--- a/public/FlowGuard-Hackathon-Pitch.pptx
+++ b/public/FlowGuard-Hackathon-Pitch.pptx
@@ -16,6 +16,7 @@
     <p:sldId id="264" r:id="rId15"/>
     <p:sldId id="265" r:id="rId16"/>
     <p:sldId id="266" r:id="rId17"/>
+    <p:sldId id="267" r:id="rId18"/>
   </p:sldIdLst>
   <p:sldSz cx="12191695" cy="6858000" type="screen4x3"/>
   <p:notesSz cx="6858000" cy="9144000"/>
@@ -3268,6 +3269,615 @@
     <p:bg>
       <p:bgPr>
         <a:solidFill>
+          <a:srgbClr val="FFFFFF"/>
+        </a:solidFill>
+        <a:effectLst/>
+      </p:bgPr>
+    </p:bg>
+    <p:spTree>
+      <p:nvGrpSpPr>
+        <p:cNvPr id="1" name=""/>
+        <p:cNvGrpSpPr/>
+        <p:nvPr/>
+      </p:nvGrpSpPr>
+      <p:grpSpPr/>
+      <p:sp>
+        <p:nvSpPr>
+          <p:cNvPr id="2" name="TextBox 1"/>
+          <p:cNvSpPr txBox="1"/>
+          <p:nvPr/>
+        </p:nvSpPr>
+        <p:spPr>
+          <a:xfrm>
+            <a:off x="822960" y="502920"/>
+            <a:ext cx="10515600" cy="365760"/>
+          </a:xfrm>
+          <a:prstGeom prst="rect">
+            <a:avLst/>
+          </a:prstGeom>
+          <a:noFill/>
+        </p:spPr>
+        <p:txBody>
+          <a:bodyPr wrap="square" anchor="t">
+            <a:spAutoFit/>
+          </a:bodyPr>
+          <a:lstStyle/>
+          <a:p>
+            <a:pPr algn="l"/>
+            <a:r>
+              <a:rPr sz="1400" b="1">
+                <a:solidFill>
+                  <a:srgbClr val="0F766E"/>
+                </a:solidFill>
+                <a:latin typeface="Noto Sans CJK SC"/>
+                <a:ea typeface="Noto Sans CJK SC"/>
+                <a:cs typeface="Noto Sans CJK SC"/>
+              </a:rPr>
+              <a:t>过程可说明 · 技术架构</a:t>
+            </a:r>
+          </a:p>
+        </p:txBody>
+      </p:sp>
+      <p:sp>
+        <p:nvSpPr>
+          <p:cNvPr id="3" name="TextBox 2"/>
+          <p:cNvSpPr txBox="1"/>
+          <p:nvPr/>
+        </p:nvSpPr>
+        <p:spPr>
+          <a:xfrm>
+            <a:off x="822960" y="868680"/>
+            <a:ext cx="10515600" cy="914400"/>
+          </a:xfrm>
+          <a:prstGeom prst="rect">
+            <a:avLst/>
+          </a:prstGeom>
+          <a:noFill/>
+        </p:spPr>
+        <p:txBody>
+          <a:bodyPr wrap="square" anchor="t">
+            <a:spAutoFit/>
+          </a:bodyPr>
+          <a:lstStyle/>
+          <a:p>
+            <a:pPr algn="l"/>
+            <a:r>
+              <a:rPr sz="3600" b="1">
+                <a:solidFill>
+                  <a:srgbClr val="0F172A"/>
+                </a:solidFill>
+                <a:latin typeface="Noto Sans CJK SC"/>
+                <a:ea typeface="Noto Sans CJK SC"/>
+                <a:cs typeface="Noto Sans CJK SC"/>
+              </a:rPr>
+              <a:t>怎么实现的</a:t>
+            </a:r>
+          </a:p>
+        </p:txBody>
+      </p:sp>
+      <p:sp>
+        <p:nvSpPr>
+          <p:cNvPr id="4" name="TextBox 3"/>
+          <p:cNvSpPr txBox="1"/>
+          <p:nvPr/>
+        </p:nvSpPr>
+        <p:spPr>
+          <a:xfrm>
+            <a:off x="822960" y="1783080"/>
+            <a:ext cx="10515600" cy="731520"/>
+          </a:xfrm>
+          <a:prstGeom prst="rect">
+            <a:avLst/>
+          </a:prstGeom>
+          <a:noFill/>
+        </p:spPr>
+        <p:txBody>
+          <a:bodyPr wrap="square" anchor="t">
+            <a:spAutoFit/>
+          </a:bodyPr>
+          <a:lstStyle/>
+          <a:p>
+            <a:pPr algn="l"/>
+            <a:r>
+              <a:rPr sz="1600" b="0">
+                <a:solidFill>
+                  <a:srgbClr val="64748B"/>
+                </a:solidFill>
+                <a:latin typeface="Noto Sans CJK SC"/>
+                <a:ea typeface="Noto Sans CJK SC"/>
+                <a:cs typeface="Noto Sans CJK SC"/>
+              </a:rPr>
+              <a:t>Next.js(App Router)+TypeScript+Tailwind；确定性规则引擎+DeepSeek AI；双语 i18n。</a:t>
+            </a:r>
+          </a:p>
+        </p:txBody>
+      </p:sp>
+      <p:sp>
+        <p:nvSpPr>
+          <p:cNvPr id="5" name="Rounded Rectangle 4"/>
+          <p:cNvSpPr/>
+          <p:nvPr/>
+        </p:nvSpPr>
+        <p:spPr>
+          <a:xfrm>
+            <a:off x="822960" y="2468880"/>
+            <a:ext cx="5143500" cy="1143000"/>
+          </a:xfrm>
+          <a:prstGeom prst="roundRect">
+            <a:avLst/>
+          </a:prstGeom>
+          <a:solidFill>
+            <a:srgbClr val="F1F5F9"/>
+          </a:solidFill>
+          <a:ln>
+            <a:noFill/>
+          </a:ln>
+          <a:effectLst/>
+        </p:spPr>
+        <p:style>
+          <a:lnRef idx="1">
+            <a:schemeClr val="accent1"/>
+          </a:lnRef>
+          <a:fillRef idx="3">
+            <a:schemeClr val="accent1"/>
+          </a:fillRef>
+          <a:effectRef idx="2">
+            <a:schemeClr val="accent1"/>
+          </a:effectRef>
+          <a:fontRef idx="minor">
+            <a:schemeClr val="lt1"/>
+          </a:fontRef>
+        </p:style>
+        <p:txBody>
+          <a:bodyPr rtlCol="0" anchor="ctr"/>
+          <a:lstStyle/>
+          <a:p>
+            <a:pPr algn="ctr"/>
+          </a:p>
+        </p:txBody>
+      </p:sp>
+      <p:sp>
+        <p:nvSpPr>
+          <p:cNvPr id="6" name="TextBox 5"/>
+          <p:cNvSpPr txBox="1"/>
+          <p:nvPr/>
+        </p:nvSpPr>
+        <p:spPr>
+          <a:xfrm>
+            <a:off x="1005840" y="2578608"/>
+            <a:ext cx="4777740" cy="365760"/>
+          </a:xfrm>
+          <a:prstGeom prst="rect">
+            <a:avLst/>
+          </a:prstGeom>
+          <a:noFill/>
+        </p:spPr>
+        <p:txBody>
+          <a:bodyPr wrap="square" anchor="t">
+            <a:spAutoFit/>
+          </a:bodyPr>
+          <a:lstStyle/>
+          <a:p>
+            <a:pPr algn="l"/>
+            <a:r>
+              <a:rPr sz="1600" b="1">
+                <a:solidFill>
+                  <a:srgbClr val="0F172A"/>
+                </a:solidFill>
+                <a:latin typeface="Noto Sans CJK SC"/>
+                <a:ea typeface="Noto Sans CJK SC"/>
+                <a:cs typeface="Noto Sans CJK SC"/>
+              </a:rPr>
+              <a:t>前端 / 应用</a:t>
+            </a:r>
+          </a:p>
+        </p:txBody>
+      </p:sp>
+      <p:sp>
+        <p:nvSpPr>
+          <p:cNvPr id="7" name="TextBox 6"/>
+          <p:cNvSpPr txBox="1"/>
+          <p:nvPr/>
+        </p:nvSpPr>
+        <p:spPr>
+          <a:xfrm>
+            <a:off x="1005840" y="2971800"/>
+            <a:ext cx="4777740" cy="548640"/>
+          </a:xfrm>
+          <a:prstGeom prst="rect">
+            <a:avLst/>
+          </a:prstGeom>
+          <a:noFill/>
+        </p:spPr>
+        <p:txBody>
+          <a:bodyPr wrap="square" anchor="t">
+            <a:spAutoFit/>
+          </a:bodyPr>
+          <a:lstStyle/>
+          <a:p>
+            <a:pPr algn="l"/>
+            <a:r>
+              <a:rPr sz="1250" b="0">
+                <a:solidFill>
+                  <a:srgbClr val="64748B"/>
+                </a:solidFill>
+                <a:latin typeface="Noto Sans CJK SC"/>
+                <a:ea typeface="Noto Sans CJK SC"/>
+                <a:cs typeface="Noto Sans CJK SC"/>
+              </a:rPr>
+              <a:t>Next.js 15 + React + Tailwind，移动端优先；react-i18next 中英双语。</a:t>
+            </a:r>
+          </a:p>
+        </p:txBody>
+      </p:sp>
+      <p:sp>
+        <p:nvSpPr>
+          <p:cNvPr id="8" name="Rounded Rectangle 7"/>
+          <p:cNvSpPr/>
+          <p:nvPr/>
+        </p:nvSpPr>
+        <p:spPr>
+          <a:xfrm>
+            <a:off x="6195060" y="2468880"/>
+            <a:ext cx="5143500" cy="1143000"/>
+          </a:xfrm>
+          <a:prstGeom prst="roundRect">
+            <a:avLst/>
+          </a:prstGeom>
+          <a:solidFill>
+            <a:srgbClr val="F1F5F9"/>
+          </a:solidFill>
+          <a:ln>
+            <a:noFill/>
+          </a:ln>
+          <a:effectLst/>
+        </p:spPr>
+        <p:style>
+          <a:lnRef idx="1">
+            <a:schemeClr val="accent1"/>
+          </a:lnRef>
+          <a:fillRef idx="3">
+            <a:schemeClr val="accent1"/>
+          </a:fillRef>
+          <a:effectRef idx="2">
+            <a:schemeClr val="accent1"/>
+          </a:effectRef>
+          <a:fontRef idx="minor">
+            <a:schemeClr val="lt1"/>
+          </a:fontRef>
+        </p:style>
+        <p:txBody>
+          <a:bodyPr rtlCol="0" anchor="ctr"/>
+          <a:lstStyle/>
+          <a:p>
+            <a:pPr algn="ctr"/>
+          </a:p>
+        </p:txBody>
+      </p:sp>
+      <p:sp>
+        <p:nvSpPr>
+          <p:cNvPr id="9" name="TextBox 8"/>
+          <p:cNvSpPr txBox="1"/>
+          <p:nvPr/>
+        </p:nvSpPr>
+        <p:spPr>
+          <a:xfrm>
+            <a:off x="6377940" y="2578608"/>
+            <a:ext cx="4777740" cy="365760"/>
+          </a:xfrm>
+          <a:prstGeom prst="rect">
+            <a:avLst/>
+          </a:prstGeom>
+          <a:noFill/>
+        </p:spPr>
+        <p:txBody>
+          <a:bodyPr wrap="square" anchor="t">
+            <a:spAutoFit/>
+          </a:bodyPr>
+          <a:lstStyle/>
+          <a:p>
+            <a:pPr algn="l"/>
+            <a:r>
+              <a:rPr sz="1600" b="1">
+                <a:solidFill>
+                  <a:srgbClr val="0F172A"/>
+                </a:solidFill>
+                <a:latin typeface="Noto Sans CJK SC"/>
+                <a:ea typeface="Noto Sans CJK SC"/>
+                <a:cs typeface="Noto Sans CJK SC"/>
+              </a:rPr>
+              <a:t>风控内核</a:t>
+            </a:r>
+          </a:p>
+        </p:txBody>
+      </p:sp>
+      <p:sp>
+        <p:nvSpPr>
+          <p:cNvPr id="10" name="TextBox 9"/>
+          <p:cNvSpPr txBox="1"/>
+          <p:nvPr/>
+        </p:nvSpPr>
+        <p:spPr>
+          <a:xfrm>
+            <a:off x="6377940" y="2971800"/>
+            <a:ext cx="4777740" cy="548640"/>
+          </a:xfrm>
+          <a:prstGeom prst="rect">
+            <a:avLst/>
+          </a:prstGeom>
+          <a:noFill/>
+        </p:spPr>
+        <p:txBody>
+          <a:bodyPr wrap="square" anchor="t">
+            <a:spAutoFit/>
+          </a:bodyPr>
+          <a:lstStyle/>
+          <a:p>
+            <a:pPr algn="l"/>
+            <a:r>
+              <a:rPr sz="1250" b="0">
+                <a:solidFill>
+                  <a:srgbClr val="64748B"/>
+                </a:solidFill>
+                <a:latin typeface="Noto Sans CJK SC"/>
+                <a:ea typeface="Noto Sans CJK SC"/>
+                <a:cs typeface="Noto Sans CJK SC"/>
+              </a:rPr>
+              <a:t>确定性退回风险规则引擎(可解释、可复现) + DeepSeek 作为补充语义信号层。</a:t>
+            </a:r>
+          </a:p>
+        </p:txBody>
+      </p:sp>
+      <p:sp>
+        <p:nvSpPr>
+          <p:cNvPr id="11" name="Rounded Rectangle 10"/>
+          <p:cNvSpPr/>
+          <p:nvPr/>
+        </p:nvSpPr>
+        <p:spPr>
+          <a:xfrm>
+            <a:off x="822960" y="3840480"/>
+            <a:ext cx="5143500" cy="1143000"/>
+          </a:xfrm>
+          <a:prstGeom prst="roundRect">
+            <a:avLst/>
+          </a:prstGeom>
+          <a:solidFill>
+            <a:srgbClr val="F1F5F9"/>
+          </a:solidFill>
+          <a:ln>
+            <a:noFill/>
+          </a:ln>
+          <a:effectLst/>
+        </p:spPr>
+        <p:style>
+          <a:lnRef idx="1">
+            <a:schemeClr val="accent1"/>
+          </a:lnRef>
+          <a:fillRef idx="3">
+            <a:schemeClr val="accent1"/>
+          </a:fillRef>
+          <a:effectRef idx="2">
+            <a:schemeClr val="accent1"/>
+          </a:effectRef>
+          <a:fontRef idx="minor">
+            <a:schemeClr val="lt1"/>
+          </a:fontRef>
+        </p:style>
+        <p:txBody>
+          <a:bodyPr rtlCol="0" anchor="ctr"/>
+          <a:lstStyle/>
+          <a:p>
+            <a:pPr algn="ctr"/>
+          </a:p>
+        </p:txBody>
+      </p:sp>
+      <p:sp>
+        <p:nvSpPr>
+          <p:cNvPr id="12" name="TextBox 11"/>
+          <p:cNvSpPr txBox="1"/>
+          <p:nvPr/>
+        </p:nvSpPr>
+        <p:spPr>
+          <a:xfrm>
+            <a:off x="1005840" y="3950208"/>
+            <a:ext cx="4777740" cy="365760"/>
+          </a:xfrm>
+          <a:prstGeom prst="rect">
+            <a:avLst/>
+          </a:prstGeom>
+          <a:noFill/>
+        </p:spPr>
+        <p:txBody>
+          <a:bodyPr wrap="square" anchor="t">
+            <a:spAutoFit/>
+          </a:bodyPr>
+          <a:lstStyle/>
+          <a:p>
+            <a:pPr algn="l"/>
+            <a:r>
+              <a:rPr sz="1600" b="1">
+                <a:solidFill>
+                  <a:srgbClr val="0F172A"/>
+                </a:solidFill>
+                <a:latin typeface="Noto Sans CJK SC"/>
+                <a:ea typeface="Noto Sans CJK SC"/>
+                <a:cs typeface="Noto Sans CJK SC"/>
+              </a:rPr>
+              <a:t>数据与流转</a:t>
+            </a:r>
+          </a:p>
+        </p:txBody>
+      </p:sp>
+      <p:sp>
+        <p:nvSpPr>
+          <p:cNvPr id="13" name="TextBox 12"/>
+          <p:cNvSpPr txBox="1"/>
+          <p:nvPr/>
+        </p:nvSpPr>
+        <p:spPr>
+          <a:xfrm>
+            <a:off x="1005840" y="4343400"/>
+            <a:ext cx="4777740" cy="548640"/>
+          </a:xfrm>
+          <a:prstGeom prst="rect">
+            <a:avLst/>
+          </a:prstGeom>
+          <a:noFill/>
+        </p:spPr>
+        <p:txBody>
+          <a:bodyPr wrap="square" anchor="t">
+            <a:spAutoFit/>
+          </a:bodyPr>
+          <a:lstStyle/>
+          <a:p>
+            <a:pPr algn="l"/>
+            <a:r>
+              <a:rPr sz="1250" b="0">
+                <a:solidFill>
+                  <a:srgbClr val="64748B"/>
+                </a:solidFill>
+                <a:latin typeface="Noto Sans CJK SC"/>
+                <a:ea typeface="Noto Sans CJK SC"/>
+                <a:cs typeface="Noto Sans CJK SC"/>
+              </a:rPr>
+              <a:t>付款指令/收款人台账/工单/到账确认/对账 全链路数据模型。</a:t>
+            </a:r>
+          </a:p>
+        </p:txBody>
+      </p:sp>
+      <p:sp>
+        <p:nvSpPr>
+          <p:cNvPr id="14" name="Rounded Rectangle 13"/>
+          <p:cNvSpPr/>
+          <p:nvPr/>
+        </p:nvSpPr>
+        <p:spPr>
+          <a:xfrm>
+            <a:off x="6195060" y="3840480"/>
+            <a:ext cx="5143500" cy="1143000"/>
+          </a:xfrm>
+          <a:prstGeom prst="roundRect">
+            <a:avLst/>
+          </a:prstGeom>
+          <a:solidFill>
+            <a:srgbClr val="F1F5F9"/>
+          </a:solidFill>
+          <a:ln>
+            <a:noFill/>
+          </a:ln>
+          <a:effectLst/>
+        </p:spPr>
+        <p:style>
+          <a:lnRef idx="1">
+            <a:schemeClr val="accent1"/>
+          </a:lnRef>
+          <a:fillRef idx="3">
+            <a:schemeClr val="accent1"/>
+          </a:fillRef>
+          <a:effectRef idx="2">
+            <a:schemeClr val="accent1"/>
+          </a:effectRef>
+          <a:fontRef idx="minor">
+            <a:schemeClr val="lt1"/>
+          </a:fontRef>
+        </p:style>
+        <p:txBody>
+          <a:bodyPr rtlCol="0" anchor="ctr"/>
+          <a:lstStyle/>
+          <a:p>
+            <a:pPr algn="ctr"/>
+          </a:p>
+        </p:txBody>
+      </p:sp>
+      <p:sp>
+        <p:nvSpPr>
+          <p:cNvPr id="15" name="TextBox 14"/>
+          <p:cNvSpPr txBox="1"/>
+          <p:nvPr/>
+        </p:nvSpPr>
+        <p:spPr>
+          <a:xfrm>
+            <a:off x="6377940" y="3950208"/>
+            <a:ext cx="4777740" cy="365760"/>
+          </a:xfrm>
+          <a:prstGeom prst="rect">
+            <a:avLst/>
+          </a:prstGeom>
+          <a:noFill/>
+        </p:spPr>
+        <p:txBody>
+          <a:bodyPr wrap="square" anchor="t">
+            <a:spAutoFit/>
+          </a:bodyPr>
+          <a:lstStyle/>
+          <a:p>
+            <a:pPr algn="l"/>
+            <a:r>
+              <a:rPr sz="1600" b="1">
+                <a:solidFill>
+                  <a:srgbClr val="0F172A"/>
+                </a:solidFill>
+                <a:latin typeface="Noto Sans CJK SC"/>
+                <a:ea typeface="Noto Sans CJK SC"/>
+                <a:cs typeface="Noto Sans CJK SC"/>
+              </a:rPr>
+              <a:t>工程质量</a:t>
+            </a:r>
+          </a:p>
+        </p:txBody>
+      </p:sp>
+      <p:sp>
+        <p:nvSpPr>
+          <p:cNvPr id="16" name="TextBox 15"/>
+          <p:cNvSpPr txBox="1"/>
+          <p:nvPr/>
+        </p:nvSpPr>
+        <p:spPr>
+          <a:xfrm>
+            <a:off x="6377940" y="4343400"/>
+            <a:ext cx="4777740" cy="548640"/>
+          </a:xfrm>
+          <a:prstGeom prst="rect">
+            <a:avLst/>
+          </a:prstGeom>
+          <a:noFill/>
+        </p:spPr>
+        <p:txBody>
+          <a:bodyPr wrap="square" anchor="t">
+            <a:spAutoFit/>
+          </a:bodyPr>
+          <a:lstStyle/>
+          <a:p>
+            <a:pPr algn="l"/>
+            <a:r>
+              <a:rPr sz="1250" b="0">
+                <a:solidFill>
+                  <a:srgbClr val="64748B"/>
+                </a:solidFill>
+                <a:latin typeface="Noto Sans CJK SC"/>
+                <a:ea typeface="Noto Sans CJK SC"/>
+                <a:cs typeface="Noto Sans CJK SC"/>
+              </a:rPr>
+              <a:t>全站 TypeScript 0 error、双语键 386/386 对齐、关键路由端到端可跑。</a:t>
+            </a:r>
+          </a:p>
+        </p:txBody>
+      </p:sp>
+    </p:spTree>
+  </p:cSld>
+  <p:clrMapOvr>
+    <a:masterClrMapping/>
+  </p:clrMapOvr>
+</p:sld>
+</file>
+
+<file path=ppt/slides/slide11.xml><?xml version="1.0" encoding="utf-8"?>
+<p:sld xmlns:a="http://schemas.openxmlformats.org/drawingml/2006/main" xmlns:p="http://schemas.openxmlformats.org/presentationml/2006/main" xmlns:r="http://schemas.openxmlformats.org/officeDocument/2006/relationships">
+  <p:cSld>
+    <p:bg>
+      <p:bgPr>
+        <a:solidFill>
           <a:srgbClr val="991B1B"/>
         </a:solidFill>
         <a:effectLst/>
@@ -3908,7 +4518,7 @@
 </p:sld>
 </file>
 
-<file path=ppt/slides/slide11.xml><?xml version="1.0" encoding="utf-8"?>
+<file path=ppt/slides/slide12.xml><?xml version="1.0" encoding="utf-8"?>
 <p:sld xmlns:a="http://schemas.openxmlformats.org/drawingml/2006/main" xmlns:p="http://schemas.openxmlformats.org/presentationml/2006/main" xmlns:r="http://schemas.openxmlformats.org/officeDocument/2006/relationships">
   <p:cSld>
     <p:bg>
@@ -8730,7 +9340,7 @@
                 <a:ea typeface="Noto Sans CJK SC"/>
                 <a:cs typeface="Noto Sans CJK SC"/>
               </a:rPr>
-              <a:t>现场可以看到什么</a:t>
+              <a:t>AI 为何必要 · 四处真实痛点 → 四个 AI 能力</a:t>
             </a:r>
           </a:p>
         </p:txBody>
@@ -8759,7 +9369,7 @@
           <a:p>
             <a:pPr algn="l"/>
             <a:r>
-              <a:rPr sz="3200" b="1">
+              <a:rPr sz="3000" b="1">
                 <a:solidFill>
                   <a:srgbClr val="0F172A"/>
                 </a:solidFill>
@@ -8767,7 +9377,7 @@
                 <a:ea typeface="Noto Sans CJK SC"/>
                 <a:cs typeface="Noto Sans CJK SC"/>
               </a:rPr>
-              <a:t>现场 Demo：一笔高风险付款的完整拦截</a:t>
+              <a:t>AI 覆盖一览：不是装饰，是每个卡点的解法</a:t>
             </a:r>
           </a:p>
         </p:txBody>
@@ -8780,23 +9390,23 @@
         </p:nvSpPr>
         <p:spPr>
           <a:xfrm>
-            <a:off x="822960" y="1691640"/>
-            <a:ext cx="10515600" cy="548640"/>
-          </a:xfrm>
-          <a:prstGeom prst="rect">
-            <a:avLst/>
-          </a:prstGeom>
-          <a:noFill/>
-        </p:spPr>
-        <p:txBody>
-          <a:bodyPr wrap="square" anchor="t">
-            <a:spAutoFit/>
-          </a:bodyPr>
-          <a:lstStyle/>
-          <a:p>
-            <a:pPr algn="l"/>
-            <a:r>
-              <a:rPr sz="1500" b="0">
+            <a:off x="822960" y="1554480"/>
+            <a:ext cx="10515600" cy="457200"/>
+          </a:xfrm>
+          <a:prstGeom prst="rect">
+            <a:avLst/>
+          </a:prstGeom>
+          <a:noFill/>
+        </p:spPr>
+        <p:txBody>
+          <a:bodyPr wrap="square" anchor="t">
+            <a:spAutoFit/>
+          </a:bodyPr>
+          <a:lstStyle/>
+          <a:p>
+            <a:pPr algn="l"/>
+            <a:r>
+              <a:rPr sz="1400" b="0">
                 <a:solidFill>
                   <a:srgbClr val="64748B"/>
                 </a:solidFill>
@@ -8804,35 +9414,452 @@
                 <a:ea typeface="Noto Sans CJK SC"/>
                 <a:cs typeface="Noto Sans CJK SC"/>
               </a:rPr>
-              <a:t>现场可运行：新建付款→预检亮红→AI 信号→核实清除→双人放行→生成指令。</a:t>
-            </a:r>
-          </a:p>
-        </p:txBody>
-      </p:sp>
-      <p:pic>
-        <p:nvPicPr>
-          <p:cNvPr id="5" name="Picture 4" descr="demo.png"/>
-          <p:cNvPicPr>
-            <a:picLocks noChangeAspect="1"/>
-          </p:cNvPicPr>
-          <p:nvPr/>
-        </p:nvPicPr>
-        <p:blipFill>
-          <a:blip r:embed="rId2"/>
-          <a:stretch>
-            <a:fillRect/>
-          </a:stretch>
-        </p:blipFill>
-        <p:spPr>
-          <a:xfrm>
-            <a:off x="1234440" y="2286000"/>
-            <a:ext cx="9692640" cy="5452110"/>
-          </a:xfrm>
-          <a:prstGeom prst="rect">
-            <a:avLst/>
-          </a:prstGeom>
-        </p:spPr>
-      </p:pic>
+              <a:t>每个 AI 能力都绑定一个真实痛点、一个具体入口、一件明确的事。</a:t>
+            </a:r>
+          </a:p>
+        </p:txBody>
+      </p:sp>
+      <p:graphicFrame>
+        <p:nvGraphicFramePr>
+          <p:cNvPr id="5" name="Table 4"/>
+          <p:cNvGraphicFramePr>
+            <a:graphicFrameLocks noGrp="1"/>
+          </p:cNvGraphicFramePr>
+          <p:nvPr/>
+        </p:nvGraphicFramePr>
+        <p:xfrm>
+          <a:off x="822960" y="2148840"/>
+          <a:ext cx="10515600" cy="3657600"/>
+        </p:xfrm>
+        <a:graphic>
+          <a:graphicData uri="http://schemas.openxmlformats.org/drawingml/2006/table">
+            <a:tbl>
+              <a:tblPr firstRow="1" bandRow="1">
+                <a:tableStyleId>{5C22544A-7EE6-4342-B048-85BDC9FD1C3A}</a:tableStyleId>
+              </a:tblPr>
+              <a:tblGrid>
+                <a:gridCol w="1920240"/>
+                <a:gridCol w="2926080"/>
+                <a:gridCol w="5669280"/>
+              </a:tblGrid>
+              <a:tr h="731520">
+                <a:tc>
+                  <a:txBody>
+                    <a:bodyPr/>
+                    <a:lstStyle/>
+                    <a:p>
+                      <a:r>
+                        <a:rPr sz="1300" b="1">
+                          <a:solidFill>
+                            <a:srgbClr val="FFFFFF"/>
+                          </a:solidFill>
+                          <a:latin typeface="Noto Sans CJK SC"/>
+                          <a:ea typeface="Noto Sans CJK SC"/>
+                          <a:cs typeface="Noto Sans CJK SC"/>
+                        </a:rPr>
+                        <a:t>痛点</a:t>
+                      </a:r>
+                    </a:p>
+                  </a:txBody>
+                  <a:tcPr marL="91440" marT="36576" marB="36576">
+                    <a:solidFill>
+                      <a:srgbClr val="0F766E"/>
+                    </a:solidFill>
+                  </a:tcPr>
+                </a:tc>
+                <a:tc>
+                  <a:txBody>
+                    <a:bodyPr/>
+                    <a:lstStyle/>
+                    <a:p>
+                      <a:r>
+                        <a:rPr sz="1300" b="1">
+                          <a:solidFill>
+                            <a:srgbClr val="FFFFFF"/>
+                          </a:solidFill>
+                          <a:latin typeface="Noto Sans CJK SC"/>
+                          <a:ea typeface="Noto Sans CJK SC"/>
+                          <a:cs typeface="Noto Sans CJK SC"/>
+                        </a:rPr>
+                        <a:t>入口</a:t>
+                      </a:r>
+                    </a:p>
+                  </a:txBody>
+                  <a:tcPr marL="91440" marT="36576" marB="36576">
+                    <a:solidFill>
+                      <a:srgbClr val="0F766E"/>
+                    </a:solidFill>
+                  </a:tcPr>
+                </a:tc>
+                <a:tc>
+                  <a:txBody>
+                    <a:bodyPr/>
+                    <a:lstStyle/>
+                    <a:p>
+                      <a:r>
+                        <a:rPr sz="1300" b="1">
+                          <a:solidFill>
+                            <a:srgbClr val="FFFFFF"/>
+                          </a:solidFill>
+                          <a:latin typeface="Noto Sans CJK SC"/>
+                          <a:ea typeface="Noto Sans CJK SC"/>
+                          <a:cs typeface="Noto Sans CJK SC"/>
+                        </a:rPr>
+                        <a:t>AI 做什么</a:t>
+                      </a:r>
+                    </a:p>
+                  </a:txBody>
+                  <a:tcPr marL="91440" marT="36576" marB="36576">
+                    <a:solidFill>
+                      <a:srgbClr val="0F766E"/>
+                    </a:solidFill>
+                  </a:tcPr>
+                </a:tc>
+              </a:tr>
+              <a:tr h="731520">
+                <a:tc>
+                  <a:txBody>
+                    <a:bodyPr/>
+                    <a:lstStyle/>
+                    <a:p>
+                      <a:r>
+                        <a:rPr sz="1200" b="1">
+                          <a:solidFill>
+                            <a:srgbClr val="0F172A"/>
+                          </a:solidFill>
+                          <a:latin typeface="Noto Sans CJK SC"/>
+                          <a:ea typeface="Noto Sans CJK SC"/>
+                          <a:cs typeface="Noto Sans CJK SC"/>
+                        </a:rPr>
+                        <a:t>① 看不到钱卡哪</a:t>
+                      </a:r>
+                    </a:p>
+                  </a:txBody>
+                  <a:tcPr marL="91440" marT="45720" marB="45720">
+                    <a:solidFill>
+                      <a:srgbClr val="F8FAFC"/>
+                    </a:solidFill>
+                  </a:tcPr>
+                </a:tc>
+                <a:tc>
+                  <a:txBody>
+                    <a:bodyPr/>
+                    <a:lstStyle/>
+                    <a:p>
+                      <a:r>
+                        <a:rPr sz="1150" b="0">
+                          <a:solidFill>
+                            <a:srgbClr val="64748B"/>
+                          </a:solidFill>
+                          <a:latin typeface="Noto Sans CJK SC"/>
+                          <a:ea typeface="Noto Sans CJK SC"/>
+                          <a:cs typeface="Noto Sans CJK SC"/>
+                        </a:rPr>
+                        <a:t>历史里进行中付款的资金流链路图下方</a:t>
+                      </a:r>
+                    </a:p>
+                  </a:txBody>
+                  <a:tcPr marL="91440" marT="45720" marB="45720">
+                    <a:solidFill>
+                      <a:srgbClr val="F8FAFC"/>
+                    </a:solidFill>
+                  </a:tcPr>
+                </a:tc>
+                <a:tc>
+                  <a:txBody>
+                    <a:bodyPr wrap="square"/>
+                    <a:lstStyle/>
+                    <a:p>
+                      <a:r>
+                        <a:rPr sz="1200" b="1">
+                          <a:solidFill>
+                            <a:srgbClr val="0F766E"/>
+                          </a:solidFill>
+                          <a:latin typeface="Noto Sans CJK SC"/>
+                          <a:ea typeface="Noto Sans CJK SC"/>
+                          <a:cs typeface="Noto Sans CJK SC"/>
+                        </a:rPr>
+                        <a:t>「AI: where is my money?」</a:t>
+                      </a:r>
+                      <a:r>
+                        <a:rPr sz="1150" b="0">
+                          <a:solidFill>
+                            <a:srgbClr val="64748B"/>
+                          </a:solidFill>
+                          <a:latin typeface="Noto Sans CJK SC"/>
+                          <a:ea typeface="Noto Sans CJK SC"/>
+                          <a:cs typeface="Noto Sans CJK SC"/>
+                        </a:rPr>
+                        <a:t> — 用自然语言说清钱现在卡在哪家中间行、为何被卡、大概还要多久、你能做什么。</a:t>
+                      </a:r>
+                    </a:p>
+                  </a:txBody>
+                  <a:tcPr marL="91440" marT="45720" marB="45720">
+                    <a:solidFill>
+                      <a:srgbClr val="F8FAFC"/>
+                    </a:solidFill>
+                  </a:tcPr>
+                </a:tc>
+              </a:tr>
+              <a:tr h="731520">
+                <a:tc>
+                  <a:txBody>
+                    <a:bodyPr/>
+                    <a:lstStyle/>
+                    <a:p>
+                      <a:r>
+                        <a:rPr sz="1200" b="1">
+                          <a:solidFill>
+                            <a:srgbClr val="0F172A"/>
+                          </a:solidFill>
+                          <a:latin typeface="Noto Sans CJK SC"/>
+                          <a:ea typeface="Noto Sans CJK SC"/>
+                          <a:cs typeface="Noto Sans CJK SC"/>
+                        </a:rPr>
+                        <a:t>② 退回事后才知道</a:t>
+                      </a:r>
+                    </a:p>
+                  </a:txBody>
+                  <a:tcPr marL="91440" marT="45720" marB="45720">
+                    <a:solidFill>
+                      <a:srgbClr val="FFFFFF"/>
+                    </a:solidFill>
+                  </a:tcPr>
+                </a:tc>
+                <a:tc>
+                  <a:txBody>
+                    <a:bodyPr/>
+                    <a:lstStyle/>
+                    <a:p>
+                      <a:r>
+                        <a:rPr sz="1150" b="0">
+                          <a:solidFill>
+                            <a:srgbClr val="64748B"/>
+                          </a:solidFill>
+                          <a:latin typeface="Noto Sans CJK SC"/>
+                          <a:ea typeface="Noto Sans CJK SC"/>
+                          <a:cs typeface="Noto Sans CJK SC"/>
+                        </a:rPr>
+                        <a:t>核验 Case（open 状态）</a:t>
+                      </a:r>
+                    </a:p>
+                  </a:txBody>
+                  <a:tcPr marL="91440" marT="45720" marB="45720">
+                    <a:solidFill>
+                      <a:srgbClr val="FFFFFF"/>
+                    </a:solidFill>
+                  </a:tcPr>
+                </a:tc>
+                <a:tc>
+                  <a:txBody>
+                    <a:bodyPr wrap="square"/>
+                    <a:lstStyle/>
+                    <a:p>
+                      <a:r>
+                        <a:rPr sz="1200" b="1">
+                          <a:solidFill>
+                            <a:srgbClr val="0F766E"/>
+                          </a:solidFill>
+                          <a:latin typeface="Noto Sans CJK SC"/>
+                          <a:ea typeface="Noto Sans CJK SC"/>
+                          <a:cs typeface="Noto Sans CJK SC"/>
+                        </a:rPr>
+                        <a:t>「AI: draft the follow-up」</a:t>
+                      </a:r>
+                      <a:r>
+                        <a:rPr sz="1150" b="0">
+                          <a:solidFill>
+                            <a:srgbClr val="64748B"/>
+                          </a:solidFill>
+                          <a:latin typeface="Noto Sans CJK SC"/>
+                          <a:ea typeface="Noto Sans CJK SC"/>
+                          <a:cs typeface="Noto Sans CJK SC"/>
+                        </a:rPr>
+                        <a:t> — 基于命中因子直接起草给供应商的核实话术，第一条就是可直接发送的消息（补齐闭环）。</a:t>
+                      </a:r>
+                    </a:p>
+                  </a:txBody>
+                  <a:tcPr marL="91440" marT="45720" marB="45720">
+                    <a:solidFill>
+                      <a:srgbClr val="FFFFFF"/>
+                    </a:solidFill>
+                  </a:tcPr>
+                </a:tc>
+              </a:tr>
+              <a:tr h="731520">
+                <a:tc>
+                  <a:txBody>
+                    <a:bodyPr/>
+                    <a:lstStyle/>
+                    <a:p>
+                      <a:r>
+                        <a:rPr sz="1200" b="1">
+                          <a:solidFill>
+                            <a:srgbClr val="0F172A"/>
+                          </a:solidFill>
+                          <a:latin typeface="Noto Sans CJK SC"/>
+                          <a:ea typeface="Noto Sans CJK SC"/>
+                          <a:cs typeface="Noto Sans CJK SC"/>
+                        </a:rPr>
+                        <a:t>③ 多国重复适应银行</a:t>
+                      </a:r>
+                    </a:p>
+                  </a:txBody>
+                  <a:tcPr marL="91440" marT="45720" marB="45720">
+                    <a:solidFill>
+                      <a:srgbClr val="F8FAFC"/>
+                    </a:solidFill>
+                  </a:tcPr>
+                </a:tc>
+                <a:tc>
+                  <a:txBody>
+                    <a:bodyPr/>
+                    <a:lstStyle/>
+                    <a:p>
+                      <a:r>
+                        <a:rPr sz="1150" b="0">
+                          <a:solidFill>
+                            <a:srgbClr val="64748B"/>
+                          </a:solidFill>
+                          <a:latin typeface="Noto Sans CJK SC"/>
+                          <a:ea typeface="Noto Sans CJK SC"/>
+                          <a:cs typeface="Noto Sans CJK SC"/>
+                        </a:rPr>
+                        <a:t>添加收款人表单（填了国家+银行后出现）</a:t>
+                      </a:r>
+                    </a:p>
+                  </a:txBody>
+                  <a:tcPr marL="91440" marT="45720" marB="45720">
+                    <a:solidFill>
+                      <a:srgbClr val="F8FAFC"/>
+                    </a:solidFill>
+                  </a:tcPr>
+                </a:tc>
+                <a:tc>
+                  <a:txBody>
+                    <a:bodyPr wrap="square"/>
+                    <a:lstStyle/>
+                    <a:p>
+                      <a:r>
+                        <a:rPr sz="1200" b="1">
+                          <a:solidFill>
+                            <a:srgbClr val="0F766E"/>
+                          </a:solidFill>
+                          <a:latin typeface="Noto Sans CJK SC"/>
+                          <a:ea typeface="Noto Sans CJK SC"/>
+                          <a:cs typeface="Noto Sans CJK SC"/>
+                        </a:rPr>
+                        <a:t>「AI: what this corridor requires」</a:t>
+                      </a:r>
+                      <a:r>
+                        <a:rPr sz="1150" b="0">
+                          <a:solidFill>
+                            <a:srgbClr val="64748B"/>
+                          </a:solidFill>
+                          <a:latin typeface="Noto Sans CJK SC"/>
+                          <a:ea typeface="Noto Sans CJK SC"/>
+                          <a:cs typeface="Noto Sans CJK SC"/>
+                        </a:rPr>
+                        <a:t> — 生成该国家/币种的结算要求清单（收款名匹配、SWIFT/IBAN、FX 管制文件等），省去每次重新摸规则。</a:t>
+                      </a:r>
+                    </a:p>
+                  </a:txBody>
+                  <a:tcPr marL="91440" marT="45720" marB="45720">
+                    <a:solidFill>
+                      <a:srgbClr val="F8FAFC"/>
+                    </a:solidFill>
+                  </a:tcPr>
+                </a:tc>
+              </a:tr>
+              <a:tr h="731520">
+                <a:tc>
+                  <a:txBody>
+                    <a:bodyPr/>
+                    <a:lstStyle/>
+                    <a:p>
+                      <a:r>
+                        <a:rPr sz="1200" b="1">
+                          <a:solidFill>
+                            <a:srgbClr val="0F172A"/>
+                          </a:solidFill>
+                          <a:latin typeface="Noto Sans CJK SC"/>
+                          <a:ea typeface="Noto Sans CJK SC"/>
+                          <a:cs typeface="Noto Sans CJK SC"/>
+                        </a:rPr>
+                        <a:t>④ 对账对不上</a:t>
+                      </a:r>
+                    </a:p>
+                  </a:txBody>
+                  <a:tcPr marL="91440" marT="45720" marB="45720">
+                    <a:solidFill>
+                      <a:srgbClr val="FFFFFF"/>
+                    </a:solidFill>
+                  </a:tcPr>
+                </a:tc>
+                <a:tc>
+                  <a:txBody>
+                    <a:bodyPr/>
+                    <a:lstStyle/>
+                    <a:p>
+                      <a:r>
+                        <a:rPr sz="1150" b="0">
+                          <a:solidFill>
+                            <a:srgbClr val="64748B"/>
+                          </a:solidFill>
+                          <a:latin typeface="Noto Sans CJK SC"/>
+                          <a:ea typeface="Noto Sans CJK SC"/>
+                          <a:cs typeface="Noto Sans CJK SC"/>
+                        </a:rPr>
+                        <a:t>对账卡片（有差异或凭证未匹配时）</a:t>
+                      </a:r>
+                    </a:p>
+                  </a:txBody>
+                  <a:tcPr marL="91440" marT="45720" marB="45720">
+                    <a:solidFill>
+                      <a:srgbClr val="FFFFFF"/>
+                    </a:solidFill>
+                  </a:tcPr>
+                </a:tc>
+                <a:tc>
+                  <a:txBody>
+                    <a:bodyPr wrap="square"/>
+                    <a:lstStyle/>
+                    <a:p>
+                      <a:r>
+                        <a:rPr sz="1200" b="1">
+                          <a:solidFill>
+                            <a:srgbClr val="0F766E"/>
+                          </a:solidFill>
+                          <a:latin typeface="Noto Sans CJK SC"/>
+                          <a:ea typeface="Noto Sans CJK SC"/>
+                          <a:cs typeface="Noto Sans CJK SC"/>
+                        </a:rPr>
+                        <a:t>「AI: why don't these match?」</a:t>
+                      </a:r>
+                      <a:r>
+                        <a:rPr sz="1150" b="0">
+                          <a:solidFill>
+                            <a:srgbClr val="64748B"/>
+                          </a:solidFill>
+                          <a:latin typeface="Noto Sans CJK SC"/>
+                          <a:ea typeface="Noto Sans CJK SC"/>
+                          <a:cs typeface="Noto Sans CJK SC"/>
+                        </a:rPr>
+                        <a:t> — 指出金额/凭证对不上的最可能原因 + 下一步。</a:t>
+                      </a:r>
+                    </a:p>
+                  </a:txBody>
+                  <a:tcPr marL="91440" marT="45720" marB="45720">
+                    <a:solidFill>
+                      <a:srgbClr val="FFFFFF"/>
+                    </a:solidFill>
+                  </a:tcPr>
+                </a:tc>
+              </a:tr>
+            </a:tbl>
+          </a:graphicData>
+        </a:graphic>
+      </p:graphicFrame>
       <p:sp>
         <p:nvSpPr>
           <p:cNvPr id="6" name="TextBox 5"/>
@@ -8841,7 +9868,7 @@
         </p:nvSpPr>
         <p:spPr>
           <a:xfrm>
-            <a:off x="822960" y="6309360"/>
+            <a:off x="822960" y="6355080"/>
             <a:ext cx="10515600" cy="365760"/>
           </a:xfrm>
           <a:prstGeom prst="rect">
@@ -8857,7 +9884,7 @@
           <a:p>
             <a:pPr algn="l"/>
             <a:r>
-              <a:rPr sz="1100" b="0">
+              <a:rPr sz="1050" b="0">
                 <a:solidFill>
                   <a:srgbClr val="64748B"/>
                 </a:solidFill>
@@ -8865,7 +9892,7 @@
                 <a:ea typeface="Noto Sans CJK SC"/>
                 <a:cs typeface="Noto Sans CJK SC"/>
               </a:rPr>
-              <a:t>现场可运行、可演示核心功能——不是 PPT 概念。可扫码访问在线应用实测。</a:t>
+              <a:t>AI 只加价值、只加警示——绝不降低确定性引擎评分；输出均需提交指令前人工核实。</a:t>
             </a:r>
           </a:p>
         </p:txBody>
@@ -8928,7 +9955,7 @@
                 <a:ea typeface="Noto Sans CJK SC"/>
                 <a:cs typeface="Noto Sans CJK SC"/>
               </a:rPr>
-              <a:t>过程可说明 · 技术架构</a:t>
+              <a:t>现场可以看到什么</a:t>
             </a:r>
           </a:p>
         </p:txBody>
@@ -8957,7 +9984,7 @@
           <a:p>
             <a:pPr algn="l"/>
             <a:r>
-              <a:rPr sz="3600" b="1">
+              <a:rPr sz="3200" b="1">
                 <a:solidFill>
                   <a:srgbClr val="0F172A"/>
                 </a:solidFill>
@@ -8965,7 +9992,7 @@
                 <a:ea typeface="Noto Sans CJK SC"/>
                 <a:cs typeface="Noto Sans CJK SC"/>
               </a:rPr>
-              <a:t>怎么实现的</a:t>
+              <a:t>现场 Demo：一笔高风险付款的完整拦截</a:t>
             </a:r>
           </a:p>
         </p:txBody>
@@ -8978,23 +10005,23 @@
         </p:nvSpPr>
         <p:spPr>
           <a:xfrm>
-            <a:off x="822960" y="1783080"/>
-            <a:ext cx="10515600" cy="731520"/>
-          </a:xfrm>
-          <a:prstGeom prst="rect">
-            <a:avLst/>
-          </a:prstGeom>
-          <a:noFill/>
-        </p:spPr>
-        <p:txBody>
-          <a:bodyPr wrap="square" anchor="t">
-            <a:spAutoFit/>
-          </a:bodyPr>
-          <a:lstStyle/>
-          <a:p>
-            <a:pPr algn="l"/>
-            <a:r>
-              <a:rPr sz="1600" b="0">
+            <a:off x="822960" y="1691640"/>
+            <a:ext cx="10515600" cy="548640"/>
+          </a:xfrm>
+          <a:prstGeom prst="rect">
+            <a:avLst/>
+          </a:prstGeom>
+          <a:noFill/>
+        </p:spPr>
+        <p:txBody>
+          <a:bodyPr wrap="square" anchor="t">
+            <a:spAutoFit/>
+          </a:bodyPr>
+          <a:lstStyle/>
+          <a:p>
+            <a:pPr algn="l"/>
+            <a:r>
+              <a:rPr sz="1500" b="0">
                 <a:solidFill>
                   <a:srgbClr val="64748B"/>
                 </a:solidFill>
@@ -9002,55 +10029,35 @@
                 <a:ea typeface="Noto Sans CJK SC"/>
                 <a:cs typeface="Noto Sans CJK SC"/>
               </a:rPr>
-              <a:t>Next.js(App Router)+TypeScript+Tailwind；确定性规则引擎+DeepSeek AI；双语 i18n。</a:t>
-            </a:r>
-          </a:p>
-        </p:txBody>
-      </p:sp>
-      <p:sp>
-        <p:nvSpPr>
-          <p:cNvPr id="5" name="Rounded Rectangle 4"/>
-          <p:cNvSpPr/>
-          <p:nvPr/>
-        </p:nvSpPr>
-        <p:spPr>
-          <a:xfrm>
-            <a:off x="822960" y="2468880"/>
-            <a:ext cx="5143500" cy="1143000"/>
-          </a:xfrm>
-          <a:prstGeom prst="roundRect">
-            <a:avLst/>
-          </a:prstGeom>
-          <a:solidFill>
-            <a:srgbClr val="F1F5F9"/>
-          </a:solidFill>
-          <a:ln>
-            <a:noFill/>
-          </a:ln>
-          <a:effectLst/>
-        </p:spPr>
-        <p:style>
-          <a:lnRef idx="1">
-            <a:schemeClr val="accent1"/>
-          </a:lnRef>
-          <a:fillRef idx="3">
-            <a:schemeClr val="accent1"/>
-          </a:fillRef>
-          <a:effectRef idx="2">
-            <a:schemeClr val="accent1"/>
-          </a:effectRef>
-          <a:fontRef idx="minor">
-            <a:schemeClr val="lt1"/>
-          </a:fontRef>
-        </p:style>
-        <p:txBody>
-          <a:bodyPr rtlCol="0" anchor="ctr"/>
-          <a:lstStyle/>
-          <a:p>
-            <a:pPr algn="ctr"/>
-          </a:p>
-        </p:txBody>
-      </p:sp>
+              <a:t>现场可运行：新建付款→预检亮红→AI 信号→核实清除→双人放行→生成指令。</a:t>
+            </a:r>
+          </a:p>
+        </p:txBody>
+      </p:sp>
+      <p:pic>
+        <p:nvPicPr>
+          <p:cNvPr id="5" name="Picture 4" descr="demo.png"/>
+          <p:cNvPicPr>
+            <a:picLocks noChangeAspect="1"/>
+          </p:cNvPicPr>
+          <p:nvPr/>
+        </p:nvPicPr>
+        <p:blipFill>
+          <a:blip r:embed="rId2"/>
+          <a:stretch>
+            <a:fillRect/>
+          </a:stretch>
+        </p:blipFill>
+        <p:spPr>
+          <a:xfrm>
+            <a:off x="1234440" y="2286000"/>
+            <a:ext cx="9692640" cy="5452110"/>
+          </a:xfrm>
+          <a:prstGeom prst="rect">
+            <a:avLst/>
+          </a:prstGeom>
+        </p:spPr>
+      </p:pic>
       <p:sp>
         <p:nvSpPr>
           <p:cNvPr id="6" name="TextBox 5"/>
@@ -9059,60 +10066,23 @@
         </p:nvSpPr>
         <p:spPr>
           <a:xfrm>
-            <a:off x="1005840" y="2578608"/>
-            <a:ext cx="4777740" cy="365760"/>
-          </a:xfrm>
-          <a:prstGeom prst="rect">
-            <a:avLst/>
-          </a:prstGeom>
-          <a:noFill/>
-        </p:spPr>
-        <p:txBody>
-          <a:bodyPr wrap="square" anchor="t">
-            <a:spAutoFit/>
-          </a:bodyPr>
-          <a:lstStyle/>
-          <a:p>
-            <a:pPr algn="l"/>
-            <a:r>
-              <a:rPr sz="1600" b="1">
-                <a:solidFill>
-                  <a:srgbClr val="0F172A"/>
-                </a:solidFill>
-                <a:latin typeface="Noto Sans CJK SC"/>
-                <a:ea typeface="Noto Sans CJK SC"/>
-                <a:cs typeface="Noto Sans CJK SC"/>
-              </a:rPr>
-              <a:t>前端 / 应用</a:t>
-            </a:r>
-          </a:p>
-        </p:txBody>
-      </p:sp>
-      <p:sp>
-        <p:nvSpPr>
-          <p:cNvPr id="7" name="TextBox 6"/>
-          <p:cNvSpPr txBox="1"/>
-          <p:nvPr/>
-        </p:nvSpPr>
-        <p:spPr>
-          <a:xfrm>
-            <a:off x="1005840" y="2971800"/>
-            <a:ext cx="4777740" cy="548640"/>
-          </a:xfrm>
-          <a:prstGeom prst="rect">
-            <a:avLst/>
-          </a:prstGeom>
-          <a:noFill/>
-        </p:spPr>
-        <p:txBody>
-          <a:bodyPr wrap="square" anchor="t">
-            <a:spAutoFit/>
-          </a:bodyPr>
-          <a:lstStyle/>
-          <a:p>
-            <a:pPr algn="l"/>
-            <a:r>
-              <a:rPr sz="1250" b="0">
+            <a:off x="822960" y="6309360"/>
+            <a:ext cx="10515600" cy="365760"/>
+          </a:xfrm>
+          <a:prstGeom prst="rect">
+            <a:avLst/>
+          </a:prstGeom>
+          <a:noFill/>
+        </p:spPr>
+        <p:txBody>
+          <a:bodyPr wrap="square" anchor="t">
+            <a:spAutoFit/>
+          </a:bodyPr>
+          <a:lstStyle/>
+          <a:p>
+            <a:pPr algn="l"/>
+            <a:r>
+              <a:rPr sz="1100" b="0">
                 <a:solidFill>
                   <a:srgbClr val="64748B"/>
                 </a:solidFill>
@@ -9120,361 +10090,7 @@
                 <a:ea typeface="Noto Sans CJK SC"/>
                 <a:cs typeface="Noto Sans CJK SC"/>
               </a:rPr>
-              <a:t>Next.js 15 + React + Tailwind，移动端优先；react-i18next 中英双语。</a:t>
-            </a:r>
-          </a:p>
-        </p:txBody>
-      </p:sp>
-      <p:sp>
-        <p:nvSpPr>
-          <p:cNvPr id="8" name="Rounded Rectangle 7"/>
-          <p:cNvSpPr/>
-          <p:nvPr/>
-        </p:nvSpPr>
-        <p:spPr>
-          <a:xfrm>
-            <a:off x="6195060" y="2468880"/>
-            <a:ext cx="5143500" cy="1143000"/>
-          </a:xfrm>
-          <a:prstGeom prst="roundRect">
-            <a:avLst/>
-          </a:prstGeom>
-          <a:solidFill>
-            <a:srgbClr val="F1F5F9"/>
-          </a:solidFill>
-          <a:ln>
-            <a:noFill/>
-          </a:ln>
-          <a:effectLst/>
-        </p:spPr>
-        <p:style>
-          <a:lnRef idx="1">
-            <a:schemeClr val="accent1"/>
-          </a:lnRef>
-          <a:fillRef idx="3">
-            <a:schemeClr val="accent1"/>
-          </a:fillRef>
-          <a:effectRef idx="2">
-            <a:schemeClr val="accent1"/>
-          </a:effectRef>
-          <a:fontRef idx="minor">
-            <a:schemeClr val="lt1"/>
-          </a:fontRef>
-        </p:style>
-        <p:txBody>
-          <a:bodyPr rtlCol="0" anchor="ctr"/>
-          <a:lstStyle/>
-          <a:p>
-            <a:pPr algn="ctr"/>
-          </a:p>
-        </p:txBody>
-      </p:sp>
-      <p:sp>
-        <p:nvSpPr>
-          <p:cNvPr id="9" name="TextBox 8"/>
-          <p:cNvSpPr txBox="1"/>
-          <p:nvPr/>
-        </p:nvSpPr>
-        <p:spPr>
-          <a:xfrm>
-            <a:off x="6377940" y="2578608"/>
-            <a:ext cx="4777740" cy="365760"/>
-          </a:xfrm>
-          <a:prstGeom prst="rect">
-            <a:avLst/>
-          </a:prstGeom>
-          <a:noFill/>
-        </p:spPr>
-        <p:txBody>
-          <a:bodyPr wrap="square" anchor="t">
-            <a:spAutoFit/>
-          </a:bodyPr>
-          <a:lstStyle/>
-          <a:p>
-            <a:pPr algn="l"/>
-            <a:r>
-              <a:rPr sz="1600" b="1">
-                <a:solidFill>
-                  <a:srgbClr val="0F172A"/>
-                </a:solidFill>
-                <a:latin typeface="Noto Sans CJK SC"/>
-                <a:ea typeface="Noto Sans CJK SC"/>
-                <a:cs typeface="Noto Sans CJK SC"/>
-              </a:rPr>
-              <a:t>风控内核</a:t>
-            </a:r>
-          </a:p>
-        </p:txBody>
-      </p:sp>
-      <p:sp>
-        <p:nvSpPr>
-          <p:cNvPr id="10" name="TextBox 9"/>
-          <p:cNvSpPr txBox="1"/>
-          <p:nvPr/>
-        </p:nvSpPr>
-        <p:spPr>
-          <a:xfrm>
-            <a:off x="6377940" y="2971800"/>
-            <a:ext cx="4777740" cy="548640"/>
-          </a:xfrm>
-          <a:prstGeom prst="rect">
-            <a:avLst/>
-          </a:prstGeom>
-          <a:noFill/>
-        </p:spPr>
-        <p:txBody>
-          <a:bodyPr wrap="square" anchor="t">
-            <a:spAutoFit/>
-          </a:bodyPr>
-          <a:lstStyle/>
-          <a:p>
-            <a:pPr algn="l"/>
-            <a:r>
-              <a:rPr sz="1250" b="0">
-                <a:solidFill>
-                  <a:srgbClr val="64748B"/>
-                </a:solidFill>
-                <a:latin typeface="Noto Sans CJK SC"/>
-                <a:ea typeface="Noto Sans CJK SC"/>
-                <a:cs typeface="Noto Sans CJK SC"/>
-              </a:rPr>
-              <a:t>确定性退回风险规则引擎(可解释、可复现) + DeepSeek 作为补充语义信号层。</a:t>
-            </a:r>
-          </a:p>
-        </p:txBody>
-      </p:sp>
-      <p:sp>
-        <p:nvSpPr>
-          <p:cNvPr id="11" name="Rounded Rectangle 10"/>
-          <p:cNvSpPr/>
-          <p:nvPr/>
-        </p:nvSpPr>
-        <p:spPr>
-          <a:xfrm>
-            <a:off x="822960" y="3840480"/>
-            <a:ext cx="5143500" cy="1143000"/>
-          </a:xfrm>
-          <a:prstGeom prst="roundRect">
-            <a:avLst/>
-          </a:prstGeom>
-          <a:solidFill>
-            <a:srgbClr val="F1F5F9"/>
-          </a:solidFill>
-          <a:ln>
-            <a:noFill/>
-          </a:ln>
-          <a:effectLst/>
-        </p:spPr>
-        <p:style>
-          <a:lnRef idx="1">
-            <a:schemeClr val="accent1"/>
-          </a:lnRef>
-          <a:fillRef idx="3">
-            <a:schemeClr val="accent1"/>
-          </a:fillRef>
-          <a:effectRef idx="2">
-            <a:schemeClr val="accent1"/>
-          </a:effectRef>
-          <a:fontRef idx="minor">
-            <a:schemeClr val="lt1"/>
-          </a:fontRef>
-        </p:style>
-        <p:txBody>
-          <a:bodyPr rtlCol="0" anchor="ctr"/>
-          <a:lstStyle/>
-          <a:p>
-            <a:pPr algn="ctr"/>
-          </a:p>
-        </p:txBody>
-      </p:sp>
-      <p:sp>
-        <p:nvSpPr>
-          <p:cNvPr id="12" name="TextBox 11"/>
-          <p:cNvSpPr txBox="1"/>
-          <p:nvPr/>
-        </p:nvSpPr>
-        <p:spPr>
-          <a:xfrm>
-            <a:off x="1005840" y="3950208"/>
-            <a:ext cx="4777740" cy="365760"/>
-          </a:xfrm>
-          <a:prstGeom prst="rect">
-            <a:avLst/>
-          </a:prstGeom>
-          <a:noFill/>
-        </p:spPr>
-        <p:txBody>
-          <a:bodyPr wrap="square" anchor="t">
-            <a:spAutoFit/>
-          </a:bodyPr>
-          <a:lstStyle/>
-          <a:p>
-            <a:pPr algn="l"/>
-            <a:r>
-              <a:rPr sz="1600" b="1">
-                <a:solidFill>
-                  <a:srgbClr val="0F172A"/>
-                </a:solidFill>
-                <a:latin typeface="Noto Sans CJK SC"/>
-                <a:ea typeface="Noto Sans CJK SC"/>
-                <a:cs typeface="Noto Sans CJK SC"/>
-              </a:rPr>
-              <a:t>数据与流转</a:t>
-            </a:r>
-          </a:p>
-        </p:txBody>
-      </p:sp>
-      <p:sp>
-        <p:nvSpPr>
-          <p:cNvPr id="13" name="TextBox 12"/>
-          <p:cNvSpPr txBox="1"/>
-          <p:nvPr/>
-        </p:nvSpPr>
-        <p:spPr>
-          <a:xfrm>
-            <a:off x="1005840" y="4343400"/>
-            <a:ext cx="4777740" cy="548640"/>
-          </a:xfrm>
-          <a:prstGeom prst="rect">
-            <a:avLst/>
-          </a:prstGeom>
-          <a:noFill/>
-        </p:spPr>
-        <p:txBody>
-          <a:bodyPr wrap="square" anchor="t">
-            <a:spAutoFit/>
-          </a:bodyPr>
-          <a:lstStyle/>
-          <a:p>
-            <a:pPr algn="l"/>
-            <a:r>
-              <a:rPr sz="1250" b="0">
-                <a:solidFill>
-                  <a:srgbClr val="64748B"/>
-                </a:solidFill>
-                <a:latin typeface="Noto Sans CJK SC"/>
-                <a:ea typeface="Noto Sans CJK SC"/>
-                <a:cs typeface="Noto Sans CJK SC"/>
-              </a:rPr>
-              <a:t>付款指令/收款人台账/工单/到账确认/对账 全链路数据模型。</a:t>
-            </a:r>
-          </a:p>
-        </p:txBody>
-      </p:sp>
-      <p:sp>
-        <p:nvSpPr>
-          <p:cNvPr id="14" name="Rounded Rectangle 13"/>
-          <p:cNvSpPr/>
-          <p:nvPr/>
-        </p:nvSpPr>
-        <p:spPr>
-          <a:xfrm>
-            <a:off x="6195060" y="3840480"/>
-            <a:ext cx="5143500" cy="1143000"/>
-          </a:xfrm>
-          <a:prstGeom prst="roundRect">
-            <a:avLst/>
-          </a:prstGeom>
-          <a:solidFill>
-            <a:srgbClr val="F1F5F9"/>
-          </a:solidFill>
-          <a:ln>
-            <a:noFill/>
-          </a:ln>
-          <a:effectLst/>
-        </p:spPr>
-        <p:style>
-          <a:lnRef idx="1">
-            <a:schemeClr val="accent1"/>
-          </a:lnRef>
-          <a:fillRef idx="3">
-            <a:schemeClr val="accent1"/>
-          </a:fillRef>
-          <a:effectRef idx="2">
-            <a:schemeClr val="accent1"/>
-          </a:effectRef>
-          <a:fontRef idx="minor">
-            <a:schemeClr val="lt1"/>
-          </a:fontRef>
-        </p:style>
-        <p:txBody>
-          <a:bodyPr rtlCol="0" anchor="ctr"/>
-          <a:lstStyle/>
-          <a:p>
-            <a:pPr algn="ctr"/>
-          </a:p>
-        </p:txBody>
-      </p:sp>
-      <p:sp>
-        <p:nvSpPr>
-          <p:cNvPr id="15" name="TextBox 14"/>
-          <p:cNvSpPr txBox="1"/>
-          <p:nvPr/>
-        </p:nvSpPr>
-        <p:spPr>
-          <a:xfrm>
-            <a:off x="6377940" y="3950208"/>
-            <a:ext cx="4777740" cy="365760"/>
-          </a:xfrm>
-          <a:prstGeom prst="rect">
-            <a:avLst/>
-          </a:prstGeom>
-          <a:noFill/>
-        </p:spPr>
-        <p:txBody>
-          <a:bodyPr wrap="square" anchor="t">
-            <a:spAutoFit/>
-          </a:bodyPr>
-          <a:lstStyle/>
-          <a:p>
-            <a:pPr algn="l"/>
-            <a:r>
-              <a:rPr sz="1600" b="1">
-                <a:solidFill>
-                  <a:srgbClr val="0F172A"/>
-                </a:solidFill>
-                <a:latin typeface="Noto Sans CJK SC"/>
-                <a:ea typeface="Noto Sans CJK SC"/>
-                <a:cs typeface="Noto Sans CJK SC"/>
-              </a:rPr>
-              <a:t>工程质量</a:t>
-            </a:r>
-          </a:p>
-        </p:txBody>
-      </p:sp>
-      <p:sp>
-        <p:nvSpPr>
-          <p:cNvPr id="16" name="TextBox 15"/>
-          <p:cNvSpPr txBox="1"/>
-          <p:nvPr/>
-        </p:nvSpPr>
-        <p:spPr>
-          <a:xfrm>
-            <a:off x="6377940" y="4343400"/>
-            <a:ext cx="4777740" cy="548640"/>
-          </a:xfrm>
-          <a:prstGeom prst="rect">
-            <a:avLst/>
-          </a:prstGeom>
-          <a:noFill/>
-        </p:spPr>
-        <p:txBody>
-          <a:bodyPr wrap="square" anchor="t">
-            <a:spAutoFit/>
-          </a:bodyPr>
-          <a:lstStyle/>
-          <a:p>
-            <a:pPr algn="l"/>
-            <a:r>
-              <a:rPr sz="1250" b="0">
-                <a:solidFill>
-                  <a:srgbClr val="64748B"/>
-                </a:solidFill>
-                <a:latin typeface="Noto Sans CJK SC"/>
-                <a:ea typeface="Noto Sans CJK SC"/>
-                <a:cs typeface="Noto Sans CJK SC"/>
-              </a:rPr>
-              <a:t>全站 TypeScript 0 error、双语键 386/386 对齐、关键路由端到端可跑。</a:t>
+              <a:t>现场可运行、可演示核心功能——不是 PPT 概念。可扫码访问在线应用实测。</a:t>
             </a:r>
           </a:p>
         </p:txBody>

--- a/public/FlowGuard-Hackathon-Pitch.pptx
+++ b/public/FlowGuard-Hackathon-Pitch.pptx
@@ -5133,7 +5133,7 @@
                 <a:ea typeface="Noto Sans CJK SC"/>
                 <a:cs typeface="Noto Sans CJK SC"/>
               </a:rPr>
-              <a:t>今天用 5 分钟讲清 9 件事</a:t>
+              <a:t>今天用 5 分钟讲清 10 件事</a:t>
             </a:r>
           </a:p>
         </p:txBody>
@@ -5841,7 +5841,7 @@
                 <a:ea typeface="Noto Sans CJK SC"/>
                 <a:cs typeface="Noto Sans CJK SC"/>
               </a:rPr>
-              <a:t>现场 Demo：你能看到什么</a:t>
+              <a:t>AI 覆盖一览：四痛点→四能力</a:t>
             </a:r>
           </a:p>
         </p:txBody>
@@ -5959,7 +5959,7 @@
                 <a:ea typeface="Noto Sans CJK SC"/>
                 <a:cs typeface="Noto Sans CJK SC"/>
               </a:rPr>
-              <a:t>技术架构：怎么实现的</a:t>
+              <a:t>现场 Demo：你能看到什么</a:t>
             </a:r>
           </a:p>
         </p:txBody>
@@ -6077,7 +6077,7 @@
                 <a:ea typeface="Noto Sans CJK SC"/>
                 <a:cs typeface="Noto Sans CJK SC"/>
               </a:rPr>
-              <a:t>合规边界：我们不碰什么（关键）</a:t>
+              <a:t>技术架构：怎么实现的</a:t>
             </a:r>
           </a:p>
         </p:txBody>
@@ -6172,6 +6172,124 @@
         <p:spPr>
           <a:xfrm>
             <a:off x="8686800" y="4983480"/>
+            <a:ext cx="2651760" cy="731520"/>
+          </a:xfrm>
+          <a:prstGeom prst="rect">
+            <a:avLst/>
+          </a:prstGeom>
+          <a:noFill/>
+        </p:spPr>
+        <p:txBody>
+          <a:bodyPr wrap="square" anchor="t">
+            <a:spAutoFit/>
+          </a:bodyPr>
+          <a:lstStyle/>
+          <a:p>
+            <a:pPr algn="l"/>
+            <a:r>
+              <a:rPr sz="1300" b="1">
+                <a:solidFill>
+                  <a:srgbClr val="0F172A"/>
+                </a:solidFill>
+                <a:latin typeface="Noto Sans CJK SC"/>
+                <a:ea typeface="Noto Sans CJK SC"/>
+                <a:cs typeface="Noto Sans CJK SC"/>
+              </a:rPr>
+              <a:t>合规边界：我们不碰什么（关键）</a:t>
+            </a:r>
+          </a:p>
+        </p:txBody>
+      </p:sp>
+      <p:sp>
+        <p:nvSpPr>
+          <p:cNvPr id="31" name="Rounded Rectangle 30"/>
+          <p:cNvSpPr/>
+          <p:nvPr/>
+        </p:nvSpPr>
+        <p:spPr>
+          <a:xfrm>
+            <a:off x="822960" y="6035040"/>
+            <a:ext cx="3429000" cy="1051560"/>
+          </a:xfrm>
+          <a:prstGeom prst="roundRect">
+            <a:avLst/>
+          </a:prstGeom>
+          <a:solidFill>
+            <a:srgbClr val="F1F5F9"/>
+          </a:solidFill>
+          <a:ln>
+            <a:noFill/>
+          </a:ln>
+          <a:effectLst/>
+        </p:spPr>
+        <p:style>
+          <a:lnRef idx="1">
+            <a:schemeClr val="accent1"/>
+          </a:lnRef>
+          <a:fillRef idx="3">
+            <a:schemeClr val="accent1"/>
+          </a:fillRef>
+          <a:effectRef idx="2">
+            <a:schemeClr val="accent1"/>
+          </a:effectRef>
+          <a:fontRef idx="minor">
+            <a:schemeClr val="lt1"/>
+          </a:fontRef>
+        </p:style>
+        <p:txBody>
+          <a:bodyPr rtlCol="0" anchor="ctr"/>
+          <a:lstStyle/>
+          <a:p>
+            <a:pPr algn="ctr"/>
+          </a:p>
+        </p:txBody>
+      </p:sp>
+      <p:sp>
+        <p:nvSpPr>
+          <p:cNvPr id="32" name="TextBox 31"/>
+          <p:cNvSpPr txBox="1"/>
+          <p:nvPr/>
+        </p:nvSpPr>
+        <p:spPr>
+          <a:xfrm>
+            <a:off x="960120" y="6144768"/>
+            <a:ext cx="457200" cy="457200"/>
+          </a:xfrm>
+          <a:prstGeom prst="rect">
+            <a:avLst/>
+          </a:prstGeom>
+          <a:noFill/>
+        </p:spPr>
+        <p:txBody>
+          <a:bodyPr wrap="square" anchor="t">
+            <a:spAutoFit/>
+          </a:bodyPr>
+          <a:lstStyle/>
+          <a:p>
+            <a:pPr algn="l"/>
+            <a:r>
+              <a:rPr sz="1800" b="1">
+                <a:solidFill>
+                  <a:srgbClr val="0F766E"/>
+                </a:solidFill>
+                <a:latin typeface="Noto Sans CJK SC"/>
+                <a:ea typeface="Noto Sans CJK SC"/>
+                <a:cs typeface="Noto Sans CJK SC"/>
+              </a:rPr>
+              <a:t>10</a:t>
+            </a:r>
+          </a:p>
+        </p:txBody>
+      </p:sp>
+      <p:sp>
+        <p:nvSpPr>
+          <p:cNvPr id="33" name="TextBox 32"/>
+          <p:cNvSpPr txBox="1"/>
+          <p:nvPr/>
+        </p:nvSpPr>
+        <p:spPr>
+          <a:xfrm>
+            <a:off x="1463040" y="6217920"/>
             <a:ext cx="2651760" cy="731520"/>
           </a:xfrm>
           <a:prstGeom prst="rect">

--- a/public/FlowGuard-Hackathon-Pitch.pptx
+++ b/public/FlowGuard-Hackathon-Pitch.pptx
@@ -6450,7 +6450,7 @@
                 <a:ea typeface="Noto Sans CJK SC"/>
                 <a:cs typeface="Noto Sans CJK SC"/>
               </a:rPr>
-              <a:t>使用者：外贸企业出纳/财务、跨境电商、做海外供应商结算的中小企业。</a:t>
+              <a:t>使用者：外贸企业出纳/财务、跨境电商、做海外供应商结算的中小企业。下面四痛点，正好对应后面四个 AI 能力。</a:t>
             </a:r>
           </a:p>
         </p:txBody>
@@ -6464,7 +6464,7 @@
         <p:spPr>
           <a:xfrm>
             <a:off x="822960" y="2468880"/>
-            <a:ext cx="5143500" cy="1143000"/>
+            <a:ext cx="5143500" cy="1371600"/>
           </a:xfrm>
           <a:prstGeom prst="roundRect">
             <a:avLst/>
@@ -6531,7 +6531,7 @@
                 <a:ea typeface="Noto Sans CJK SC"/>
                 <a:cs typeface="Noto Sans CJK SC"/>
               </a:rPr>
-              <a:t>先发后祈祷</a:t>
+              <a:t>① 中间行黑箱，钱卡哪看不见</a:t>
             </a:r>
           </a:p>
         </p:txBody>
@@ -6545,7 +6545,7 @@
         <p:spPr>
           <a:xfrm>
             <a:off x="1005840" y="2971800"/>
-            <a:ext cx="4777740" cy="548640"/>
+            <a:ext cx="4777740" cy="777240"/>
           </a:xfrm>
           <a:prstGeom prst="rect">
             <a:avLst/>
@@ -6568,7 +6568,7 @@
                 <a:ea typeface="Noto Sans CJK SC"/>
                 <a:cs typeface="Noto Sans CJK SC"/>
               </a:rPr>
-              <a:t>钱汇出去才知道会被退回——资金冻结数日，业务停摆、供应商催货。</a:t>
+              <a:t>看不到钱走了哪条路、卡在哪个中间行，只能干等 → AI: where is my money?</a:t>
             </a:r>
           </a:p>
         </p:txBody>
@@ -6582,7 +6582,7 @@
         <p:spPr>
           <a:xfrm>
             <a:off x="6195060" y="2468880"/>
-            <a:ext cx="5143500" cy="1143000"/>
+            <a:ext cx="5143500" cy="1371600"/>
           </a:xfrm>
           <a:prstGeom prst="roundRect">
             <a:avLst/>
@@ -6649,7 +6649,7 @@
                 <a:ea typeface="Noto Sans CJK SC"/>
                 <a:cs typeface="Noto Sans CJK SC"/>
               </a:rPr>
-              <a:t>退回原因藏在细节</a:t>
+              <a:t>② 莫名被退，发起时才知道</a:t>
             </a:r>
           </a:p>
         </p:txBody>
@@ -6663,7 +6663,7 @@
         <p:spPr>
           <a:xfrm>
             <a:off x="6377940" y="2971800"/>
-            <a:ext cx="4777740" cy="548640"/>
+            <a:ext cx="4777740" cy="777240"/>
           </a:xfrm>
           <a:prstGeom prst="rect">
             <a:avLst/>
@@ -6686,7 +6686,7 @@
                 <a:ea typeface="Noto Sans CJK SC"/>
                 <a:cs typeface="Noto Sans CJK SC"/>
               </a:rPr>
-              <a:t>收款人信息一个字段不符、通道选错，就整笔退回，出纳无从预判。</a:t>
+              <a:t>退回多是收款信息/合规校验问题，却发起后才发现，代价几天到一周 → AI: draft the follow-up</a:t>
             </a:r>
           </a:p>
         </p:txBody>
@@ -6699,8 +6699,8 @@
         </p:nvSpPr>
         <p:spPr>
           <a:xfrm>
-            <a:off x="822960" y="3840480"/>
-            <a:ext cx="5143500" cy="1143000"/>
+            <a:off x="822960" y="4069080"/>
+            <a:ext cx="5143500" cy="1371600"/>
           </a:xfrm>
           <a:prstGeom prst="roundRect">
             <a:avLst/>
@@ -6743,7 +6743,7 @@
         </p:nvSpPr>
         <p:spPr>
           <a:xfrm>
-            <a:off x="1005840" y="3950208"/>
+            <a:off x="1005840" y="4178808"/>
             <a:ext cx="4777740" cy="365760"/>
           </a:xfrm>
           <a:prstGeom prst="rect">
@@ -6767,7 +6767,7 @@
                 <a:ea typeface="Noto Sans CJK SC"/>
                 <a:cs typeface="Noto Sans CJK SC"/>
               </a:rPr>
-              <a:t>选错通道白花钱</a:t>
+              <a:t>③ 多国供应商，重复适应银行</a:t>
             </a:r>
           </a:p>
         </p:txBody>
@@ -6780,8 +6780,8 @@
         </p:nvSpPr>
         <p:spPr>
           <a:xfrm>
-            <a:off x="1005840" y="4343400"/>
-            <a:ext cx="4777740" cy="548640"/>
+            <a:off x="1005840" y="4572000"/>
+            <a:ext cx="4777740" cy="777240"/>
           </a:xfrm>
           <a:prstGeom prst="rect">
             <a:avLst/>
@@ -6804,7 +6804,7 @@
                 <a:ea typeface="Noto Sans CJK SC"/>
                 <a:cs typeface="Noto Sans CJK SC"/>
               </a:rPr>
-              <a:t>稳定币直连 vs 本地法币凭感觉选，费用更高、失败率更高。</a:t>
+              <a:t>多国多供应商，每次结算都要重新适应不同银行要求，效率极低 → AI: what this corridor requires</a:t>
             </a:r>
           </a:p>
         </p:txBody>
@@ -6817,8 +6817,8 @@
         </p:nvSpPr>
         <p:spPr>
           <a:xfrm>
-            <a:off x="6195060" y="3840480"/>
-            <a:ext cx="5143500" cy="1143000"/>
+            <a:off x="6195060" y="4069080"/>
+            <a:ext cx="5143500" cy="1371600"/>
           </a:xfrm>
           <a:prstGeom prst="roundRect">
             <a:avLst/>
@@ -6861,7 +6861,7 @@
         </p:nvSpPr>
         <p:spPr>
           <a:xfrm>
-            <a:off x="6377940" y="3950208"/>
+            <a:off x="6377940" y="4178808"/>
             <a:ext cx="4777740" cy="365760"/>
           </a:xfrm>
           <a:prstGeom prst="rect">
@@ -6885,7 +6885,7 @@
                 <a:ea typeface="Noto Sans CJK SC"/>
                 <a:cs typeface="Noto Sans CJK SC"/>
               </a:rPr>
-              <a:t>缺少双人控制</a:t>
+              <a:t>④ 财务对账，凭证对不上</a:t>
             </a:r>
           </a:p>
         </p:txBody>
@@ -6898,8 +6898,8 @@
         </p:nvSpPr>
         <p:spPr>
           <a:xfrm>
-            <a:off x="6377940" y="4343400"/>
-            <a:ext cx="4777740" cy="548640"/>
+            <a:off x="6377940" y="4572000"/>
+            <a:ext cx="4777740" cy="777240"/>
           </a:xfrm>
           <a:prstGeom prst="rect">
             <a:avLst/>
@@ -6922,7 +6922,7 @@
                 <a:ea typeface="Noto Sans CJK SC"/>
                 <a:cs typeface="Noto Sans CJK SC"/>
               </a:rPr>
-              <a:t>一个人又发起又确认，填错没有第二道拦截，直接造成损失。</a:t>
+              <a:t>链上/链下凭证对不上，多笔跨国付款时尤其头疼 → AI: why don't these match?</a:t>
             </a:r>
           </a:p>
         </p:txBody>
@@ -6959,7 +6959,7 @@
                 <a:ea typeface="Noto Sans CJK SC"/>
                 <a:cs typeface="Noto Sans CJK SC"/>
               </a:rPr>
-              <a:t>真实、高频、可被验证的痛点——不是未来概念。</a:t>
+              <a:t>真实、高频、可被验证的痛点——每一条都在后续被一个 AI 能力接住。</a:t>
             </a:r>
           </a:p>
         </p:txBody>

--- a/public/FlowGuard-Hackathon-Pitch.pptx
+++ b/public/FlowGuard-Hackathon-Pitch.pptx
@@ -17,6 +17,7 @@
     <p:sldId id="265" r:id="rId16"/>
     <p:sldId id="266" r:id="rId17"/>
     <p:sldId id="267" r:id="rId18"/>
+    <p:sldId id="268" r:id="rId19"/>
   </p:sldIdLst>
   <p:sldSz cx="12191695" cy="6858000" type="screen4x3"/>
   <p:notesSz cx="6858000" cy="9144000"/>
@@ -3313,7 +3314,7 @@
                 <a:ea typeface="Noto Sans CJK SC"/>
                 <a:cs typeface="Noto Sans CJK SC"/>
               </a:rPr>
-              <a:t>过程可说明 · 技术架构</a:t>
+              <a:t>现场可以看到什么</a:t>
             </a:r>
           </a:p>
         </p:txBody>
@@ -3342,7 +3343,7 @@
           <a:p>
             <a:pPr algn="l"/>
             <a:r>
-              <a:rPr sz="3600" b="1">
+              <a:rPr sz="3200" b="1">
                 <a:solidFill>
                   <a:srgbClr val="0F172A"/>
                 </a:solidFill>
@@ -3350,7 +3351,7 @@
                 <a:ea typeface="Noto Sans CJK SC"/>
                 <a:cs typeface="Noto Sans CJK SC"/>
               </a:rPr>
-              <a:t>怎么实现的</a:t>
+              <a:t>现场 Demo：一笔高风险付款的完整拦截</a:t>
             </a:r>
           </a:p>
         </p:txBody>
@@ -3363,23 +3364,23 @@
         </p:nvSpPr>
         <p:spPr>
           <a:xfrm>
-            <a:off x="822960" y="1783080"/>
-            <a:ext cx="10515600" cy="731520"/>
-          </a:xfrm>
-          <a:prstGeom prst="rect">
-            <a:avLst/>
-          </a:prstGeom>
-          <a:noFill/>
-        </p:spPr>
-        <p:txBody>
-          <a:bodyPr wrap="square" anchor="t">
-            <a:spAutoFit/>
-          </a:bodyPr>
-          <a:lstStyle/>
-          <a:p>
-            <a:pPr algn="l"/>
-            <a:r>
-              <a:rPr sz="1600" b="0">
+            <a:off x="822960" y="1691640"/>
+            <a:ext cx="10515600" cy="548640"/>
+          </a:xfrm>
+          <a:prstGeom prst="rect">
+            <a:avLst/>
+          </a:prstGeom>
+          <a:noFill/>
+        </p:spPr>
+        <p:txBody>
+          <a:bodyPr wrap="square" anchor="t">
+            <a:spAutoFit/>
+          </a:bodyPr>
+          <a:lstStyle/>
+          <a:p>
+            <a:pPr algn="l"/>
+            <a:r>
+              <a:rPr sz="1500" b="0">
                 <a:solidFill>
                   <a:srgbClr val="64748B"/>
                 </a:solidFill>
@@ -3387,55 +3388,35 @@
                 <a:ea typeface="Noto Sans CJK SC"/>
                 <a:cs typeface="Noto Sans CJK SC"/>
               </a:rPr>
-              <a:t>Next.js(App Router)+TypeScript+Tailwind；确定性规则引擎+DeepSeek AI；双语 i18n。</a:t>
-            </a:r>
-          </a:p>
-        </p:txBody>
-      </p:sp>
-      <p:sp>
-        <p:nvSpPr>
-          <p:cNvPr id="5" name="Rounded Rectangle 4"/>
-          <p:cNvSpPr/>
-          <p:nvPr/>
-        </p:nvSpPr>
-        <p:spPr>
-          <a:xfrm>
-            <a:off x="822960" y="2468880"/>
-            <a:ext cx="5143500" cy="1143000"/>
-          </a:xfrm>
-          <a:prstGeom prst="roundRect">
-            <a:avLst/>
-          </a:prstGeom>
-          <a:solidFill>
-            <a:srgbClr val="F1F5F9"/>
-          </a:solidFill>
-          <a:ln>
-            <a:noFill/>
-          </a:ln>
-          <a:effectLst/>
-        </p:spPr>
-        <p:style>
-          <a:lnRef idx="1">
-            <a:schemeClr val="accent1"/>
-          </a:lnRef>
-          <a:fillRef idx="3">
-            <a:schemeClr val="accent1"/>
-          </a:fillRef>
-          <a:effectRef idx="2">
-            <a:schemeClr val="accent1"/>
-          </a:effectRef>
-          <a:fontRef idx="minor">
-            <a:schemeClr val="lt1"/>
-          </a:fontRef>
-        </p:style>
-        <p:txBody>
-          <a:bodyPr rtlCol="0" anchor="ctr"/>
-          <a:lstStyle/>
-          <a:p>
-            <a:pPr algn="ctr"/>
-          </a:p>
-        </p:txBody>
-      </p:sp>
+              <a:t>现场可运行：新建付款→预检亮红→AI 信号→核实清除→双人放行→生成指令。</a:t>
+            </a:r>
+          </a:p>
+        </p:txBody>
+      </p:sp>
+      <p:pic>
+        <p:nvPicPr>
+          <p:cNvPr id="5" name="Picture 4" descr="demo.png"/>
+          <p:cNvPicPr>
+            <a:picLocks noChangeAspect="1"/>
+          </p:cNvPicPr>
+          <p:nvPr/>
+        </p:nvPicPr>
+        <p:blipFill>
+          <a:blip r:embed="rId2"/>
+          <a:stretch>
+            <a:fillRect/>
+          </a:stretch>
+        </p:blipFill>
+        <p:spPr>
+          <a:xfrm>
+            <a:off x="1234440" y="2286000"/>
+            <a:ext cx="9692640" cy="5452110"/>
+          </a:xfrm>
+          <a:prstGeom prst="rect">
+            <a:avLst/>
+          </a:prstGeom>
+        </p:spPr>
+      </p:pic>
       <p:sp>
         <p:nvSpPr>
           <p:cNvPr id="6" name="TextBox 5"/>
@@ -3444,60 +3425,23 @@
         </p:nvSpPr>
         <p:spPr>
           <a:xfrm>
-            <a:off x="1005840" y="2578608"/>
-            <a:ext cx="4777740" cy="365760"/>
-          </a:xfrm>
-          <a:prstGeom prst="rect">
-            <a:avLst/>
-          </a:prstGeom>
-          <a:noFill/>
-        </p:spPr>
-        <p:txBody>
-          <a:bodyPr wrap="square" anchor="t">
-            <a:spAutoFit/>
-          </a:bodyPr>
-          <a:lstStyle/>
-          <a:p>
-            <a:pPr algn="l"/>
-            <a:r>
-              <a:rPr sz="1600" b="1">
-                <a:solidFill>
-                  <a:srgbClr val="0F172A"/>
-                </a:solidFill>
-                <a:latin typeface="Noto Sans CJK SC"/>
-                <a:ea typeface="Noto Sans CJK SC"/>
-                <a:cs typeface="Noto Sans CJK SC"/>
-              </a:rPr>
-              <a:t>前端 / 应用</a:t>
-            </a:r>
-          </a:p>
-        </p:txBody>
-      </p:sp>
-      <p:sp>
-        <p:nvSpPr>
-          <p:cNvPr id="7" name="TextBox 6"/>
-          <p:cNvSpPr txBox="1"/>
-          <p:nvPr/>
-        </p:nvSpPr>
-        <p:spPr>
-          <a:xfrm>
-            <a:off x="1005840" y="2971800"/>
-            <a:ext cx="4777740" cy="548640"/>
-          </a:xfrm>
-          <a:prstGeom prst="rect">
-            <a:avLst/>
-          </a:prstGeom>
-          <a:noFill/>
-        </p:spPr>
-        <p:txBody>
-          <a:bodyPr wrap="square" anchor="t">
-            <a:spAutoFit/>
-          </a:bodyPr>
-          <a:lstStyle/>
-          <a:p>
-            <a:pPr algn="l"/>
-            <a:r>
-              <a:rPr sz="1250" b="0">
+            <a:off x="822960" y="6309360"/>
+            <a:ext cx="10515600" cy="365760"/>
+          </a:xfrm>
+          <a:prstGeom prst="rect">
+            <a:avLst/>
+          </a:prstGeom>
+          <a:noFill/>
+        </p:spPr>
+        <p:txBody>
+          <a:bodyPr wrap="square" anchor="t">
+            <a:spAutoFit/>
+          </a:bodyPr>
+          <a:lstStyle/>
+          <a:p>
+            <a:pPr algn="l"/>
+            <a:r>
+              <a:rPr sz="1100" b="0">
                 <a:solidFill>
                   <a:srgbClr val="64748B"/>
                 </a:solidFill>
@@ -3505,361 +3449,7 @@
                 <a:ea typeface="Noto Sans CJK SC"/>
                 <a:cs typeface="Noto Sans CJK SC"/>
               </a:rPr>
-              <a:t>Next.js 15 + React + Tailwind，移动端优先；react-i18next 中英双语。</a:t>
-            </a:r>
-          </a:p>
-        </p:txBody>
-      </p:sp>
-      <p:sp>
-        <p:nvSpPr>
-          <p:cNvPr id="8" name="Rounded Rectangle 7"/>
-          <p:cNvSpPr/>
-          <p:nvPr/>
-        </p:nvSpPr>
-        <p:spPr>
-          <a:xfrm>
-            <a:off x="6195060" y="2468880"/>
-            <a:ext cx="5143500" cy="1143000"/>
-          </a:xfrm>
-          <a:prstGeom prst="roundRect">
-            <a:avLst/>
-          </a:prstGeom>
-          <a:solidFill>
-            <a:srgbClr val="F1F5F9"/>
-          </a:solidFill>
-          <a:ln>
-            <a:noFill/>
-          </a:ln>
-          <a:effectLst/>
-        </p:spPr>
-        <p:style>
-          <a:lnRef idx="1">
-            <a:schemeClr val="accent1"/>
-          </a:lnRef>
-          <a:fillRef idx="3">
-            <a:schemeClr val="accent1"/>
-          </a:fillRef>
-          <a:effectRef idx="2">
-            <a:schemeClr val="accent1"/>
-          </a:effectRef>
-          <a:fontRef idx="minor">
-            <a:schemeClr val="lt1"/>
-          </a:fontRef>
-        </p:style>
-        <p:txBody>
-          <a:bodyPr rtlCol="0" anchor="ctr"/>
-          <a:lstStyle/>
-          <a:p>
-            <a:pPr algn="ctr"/>
-          </a:p>
-        </p:txBody>
-      </p:sp>
-      <p:sp>
-        <p:nvSpPr>
-          <p:cNvPr id="9" name="TextBox 8"/>
-          <p:cNvSpPr txBox="1"/>
-          <p:nvPr/>
-        </p:nvSpPr>
-        <p:spPr>
-          <a:xfrm>
-            <a:off x="6377940" y="2578608"/>
-            <a:ext cx="4777740" cy="365760"/>
-          </a:xfrm>
-          <a:prstGeom prst="rect">
-            <a:avLst/>
-          </a:prstGeom>
-          <a:noFill/>
-        </p:spPr>
-        <p:txBody>
-          <a:bodyPr wrap="square" anchor="t">
-            <a:spAutoFit/>
-          </a:bodyPr>
-          <a:lstStyle/>
-          <a:p>
-            <a:pPr algn="l"/>
-            <a:r>
-              <a:rPr sz="1600" b="1">
-                <a:solidFill>
-                  <a:srgbClr val="0F172A"/>
-                </a:solidFill>
-                <a:latin typeface="Noto Sans CJK SC"/>
-                <a:ea typeface="Noto Sans CJK SC"/>
-                <a:cs typeface="Noto Sans CJK SC"/>
-              </a:rPr>
-              <a:t>风控内核</a:t>
-            </a:r>
-          </a:p>
-        </p:txBody>
-      </p:sp>
-      <p:sp>
-        <p:nvSpPr>
-          <p:cNvPr id="10" name="TextBox 9"/>
-          <p:cNvSpPr txBox="1"/>
-          <p:nvPr/>
-        </p:nvSpPr>
-        <p:spPr>
-          <a:xfrm>
-            <a:off x="6377940" y="2971800"/>
-            <a:ext cx="4777740" cy="548640"/>
-          </a:xfrm>
-          <a:prstGeom prst="rect">
-            <a:avLst/>
-          </a:prstGeom>
-          <a:noFill/>
-        </p:spPr>
-        <p:txBody>
-          <a:bodyPr wrap="square" anchor="t">
-            <a:spAutoFit/>
-          </a:bodyPr>
-          <a:lstStyle/>
-          <a:p>
-            <a:pPr algn="l"/>
-            <a:r>
-              <a:rPr sz="1250" b="0">
-                <a:solidFill>
-                  <a:srgbClr val="64748B"/>
-                </a:solidFill>
-                <a:latin typeface="Noto Sans CJK SC"/>
-                <a:ea typeface="Noto Sans CJK SC"/>
-                <a:cs typeface="Noto Sans CJK SC"/>
-              </a:rPr>
-              <a:t>确定性退回风险规则引擎(可解释、可复现) + DeepSeek 作为补充语义信号层。</a:t>
-            </a:r>
-          </a:p>
-        </p:txBody>
-      </p:sp>
-      <p:sp>
-        <p:nvSpPr>
-          <p:cNvPr id="11" name="Rounded Rectangle 10"/>
-          <p:cNvSpPr/>
-          <p:nvPr/>
-        </p:nvSpPr>
-        <p:spPr>
-          <a:xfrm>
-            <a:off x="822960" y="3840480"/>
-            <a:ext cx="5143500" cy="1143000"/>
-          </a:xfrm>
-          <a:prstGeom prst="roundRect">
-            <a:avLst/>
-          </a:prstGeom>
-          <a:solidFill>
-            <a:srgbClr val="F1F5F9"/>
-          </a:solidFill>
-          <a:ln>
-            <a:noFill/>
-          </a:ln>
-          <a:effectLst/>
-        </p:spPr>
-        <p:style>
-          <a:lnRef idx="1">
-            <a:schemeClr val="accent1"/>
-          </a:lnRef>
-          <a:fillRef idx="3">
-            <a:schemeClr val="accent1"/>
-          </a:fillRef>
-          <a:effectRef idx="2">
-            <a:schemeClr val="accent1"/>
-          </a:effectRef>
-          <a:fontRef idx="minor">
-            <a:schemeClr val="lt1"/>
-          </a:fontRef>
-        </p:style>
-        <p:txBody>
-          <a:bodyPr rtlCol="0" anchor="ctr"/>
-          <a:lstStyle/>
-          <a:p>
-            <a:pPr algn="ctr"/>
-          </a:p>
-        </p:txBody>
-      </p:sp>
-      <p:sp>
-        <p:nvSpPr>
-          <p:cNvPr id="12" name="TextBox 11"/>
-          <p:cNvSpPr txBox="1"/>
-          <p:nvPr/>
-        </p:nvSpPr>
-        <p:spPr>
-          <a:xfrm>
-            <a:off x="1005840" y="3950208"/>
-            <a:ext cx="4777740" cy="365760"/>
-          </a:xfrm>
-          <a:prstGeom prst="rect">
-            <a:avLst/>
-          </a:prstGeom>
-          <a:noFill/>
-        </p:spPr>
-        <p:txBody>
-          <a:bodyPr wrap="square" anchor="t">
-            <a:spAutoFit/>
-          </a:bodyPr>
-          <a:lstStyle/>
-          <a:p>
-            <a:pPr algn="l"/>
-            <a:r>
-              <a:rPr sz="1600" b="1">
-                <a:solidFill>
-                  <a:srgbClr val="0F172A"/>
-                </a:solidFill>
-                <a:latin typeface="Noto Sans CJK SC"/>
-                <a:ea typeface="Noto Sans CJK SC"/>
-                <a:cs typeface="Noto Sans CJK SC"/>
-              </a:rPr>
-              <a:t>数据与流转</a:t>
-            </a:r>
-          </a:p>
-        </p:txBody>
-      </p:sp>
-      <p:sp>
-        <p:nvSpPr>
-          <p:cNvPr id="13" name="TextBox 12"/>
-          <p:cNvSpPr txBox="1"/>
-          <p:nvPr/>
-        </p:nvSpPr>
-        <p:spPr>
-          <a:xfrm>
-            <a:off x="1005840" y="4343400"/>
-            <a:ext cx="4777740" cy="548640"/>
-          </a:xfrm>
-          <a:prstGeom prst="rect">
-            <a:avLst/>
-          </a:prstGeom>
-          <a:noFill/>
-        </p:spPr>
-        <p:txBody>
-          <a:bodyPr wrap="square" anchor="t">
-            <a:spAutoFit/>
-          </a:bodyPr>
-          <a:lstStyle/>
-          <a:p>
-            <a:pPr algn="l"/>
-            <a:r>
-              <a:rPr sz="1250" b="0">
-                <a:solidFill>
-                  <a:srgbClr val="64748B"/>
-                </a:solidFill>
-                <a:latin typeface="Noto Sans CJK SC"/>
-                <a:ea typeface="Noto Sans CJK SC"/>
-                <a:cs typeface="Noto Sans CJK SC"/>
-              </a:rPr>
-              <a:t>付款指令/收款人台账/工单/到账确认/对账 全链路数据模型。</a:t>
-            </a:r>
-          </a:p>
-        </p:txBody>
-      </p:sp>
-      <p:sp>
-        <p:nvSpPr>
-          <p:cNvPr id="14" name="Rounded Rectangle 13"/>
-          <p:cNvSpPr/>
-          <p:nvPr/>
-        </p:nvSpPr>
-        <p:spPr>
-          <a:xfrm>
-            <a:off x="6195060" y="3840480"/>
-            <a:ext cx="5143500" cy="1143000"/>
-          </a:xfrm>
-          <a:prstGeom prst="roundRect">
-            <a:avLst/>
-          </a:prstGeom>
-          <a:solidFill>
-            <a:srgbClr val="F1F5F9"/>
-          </a:solidFill>
-          <a:ln>
-            <a:noFill/>
-          </a:ln>
-          <a:effectLst/>
-        </p:spPr>
-        <p:style>
-          <a:lnRef idx="1">
-            <a:schemeClr val="accent1"/>
-          </a:lnRef>
-          <a:fillRef idx="3">
-            <a:schemeClr val="accent1"/>
-          </a:fillRef>
-          <a:effectRef idx="2">
-            <a:schemeClr val="accent1"/>
-          </a:effectRef>
-          <a:fontRef idx="minor">
-            <a:schemeClr val="lt1"/>
-          </a:fontRef>
-        </p:style>
-        <p:txBody>
-          <a:bodyPr rtlCol="0" anchor="ctr"/>
-          <a:lstStyle/>
-          <a:p>
-            <a:pPr algn="ctr"/>
-          </a:p>
-        </p:txBody>
-      </p:sp>
-      <p:sp>
-        <p:nvSpPr>
-          <p:cNvPr id="15" name="TextBox 14"/>
-          <p:cNvSpPr txBox="1"/>
-          <p:nvPr/>
-        </p:nvSpPr>
-        <p:spPr>
-          <a:xfrm>
-            <a:off x="6377940" y="3950208"/>
-            <a:ext cx="4777740" cy="365760"/>
-          </a:xfrm>
-          <a:prstGeom prst="rect">
-            <a:avLst/>
-          </a:prstGeom>
-          <a:noFill/>
-        </p:spPr>
-        <p:txBody>
-          <a:bodyPr wrap="square" anchor="t">
-            <a:spAutoFit/>
-          </a:bodyPr>
-          <a:lstStyle/>
-          <a:p>
-            <a:pPr algn="l"/>
-            <a:r>
-              <a:rPr sz="1600" b="1">
-                <a:solidFill>
-                  <a:srgbClr val="0F172A"/>
-                </a:solidFill>
-                <a:latin typeface="Noto Sans CJK SC"/>
-                <a:ea typeface="Noto Sans CJK SC"/>
-                <a:cs typeface="Noto Sans CJK SC"/>
-              </a:rPr>
-              <a:t>工程质量</a:t>
-            </a:r>
-          </a:p>
-        </p:txBody>
-      </p:sp>
-      <p:sp>
-        <p:nvSpPr>
-          <p:cNvPr id="16" name="TextBox 15"/>
-          <p:cNvSpPr txBox="1"/>
-          <p:nvPr/>
-        </p:nvSpPr>
-        <p:spPr>
-          <a:xfrm>
-            <a:off x="6377940" y="4343400"/>
-            <a:ext cx="4777740" cy="548640"/>
-          </a:xfrm>
-          <a:prstGeom prst="rect">
-            <a:avLst/>
-          </a:prstGeom>
-          <a:noFill/>
-        </p:spPr>
-        <p:txBody>
-          <a:bodyPr wrap="square" anchor="t">
-            <a:spAutoFit/>
-          </a:bodyPr>
-          <a:lstStyle/>
-          <a:p>
-            <a:pPr algn="l"/>
-            <a:r>
-              <a:rPr sz="1250" b="0">
-                <a:solidFill>
-                  <a:srgbClr val="64748B"/>
-                </a:solidFill>
-                <a:latin typeface="Noto Sans CJK SC"/>
-                <a:ea typeface="Noto Sans CJK SC"/>
-                <a:cs typeface="Noto Sans CJK SC"/>
-              </a:rPr>
-              <a:t>全站 TypeScript 0 error、双语键 386/386 对齐、关键路由端到端可跑。</a:t>
+              <a:t>现场可运行、可演示核心功能——不是 PPT 概念。可扫码访问在线应用实测。</a:t>
             </a:r>
           </a:p>
         </p:txBody>
@@ -3873,6 +3463,615 @@
 </file>
 
 <file path=ppt/slides/slide11.xml><?xml version="1.0" encoding="utf-8"?>
+<p:sld xmlns:a="http://schemas.openxmlformats.org/drawingml/2006/main" xmlns:p="http://schemas.openxmlformats.org/presentationml/2006/main" xmlns:r="http://schemas.openxmlformats.org/officeDocument/2006/relationships">
+  <p:cSld>
+    <p:bg>
+      <p:bgPr>
+        <a:solidFill>
+          <a:srgbClr val="FFFFFF"/>
+        </a:solidFill>
+        <a:effectLst/>
+      </p:bgPr>
+    </p:bg>
+    <p:spTree>
+      <p:nvGrpSpPr>
+        <p:cNvPr id="1" name=""/>
+        <p:cNvGrpSpPr/>
+        <p:nvPr/>
+      </p:nvGrpSpPr>
+      <p:grpSpPr/>
+      <p:sp>
+        <p:nvSpPr>
+          <p:cNvPr id="2" name="TextBox 1"/>
+          <p:cNvSpPr txBox="1"/>
+          <p:nvPr/>
+        </p:nvSpPr>
+        <p:spPr>
+          <a:xfrm>
+            <a:off x="822960" y="502920"/>
+            <a:ext cx="10515600" cy="365760"/>
+          </a:xfrm>
+          <a:prstGeom prst="rect">
+            <a:avLst/>
+          </a:prstGeom>
+          <a:noFill/>
+        </p:spPr>
+        <p:txBody>
+          <a:bodyPr wrap="square" anchor="t">
+            <a:spAutoFit/>
+          </a:bodyPr>
+          <a:lstStyle/>
+          <a:p>
+            <a:pPr algn="l"/>
+            <a:r>
+              <a:rPr sz="1400" b="1">
+                <a:solidFill>
+                  <a:srgbClr val="0F766E"/>
+                </a:solidFill>
+                <a:latin typeface="Noto Sans CJK SC"/>
+                <a:ea typeface="Noto Sans CJK SC"/>
+                <a:cs typeface="Noto Sans CJK SC"/>
+              </a:rPr>
+              <a:t>过程可说明 · 技术架构</a:t>
+            </a:r>
+          </a:p>
+        </p:txBody>
+      </p:sp>
+      <p:sp>
+        <p:nvSpPr>
+          <p:cNvPr id="3" name="TextBox 2"/>
+          <p:cNvSpPr txBox="1"/>
+          <p:nvPr/>
+        </p:nvSpPr>
+        <p:spPr>
+          <a:xfrm>
+            <a:off x="822960" y="868680"/>
+            <a:ext cx="10515600" cy="914400"/>
+          </a:xfrm>
+          <a:prstGeom prst="rect">
+            <a:avLst/>
+          </a:prstGeom>
+          <a:noFill/>
+        </p:spPr>
+        <p:txBody>
+          <a:bodyPr wrap="square" anchor="t">
+            <a:spAutoFit/>
+          </a:bodyPr>
+          <a:lstStyle/>
+          <a:p>
+            <a:pPr algn="l"/>
+            <a:r>
+              <a:rPr sz="3600" b="1">
+                <a:solidFill>
+                  <a:srgbClr val="0F172A"/>
+                </a:solidFill>
+                <a:latin typeface="Noto Sans CJK SC"/>
+                <a:ea typeface="Noto Sans CJK SC"/>
+                <a:cs typeface="Noto Sans CJK SC"/>
+              </a:rPr>
+              <a:t>怎么实现的</a:t>
+            </a:r>
+          </a:p>
+        </p:txBody>
+      </p:sp>
+      <p:sp>
+        <p:nvSpPr>
+          <p:cNvPr id="4" name="TextBox 3"/>
+          <p:cNvSpPr txBox="1"/>
+          <p:nvPr/>
+        </p:nvSpPr>
+        <p:spPr>
+          <a:xfrm>
+            <a:off x="822960" y="1783080"/>
+            <a:ext cx="10515600" cy="731520"/>
+          </a:xfrm>
+          <a:prstGeom prst="rect">
+            <a:avLst/>
+          </a:prstGeom>
+          <a:noFill/>
+        </p:spPr>
+        <p:txBody>
+          <a:bodyPr wrap="square" anchor="t">
+            <a:spAutoFit/>
+          </a:bodyPr>
+          <a:lstStyle/>
+          <a:p>
+            <a:pPr algn="l"/>
+            <a:r>
+              <a:rPr sz="1600" b="0">
+                <a:solidFill>
+                  <a:srgbClr val="64748B"/>
+                </a:solidFill>
+                <a:latin typeface="Noto Sans CJK SC"/>
+                <a:ea typeface="Noto Sans CJK SC"/>
+                <a:cs typeface="Noto Sans CJK SC"/>
+              </a:rPr>
+              <a:t>Next.js(App Router)+TypeScript+Tailwind；确定性规则引擎+DeepSeek AI；双语 i18n。</a:t>
+            </a:r>
+          </a:p>
+        </p:txBody>
+      </p:sp>
+      <p:sp>
+        <p:nvSpPr>
+          <p:cNvPr id="5" name="Rounded Rectangle 4"/>
+          <p:cNvSpPr/>
+          <p:nvPr/>
+        </p:nvSpPr>
+        <p:spPr>
+          <a:xfrm>
+            <a:off x="822960" y="2468880"/>
+            <a:ext cx="5143500" cy="1143000"/>
+          </a:xfrm>
+          <a:prstGeom prst="roundRect">
+            <a:avLst/>
+          </a:prstGeom>
+          <a:solidFill>
+            <a:srgbClr val="F1F5F9"/>
+          </a:solidFill>
+          <a:ln>
+            <a:noFill/>
+          </a:ln>
+          <a:effectLst/>
+        </p:spPr>
+        <p:style>
+          <a:lnRef idx="1">
+            <a:schemeClr val="accent1"/>
+          </a:lnRef>
+          <a:fillRef idx="3">
+            <a:schemeClr val="accent1"/>
+          </a:fillRef>
+          <a:effectRef idx="2">
+            <a:schemeClr val="accent1"/>
+          </a:effectRef>
+          <a:fontRef idx="minor">
+            <a:schemeClr val="lt1"/>
+          </a:fontRef>
+        </p:style>
+        <p:txBody>
+          <a:bodyPr rtlCol="0" anchor="ctr"/>
+          <a:lstStyle/>
+          <a:p>
+            <a:pPr algn="ctr"/>
+          </a:p>
+        </p:txBody>
+      </p:sp>
+      <p:sp>
+        <p:nvSpPr>
+          <p:cNvPr id="6" name="TextBox 5"/>
+          <p:cNvSpPr txBox="1"/>
+          <p:nvPr/>
+        </p:nvSpPr>
+        <p:spPr>
+          <a:xfrm>
+            <a:off x="1005840" y="2578608"/>
+            <a:ext cx="4777740" cy="365760"/>
+          </a:xfrm>
+          <a:prstGeom prst="rect">
+            <a:avLst/>
+          </a:prstGeom>
+          <a:noFill/>
+        </p:spPr>
+        <p:txBody>
+          <a:bodyPr wrap="square" anchor="t">
+            <a:spAutoFit/>
+          </a:bodyPr>
+          <a:lstStyle/>
+          <a:p>
+            <a:pPr algn="l"/>
+            <a:r>
+              <a:rPr sz="1600" b="1">
+                <a:solidFill>
+                  <a:srgbClr val="0F172A"/>
+                </a:solidFill>
+                <a:latin typeface="Noto Sans CJK SC"/>
+                <a:ea typeface="Noto Sans CJK SC"/>
+                <a:cs typeface="Noto Sans CJK SC"/>
+              </a:rPr>
+              <a:t>前端 / 应用</a:t>
+            </a:r>
+          </a:p>
+        </p:txBody>
+      </p:sp>
+      <p:sp>
+        <p:nvSpPr>
+          <p:cNvPr id="7" name="TextBox 6"/>
+          <p:cNvSpPr txBox="1"/>
+          <p:nvPr/>
+        </p:nvSpPr>
+        <p:spPr>
+          <a:xfrm>
+            <a:off x="1005840" y="2971800"/>
+            <a:ext cx="4777740" cy="548640"/>
+          </a:xfrm>
+          <a:prstGeom prst="rect">
+            <a:avLst/>
+          </a:prstGeom>
+          <a:noFill/>
+        </p:spPr>
+        <p:txBody>
+          <a:bodyPr wrap="square" anchor="t">
+            <a:spAutoFit/>
+          </a:bodyPr>
+          <a:lstStyle/>
+          <a:p>
+            <a:pPr algn="l"/>
+            <a:r>
+              <a:rPr sz="1250" b="0">
+                <a:solidFill>
+                  <a:srgbClr val="64748B"/>
+                </a:solidFill>
+                <a:latin typeface="Noto Sans CJK SC"/>
+                <a:ea typeface="Noto Sans CJK SC"/>
+                <a:cs typeface="Noto Sans CJK SC"/>
+              </a:rPr>
+              <a:t>Next.js 15 + React + Tailwind，移动端优先；react-i18next 中英双语。</a:t>
+            </a:r>
+          </a:p>
+        </p:txBody>
+      </p:sp>
+      <p:sp>
+        <p:nvSpPr>
+          <p:cNvPr id="8" name="Rounded Rectangle 7"/>
+          <p:cNvSpPr/>
+          <p:nvPr/>
+        </p:nvSpPr>
+        <p:spPr>
+          <a:xfrm>
+            <a:off x="6195060" y="2468880"/>
+            <a:ext cx="5143500" cy="1143000"/>
+          </a:xfrm>
+          <a:prstGeom prst="roundRect">
+            <a:avLst/>
+          </a:prstGeom>
+          <a:solidFill>
+            <a:srgbClr val="F1F5F9"/>
+          </a:solidFill>
+          <a:ln>
+            <a:noFill/>
+          </a:ln>
+          <a:effectLst/>
+        </p:spPr>
+        <p:style>
+          <a:lnRef idx="1">
+            <a:schemeClr val="accent1"/>
+          </a:lnRef>
+          <a:fillRef idx="3">
+            <a:schemeClr val="accent1"/>
+          </a:fillRef>
+          <a:effectRef idx="2">
+            <a:schemeClr val="accent1"/>
+          </a:effectRef>
+          <a:fontRef idx="minor">
+            <a:schemeClr val="lt1"/>
+          </a:fontRef>
+        </p:style>
+        <p:txBody>
+          <a:bodyPr rtlCol="0" anchor="ctr"/>
+          <a:lstStyle/>
+          <a:p>
+            <a:pPr algn="ctr"/>
+          </a:p>
+        </p:txBody>
+      </p:sp>
+      <p:sp>
+        <p:nvSpPr>
+          <p:cNvPr id="9" name="TextBox 8"/>
+          <p:cNvSpPr txBox="1"/>
+          <p:nvPr/>
+        </p:nvSpPr>
+        <p:spPr>
+          <a:xfrm>
+            <a:off x="6377940" y="2578608"/>
+            <a:ext cx="4777740" cy="365760"/>
+          </a:xfrm>
+          <a:prstGeom prst="rect">
+            <a:avLst/>
+          </a:prstGeom>
+          <a:noFill/>
+        </p:spPr>
+        <p:txBody>
+          <a:bodyPr wrap="square" anchor="t">
+            <a:spAutoFit/>
+          </a:bodyPr>
+          <a:lstStyle/>
+          <a:p>
+            <a:pPr algn="l"/>
+            <a:r>
+              <a:rPr sz="1600" b="1">
+                <a:solidFill>
+                  <a:srgbClr val="0F172A"/>
+                </a:solidFill>
+                <a:latin typeface="Noto Sans CJK SC"/>
+                <a:ea typeface="Noto Sans CJK SC"/>
+                <a:cs typeface="Noto Sans CJK SC"/>
+              </a:rPr>
+              <a:t>风控内核</a:t>
+            </a:r>
+          </a:p>
+        </p:txBody>
+      </p:sp>
+      <p:sp>
+        <p:nvSpPr>
+          <p:cNvPr id="10" name="TextBox 9"/>
+          <p:cNvSpPr txBox="1"/>
+          <p:nvPr/>
+        </p:nvSpPr>
+        <p:spPr>
+          <a:xfrm>
+            <a:off x="6377940" y="2971800"/>
+            <a:ext cx="4777740" cy="548640"/>
+          </a:xfrm>
+          <a:prstGeom prst="rect">
+            <a:avLst/>
+          </a:prstGeom>
+          <a:noFill/>
+        </p:spPr>
+        <p:txBody>
+          <a:bodyPr wrap="square" anchor="t">
+            <a:spAutoFit/>
+          </a:bodyPr>
+          <a:lstStyle/>
+          <a:p>
+            <a:pPr algn="l"/>
+            <a:r>
+              <a:rPr sz="1250" b="0">
+                <a:solidFill>
+                  <a:srgbClr val="64748B"/>
+                </a:solidFill>
+                <a:latin typeface="Noto Sans CJK SC"/>
+                <a:ea typeface="Noto Sans CJK SC"/>
+                <a:cs typeface="Noto Sans CJK SC"/>
+              </a:rPr>
+              <a:t>确定性退回风险规则引擎(可解释、可复现) + DeepSeek 作为补充语义信号层。</a:t>
+            </a:r>
+          </a:p>
+        </p:txBody>
+      </p:sp>
+      <p:sp>
+        <p:nvSpPr>
+          <p:cNvPr id="11" name="Rounded Rectangle 10"/>
+          <p:cNvSpPr/>
+          <p:nvPr/>
+        </p:nvSpPr>
+        <p:spPr>
+          <a:xfrm>
+            <a:off x="822960" y="3840480"/>
+            <a:ext cx="5143500" cy="1143000"/>
+          </a:xfrm>
+          <a:prstGeom prst="roundRect">
+            <a:avLst/>
+          </a:prstGeom>
+          <a:solidFill>
+            <a:srgbClr val="F1F5F9"/>
+          </a:solidFill>
+          <a:ln>
+            <a:noFill/>
+          </a:ln>
+          <a:effectLst/>
+        </p:spPr>
+        <p:style>
+          <a:lnRef idx="1">
+            <a:schemeClr val="accent1"/>
+          </a:lnRef>
+          <a:fillRef idx="3">
+            <a:schemeClr val="accent1"/>
+          </a:fillRef>
+          <a:effectRef idx="2">
+            <a:schemeClr val="accent1"/>
+          </a:effectRef>
+          <a:fontRef idx="minor">
+            <a:schemeClr val="lt1"/>
+          </a:fontRef>
+        </p:style>
+        <p:txBody>
+          <a:bodyPr rtlCol="0" anchor="ctr"/>
+          <a:lstStyle/>
+          <a:p>
+            <a:pPr algn="ctr"/>
+          </a:p>
+        </p:txBody>
+      </p:sp>
+      <p:sp>
+        <p:nvSpPr>
+          <p:cNvPr id="12" name="TextBox 11"/>
+          <p:cNvSpPr txBox="1"/>
+          <p:nvPr/>
+        </p:nvSpPr>
+        <p:spPr>
+          <a:xfrm>
+            <a:off x="1005840" y="3950208"/>
+            <a:ext cx="4777740" cy="365760"/>
+          </a:xfrm>
+          <a:prstGeom prst="rect">
+            <a:avLst/>
+          </a:prstGeom>
+          <a:noFill/>
+        </p:spPr>
+        <p:txBody>
+          <a:bodyPr wrap="square" anchor="t">
+            <a:spAutoFit/>
+          </a:bodyPr>
+          <a:lstStyle/>
+          <a:p>
+            <a:pPr algn="l"/>
+            <a:r>
+              <a:rPr sz="1600" b="1">
+                <a:solidFill>
+                  <a:srgbClr val="0F172A"/>
+                </a:solidFill>
+                <a:latin typeface="Noto Sans CJK SC"/>
+                <a:ea typeface="Noto Sans CJK SC"/>
+                <a:cs typeface="Noto Sans CJK SC"/>
+              </a:rPr>
+              <a:t>数据与流转</a:t>
+            </a:r>
+          </a:p>
+        </p:txBody>
+      </p:sp>
+      <p:sp>
+        <p:nvSpPr>
+          <p:cNvPr id="13" name="TextBox 12"/>
+          <p:cNvSpPr txBox="1"/>
+          <p:nvPr/>
+        </p:nvSpPr>
+        <p:spPr>
+          <a:xfrm>
+            <a:off x="1005840" y="4343400"/>
+            <a:ext cx="4777740" cy="548640"/>
+          </a:xfrm>
+          <a:prstGeom prst="rect">
+            <a:avLst/>
+          </a:prstGeom>
+          <a:noFill/>
+        </p:spPr>
+        <p:txBody>
+          <a:bodyPr wrap="square" anchor="t">
+            <a:spAutoFit/>
+          </a:bodyPr>
+          <a:lstStyle/>
+          <a:p>
+            <a:pPr algn="l"/>
+            <a:r>
+              <a:rPr sz="1250" b="0">
+                <a:solidFill>
+                  <a:srgbClr val="64748B"/>
+                </a:solidFill>
+                <a:latin typeface="Noto Sans CJK SC"/>
+                <a:ea typeface="Noto Sans CJK SC"/>
+                <a:cs typeface="Noto Sans CJK SC"/>
+              </a:rPr>
+              <a:t>付款指令/收款人台账/工单/到账确认/对账 全链路数据模型。</a:t>
+            </a:r>
+          </a:p>
+        </p:txBody>
+      </p:sp>
+      <p:sp>
+        <p:nvSpPr>
+          <p:cNvPr id="14" name="Rounded Rectangle 13"/>
+          <p:cNvSpPr/>
+          <p:nvPr/>
+        </p:nvSpPr>
+        <p:spPr>
+          <a:xfrm>
+            <a:off x="6195060" y="3840480"/>
+            <a:ext cx="5143500" cy="1143000"/>
+          </a:xfrm>
+          <a:prstGeom prst="roundRect">
+            <a:avLst/>
+          </a:prstGeom>
+          <a:solidFill>
+            <a:srgbClr val="F1F5F9"/>
+          </a:solidFill>
+          <a:ln>
+            <a:noFill/>
+          </a:ln>
+          <a:effectLst/>
+        </p:spPr>
+        <p:style>
+          <a:lnRef idx="1">
+            <a:schemeClr val="accent1"/>
+          </a:lnRef>
+          <a:fillRef idx="3">
+            <a:schemeClr val="accent1"/>
+          </a:fillRef>
+          <a:effectRef idx="2">
+            <a:schemeClr val="accent1"/>
+          </a:effectRef>
+          <a:fontRef idx="minor">
+            <a:schemeClr val="lt1"/>
+          </a:fontRef>
+        </p:style>
+        <p:txBody>
+          <a:bodyPr rtlCol="0" anchor="ctr"/>
+          <a:lstStyle/>
+          <a:p>
+            <a:pPr algn="ctr"/>
+          </a:p>
+        </p:txBody>
+      </p:sp>
+      <p:sp>
+        <p:nvSpPr>
+          <p:cNvPr id="15" name="TextBox 14"/>
+          <p:cNvSpPr txBox="1"/>
+          <p:nvPr/>
+        </p:nvSpPr>
+        <p:spPr>
+          <a:xfrm>
+            <a:off x="6377940" y="3950208"/>
+            <a:ext cx="4777740" cy="365760"/>
+          </a:xfrm>
+          <a:prstGeom prst="rect">
+            <a:avLst/>
+          </a:prstGeom>
+          <a:noFill/>
+        </p:spPr>
+        <p:txBody>
+          <a:bodyPr wrap="square" anchor="t">
+            <a:spAutoFit/>
+          </a:bodyPr>
+          <a:lstStyle/>
+          <a:p>
+            <a:pPr algn="l"/>
+            <a:r>
+              <a:rPr sz="1600" b="1">
+                <a:solidFill>
+                  <a:srgbClr val="0F172A"/>
+                </a:solidFill>
+                <a:latin typeface="Noto Sans CJK SC"/>
+                <a:ea typeface="Noto Sans CJK SC"/>
+                <a:cs typeface="Noto Sans CJK SC"/>
+              </a:rPr>
+              <a:t>工程质量</a:t>
+            </a:r>
+          </a:p>
+        </p:txBody>
+      </p:sp>
+      <p:sp>
+        <p:nvSpPr>
+          <p:cNvPr id="16" name="TextBox 15"/>
+          <p:cNvSpPr txBox="1"/>
+          <p:nvPr/>
+        </p:nvSpPr>
+        <p:spPr>
+          <a:xfrm>
+            <a:off x="6377940" y="4343400"/>
+            <a:ext cx="4777740" cy="548640"/>
+          </a:xfrm>
+          <a:prstGeom prst="rect">
+            <a:avLst/>
+          </a:prstGeom>
+          <a:noFill/>
+        </p:spPr>
+        <p:txBody>
+          <a:bodyPr wrap="square" anchor="t">
+            <a:spAutoFit/>
+          </a:bodyPr>
+          <a:lstStyle/>
+          <a:p>
+            <a:pPr algn="l"/>
+            <a:r>
+              <a:rPr sz="1250" b="0">
+                <a:solidFill>
+                  <a:srgbClr val="64748B"/>
+                </a:solidFill>
+                <a:latin typeface="Noto Sans CJK SC"/>
+                <a:ea typeface="Noto Sans CJK SC"/>
+                <a:cs typeface="Noto Sans CJK SC"/>
+              </a:rPr>
+              <a:t>全站 TypeScript 0 error、双语键 386/386 对齐、关键路由端到端可跑。</a:t>
+            </a:r>
+          </a:p>
+        </p:txBody>
+      </p:sp>
+    </p:spTree>
+  </p:cSld>
+  <p:clrMapOvr>
+    <a:masterClrMapping/>
+  </p:clrMapOvr>
+</p:sld>
+</file>
+
+<file path=ppt/slides/slide12.xml><?xml version="1.0" encoding="utf-8"?>
 <p:sld xmlns:a="http://schemas.openxmlformats.org/drawingml/2006/main" xmlns:p="http://schemas.openxmlformats.org/presentationml/2006/main" xmlns:r="http://schemas.openxmlformats.org/officeDocument/2006/relationships">
   <p:cSld>
     <p:bg>
@@ -4518,7 +4717,7 @@
 </p:sld>
 </file>
 
-<file path=ppt/slides/slide12.xml><?xml version="1.0" encoding="utf-8"?>
+<file path=ppt/slides/slide13.xml><?xml version="1.0" encoding="utf-8"?>
 <p:sld xmlns:a="http://schemas.openxmlformats.org/drawingml/2006/main" xmlns:p="http://schemas.openxmlformats.org/presentationml/2006/main" xmlns:r="http://schemas.openxmlformats.org/officeDocument/2006/relationships">
   <p:cSld>
     <p:bg>
@@ -5133,7 +5332,7 @@
                 <a:ea typeface="Noto Sans CJK SC"/>
                 <a:cs typeface="Noto Sans CJK SC"/>
               </a:rPr>
-              <a:t>今天用 5 分钟讲清 10 件事</a:t>
+              <a:t>今天用 5 分钟讲清 11 件事</a:t>
             </a:r>
           </a:p>
         </p:txBody>
@@ -5841,7 +6040,7 @@
                 <a:ea typeface="Noto Sans CJK SC"/>
                 <a:cs typeface="Noto Sans CJK SC"/>
               </a:rPr>
-              <a:t>AI 覆盖一览：四痛点→四能力</a:t>
+              <a:t>核心功能④：里程碑条件结算工作台</a:t>
             </a:r>
           </a:p>
         </p:txBody>
@@ -5959,7 +6158,7 @@
                 <a:ea typeface="Noto Sans CJK SC"/>
                 <a:cs typeface="Noto Sans CJK SC"/>
               </a:rPr>
-              <a:t>现场 Demo：你能看到什么</a:t>
+              <a:t>AI 覆盖一览：四痛点→四能力</a:t>
             </a:r>
           </a:p>
         </p:txBody>
@@ -6077,7 +6276,7 @@
                 <a:ea typeface="Noto Sans CJK SC"/>
                 <a:cs typeface="Noto Sans CJK SC"/>
               </a:rPr>
-              <a:t>技术架构：怎么实现的</a:t>
+              <a:t>现场 Demo：你能看到什么</a:t>
             </a:r>
           </a:p>
         </p:txBody>
@@ -6195,7 +6394,7 @@
                 <a:ea typeface="Noto Sans CJK SC"/>
                 <a:cs typeface="Noto Sans CJK SC"/>
               </a:rPr>
-              <a:t>合规边界：我们不碰什么（关键）</a:t>
+              <a:t>技术架构：怎么实现的</a:t>
             </a:r>
           </a:p>
         </p:txBody>
@@ -6290,6 +6489,124 @@
         <p:spPr>
           <a:xfrm>
             <a:off x="1463040" y="6217920"/>
+            <a:ext cx="2651760" cy="731520"/>
+          </a:xfrm>
+          <a:prstGeom prst="rect">
+            <a:avLst/>
+          </a:prstGeom>
+          <a:noFill/>
+        </p:spPr>
+        <p:txBody>
+          <a:bodyPr wrap="square" anchor="t">
+            <a:spAutoFit/>
+          </a:bodyPr>
+          <a:lstStyle/>
+          <a:p>
+            <a:pPr algn="l"/>
+            <a:r>
+              <a:rPr sz="1300" b="1">
+                <a:solidFill>
+                  <a:srgbClr val="0F172A"/>
+                </a:solidFill>
+                <a:latin typeface="Noto Sans CJK SC"/>
+                <a:ea typeface="Noto Sans CJK SC"/>
+                <a:cs typeface="Noto Sans CJK SC"/>
+              </a:rPr>
+              <a:t>合规边界：我们不碰什么（关键）</a:t>
+            </a:r>
+          </a:p>
+        </p:txBody>
+      </p:sp>
+      <p:sp>
+        <p:nvSpPr>
+          <p:cNvPr id="34" name="Rounded Rectangle 33"/>
+          <p:cNvSpPr/>
+          <p:nvPr/>
+        </p:nvSpPr>
+        <p:spPr>
+          <a:xfrm>
+            <a:off x="4434840" y="6035040"/>
+            <a:ext cx="3429000" cy="1051560"/>
+          </a:xfrm>
+          <a:prstGeom prst="roundRect">
+            <a:avLst/>
+          </a:prstGeom>
+          <a:solidFill>
+            <a:srgbClr val="F1F5F9"/>
+          </a:solidFill>
+          <a:ln>
+            <a:noFill/>
+          </a:ln>
+          <a:effectLst/>
+        </p:spPr>
+        <p:style>
+          <a:lnRef idx="1">
+            <a:schemeClr val="accent1"/>
+          </a:lnRef>
+          <a:fillRef idx="3">
+            <a:schemeClr val="accent1"/>
+          </a:fillRef>
+          <a:effectRef idx="2">
+            <a:schemeClr val="accent1"/>
+          </a:effectRef>
+          <a:fontRef idx="minor">
+            <a:schemeClr val="lt1"/>
+          </a:fontRef>
+        </p:style>
+        <p:txBody>
+          <a:bodyPr rtlCol="0" anchor="ctr"/>
+          <a:lstStyle/>
+          <a:p>
+            <a:pPr algn="ctr"/>
+          </a:p>
+        </p:txBody>
+      </p:sp>
+      <p:sp>
+        <p:nvSpPr>
+          <p:cNvPr id="35" name="TextBox 34"/>
+          <p:cNvSpPr txBox="1"/>
+          <p:nvPr/>
+        </p:nvSpPr>
+        <p:spPr>
+          <a:xfrm>
+            <a:off x="4572000" y="6144768"/>
+            <a:ext cx="457200" cy="457200"/>
+          </a:xfrm>
+          <a:prstGeom prst="rect">
+            <a:avLst/>
+          </a:prstGeom>
+          <a:noFill/>
+        </p:spPr>
+        <p:txBody>
+          <a:bodyPr wrap="square" anchor="t">
+            <a:spAutoFit/>
+          </a:bodyPr>
+          <a:lstStyle/>
+          <a:p>
+            <a:pPr algn="l"/>
+            <a:r>
+              <a:rPr sz="1800" b="1">
+                <a:solidFill>
+                  <a:srgbClr val="0F766E"/>
+                </a:solidFill>
+                <a:latin typeface="Noto Sans CJK SC"/>
+                <a:ea typeface="Noto Sans CJK SC"/>
+                <a:cs typeface="Noto Sans CJK SC"/>
+              </a:rPr>
+              <a:t>11</a:t>
+            </a:r>
+          </a:p>
+        </p:txBody>
+      </p:sp>
+      <p:sp>
+        <p:nvSpPr>
+          <p:cNvPr id="36" name="TextBox 35"/>
+          <p:cNvSpPr txBox="1"/>
+          <p:nvPr/>
+        </p:nvSpPr>
+        <p:spPr>
+          <a:xfrm>
+            <a:off x="5074920" y="6217920"/>
             <a:ext cx="2651760" cy="731520"/>
           </a:xfrm>
           <a:prstGeom prst="rect">
@@ -7660,7 +7977,7 @@
           <a:p>
             <a:pPr algn="l"/>
             <a:r>
-              <a:rPr sz="3600" b="1">
+              <a:rPr sz="3000" b="1">
                 <a:solidFill>
                   <a:srgbClr val="0F172A"/>
                 </a:solidFill>
@@ -7681,23 +7998,23 @@
         </p:nvSpPr>
         <p:spPr>
           <a:xfrm>
-            <a:off x="822960" y="1783080"/>
-            <a:ext cx="10515600" cy="731520"/>
-          </a:xfrm>
-          <a:prstGeom prst="rect">
-            <a:avLst/>
-          </a:prstGeom>
-          <a:noFill/>
-        </p:spPr>
-        <p:txBody>
-          <a:bodyPr wrap="square" anchor="t">
-            <a:spAutoFit/>
-          </a:bodyPr>
-          <a:lstStyle/>
-          <a:p>
-            <a:pPr algn="l"/>
-            <a:r>
-              <a:rPr sz="1600" b="0">
+            <a:off x="822960" y="1554480"/>
+            <a:ext cx="7040880" cy="640080"/>
+          </a:xfrm>
+          <a:prstGeom prst="rect">
+            <a:avLst/>
+          </a:prstGeom>
+          <a:noFill/>
+        </p:spPr>
+        <p:txBody>
+          <a:bodyPr wrap="square" anchor="t">
+            <a:spAutoFit/>
+          </a:bodyPr>
+          <a:lstStyle/>
+          <a:p>
+            <a:pPr algn="l"/>
+            <a:r>
+              <a:rPr sz="1400" b="0">
                 <a:solidFill>
                   <a:srgbClr val="64748B"/>
                 </a:solidFill>
@@ -7718,8 +8035,8 @@
         </p:nvSpPr>
         <p:spPr>
           <a:xfrm>
-            <a:off x="822960" y="2468880"/>
-            <a:ext cx="5143500" cy="1143000"/>
+            <a:off x="822960" y="2377440"/>
+            <a:ext cx="7040880" cy="932688"/>
           </a:xfrm>
           <a:prstGeom prst="roundRect">
             <a:avLst/>
@@ -7762,23 +8079,23 @@
         </p:nvSpPr>
         <p:spPr>
           <a:xfrm>
-            <a:off x="1005840" y="2578608"/>
-            <a:ext cx="4777740" cy="365760"/>
-          </a:xfrm>
-          <a:prstGeom prst="rect">
-            <a:avLst/>
-          </a:prstGeom>
-          <a:noFill/>
-        </p:spPr>
-        <p:txBody>
-          <a:bodyPr wrap="square" anchor="t">
-            <a:spAutoFit/>
-          </a:bodyPr>
-          <a:lstStyle/>
-          <a:p>
-            <a:pPr algn="l"/>
-            <a:r>
-              <a:rPr sz="1600" b="1">
+            <a:off x="1005840" y="2487168"/>
+            <a:ext cx="6675120" cy="365760"/>
+          </a:xfrm>
+          <a:prstGeom prst="rect">
+            <a:avLst/>
+          </a:prstGeom>
+          <a:noFill/>
+        </p:spPr>
+        <p:txBody>
+          <a:bodyPr wrap="square" anchor="t">
+            <a:spAutoFit/>
+          </a:bodyPr>
+          <a:lstStyle/>
+          <a:p>
+            <a:pPr algn="l"/>
+            <a:r>
+              <a:rPr sz="1500" b="1">
                 <a:solidFill>
                   <a:srgbClr val="0F172A"/>
                 </a:solidFill>
@@ -7786,7 +8103,7 @@
                 <a:ea typeface="Noto Sans CJK SC"/>
                 <a:cs typeface="Noto Sans CJK SC"/>
               </a:rPr>
-              <a:t>先拦截，而非先失败</a:t>
+              <a:t>1. 先拦截，而非先失败</a:t>
             </a:r>
           </a:p>
         </p:txBody>
@@ -7799,23 +8116,23 @@
         </p:nvSpPr>
         <p:spPr>
           <a:xfrm>
-            <a:off x="1005840" y="2971800"/>
-            <a:ext cx="4777740" cy="548640"/>
-          </a:xfrm>
-          <a:prstGeom prst="rect">
-            <a:avLst/>
-          </a:prstGeom>
-          <a:noFill/>
-        </p:spPr>
-        <p:txBody>
-          <a:bodyPr wrap="square" anchor="t">
-            <a:spAutoFit/>
-          </a:bodyPr>
-          <a:lstStyle/>
-          <a:p>
-            <a:pPr algn="l"/>
-            <a:r>
-              <a:rPr sz="1250" b="0">
+            <a:off x="1005840" y="2834640"/>
+            <a:ext cx="6675120" cy="457200"/>
+          </a:xfrm>
+          <a:prstGeom prst="rect">
+            <a:avLst/>
+          </a:prstGeom>
+          <a:noFill/>
+        </p:spPr>
+        <p:txBody>
+          <a:bodyPr wrap="square" anchor="t">
+            <a:spAutoFit/>
+          </a:bodyPr>
+          <a:lstStyle/>
+          <a:p>
+            <a:pPr algn="l"/>
+            <a:r>
+              <a:rPr sz="1150" b="0">
                 <a:solidFill>
                   <a:srgbClr val="64748B"/>
                 </a:solidFill>
@@ -7836,8 +8153,8 @@
         </p:nvSpPr>
         <p:spPr>
           <a:xfrm>
-            <a:off x="6195060" y="2468880"/>
-            <a:ext cx="5143500" cy="1143000"/>
+            <a:off x="822960" y="3474720"/>
+            <a:ext cx="7040880" cy="932688"/>
           </a:xfrm>
           <a:prstGeom prst="roundRect">
             <a:avLst/>
@@ -7880,23 +8197,23 @@
         </p:nvSpPr>
         <p:spPr>
           <a:xfrm>
-            <a:off x="6377940" y="2578608"/>
-            <a:ext cx="4777740" cy="365760"/>
-          </a:xfrm>
-          <a:prstGeom prst="rect">
-            <a:avLst/>
-          </a:prstGeom>
-          <a:noFill/>
-        </p:spPr>
-        <p:txBody>
-          <a:bodyPr wrap="square" anchor="t">
-            <a:spAutoFit/>
-          </a:bodyPr>
-          <a:lstStyle/>
-          <a:p>
-            <a:pPr algn="l"/>
-            <a:r>
-              <a:rPr sz="1600" b="1">
+            <a:off x="1005840" y="3584448"/>
+            <a:ext cx="6675120" cy="365760"/>
+          </a:xfrm>
+          <a:prstGeom prst="rect">
+            <a:avLst/>
+          </a:prstGeom>
+          <a:noFill/>
+        </p:spPr>
+        <p:txBody>
+          <a:bodyPr wrap="square" anchor="t">
+            <a:spAutoFit/>
+          </a:bodyPr>
+          <a:lstStyle/>
+          <a:p>
+            <a:pPr algn="l"/>
+            <a:r>
+              <a:rPr sz="1500" b="1">
                 <a:solidFill>
                   <a:srgbClr val="0F172A"/>
                 </a:solidFill>
@@ -7904,7 +8221,7 @@
                 <a:ea typeface="Noto Sans CJK SC"/>
                 <a:cs typeface="Noto Sans CJK SC"/>
               </a:rPr>
-              <a:t>可解释</a:t>
+              <a:t>2. 可解释</a:t>
             </a:r>
           </a:p>
         </p:txBody>
@@ -7917,23 +8234,23 @@
         </p:nvSpPr>
         <p:spPr>
           <a:xfrm>
-            <a:off x="6377940" y="2971800"/>
-            <a:ext cx="4777740" cy="548640"/>
-          </a:xfrm>
-          <a:prstGeom prst="rect">
-            <a:avLst/>
-          </a:prstGeom>
-          <a:noFill/>
-        </p:spPr>
-        <p:txBody>
-          <a:bodyPr wrap="square" anchor="t">
-            <a:spAutoFit/>
-          </a:bodyPr>
-          <a:lstStyle/>
-          <a:p>
-            <a:pPr algn="l"/>
-            <a:r>
-              <a:rPr sz="1250" b="0">
+            <a:off x="1005840" y="3931920"/>
+            <a:ext cx="6675120" cy="457200"/>
+          </a:xfrm>
+          <a:prstGeom prst="rect">
+            <a:avLst/>
+          </a:prstGeom>
+          <a:noFill/>
+        </p:spPr>
+        <p:txBody>
+          <a:bodyPr wrap="square" anchor="t">
+            <a:spAutoFit/>
+          </a:bodyPr>
+          <a:lstStyle/>
+          <a:p>
+            <a:pPr algn="l"/>
+            <a:r>
+              <a:rPr sz="1150" b="0">
                 <a:solidFill>
                   <a:srgbClr val="64748B"/>
                 </a:solidFill>
@@ -7954,8 +8271,8 @@
         </p:nvSpPr>
         <p:spPr>
           <a:xfrm>
-            <a:off x="822960" y="3840480"/>
-            <a:ext cx="5143500" cy="1143000"/>
+            <a:off x="822960" y="4572000"/>
+            <a:ext cx="7040880" cy="932688"/>
           </a:xfrm>
           <a:prstGeom prst="roundRect">
             <a:avLst/>
@@ -7998,23 +8315,23 @@
         </p:nvSpPr>
         <p:spPr>
           <a:xfrm>
-            <a:off x="1005840" y="3950208"/>
-            <a:ext cx="4777740" cy="365760"/>
-          </a:xfrm>
-          <a:prstGeom prst="rect">
-            <a:avLst/>
-          </a:prstGeom>
-          <a:noFill/>
-        </p:spPr>
-        <p:txBody>
-          <a:bodyPr wrap="square" anchor="t">
-            <a:spAutoFit/>
-          </a:bodyPr>
-          <a:lstStyle/>
-          <a:p>
-            <a:pPr algn="l"/>
-            <a:r>
-              <a:rPr sz="1600" b="1">
+            <a:off x="1005840" y="4681728"/>
+            <a:ext cx="6675120" cy="365760"/>
+          </a:xfrm>
+          <a:prstGeom prst="rect">
+            <a:avLst/>
+          </a:prstGeom>
+          <a:noFill/>
+        </p:spPr>
+        <p:txBody>
+          <a:bodyPr wrap="square" anchor="t">
+            <a:spAutoFit/>
+          </a:bodyPr>
+          <a:lstStyle/>
+          <a:p>
+            <a:pPr algn="l"/>
+            <a:r>
+              <a:rPr sz="1500" b="1">
                 <a:solidFill>
                   <a:srgbClr val="0F172A"/>
                 </a:solidFill>
@@ -8022,7 +8339,7 @@
                 <a:ea typeface="Noto Sans CJK SC"/>
                 <a:cs typeface="Noto Sans CJK SC"/>
               </a:rPr>
-              <a:t>一键转核实</a:t>
+              <a:t>3. 一键转核实</a:t>
             </a:r>
           </a:p>
         </p:txBody>
@@ -8035,23 +8352,23 @@
         </p:nvSpPr>
         <p:spPr>
           <a:xfrm>
-            <a:off x="1005840" y="4343400"/>
-            <a:ext cx="4777740" cy="548640"/>
-          </a:xfrm>
-          <a:prstGeom prst="rect">
-            <a:avLst/>
-          </a:prstGeom>
-          <a:noFill/>
-        </p:spPr>
-        <p:txBody>
-          <a:bodyPr wrap="square" anchor="t">
-            <a:spAutoFit/>
-          </a:bodyPr>
-          <a:lstStyle/>
-          <a:p>
-            <a:pPr algn="l"/>
-            <a:r>
-              <a:rPr sz="1250" b="0">
+            <a:off x="1005840" y="5029200"/>
+            <a:ext cx="6675120" cy="457200"/>
+          </a:xfrm>
+          <a:prstGeom prst="rect">
+            <a:avLst/>
+          </a:prstGeom>
+          <a:noFill/>
+        </p:spPr>
+        <p:txBody>
+          <a:bodyPr wrap="square" anchor="t">
+            <a:spAutoFit/>
+          </a:bodyPr>
+          <a:lstStyle/>
+          <a:p>
+            <a:pPr algn="l"/>
+            <a:r>
+              <a:rPr sz="1150" b="0">
                 <a:solidFill>
                   <a:srgbClr val="64748B"/>
                 </a:solidFill>
@@ -8072,8 +8389,8 @@
         </p:nvSpPr>
         <p:spPr>
           <a:xfrm>
-            <a:off x="6195060" y="3840480"/>
-            <a:ext cx="5143500" cy="1143000"/>
+            <a:off x="822960" y="5669279"/>
+            <a:ext cx="7040880" cy="932688"/>
           </a:xfrm>
           <a:prstGeom prst="roundRect">
             <a:avLst/>
@@ -8116,23 +8433,23 @@
         </p:nvSpPr>
         <p:spPr>
           <a:xfrm>
-            <a:off x="6377940" y="3950208"/>
-            <a:ext cx="4777740" cy="365760"/>
-          </a:xfrm>
-          <a:prstGeom prst="rect">
-            <a:avLst/>
-          </a:prstGeom>
-          <a:noFill/>
-        </p:spPr>
-        <p:txBody>
-          <a:bodyPr wrap="square" anchor="t">
-            <a:spAutoFit/>
-          </a:bodyPr>
-          <a:lstStyle/>
-          <a:p>
-            <a:pPr algn="l"/>
-            <a:r>
-              <a:rPr sz="1600" b="1">
+            <a:off x="1005840" y="5779007"/>
+            <a:ext cx="6675120" cy="365760"/>
+          </a:xfrm>
+          <a:prstGeom prst="rect">
+            <a:avLst/>
+          </a:prstGeom>
+          <a:noFill/>
+        </p:spPr>
+        <p:txBody>
+          <a:bodyPr wrap="square" anchor="t">
+            <a:spAutoFit/>
+          </a:bodyPr>
+          <a:lstStyle/>
+          <a:p>
+            <a:pPr algn="l"/>
+            <a:r>
+              <a:rPr sz="1500" b="1">
                 <a:solidFill>
                   <a:srgbClr val="0F172A"/>
                 </a:solidFill>
@@ -8140,7 +8457,7 @@
                 <a:ea typeface="Noto Sans CJK SC"/>
                 <a:cs typeface="Noto Sans CJK SC"/>
               </a:rPr>
-              <a:t>为高风险把关</a:t>
+              <a:t>4. 为高风险把关</a:t>
             </a:r>
           </a:p>
         </p:txBody>
@@ -8153,23 +8470,23 @@
         </p:nvSpPr>
         <p:spPr>
           <a:xfrm>
-            <a:off x="6377940" y="4343400"/>
-            <a:ext cx="4777740" cy="548640"/>
-          </a:xfrm>
-          <a:prstGeom prst="rect">
-            <a:avLst/>
-          </a:prstGeom>
-          <a:noFill/>
-        </p:spPr>
-        <p:txBody>
-          <a:bodyPr wrap="square" anchor="t">
-            <a:spAutoFit/>
-          </a:bodyPr>
-          <a:lstStyle/>
-          <a:p>
-            <a:pPr algn="l"/>
-            <a:r>
-              <a:rPr sz="1250" b="0">
+            <a:off x="1005840" y="6126479"/>
+            <a:ext cx="6675120" cy="457200"/>
+          </a:xfrm>
+          <a:prstGeom prst="rect">
+            <a:avLst/>
+          </a:prstGeom>
+          <a:noFill/>
+        </p:spPr>
+        <p:txBody>
+          <a:bodyPr wrap="square" anchor="t">
+            <a:spAutoFit/>
+          </a:bodyPr>
+          <a:lstStyle/>
+          <a:p>
+            <a:pPr algn="l"/>
+            <a:r>
+              <a:rPr sz="1150" b="0">
                 <a:solidFill>
                   <a:srgbClr val="64748B"/>
                 </a:solidFill>
@@ -8178,6 +8495,111 @@
                 <a:cs typeface="Noto Sans CJK SC"/>
               </a:rPr>
               <a:t>超大额、受限地区、休眠账户等自动进入高风险通道。</a:t>
+            </a:r>
+          </a:p>
+        </p:txBody>
+      </p:sp>
+      <p:sp>
+        <p:nvSpPr>
+          <p:cNvPr id="17" name="Rounded Rectangle 16"/>
+          <p:cNvSpPr/>
+          <p:nvPr/>
+        </p:nvSpPr>
+        <p:spPr>
+          <a:xfrm>
+            <a:off x="8138160" y="1508760"/>
+            <a:ext cx="3246120" cy="4937760"/>
+          </a:xfrm>
+          <a:prstGeom prst="roundRect">
+            <a:avLst/>
+          </a:prstGeom>
+          <a:solidFill>
+            <a:srgbClr val="F1F5F9"/>
+          </a:solidFill>
+          <a:ln>
+            <a:noFill/>
+          </a:ln>
+          <a:effectLst/>
+        </p:spPr>
+        <p:style>
+          <a:lnRef idx="1">
+            <a:schemeClr val="accent1"/>
+          </a:lnRef>
+          <a:fillRef idx="3">
+            <a:schemeClr val="accent1"/>
+          </a:fillRef>
+          <a:effectRef idx="2">
+            <a:schemeClr val="accent1"/>
+          </a:effectRef>
+          <a:fontRef idx="minor">
+            <a:schemeClr val="lt1"/>
+          </a:fontRef>
+        </p:style>
+        <p:txBody>
+          <a:bodyPr rtlCol="0" anchor="ctr"/>
+          <a:lstStyle/>
+          <a:p>
+            <a:pPr algn="ctr"/>
+          </a:p>
+        </p:txBody>
+      </p:sp>
+      <p:pic>
+        <p:nvPicPr>
+          <p:cNvPr id="18" name="Picture 17" descr="feat-precheck.png"/>
+          <p:cNvPicPr>
+            <a:picLocks noChangeAspect="1"/>
+          </p:cNvPicPr>
+          <p:nvPr/>
+        </p:nvPicPr>
+        <p:blipFill>
+          <a:blip r:embed="rId2"/>
+          <a:stretch>
+            <a:fillRect/>
+          </a:stretch>
+        </p:blipFill>
+        <p:spPr>
+          <a:xfrm>
+            <a:off x="8275320" y="1645920"/>
+            <a:ext cx="3544214" cy="4663440"/>
+          </a:xfrm>
+          <a:prstGeom prst="rect">
+            <a:avLst/>
+          </a:prstGeom>
+        </p:spPr>
+      </p:pic>
+      <p:sp>
+        <p:nvSpPr>
+          <p:cNvPr id="19" name="TextBox 18"/>
+          <p:cNvSpPr txBox="1"/>
+          <p:nvPr/>
+        </p:nvSpPr>
+        <p:spPr>
+          <a:xfrm>
+            <a:off x="8138160" y="6510528"/>
+            <a:ext cx="3246120" cy="274320"/>
+          </a:xfrm>
+          <a:prstGeom prst="rect">
+            <a:avLst/>
+          </a:prstGeom>
+          <a:noFill/>
+        </p:spPr>
+        <p:txBody>
+          <a:bodyPr wrap="square" anchor="t">
+            <a:spAutoFit/>
+          </a:bodyPr>
+          <a:lstStyle/>
+          <a:p>
+            <a:pPr algn="ctr"/>
+            <a:r>
+              <a:rPr sz="900" b="0">
+                <a:solidFill>
+                  <a:srgbClr val="64748B"/>
+                </a:solidFill>
+                <a:latin typeface="Noto Sans CJK SC"/>
+                <a:ea typeface="Noto Sans CJK SC"/>
+                <a:cs typeface="Noto Sans CJK SC"/>
+              </a:rPr>
+              <a:t>产品界面（现场可实测）</a:t>
             </a:r>
           </a:p>
         </p:txBody>
@@ -8269,7 +8691,7 @@
           <a:p>
             <a:pPr algn="l"/>
             <a:r>
-              <a:rPr sz="3600" b="1">
+              <a:rPr sz="3000" b="1">
                 <a:solidFill>
                   <a:srgbClr val="0F172A"/>
                 </a:solidFill>
@@ -8290,23 +8712,23 @@
         </p:nvSpPr>
         <p:spPr>
           <a:xfrm>
-            <a:off x="822960" y="1783080"/>
-            <a:ext cx="10515600" cy="731520"/>
-          </a:xfrm>
-          <a:prstGeom prst="rect">
-            <a:avLst/>
-          </a:prstGeom>
-          <a:noFill/>
-        </p:spPr>
-        <p:txBody>
-          <a:bodyPr wrap="square" anchor="t">
-            <a:spAutoFit/>
-          </a:bodyPr>
-          <a:lstStyle/>
-          <a:p>
-            <a:pPr algn="l"/>
-            <a:r>
-              <a:rPr sz="1600" b="0">
+            <a:off x="822960" y="1554480"/>
+            <a:ext cx="7040880" cy="640080"/>
+          </a:xfrm>
+          <a:prstGeom prst="rect">
+            <a:avLst/>
+          </a:prstGeom>
+          <a:noFill/>
+        </p:spPr>
+        <p:txBody>
+          <a:bodyPr wrap="square" anchor="t">
+            <a:spAutoFit/>
+          </a:bodyPr>
+          <a:lstStyle/>
+          <a:p>
+            <a:pPr algn="l"/>
+            <a:r>
+              <a:rPr sz="1400" b="0">
                 <a:solidFill>
                   <a:srgbClr val="64748B"/>
                 </a:solidFill>
@@ -8327,8 +8749,8 @@
         </p:nvSpPr>
         <p:spPr>
           <a:xfrm>
-            <a:off x="822960" y="2468880"/>
-            <a:ext cx="5143500" cy="1143000"/>
+            <a:off x="822960" y="2377440"/>
+            <a:ext cx="7040880" cy="932688"/>
           </a:xfrm>
           <a:prstGeom prst="roundRect">
             <a:avLst/>
@@ -8371,23 +8793,23 @@
         </p:nvSpPr>
         <p:spPr>
           <a:xfrm>
-            <a:off x="1005840" y="2578608"/>
-            <a:ext cx="4777740" cy="365760"/>
-          </a:xfrm>
-          <a:prstGeom prst="rect">
-            <a:avLst/>
-          </a:prstGeom>
-          <a:noFill/>
-        </p:spPr>
-        <p:txBody>
-          <a:bodyPr wrap="square" anchor="t">
-            <a:spAutoFit/>
-          </a:bodyPr>
-          <a:lstStyle/>
-          <a:p>
-            <a:pPr algn="l"/>
-            <a:r>
-              <a:rPr sz="1600" b="1">
+            <a:off x="1005840" y="2487168"/>
+            <a:ext cx="6675120" cy="365760"/>
+          </a:xfrm>
+          <a:prstGeom prst="rect">
+            <a:avLst/>
+          </a:prstGeom>
+          <a:noFill/>
+        </p:spPr>
+        <p:txBody>
+          <a:bodyPr wrap="square" anchor="t">
+            <a:spAutoFit/>
+          </a:bodyPr>
+          <a:lstStyle/>
+          <a:p>
+            <a:pPr algn="l"/>
+            <a:r>
+              <a:rPr sz="1500" b="1">
                 <a:solidFill>
                   <a:srgbClr val="0F172A"/>
                 </a:solidFill>
@@ -8395,7 +8817,7 @@
                 <a:ea typeface="Noto Sans CJK SC"/>
                 <a:cs typeface="Noto Sans CJK SC"/>
               </a:rPr>
-              <a:t>抓规则抓不到的</a:t>
+              <a:t>1. 抓规则抓不到的</a:t>
             </a:r>
           </a:p>
         </p:txBody>
@@ -8408,23 +8830,23 @@
         </p:nvSpPr>
         <p:spPr>
           <a:xfrm>
-            <a:off x="1005840" y="2971800"/>
-            <a:ext cx="4777740" cy="548640"/>
-          </a:xfrm>
-          <a:prstGeom prst="rect">
-            <a:avLst/>
-          </a:prstGeom>
-          <a:noFill/>
-        </p:spPr>
-        <p:txBody>
-          <a:bodyPr wrap="square" anchor="t">
-            <a:spAutoFit/>
-          </a:bodyPr>
-          <a:lstStyle/>
-          <a:p>
-            <a:pPr algn="l"/>
-            <a:r>
-              <a:rPr sz="1250" b="0">
+            <a:off x="1005840" y="2834640"/>
+            <a:ext cx="6675120" cy="457200"/>
+          </a:xfrm>
+          <a:prstGeom prst="rect">
+            <a:avLst/>
+          </a:prstGeom>
+          <a:noFill/>
+        </p:spPr>
+        <p:txBody>
+          <a:bodyPr wrap="square" anchor="t">
+            <a:spAutoFit/>
+          </a:bodyPr>
+          <a:lstStyle/>
+          <a:p>
+            <a:pPr algn="l"/>
+            <a:r>
+              <a:rPr sz="1150" b="0">
                 <a:solidFill>
                   <a:srgbClr val="64748B"/>
                 </a:solidFill>
@@ -8445,8 +8867,8 @@
         </p:nvSpPr>
         <p:spPr>
           <a:xfrm>
-            <a:off x="6195060" y="2468880"/>
-            <a:ext cx="5143500" cy="1143000"/>
+            <a:off x="822960" y="3474720"/>
+            <a:ext cx="7040880" cy="932688"/>
           </a:xfrm>
           <a:prstGeom prst="roundRect">
             <a:avLst/>
@@ -8489,23 +8911,23 @@
         </p:nvSpPr>
         <p:spPr>
           <a:xfrm>
-            <a:off x="6377940" y="2578608"/>
-            <a:ext cx="4777740" cy="365760"/>
-          </a:xfrm>
-          <a:prstGeom prst="rect">
-            <a:avLst/>
-          </a:prstGeom>
-          <a:noFill/>
-        </p:spPr>
-        <p:txBody>
-          <a:bodyPr wrap="square" anchor="t">
-            <a:spAutoFit/>
-          </a:bodyPr>
-          <a:lstStyle/>
-          <a:p>
-            <a:pPr algn="l"/>
-            <a:r>
-              <a:rPr sz="1600" b="1">
+            <a:off x="1005840" y="3584448"/>
+            <a:ext cx="6675120" cy="365760"/>
+          </a:xfrm>
+          <a:prstGeom prst="rect">
+            <a:avLst/>
+          </a:prstGeom>
+          <a:noFill/>
+        </p:spPr>
+        <p:txBody>
+          <a:bodyPr wrap="square" anchor="t">
+            <a:spAutoFit/>
+          </a:bodyPr>
+          <a:lstStyle/>
+          <a:p>
+            <a:pPr algn="l"/>
+            <a:r>
+              <a:rPr sz="1500" b="1">
                 <a:solidFill>
                   <a:srgbClr val="0F172A"/>
                 </a:solidFill>
@@ -8513,7 +8935,7 @@
                 <a:ea typeface="Noto Sans CJK SC"/>
                 <a:cs typeface="Noto Sans CJK SC"/>
               </a:rPr>
-              <a:t>合规简报</a:t>
+              <a:t>2. 合规简报</a:t>
             </a:r>
           </a:p>
         </p:txBody>
@@ -8526,23 +8948,23 @@
         </p:nvSpPr>
         <p:spPr>
           <a:xfrm>
-            <a:off x="6377940" y="2971800"/>
-            <a:ext cx="4777740" cy="548640"/>
-          </a:xfrm>
-          <a:prstGeom prst="rect">
-            <a:avLst/>
-          </a:prstGeom>
-          <a:noFill/>
-        </p:spPr>
-        <p:txBody>
-          <a:bodyPr wrap="square" anchor="t">
-            <a:spAutoFit/>
-          </a:bodyPr>
-          <a:lstStyle/>
-          <a:p>
-            <a:pPr algn="l"/>
-            <a:r>
-              <a:rPr sz="1250" b="0">
+            <a:off x="1005840" y="3931920"/>
+            <a:ext cx="6675120" cy="457200"/>
+          </a:xfrm>
+          <a:prstGeom prst="rect">
+            <a:avLst/>
+          </a:prstGeom>
+          <a:noFill/>
+        </p:spPr>
+        <p:txBody>
+          <a:bodyPr wrap="square" anchor="t">
+            <a:spAutoFit/>
+          </a:bodyPr>
+          <a:lstStyle/>
+          <a:p>
+            <a:pPr algn="l"/>
+            <a:r>
+              <a:rPr sz="1150" b="0">
                 <a:solidFill>
                   <a:srgbClr val="64748B"/>
                 </a:solidFill>
@@ -8563,8 +8985,8 @@
         </p:nvSpPr>
         <p:spPr>
           <a:xfrm>
-            <a:off x="822960" y="3840480"/>
-            <a:ext cx="5143500" cy="1143000"/>
+            <a:off x="822960" y="4572000"/>
+            <a:ext cx="7040880" cy="932688"/>
           </a:xfrm>
           <a:prstGeom prst="roundRect">
             <a:avLst/>
@@ -8607,23 +9029,23 @@
         </p:nvSpPr>
         <p:spPr>
           <a:xfrm>
-            <a:off x="1005840" y="3950208"/>
-            <a:ext cx="4777740" cy="365760"/>
-          </a:xfrm>
-          <a:prstGeom prst="rect">
-            <a:avLst/>
-          </a:prstGeom>
-          <a:noFill/>
-        </p:spPr>
-        <p:txBody>
-          <a:bodyPr wrap="square" anchor="t">
-            <a:spAutoFit/>
-          </a:bodyPr>
-          <a:lstStyle/>
-          <a:p>
-            <a:pPr algn="l"/>
-            <a:r>
-              <a:rPr sz="1600" b="1">
+            <a:off x="1005840" y="4681728"/>
+            <a:ext cx="6675120" cy="365760"/>
+          </a:xfrm>
+          <a:prstGeom prst="rect">
+            <a:avLst/>
+          </a:prstGeom>
+          <a:noFill/>
+        </p:spPr>
+        <p:txBody>
+          <a:bodyPr wrap="square" anchor="t">
+            <a:spAutoFit/>
+          </a:bodyPr>
+          <a:lstStyle/>
+          <a:p>
+            <a:pPr algn="l"/>
+            <a:r>
+              <a:rPr sz="1500" b="1">
                 <a:solidFill>
                   <a:srgbClr val="0F172A"/>
                 </a:solidFill>
@@ -8631,7 +9053,7 @@
                 <a:ea typeface="Noto Sans CJK SC"/>
                 <a:cs typeface="Noto Sans CJK SC"/>
               </a:rPr>
-              <a:t>AI 起草核实消息</a:t>
+              <a:t>3. AI 起草核实消息</a:t>
             </a:r>
           </a:p>
         </p:txBody>
@@ -8644,23 +9066,23 @@
         </p:nvSpPr>
         <p:spPr>
           <a:xfrm>
-            <a:off x="1005840" y="4343400"/>
-            <a:ext cx="4777740" cy="548640"/>
-          </a:xfrm>
-          <a:prstGeom prst="rect">
-            <a:avLst/>
-          </a:prstGeom>
-          <a:noFill/>
-        </p:spPr>
-        <p:txBody>
-          <a:bodyPr wrap="square" anchor="t">
-            <a:spAutoFit/>
-          </a:bodyPr>
-          <a:lstStyle/>
-          <a:p>
-            <a:pPr algn="l"/>
-            <a:r>
-              <a:rPr sz="1250" b="0">
+            <a:off x="1005840" y="5029200"/>
+            <a:ext cx="6675120" cy="457200"/>
+          </a:xfrm>
+          <a:prstGeom prst="rect">
+            <a:avLst/>
+          </a:prstGeom>
+          <a:noFill/>
+        </p:spPr>
+        <p:txBody>
+          <a:bodyPr wrap="square" anchor="t">
+            <a:spAutoFit/>
+          </a:bodyPr>
+          <a:lstStyle/>
+          <a:p>
+            <a:pPr algn="l"/>
+            <a:r>
+              <a:rPr sz="1150" b="0">
                 <a:solidFill>
                   <a:srgbClr val="64748B"/>
                 </a:solidFill>
@@ -8681,8 +9103,8 @@
         </p:nvSpPr>
         <p:spPr>
           <a:xfrm>
-            <a:off x="6195060" y="3840480"/>
-            <a:ext cx="5143500" cy="1143000"/>
+            <a:off x="822960" y="5669279"/>
+            <a:ext cx="7040880" cy="932688"/>
           </a:xfrm>
           <a:prstGeom prst="roundRect">
             <a:avLst/>
@@ -8725,23 +9147,23 @@
         </p:nvSpPr>
         <p:spPr>
           <a:xfrm>
-            <a:off x="6377940" y="3950208"/>
-            <a:ext cx="4777740" cy="365760"/>
-          </a:xfrm>
-          <a:prstGeom prst="rect">
-            <a:avLst/>
-          </a:prstGeom>
-          <a:noFill/>
-        </p:spPr>
-        <p:txBody>
-          <a:bodyPr wrap="square" anchor="t">
-            <a:spAutoFit/>
-          </a:bodyPr>
-          <a:lstStyle/>
-          <a:p>
-            <a:pPr algn="l"/>
-            <a:r>
-              <a:rPr sz="1600" b="1">
+            <a:off x="1005840" y="5779007"/>
+            <a:ext cx="6675120" cy="365760"/>
+          </a:xfrm>
+          <a:prstGeom prst="rect">
+            <a:avLst/>
+          </a:prstGeom>
+          <a:noFill/>
+        </p:spPr>
+        <p:txBody>
+          <a:bodyPr wrap="square" anchor="t">
+            <a:spAutoFit/>
+          </a:bodyPr>
+          <a:lstStyle/>
+          <a:p>
+            <a:pPr algn="l"/>
+            <a:r>
+              <a:rPr sz="1500" b="1">
                 <a:solidFill>
                   <a:srgbClr val="0F172A"/>
                 </a:solidFill>
@@ -8749,7 +9171,7 @@
                 <a:ea typeface="Noto Sans CJK SC"/>
                 <a:cs typeface="Noto Sans CJK SC"/>
               </a:rPr>
-              <a:t>为什么必须有 AI</a:t>
+              <a:t>4. 为什么必须有 AI</a:t>
             </a:r>
           </a:p>
         </p:txBody>
@@ -8762,23 +9184,23 @@
         </p:nvSpPr>
         <p:spPr>
           <a:xfrm>
-            <a:off x="6377940" y="4343400"/>
-            <a:ext cx="4777740" cy="548640"/>
-          </a:xfrm>
-          <a:prstGeom prst="rect">
-            <a:avLst/>
-          </a:prstGeom>
-          <a:noFill/>
-        </p:spPr>
-        <p:txBody>
-          <a:bodyPr wrap="square" anchor="t">
-            <a:spAutoFit/>
-          </a:bodyPr>
-          <a:lstStyle/>
-          <a:p>
-            <a:pPr algn="l"/>
-            <a:r>
-              <a:rPr sz="1250" b="0">
+            <a:off x="1005840" y="6126479"/>
+            <a:ext cx="6675120" cy="457200"/>
+          </a:xfrm>
+          <a:prstGeom prst="rect">
+            <a:avLst/>
+          </a:prstGeom>
+          <a:noFill/>
+        </p:spPr>
+        <p:txBody>
+          <a:bodyPr wrap="square" anchor="t">
+            <a:spAutoFit/>
+          </a:bodyPr>
+          <a:lstStyle/>
+          <a:p>
+            <a:pPr algn="l"/>
+            <a:r>
+              <a:rPr sz="1150" b="0">
                 <a:solidFill>
                   <a:srgbClr val="64748B"/>
                 </a:solidFill>
@@ -8787,6 +9209,111 @@
                 <a:cs typeface="Noto Sans CJK SC"/>
               </a:rPr>
               <a:t>退回原因高度非结构化、随通道与国家变化；规则是骨架，AI 是识别隐藏风险的关键。</a:t>
+            </a:r>
+          </a:p>
+        </p:txBody>
+      </p:sp>
+      <p:sp>
+        <p:nvSpPr>
+          <p:cNvPr id="17" name="Rounded Rectangle 16"/>
+          <p:cNvSpPr/>
+          <p:nvPr/>
+        </p:nvSpPr>
+        <p:spPr>
+          <a:xfrm>
+            <a:off x="8138160" y="1508760"/>
+            <a:ext cx="3246120" cy="4937760"/>
+          </a:xfrm>
+          <a:prstGeom prst="roundRect">
+            <a:avLst/>
+          </a:prstGeom>
+          <a:solidFill>
+            <a:srgbClr val="F1F5F9"/>
+          </a:solidFill>
+          <a:ln>
+            <a:noFill/>
+          </a:ln>
+          <a:effectLst/>
+        </p:spPr>
+        <p:style>
+          <a:lnRef idx="1">
+            <a:schemeClr val="accent1"/>
+          </a:lnRef>
+          <a:fillRef idx="3">
+            <a:schemeClr val="accent1"/>
+          </a:fillRef>
+          <a:effectRef idx="2">
+            <a:schemeClr val="accent1"/>
+          </a:effectRef>
+          <a:fontRef idx="minor">
+            <a:schemeClr val="lt1"/>
+          </a:fontRef>
+        </p:style>
+        <p:txBody>
+          <a:bodyPr rtlCol="0" anchor="ctr"/>
+          <a:lstStyle/>
+          <a:p>
+            <a:pPr algn="ctr"/>
+          </a:p>
+        </p:txBody>
+      </p:sp>
+      <p:pic>
+        <p:nvPicPr>
+          <p:cNvPr id="18" name="Picture 17" descr="feat-ai.png"/>
+          <p:cNvPicPr>
+            <a:picLocks noChangeAspect="1"/>
+          </p:cNvPicPr>
+          <p:nvPr/>
+        </p:nvPicPr>
+        <p:blipFill>
+          <a:blip r:embed="rId2"/>
+          <a:stretch>
+            <a:fillRect/>
+          </a:stretch>
+        </p:blipFill>
+        <p:spPr>
+          <a:xfrm>
+            <a:off x="8275320" y="1645920"/>
+            <a:ext cx="3544214" cy="4663440"/>
+          </a:xfrm>
+          <a:prstGeom prst="rect">
+            <a:avLst/>
+          </a:prstGeom>
+        </p:spPr>
+      </p:pic>
+      <p:sp>
+        <p:nvSpPr>
+          <p:cNvPr id="19" name="TextBox 18"/>
+          <p:cNvSpPr txBox="1"/>
+          <p:nvPr/>
+        </p:nvSpPr>
+        <p:spPr>
+          <a:xfrm>
+            <a:off x="8138160" y="6510528"/>
+            <a:ext cx="3246120" cy="274320"/>
+          </a:xfrm>
+          <a:prstGeom prst="rect">
+            <a:avLst/>
+          </a:prstGeom>
+          <a:noFill/>
+        </p:spPr>
+        <p:txBody>
+          <a:bodyPr wrap="square" anchor="t">
+            <a:spAutoFit/>
+          </a:bodyPr>
+          <a:lstStyle/>
+          <a:p>
+            <a:pPr algn="ctr"/>
+            <a:r>
+              <a:rPr sz="900" b="0">
+                <a:solidFill>
+                  <a:srgbClr val="64748B"/>
+                </a:solidFill>
+                <a:latin typeface="Noto Sans CJK SC"/>
+                <a:ea typeface="Noto Sans CJK SC"/>
+                <a:cs typeface="Noto Sans CJK SC"/>
+              </a:rPr>
+              <a:t>产品界面（现场可实测）</a:t>
             </a:r>
           </a:p>
         </p:txBody>
@@ -8878,7 +9405,7 @@
           <a:p>
             <a:pPr algn="l"/>
             <a:r>
-              <a:rPr sz="3600" b="1">
+              <a:rPr sz="3000" b="1">
                 <a:solidFill>
                   <a:srgbClr val="0F172A"/>
                 </a:solidFill>
@@ -8899,23 +9426,23 @@
         </p:nvSpPr>
         <p:spPr>
           <a:xfrm>
-            <a:off x="822960" y="1783080"/>
-            <a:ext cx="10515600" cy="731520"/>
-          </a:xfrm>
-          <a:prstGeom prst="rect">
-            <a:avLst/>
-          </a:prstGeom>
-          <a:noFill/>
-        </p:spPr>
-        <p:txBody>
-          <a:bodyPr wrap="square" anchor="t">
-            <a:spAutoFit/>
-          </a:bodyPr>
-          <a:lstStyle/>
-          <a:p>
-            <a:pPr algn="l"/>
-            <a:r>
-              <a:rPr sz="1600" b="0">
+            <a:off x="822960" y="1554480"/>
+            <a:ext cx="7040880" cy="640080"/>
+          </a:xfrm>
+          <a:prstGeom prst="rect">
+            <a:avLst/>
+          </a:prstGeom>
+          <a:noFill/>
+        </p:spPr>
+        <p:txBody>
+          <a:bodyPr wrap="square" anchor="t">
+            <a:spAutoFit/>
+          </a:bodyPr>
+          <a:lstStyle/>
+          <a:p>
+            <a:pPr algn="l"/>
+            <a:r>
+              <a:rPr sz="1400" b="0">
                 <a:solidFill>
                   <a:srgbClr val="64748B"/>
                 </a:solidFill>
@@ -8936,8 +9463,8 @@
         </p:nvSpPr>
         <p:spPr>
           <a:xfrm>
-            <a:off x="822960" y="2468880"/>
-            <a:ext cx="5143500" cy="1143000"/>
+            <a:off x="822960" y="2377440"/>
+            <a:ext cx="7040880" cy="932688"/>
           </a:xfrm>
           <a:prstGeom prst="roundRect">
             <a:avLst/>
@@ -8980,23 +9507,23 @@
         </p:nvSpPr>
         <p:spPr>
           <a:xfrm>
-            <a:off x="1005840" y="2578608"/>
-            <a:ext cx="4777740" cy="365760"/>
-          </a:xfrm>
-          <a:prstGeom prst="rect">
-            <a:avLst/>
-          </a:prstGeom>
-          <a:noFill/>
-        </p:spPr>
-        <p:txBody>
-          <a:bodyPr wrap="square" anchor="t">
-            <a:spAutoFit/>
-          </a:bodyPr>
-          <a:lstStyle/>
-          <a:p>
-            <a:pPr algn="l"/>
-            <a:r>
-              <a:rPr sz="1600" b="1">
+            <a:off x="1005840" y="2487168"/>
+            <a:ext cx="6675120" cy="365760"/>
+          </a:xfrm>
+          <a:prstGeom prst="rect">
+            <a:avLst/>
+          </a:prstGeom>
+          <a:noFill/>
+        </p:spPr>
+        <p:txBody>
+          <a:bodyPr wrap="square" anchor="t">
+            <a:spAutoFit/>
+          </a:bodyPr>
+          <a:lstStyle/>
+          <a:p>
+            <a:pPr algn="l"/>
+            <a:r>
+              <a:rPr sz="1500" b="1">
                 <a:solidFill>
                   <a:srgbClr val="0F172A"/>
                 </a:solidFill>
@@ -9004,7 +9531,7 @@
                 <a:ea typeface="Noto Sans CJK SC"/>
                 <a:cs typeface="Noto Sans CJK SC"/>
               </a:rPr>
-              <a:t>第二签才放行</a:t>
+              <a:t>1. 第二签才放行</a:t>
             </a:r>
           </a:p>
         </p:txBody>
@@ -9017,23 +9544,23 @@
         </p:nvSpPr>
         <p:spPr>
           <a:xfrm>
-            <a:off x="1005840" y="2971800"/>
-            <a:ext cx="4777740" cy="548640"/>
-          </a:xfrm>
-          <a:prstGeom prst="rect">
-            <a:avLst/>
-          </a:prstGeom>
-          <a:noFill/>
-        </p:spPr>
-        <p:txBody>
-          <a:bodyPr wrap="square" anchor="t">
-            <a:spAutoFit/>
-          </a:bodyPr>
-          <a:lstStyle/>
-          <a:p>
-            <a:pPr algn="l"/>
-            <a:r>
-              <a:rPr sz="1250" b="0">
+            <a:off x="1005840" y="2834640"/>
+            <a:ext cx="6675120" cy="457200"/>
+          </a:xfrm>
+          <a:prstGeom prst="rect">
+            <a:avLst/>
+          </a:prstGeom>
+          <a:noFill/>
+        </p:spPr>
+        <p:txBody>
+          <a:bodyPr wrap="square" anchor="t">
+            <a:spAutoFit/>
+          </a:bodyPr>
+          <a:lstStyle/>
+          <a:p>
+            <a:pPr algn="l"/>
+            <a:r>
+              <a:rPr sz="1150" b="0">
                 <a:solidFill>
                   <a:srgbClr val="64748B"/>
                 </a:solidFill>
@@ -9054,8 +9581,8 @@
         </p:nvSpPr>
         <p:spPr>
           <a:xfrm>
-            <a:off x="6195060" y="2468880"/>
-            <a:ext cx="5143500" cy="1143000"/>
+            <a:off x="822960" y="3474720"/>
+            <a:ext cx="7040880" cy="932688"/>
           </a:xfrm>
           <a:prstGeom prst="roundRect">
             <a:avLst/>
@@ -9098,23 +9625,23 @@
         </p:nvSpPr>
         <p:spPr>
           <a:xfrm>
-            <a:off x="6377940" y="2578608"/>
-            <a:ext cx="4777740" cy="365760"/>
-          </a:xfrm>
-          <a:prstGeom prst="rect">
-            <a:avLst/>
-          </a:prstGeom>
-          <a:noFill/>
-        </p:spPr>
-        <p:txBody>
-          <a:bodyPr wrap="square" anchor="t">
-            <a:spAutoFit/>
-          </a:bodyPr>
-          <a:lstStyle/>
-          <a:p>
-            <a:pPr algn="l"/>
-            <a:r>
-              <a:rPr sz="1600" b="1">
+            <a:off x="1005840" y="3584448"/>
+            <a:ext cx="6675120" cy="365760"/>
+          </a:xfrm>
+          <a:prstGeom prst="rect">
+            <a:avLst/>
+          </a:prstGeom>
+          <a:noFill/>
+        </p:spPr>
+        <p:txBody>
+          <a:bodyPr wrap="square" anchor="t">
+            <a:spAutoFit/>
+          </a:bodyPr>
+          <a:lstStyle/>
+          <a:p>
+            <a:pPr algn="l"/>
+            <a:r>
+              <a:rPr sz="1500" b="1">
                 <a:solidFill>
                   <a:srgbClr val="0F172A"/>
                 </a:solidFill>
@@ -9122,7 +9649,7 @@
                 <a:ea typeface="Noto Sans CJK SC"/>
                 <a:cs typeface="Noto Sans CJK SC"/>
               </a:rPr>
-              <a:t>全程审计留痕</a:t>
+              <a:t>2. 全程审计留痕</a:t>
             </a:r>
           </a:p>
         </p:txBody>
@@ -9135,23 +9662,23 @@
         </p:nvSpPr>
         <p:spPr>
           <a:xfrm>
-            <a:off x="6377940" y="2971800"/>
-            <a:ext cx="4777740" cy="548640"/>
-          </a:xfrm>
-          <a:prstGeom prst="rect">
-            <a:avLst/>
-          </a:prstGeom>
-          <a:noFill/>
-        </p:spPr>
-        <p:txBody>
-          <a:bodyPr wrap="square" anchor="t">
-            <a:spAutoFit/>
-          </a:bodyPr>
-          <a:lstStyle/>
-          <a:p>
-            <a:pPr algn="l"/>
-            <a:r>
-              <a:rPr sz="1250" b="0">
+            <a:off x="1005840" y="3931920"/>
+            <a:ext cx="6675120" cy="457200"/>
+          </a:xfrm>
+          <a:prstGeom prst="rect">
+            <a:avLst/>
+          </a:prstGeom>
+          <a:noFill/>
+        </p:spPr>
+        <p:txBody>
+          <a:bodyPr wrap="square" anchor="t">
+            <a:spAutoFit/>
+          </a:bodyPr>
+          <a:lstStyle/>
+          <a:p>
+            <a:pPr algn="l"/>
+            <a:r>
+              <a:rPr sz="1150" b="0">
                 <a:solidFill>
                   <a:srgbClr val="64748B"/>
                 </a:solidFill>
@@ -9172,8 +9699,8 @@
         </p:nvSpPr>
         <p:spPr>
           <a:xfrm>
-            <a:off x="822960" y="3840480"/>
-            <a:ext cx="5143500" cy="1143000"/>
+            <a:off x="822960" y="4572000"/>
+            <a:ext cx="7040880" cy="932688"/>
           </a:xfrm>
           <a:prstGeom prst="roundRect">
             <a:avLst/>
@@ -9216,23 +9743,23 @@
         </p:nvSpPr>
         <p:spPr>
           <a:xfrm>
-            <a:off x="1005840" y="3950208"/>
-            <a:ext cx="4777740" cy="365760"/>
-          </a:xfrm>
-          <a:prstGeom prst="rect">
-            <a:avLst/>
-          </a:prstGeom>
-          <a:noFill/>
-        </p:spPr>
-        <p:txBody>
-          <a:bodyPr wrap="square" anchor="t">
-            <a:spAutoFit/>
-          </a:bodyPr>
-          <a:lstStyle/>
-          <a:p>
-            <a:pPr algn="l"/>
-            <a:r>
-              <a:rPr sz="1600" b="1">
+            <a:off x="1005840" y="4681728"/>
+            <a:ext cx="6675120" cy="365760"/>
+          </a:xfrm>
+          <a:prstGeom prst="rect">
+            <a:avLst/>
+          </a:prstGeom>
+          <a:noFill/>
+        </p:spPr>
+        <p:txBody>
+          <a:bodyPr wrap="square" anchor="t">
+            <a:spAutoFit/>
+          </a:bodyPr>
+          <a:lstStyle/>
+          <a:p>
+            <a:pPr algn="l"/>
+            <a:r>
+              <a:rPr sz="1500" b="1">
                 <a:solidFill>
                   <a:srgbClr val="0F172A"/>
                 </a:solidFill>
@@ -9240,7 +9767,7 @@
                 <a:ea typeface="Noto Sans CJK SC"/>
                 <a:cs typeface="Noto Sans CJK SC"/>
               </a:rPr>
-              <a:t>产出是指令</a:t>
+              <a:t>3. 产出是指令</a:t>
             </a:r>
           </a:p>
         </p:txBody>
@@ -9253,23 +9780,23 @@
         </p:nvSpPr>
         <p:spPr>
           <a:xfrm>
-            <a:off x="1005840" y="4343400"/>
-            <a:ext cx="4777740" cy="548640"/>
-          </a:xfrm>
-          <a:prstGeom prst="rect">
-            <a:avLst/>
-          </a:prstGeom>
-          <a:noFill/>
-        </p:spPr>
-        <p:txBody>
-          <a:bodyPr wrap="square" anchor="t">
-            <a:spAutoFit/>
-          </a:bodyPr>
-          <a:lstStyle/>
-          <a:p>
-            <a:pPr algn="l"/>
-            <a:r>
-              <a:rPr sz="1250" b="0">
+            <a:off x="1005840" y="5029200"/>
+            <a:ext cx="6675120" cy="457200"/>
+          </a:xfrm>
+          <a:prstGeom prst="rect">
+            <a:avLst/>
+          </a:prstGeom>
+          <a:noFill/>
+        </p:spPr>
+        <p:txBody>
+          <a:bodyPr wrap="square" anchor="t">
+            <a:spAutoFit/>
+          </a:bodyPr>
+          <a:lstStyle/>
+          <a:p>
+            <a:pPr algn="l"/>
+            <a:r>
+              <a:rPr sz="1150" b="0">
                 <a:solidFill>
                   <a:srgbClr val="64748B"/>
                 </a:solidFill>
@@ -9290,8 +9817,8 @@
         </p:nvSpPr>
         <p:spPr>
           <a:xfrm>
-            <a:off x="6195060" y="3840480"/>
-            <a:ext cx="5143500" cy="1143000"/>
+            <a:off x="822960" y="5669279"/>
+            <a:ext cx="7040880" cy="932688"/>
           </a:xfrm>
           <a:prstGeom prst="roundRect">
             <a:avLst/>
@@ -9334,23 +9861,23 @@
         </p:nvSpPr>
         <p:spPr>
           <a:xfrm>
-            <a:off x="6377940" y="3950208"/>
-            <a:ext cx="4777740" cy="365760"/>
-          </a:xfrm>
-          <a:prstGeom prst="rect">
-            <a:avLst/>
-          </a:prstGeom>
-          <a:noFill/>
-        </p:spPr>
-        <p:txBody>
-          <a:bodyPr wrap="square" anchor="t">
-            <a:spAutoFit/>
-          </a:bodyPr>
-          <a:lstStyle/>
-          <a:p>
-            <a:pPr algn="l"/>
-            <a:r>
-              <a:rPr sz="1600" b="1">
+            <a:off x="1005840" y="5779007"/>
+            <a:ext cx="6675120" cy="365760"/>
+          </a:xfrm>
+          <a:prstGeom prst="rect">
+            <a:avLst/>
+          </a:prstGeom>
+          <a:noFill/>
+        </p:spPr>
+        <p:txBody>
+          <a:bodyPr wrap="square" anchor="t">
+            <a:spAutoFit/>
+          </a:bodyPr>
+          <a:lstStyle/>
+          <a:p>
+            <a:pPr algn="l"/>
+            <a:r>
+              <a:rPr sz="1500" b="1">
                 <a:solidFill>
                   <a:srgbClr val="0F172A"/>
                 </a:solidFill>
@@ -9358,7 +9885,7 @@
                 <a:ea typeface="Noto Sans CJK SC"/>
                 <a:cs typeface="Noto Sans CJK SC"/>
               </a:rPr>
-              <a:t>防错防内控</a:t>
+              <a:t>4. 防错防内控</a:t>
             </a:r>
           </a:p>
         </p:txBody>
@@ -9371,23 +9898,23 @@
         </p:nvSpPr>
         <p:spPr>
           <a:xfrm>
-            <a:off x="6377940" y="4343400"/>
-            <a:ext cx="4777740" cy="548640"/>
-          </a:xfrm>
-          <a:prstGeom prst="rect">
-            <a:avLst/>
-          </a:prstGeom>
-          <a:noFill/>
-        </p:spPr>
-        <p:txBody>
-          <a:bodyPr wrap="square" anchor="t">
-            <a:spAutoFit/>
-          </a:bodyPr>
-          <a:lstStyle/>
-          <a:p>
-            <a:pPr algn="l"/>
-            <a:r>
-              <a:rPr sz="1250" b="0">
+            <a:off x="1005840" y="6126479"/>
+            <a:ext cx="6675120" cy="457200"/>
+          </a:xfrm>
+          <a:prstGeom prst="rect">
+            <a:avLst/>
+          </a:prstGeom>
+          <a:noFill/>
+        </p:spPr>
+        <p:txBody>
+          <a:bodyPr wrap="square" anchor="t">
+            <a:spAutoFit/>
+          </a:bodyPr>
+          <a:lstStyle/>
+          <a:p>
+            <a:pPr algn="l"/>
+            <a:r>
+              <a:rPr sz="1150" b="0">
                 <a:solidFill>
                   <a:srgbClr val="64748B"/>
                 </a:solidFill>
@@ -9396,6 +9923,111 @@
                 <a:cs typeface="Noto Sans CJK SC"/>
               </a:rPr>
               <a:t>把关键控制点前置，减少人为疏漏造成的资金损失。</a:t>
+            </a:r>
+          </a:p>
+        </p:txBody>
+      </p:sp>
+      <p:sp>
+        <p:nvSpPr>
+          <p:cNvPr id="17" name="Rounded Rectangle 16"/>
+          <p:cNvSpPr/>
+          <p:nvPr/>
+        </p:nvSpPr>
+        <p:spPr>
+          <a:xfrm>
+            <a:off x="8138160" y="1508760"/>
+            <a:ext cx="3246120" cy="4937760"/>
+          </a:xfrm>
+          <a:prstGeom prst="roundRect">
+            <a:avLst/>
+          </a:prstGeom>
+          <a:solidFill>
+            <a:srgbClr val="F1F5F9"/>
+          </a:solidFill>
+          <a:ln>
+            <a:noFill/>
+          </a:ln>
+          <a:effectLst/>
+        </p:spPr>
+        <p:style>
+          <a:lnRef idx="1">
+            <a:schemeClr val="accent1"/>
+          </a:lnRef>
+          <a:fillRef idx="3">
+            <a:schemeClr val="accent1"/>
+          </a:fillRef>
+          <a:effectRef idx="2">
+            <a:schemeClr val="accent1"/>
+          </a:effectRef>
+          <a:fontRef idx="minor">
+            <a:schemeClr val="lt1"/>
+          </a:fontRef>
+        </p:style>
+        <p:txBody>
+          <a:bodyPr rtlCol="0" anchor="ctr"/>
+          <a:lstStyle/>
+          <a:p>
+            <a:pPr algn="ctr"/>
+          </a:p>
+        </p:txBody>
+      </p:sp>
+      <p:pic>
+        <p:nvPicPr>
+          <p:cNvPr id="18" name="Picture 17" descr="feat-review.png"/>
+          <p:cNvPicPr>
+            <a:picLocks noChangeAspect="1"/>
+          </p:cNvPicPr>
+          <p:nvPr/>
+        </p:nvPicPr>
+        <p:blipFill>
+          <a:blip r:embed="rId2"/>
+          <a:stretch>
+            <a:fillRect/>
+          </a:stretch>
+        </p:blipFill>
+        <p:spPr>
+          <a:xfrm>
+            <a:off x="8275320" y="1645920"/>
+            <a:ext cx="3544214" cy="4663440"/>
+          </a:xfrm>
+          <a:prstGeom prst="rect">
+            <a:avLst/>
+          </a:prstGeom>
+        </p:spPr>
+      </p:pic>
+      <p:sp>
+        <p:nvSpPr>
+          <p:cNvPr id="19" name="TextBox 18"/>
+          <p:cNvSpPr txBox="1"/>
+          <p:nvPr/>
+        </p:nvSpPr>
+        <p:spPr>
+          <a:xfrm>
+            <a:off x="8138160" y="6510528"/>
+            <a:ext cx="3246120" cy="274320"/>
+          </a:xfrm>
+          <a:prstGeom prst="rect">
+            <a:avLst/>
+          </a:prstGeom>
+          <a:noFill/>
+        </p:spPr>
+        <p:txBody>
+          <a:bodyPr wrap="square" anchor="t">
+            <a:spAutoFit/>
+          </a:bodyPr>
+          <a:lstStyle/>
+          <a:p>
+            <a:pPr algn="ctr"/>
+            <a:r>
+              <a:rPr sz="900" b="0">
+                <a:solidFill>
+                  <a:srgbClr val="64748B"/>
+                </a:solidFill>
+                <a:latin typeface="Noto Sans CJK SC"/>
+                <a:ea typeface="Noto Sans CJK SC"/>
+                <a:cs typeface="Noto Sans CJK SC"/>
+              </a:rPr>
+              <a:t>产品界面（现场可实测）</a:t>
             </a:r>
           </a:p>
         </p:txBody>
@@ -9409,6 +10041,720 @@
 </file>
 
 <file path=ppt/slides/slide8.xml><?xml version="1.0" encoding="utf-8"?>
+<p:sld xmlns:a="http://schemas.openxmlformats.org/drawingml/2006/main" xmlns:p="http://schemas.openxmlformats.org/presentationml/2006/main" xmlns:r="http://schemas.openxmlformats.org/officeDocument/2006/relationships">
+  <p:cSld>
+    <p:bg>
+      <p:bgPr>
+        <a:solidFill>
+          <a:srgbClr val="FFFFFF"/>
+        </a:solidFill>
+        <a:effectLst/>
+      </p:bgPr>
+    </p:bg>
+    <p:spTree>
+      <p:nvGrpSpPr>
+        <p:cNvPr id="1" name=""/>
+        <p:cNvGrpSpPr/>
+        <p:nvPr/>
+      </p:nvGrpSpPr>
+      <p:grpSpPr/>
+      <p:sp>
+        <p:nvSpPr>
+          <p:cNvPr id="2" name="TextBox 1"/>
+          <p:cNvSpPr txBox="1"/>
+          <p:nvPr/>
+        </p:nvSpPr>
+        <p:spPr>
+          <a:xfrm>
+            <a:off x="822960" y="502920"/>
+            <a:ext cx="10515600" cy="365760"/>
+          </a:xfrm>
+          <a:prstGeom prst="rect">
+            <a:avLst/>
+          </a:prstGeom>
+          <a:noFill/>
+        </p:spPr>
+        <p:txBody>
+          <a:bodyPr wrap="square" anchor="t">
+            <a:spAutoFit/>
+          </a:bodyPr>
+          <a:lstStyle/>
+          <a:p>
+            <a:pPr algn="l"/>
+            <a:r>
+              <a:rPr sz="1400" b="1">
+                <a:solidFill>
+                  <a:srgbClr val="0F766E"/>
+                </a:solidFill>
+                <a:latin typeface="Noto Sans CJK SC"/>
+                <a:ea typeface="Noto Sans CJK SC"/>
+                <a:cs typeface="Noto Sans CJK SC"/>
+              </a:rPr>
+              <a:t>核心功能④ · 成果可演示</a:t>
+            </a:r>
+          </a:p>
+        </p:txBody>
+      </p:sp>
+      <p:sp>
+        <p:nvSpPr>
+          <p:cNvPr id="3" name="TextBox 2"/>
+          <p:cNvSpPr txBox="1"/>
+          <p:nvPr/>
+        </p:nvSpPr>
+        <p:spPr>
+          <a:xfrm>
+            <a:off x="822960" y="868680"/>
+            <a:ext cx="10515600" cy="914400"/>
+          </a:xfrm>
+          <a:prstGeom prst="rect">
+            <a:avLst/>
+          </a:prstGeom>
+          <a:noFill/>
+        </p:spPr>
+        <p:txBody>
+          <a:bodyPr wrap="square" anchor="t">
+            <a:spAutoFit/>
+          </a:bodyPr>
+          <a:lstStyle/>
+          <a:p>
+            <a:pPr algn="l"/>
+            <a:r>
+              <a:rPr sz="3000" b="1">
+                <a:solidFill>
+                  <a:srgbClr val="0F172A"/>
+                </a:solidFill>
+                <a:latin typeface="Noto Sans CJK SC"/>
+                <a:ea typeface="Noto Sans CJK SC"/>
+                <a:cs typeface="Noto Sans CJK SC"/>
+              </a:rPr>
+              <a:t>里程碑条件结算工作台</a:t>
+            </a:r>
+          </a:p>
+        </p:txBody>
+      </p:sp>
+      <p:sp>
+        <p:nvSpPr>
+          <p:cNvPr id="4" name="TextBox 3"/>
+          <p:cNvSpPr txBox="1"/>
+          <p:nvPr/>
+        </p:nvSpPr>
+        <p:spPr>
+          <a:xfrm>
+            <a:off x="822960" y="1554480"/>
+            <a:ext cx="7040880" cy="640080"/>
+          </a:xfrm>
+          <a:prstGeom prst="rect">
+            <a:avLst/>
+          </a:prstGeom>
+          <a:noFill/>
+        </p:spPr>
+        <p:txBody>
+          <a:bodyPr wrap="square" anchor="t">
+            <a:spAutoFit/>
+          </a:bodyPr>
+          <a:lstStyle/>
+          <a:p>
+            <a:pPr algn="l"/>
+            <a:r>
+              <a:rPr sz="1400" b="0">
+                <a:solidFill>
+                  <a:srgbClr val="64748B"/>
+                </a:solidFill>
+                <a:latin typeface="Noto Sans CJK SC"/>
+                <a:ea typeface="Noto Sans CJK SC"/>
+                <a:cs typeface="Noto Sans CJK SC"/>
+              </a:rPr>
+              <a:t>按里程碑进度设条件、校验通过后推送放款提醒；不托管、不放款。</a:t>
+            </a:r>
+          </a:p>
+        </p:txBody>
+      </p:sp>
+      <p:sp>
+        <p:nvSpPr>
+          <p:cNvPr id="5" name="Rounded Rectangle 4"/>
+          <p:cNvSpPr/>
+          <p:nvPr/>
+        </p:nvSpPr>
+        <p:spPr>
+          <a:xfrm>
+            <a:off x="822960" y="2377440"/>
+            <a:ext cx="7040880" cy="932688"/>
+          </a:xfrm>
+          <a:prstGeom prst="roundRect">
+            <a:avLst/>
+          </a:prstGeom>
+          <a:solidFill>
+            <a:srgbClr val="F1F5F9"/>
+          </a:solidFill>
+          <a:ln>
+            <a:noFill/>
+          </a:ln>
+          <a:effectLst/>
+        </p:spPr>
+        <p:style>
+          <a:lnRef idx="1">
+            <a:schemeClr val="accent1"/>
+          </a:lnRef>
+          <a:fillRef idx="3">
+            <a:schemeClr val="accent1"/>
+          </a:fillRef>
+          <a:effectRef idx="2">
+            <a:schemeClr val="accent1"/>
+          </a:effectRef>
+          <a:fontRef idx="minor">
+            <a:schemeClr val="lt1"/>
+          </a:fontRef>
+        </p:style>
+        <p:txBody>
+          <a:bodyPr rtlCol="0" anchor="ctr"/>
+          <a:lstStyle/>
+          <a:p>
+            <a:pPr algn="ctr"/>
+          </a:p>
+        </p:txBody>
+      </p:sp>
+      <p:sp>
+        <p:nvSpPr>
+          <p:cNvPr id="6" name="TextBox 5"/>
+          <p:cNvSpPr txBox="1"/>
+          <p:nvPr/>
+        </p:nvSpPr>
+        <p:spPr>
+          <a:xfrm>
+            <a:off x="1005840" y="2487168"/>
+            <a:ext cx="6675120" cy="365760"/>
+          </a:xfrm>
+          <a:prstGeom prst="rect">
+            <a:avLst/>
+          </a:prstGeom>
+          <a:noFill/>
+        </p:spPr>
+        <p:txBody>
+          <a:bodyPr wrap="square" anchor="t">
+            <a:spAutoFit/>
+          </a:bodyPr>
+          <a:lstStyle/>
+          <a:p>
+            <a:pPr algn="l"/>
+            <a:r>
+              <a:rPr sz="1500" b="1">
+                <a:solidFill>
+                  <a:srgbClr val="0F172A"/>
+                </a:solidFill>
+                <a:latin typeface="Noto Sans CJK SC"/>
+                <a:ea typeface="Noto Sans CJK SC"/>
+                <a:cs typeface="Noto Sans CJK SC"/>
+              </a:rPr>
+              <a:t>1. 项目/里程碑台账</a:t>
+            </a:r>
+          </a:p>
+        </p:txBody>
+      </p:sp>
+      <p:sp>
+        <p:nvSpPr>
+          <p:cNvPr id="7" name="TextBox 6"/>
+          <p:cNvSpPr txBox="1"/>
+          <p:nvPr/>
+        </p:nvSpPr>
+        <p:spPr>
+          <a:xfrm>
+            <a:off x="1005840" y="2834640"/>
+            <a:ext cx="6675120" cy="457200"/>
+          </a:xfrm>
+          <a:prstGeom prst="rect">
+            <a:avLst/>
+          </a:prstGeom>
+          <a:noFill/>
+        </p:spPr>
+        <p:txBody>
+          <a:bodyPr wrap="square" anchor="t">
+            <a:spAutoFit/>
+          </a:bodyPr>
+          <a:lstStyle/>
+          <a:p>
+            <a:pPr algn="l"/>
+            <a:r>
+              <a:rPr sz="1150" b="0">
+                <a:solidFill>
+                  <a:srgbClr val="64748B"/>
+                </a:solidFill>
+                <a:latin typeface="Noto Sans CJK SC"/>
+                <a:ea typeface="Noto Sans CJK SC"/>
+                <a:cs typeface="Noto Sans CJK SC"/>
+              </a:rPr>
+              <a:t>外包/项目付款节点集中管理，进度与金额一目了然。</a:t>
+            </a:r>
+          </a:p>
+        </p:txBody>
+      </p:sp>
+      <p:sp>
+        <p:nvSpPr>
+          <p:cNvPr id="8" name="Rounded Rectangle 7"/>
+          <p:cNvSpPr/>
+          <p:nvPr/>
+        </p:nvSpPr>
+        <p:spPr>
+          <a:xfrm>
+            <a:off x="822960" y="3474720"/>
+            <a:ext cx="7040880" cy="932688"/>
+          </a:xfrm>
+          <a:prstGeom prst="roundRect">
+            <a:avLst/>
+          </a:prstGeom>
+          <a:solidFill>
+            <a:srgbClr val="F1F5F9"/>
+          </a:solidFill>
+          <a:ln>
+            <a:noFill/>
+          </a:ln>
+          <a:effectLst/>
+        </p:spPr>
+        <p:style>
+          <a:lnRef idx="1">
+            <a:schemeClr val="accent1"/>
+          </a:lnRef>
+          <a:fillRef idx="3">
+            <a:schemeClr val="accent1"/>
+          </a:fillRef>
+          <a:effectRef idx="2">
+            <a:schemeClr val="accent1"/>
+          </a:effectRef>
+          <a:fontRef idx="minor">
+            <a:schemeClr val="lt1"/>
+          </a:fontRef>
+        </p:style>
+        <p:txBody>
+          <a:bodyPr rtlCol="0" anchor="ctr"/>
+          <a:lstStyle/>
+          <a:p>
+            <a:pPr algn="ctr"/>
+          </a:p>
+        </p:txBody>
+      </p:sp>
+      <p:sp>
+        <p:nvSpPr>
+          <p:cNvPr id="9" name="TextBox 8"/>
+          <p:cNvSpPr txBox="1"/>
+          <p:nvPr/>
+        </p:nvSpPr>
+        <p:spPr>
+          <a:xfrm>
+            <a:off x="1005840" y="3584448"/>
+            <a:ext cx="6675120" cy="365760"/>
+          </a:xfrm>
+          <a:prstGeom prst="rect">
+            <a:avLst/>
+          </a:prstGeom>
+          <a:noFill/>
+        </p:spPr>
+        <p:txBody>
+          <a:bodyPr wrap="square" anchor="t">
+            <a:spAutoFit/>
+          </a:bodyPr>
+          <a:lstStyle/>
+          <a:p>
+            <a:pPr algn="l"/>
+            <a:r>
+              <a:rPr sz="1500" b="1">
+                <a:solidFill>
+                  <a:srgbClr val="0F172A"/>
+                </a:solidFill>
+                <a:latin typeface="Noto Sans CJK SC"/>
+                <a:ea typeface="Noto Sans CJK SC"/>
+                <a:cs typeface="Noto Sans CJK SC"/>
+              </a:rPr>
+              <a:t>2. 条件与状态流转</a:t>
+            </a:r>
+          </a:p>
+        </p:txBody>
+      </p:sp>
+      <p:sp>
+        <p:nvSpPr>
+          <p:cNvPr id="10" name="TextBox 9"/>
+          <p:cNvSpPr txBox="1"/>
+          <p:nvPr/>
+        </p:nvSpPr>
+        <p:spPr>
+          <a:xfrm>
+            <a:off x="1005840" y="3931920"/>
+            <a:ext cx="6675120" cy="457200"/>
+          </a:xfrm>
+          <a:prstGeom prst="rect">
+            <a:avLst/>
+          </a:prstGeom>
+          <a:noFill/>
+        </p:spPr>
+        <p:txBody>
+          <a:bodyPr wrap="square" anchor="t">
+            <a:spAutoFit/>
+          </a:bodyPr>
+          <a:lstStyle/>
+          <a:p>
+            <a:pPr algn="l"/>
+            <a:r>
+              <a:rPr sz="1150" b="0">
+                <a:solidFill>
+                  <a:srgbClr val="64748B"/>
+                </a:solidFill>
+                <a:latin typeface="Noto Sans CJK SC"/>
+                <a:ea typeface="Noto Sans CJK SC"/>
+                <a:cs typeface="Noto Sans CJK SC"/>
+              </a:rPr>
+              <a:t>待开始→进行中→待校验→已校验，逐节点可控。</a:t>
+            </a:r>
+          </a:p>
+        </p:txBody>
+      </p:sp>
+      <p:sp>
+        <p:nvSpPr>
+          <p:cNvPr id="11" name="Rounded Rectangle 10"/>
+          <p:cNvSpPr/>
+          <p:nvPr/>
+        </p:nvSpPr>
+        <p:spPr>
+          <a:xfrm>
+            <a:off x="822960" y="4572000"/>
+            <a:ext cx="7040880" cy="932688"/>
+          </a:xfrm>
+          <a:prstGeom prst="roundRect">
+            <a:avLst/>
+          </a:prstGeom>
+          <a:solidFill>
+            <a:srgbClr val="F1F5F9"/>
+          </a:solidFill>
+          <a:ln>
+            <a:noFill/>
+          </a:ln>
+          <a:effectLst/>
+        </p:spPr>
+        <p:style>
+          <a:lnRef idx="1">
+            <a:schemeClr val="accent1"/>
+          </a:lnRef>
+          <a:fillRef idx="3">
+            <a:schemeClr val="accent1"/>
+          </a:fillRef>
+          <a:effectRef idx="2">
+            <a:schemeClr val="accent1"/>
+          </a:effectRef>
+          <a:fontRef idx="minor">
+            <a:schemeClr val="lt1"/>
+          </a:fontRef>
+        </p:style>
+        <p:txBody>
+          <a:bodyPr rtlCol="0" anchor="ctr"/>
+          <a:lstStyle/>
+          <a:p>
+            <a:pPr algn="ctr"/>
+          </a:p>
+        </p:txBody>
+      </p:sp>
+      <p:sp>
+        <p:nvSpPr>
+          <p:cNvPr id="12" name="TextBox 11"/>
+          <p:cNvSpPr txBox="1"/>
+          <p:nvPr/>
+        </p:nvSpPr>
+        <p:spPr>
+          <a:xfrm>
+            <a:off x="1005840" y="4681728"/>
+            <a:ext cx="6675120" cy="365760"/>
+          </a:xfrm>
+          <a:prstGeom prst="rect">
+            <a:avLst/>
+          </a:prstGeom>
+          <a:noFill/>
+        </p:spPr>
+        <p:txBody>
+          <a:bodyPr wrap="square" anchor="t">
+            <a:spAutoFit/>
+          </a:bodyPr>
+          <a:lstStyle/>
+          <a:p>
+            <a:pPr algn="l"/>
+            <a:r>
+              <a:rPr sz="1500" b="1">
+                <a:solidFill>
+                  <a:srgbClr val="0F172A"/>
+                </a:solidFill>
+                <a:latin typeface="Noto Sans CJK SC"/>
+                <a:ea typeface="Noto Sans CJK SC"/>
+                <a:cs typeface="Noto Sans CJK SC"/>
+              </a:rPr>
+              <a:t>3. 放款提醒→生成指令</a:t>
+            </a:r>
+          </a:p>
+        </p:txBody>
+      </p:sp>
+      <p:sp>
+        <p:nvSpPr>
+          <p:cNvPr id="13" name="TextBox 12"/>
+          <p:cNvSpPr txBox="1"/>
+          <p:nvPr/>
+        </p:nvSpPr>
+        <p:spPr>
+          <a:xfrm>
+            <a:off x="1005840" y="5029200"/>
+            <a:ext cx="6675120" cy="457200"/>
+          </a:xfrm>
+          <a:prstGeom prst="rect">
+            <a:avLst/>
+          </a:prstGeom>
+          <a:noFill/>
+        </p:spPr>
+        <p:txBody>
+          <a:bodyPr wrap="square" anchor="t">
+            <a:spAutoFit/>
+          </a:bodyPr>
+          <a:lstStyle/>
+          <a:p>
+            <a:pPr algn="l"/>
+            <a:r>
+              <a:rPr sz="1150" b="0">
+                <a:solidFill>
+                  <a:srgbClr val="64748B"/>
+                </a:solidFill>
+                <a:latin typeface="Noto Sans CJK SC"/>
+                <a:ea typeface="Noto Sans CJK SC"/>
+                <a:cs typeface="Noto Sans CJK SC"/>
+              </a:rPr>
+              <a:t>校验通过弹出放款提醒，一键跳转生成付款指令。</a:t>
+            </a:r>
+          </a:p>
+        </p:txBody>
+      </p:sp>
+      <p:sp>
+        <p:nvSpPr>
+          <p:cNvPr id="14" name="Rounded Rectangle 13"/>
+          <p:cNvSpPr/>
+          <p:nvPr/>
+        </p:nvSpPr>
+        <p:spPr>
+          <a:xfrm>
+            <a:off x="822960" y="5669279"/>
+            <a:ext cx="7040880" cy="932688"/>
+          </a:xfrm>
+          <a:prstGeom prst="roundRect">
+            <a:avLst/>
+          </a:prstGeom>
+          <a:solidFill>
+            <a:srgbClr val="F1F5F9"/>
+          </a:solidFill>
+          <a:ln>
+            <a:noFill/>
+          </a:ln>
+          <a:effectLst/>
+        </p:spPr>
+        <p:style>
+          <a:lnRef idx="1">
+            <a:schemeClr val="accent1"/>
+          </a:lnRef>
+          <a:fillRef idx="3">
+            <a:schemeClr val="accent1"/>
+          </a:fillRef>
+          <a:effectRef idx="2">
+            <a:schemeClr val="accent1"/>
+          </a:effectRef>
+          <a:fontRef idx="minor">
+            <a:schemeClr val="lt1"/>
+          </a:fontRef>
+        </p:style>
+        <p:txBody>
+          <a:bodyPr rtlCol="0" anchor="ctr"/>
+          <a:lstStyle/>
+          <a:p>
+            <a:pPr algn="ctr"/>
+          </a:p>
+        </p:txBody>
+      </p:sp>
+      <p:sp>
+        <p:nvSpPr>
+          <p:cNvPr id="15" name="TextBox 14"/>
+          <p:cNvSpPr txBox="1"/>
+          <p:nvPr/>
+        </p:nvSpPr>
+        <p:spPr>
+          <a:xfrm>
+            <a:off x="1005840" y="5779007"/>
+            <a:ext cx="6675120" cy="365760"/>
+          </a:xfrm>
+          <a:prstGeom prst="rect">
+            <a:avLst/>
+          </a:prstGeom>
+          <a:noFill/>
+        </p:spPr>
+        <p:txBody>
+          <a:bodyPr wrap="square" anchor="t">
+            <a:spAutoFit/>
+          </a:bodyPr>
+          <a:lstStyle/>
+          <a:p>
+            <a:pPr algn="l"/>
+            <a:r>
+              <a:rPr sz="1500" b="1">
+                <a:solidFill>
+                  <a:srgbClr val="0F172A"/>
+                </a:solidFill>
+                <a:latin typeface="Noto Sans CJK SC"/>
+                <a:ea typeface="Noto Sans CJK SC"/>
+                <a:cs typeface="Noto Sans CJK SC"/>
+              </a:rPr>
+              <a:t>4. 合规边界</a:t>
+            </a:r>
+          </a:p>
+        </p:txBody>
+      </p:sp>
+      <p:sp>
+        <p:nvSpPr>
+          <p:cNvPr id="16" name="TextBox 15"/>
+          <p:cNvSpPr txBox="1"/>
+          <p:nvPr/>
+        </p:nvSpPr>
+        <p:spPr>
+          <a:xfrm>
+            <a:off x="1005840" y="6126479"/>
+            <a:ext cx="6675120" cy="457200"/>
+          </a:xfrm>
+          <a:prstGeom prst="rect">
+            <a:avLst/>
+          </a:prstGeom>
+          <a:noFill/>
+        </p:spPr>
+        <p:txBody>
+          <a:bodyPr wrap="square" anchor="t">
+            <a:spAutoFit/>
+          </a:bodyPr>
+          <a:lstStyle/>
+          <a:p>
+            <a:pPr algn="l"/>
+            <a:r>
+              <a:rPr sz="1150" b="0">
+                <a:solidFill>
+                  <a:srgbClr val="64748B"/>
+                </a:solidFill>
+                <a:latin typeface="Noto Sans CJK SC"/>
+                <a:ea typeface="Noto Sans CJK SC"/>
+                <a:cs typeface="Noto Sans CJK SC"/>
+              </a:rPr>
+              <a:t>仅做条件结算管理，实际放款在银行/持牌机构完成。</a:t>
+            </a:r>
+          </a:p>
+        </p:txBody>
+      </p:sp>
+      <p:sp>
+        <p:nvSpPr>
+          <p:cNvPr id="17" name="Rounded Rectangle 16"/>
+          <p:cNvSpPr/>
+          <p:nvPr/>
+        </p:nvSpPr>
+        <p:spPr>
+          <a:xfrm>
+            <a:off x="8138160" y="1508760"/>
+            <a:ext cx="3246120" cy="4937760"/>
+          </a:xfrm>
+          <a:prstGeom prst="roundRect">
+            <a:avLst/>
+          </a:prstGeom>
+          <a:solidFill>
+            <a:srgbClr val="F1F5F9"/>
+          </a:solidFill>
+          <a:ln>
+            <a:noFill/>
+          </a:ln>
+          <a:effectLst/>
+        </p:spPr>
+        <p:style>
+          <a:lnRef idx="1">
+            <a:schemeClr val="accent1"/>
+          </a:lnRef>
+          <a:fillRef idx="3">
+            <a:schemeClr val="accent1"/>
+          </a:fillRef>
+          <a:effectRef idx="2">
+            <a:schemeClr val="accent1"/>
+          </a:effectRef>
+          <a:fontRef idx="minor">
+            <a:schemeClr val="lt1"/>
+          </a:fontRef>
+        </p:style>
+        <p:txBody>
+          <a:bodyPr rtlCol="0" anchor="ctr"/>
+          <a:lstStyle/>
+          <a:p>
+            <a:pPr algn="ctr"/>
+          </a:p>
+        </p:txBody>
+      </p:sp>
+      <p:pic>
+        <p:nvPicPr>
+          <p:cNvPr id="18" name="Picture 17" descr="feat-milestones.png"/>
+          <p:cNvPicPr>
+            <a:picLocks noChangeAspect="1"/>
+          </p:cNvPicPr>
+          <p:nvPr/>
+        </p:nvPicPr>
+        <p:blipFill>
+          <a:blip r:embed="rId2"/>
+          <a:stretch>
+            <a:fillRect/>
+          </a:stretch>
+        </p:blipFill>
+        <p:spPr>
+          <a:xfrm>
+            <a:off x="8275320" y="1645920"/>
+            <a:ext cx="3544214" cy="4663440"/>
+          </a:xfrm>
+          <a:prstGeom prst="rect">
+            <a:avLst/>
+          </a:prstGeom>
+        </p:spPr>
+      </p:pic>
+      <p:sp>
+        <p:nvSpPr>
+          <p:cNvPr id="19" name="TextBox 18"/>
+          <p:cNvSpPr txBox="1"/>
+          <p:nvPr/>
+        </p:nvSpPr>
+        <p:spPr>
+          <a:xfrm>
+            <a:off x="8138160" y="6510528"/>
+            <a:ext cx="3246120" cy="274320"/>
+          </a:xfrm>
+          <a:prstGeom prst="rect">
+            <a:avLst/>
+          </a:prstGeom>
+          <a:noFill/>
+        </p:spPr>
+        <p:txBody>
+          <a:bodyPr wrap="square" anchor="t">
+            <a:spAutoFit/>
+          </a:bodyPr>
+          <a:lstStyle/>
+          <a:p>
+            <a:pPr algn="ctr"/>
+            <a:r>
+              <a:rPr sz="900" b="0">
+                <a:solidFill>
+                  <a:srgbClr val="64748B"/>
+                </a:solidFill>
+                <a:latin typeface="Noto Sans CJK SC"/>
+                <a:ea typeface="Noto Sans CJK SC"/>
+                <a:cs typeface="Noto Sans CJK SC"/>
+              </a:rPr>
+              <a:t>产品界面（现场可实测）</a:t>
+            </a:r>
+          </a:p>
+        </p:txBody>
+      </p:sp>
+    </p:spTree>
+  </p:cSld>
+  <p:clrMapOvr>
+    <a:masterClrMapping/>
+  </p:clrMapOvr>
+</p:sld>
+</file>
+
+<file path=ppt/slides/slide9.xml><?xml version="1.0" encoding="utf-8"?>
 <p:sld xmlns:a="http://schemas.openxmlformats.org/drawingml/2006/main" xmlns:p="http://schemas.openxmlformats.org/presentationml/2006/main" xmlns:r="http://schemas.openxmlformats.org/officeDocument/2006/relationships">
   <p:cSld>
     <p:bg>
@@ -10023,204 +11369,6 @@
 </p:sld>
 </file>
 
-<file path=ppt/slides/slide9.xml><?xml version="1.0" encoding="utf-8"?>
-<p:sld xmlns:a="http://schemas.openxmlformats.org/drawingml/2006/main" xmlns:p="http://schemas.openxmlformats.org/presentationml/2006/main" xmlns:r="http://schemas.openxmlformats.org/officeDocument/2006/relationships">
-  <p:cSld>
-    <p:bg>
-      <p:bgPr>
-        <a:solidFill>
-          <a:srgbClr val="FFFFFF"/>
-        </a:solidFill>
-        <a:effectLst/>
-      </p:bgPr>
-    </p:bg>
-    <p:spTree>
-      <p:nvGrpSpPr>
-        <p:cNvPr id="1" name=""/>
-        <p:cNvGrpSpPr/>
-        <p:nvPr/>
-      </p:nvGrpSpPr>
-      <p:grpSpPr/>
-      <p:sp>
-        <p:nvSpPr>
-          <p:cNvPr id="2" name="TextBox 1"/>
-          <p:cNvSpPr txBox="1"/>
-          <p:nvPr/>
-        </p:nvSpPr>
-        <p:spPr>
-          <a:xfrm>
-            <a:off x="822960" y="502920"/>
-            <a:ext cx="10515600" cy="365760"/>
-          </a:xfrm>
-          <a:prstGeom prst="rect">
-            <a:avLst/>
-          </a:prstGeom>
-          <a:noFill/>
-        </p:spPr>
-        <p:txBody>
-          <a:bodyPr wrap="square" anchor="t">
-            <a:spAutoFit/>
-          </a:bodyPr>
-          <a:lstStyle/>
-          <a:p>
-            <a:pPr algn="l"/>
-            <a:r>
-              <a:rPr sz="1400" b="1">
-                <a:solidFill>
-                  <a:srgbClr val="0F766E"/>
-                </a:solidFill>
-                <a:latin typeface="Noto Sans CJK SC"/>
-                <a:ea typeface="Noto Sans CJK SC"/>
-                <a:cs typeface="Noto Sans CJK SC"/>
-              </a:rPr>
-              <a:t>现场可以看到什么</a:t>
-            </a:r>
-          </a:p>
-        </p:txBody>
-      </p:sp>
-      <p:sp>
-        <p:nvSpPr>
-          <p:cNvPr id="3" name="TextBox 2"/>
-          <p:cNvSpPr txBox="1"/>
-          <p:nvPr/>
-        </p:nvSpPr>
-        <p:spPr>
-          <a:xfrm>
-            <a:off x="822960" y="868680"/>
-            <a:ext cx="10515600" cy="914400"/>
-          </a:xfrm>
-          <a:prstGeom prst="rect">
-            <a:avLst/>
-          </a:prstGeom>
-          <a:noFill/>
-        </p:spPr>
-        <p:txBody>
-          <a:bodyPr wrap="square" anchor="t">
-            <a:spAutoFit/>
-          </a:bodyPr>
-          <a:lstStyle/>
-          <a:p>
-            <a:pPr algn="l"/>
-            <a:r>
-              <a:rPr sz="3200" b="1">
-                <a:solidFill>
-                  <a:srgbClr val="0F172A"/>
-                </a:solidFill>
-                <a:latin typeface="Noto Sans CJK SC"/>
-                <a:ea typeface="Noto Sans CJK SC"/>
-                <a:cs typeface="Noto Sans CJK SC"/>
-              </a:rPr>
-              <a:t>现场 Demo：一笔高风险付款的完整拦截</a:t>
-            </a:r>
-          </a:p>
-        </p:txBody>
-      </p:sp>
-      <p:sp>
-        <p:nvSpPr>
-          <p:cNvPr id="4" name="TextBox 3"/>
-          <p:cNvSpPr txBox="1"/>
-          <p:nvPr/>
-        </p:nvSpPr>
-        <p:spPr>
-          <a:xfrm>
-            <a:off x="822960" y="1691640"/>
-            <a:ext cx="10515600" cy="548640"/>
-          </a:xfrm>
-          <a:prstGeom prst="rect">
-            <a:avLst/>
-          </a:prstGeom>
-          <a:noFill/>
-        </p:spPr>
-        <p:txBody>
-          <a:bodyPr wrap="square" anchor="t">
-            <a:spAutoFit/>
-          </a:bodyPr>
-          <a:lstStyle/>
-          <a:p>
-            <a:pPr algn="l"/>
-            <a:r>
-              <a:rPr sz="1500" b="0">
-                <a:solidFill>
-                  <a:srgbClr val="64748B"/>
-                </a:solidFill>
-                <a:latin typeface="Noto Sans CJK SC"/>
-                <a:ea typeface="Noto Sans CJK SC"/>
-                <a:cs typeface="Noto Sans CJK SC"/>
-              </a:rPr>
-              <a:t>现场可运行：新建付款→预检亮红→AI 信号→核实清除→双人放行→生成指令。</a:t>
-            </a:r>
-          </a:p>
-        </p:txBody>
-      </p:sp>
-      <p:pic>
-        <p:nvPicPr>
-          <p:cNvPr id="5" name="Picture 4" descr="demo.png"/>
-          <p:cNvPicPr>
-            <a:picLocks noChangeAspect="1"/>
-          </p:cNvPicPr>
-          <p:nvPr/>
-        </p:nvPicPr>
-        <p:blipFill>
-          <a:blip r:embed="rId2"/>
-          <a:stretch>
-            <a:fillRect/>
-          </a:stretch>
-        </p:blipFill>
-        <p:spPr>
-          <a:xfrm>
-            <a:off x="1234440" y="2286000"/>
-            <a:ext cx="9692640" cy="5452110"/>
-          </a:xfrm>
-          <a:prstGeom prst="rect">
-            <a:avLst/>
-          </a:prstGeom>
-        </p:spPr>
-      </p:pic>
-      <p:sp>
-        <p:nvSpPr>
-          <p:cNvPr id="6" name="TextBox 5"/>
-          <p:cNvSpPr txBox="1"/>
-          <p:nvPr/>
-        </p:nvSpPr>
-        <p:spPr>
-          <a:xfrm>
-            <a:off x="822960" y="6309360"/>
-            <a:ext cx="10515600" cy="365760"/>
-          </a:xfrm>
-          <a:prstGeom prst="rect">
-            <a:avLst/>
-          </a:prstGeom>
-          <a:noFill/>
-        </p:spPr>
-        <p:txBody>
-          <a:bodyPr wrap="square" anchor="t">
-            <a:spAutoFit/>
-          </a:bodyPr>
-          <a:lstStyle/>
-          <a:p>
-            <a:pPr algn="l"/>
-            <a:r>
-              <a:rPr sz="1100" b="0">
-                <a:solidFill>
-                  <a:srgbClr val="64748B"/>
-                </a:solidFill>
-                <a:latin typeface="Noto Sans CJK SC"/>
-                <a:ea typeface="Noto Sans CJK SC"/>
-                <a:cs typeface="Noto Sans CJK SC"/>
-              </a:rPr>
-              <a:t>现场可运行、可演示核心功能——不是 PPT 概念。可扫码访问在线应用实测。</a:t>
-            </a:r>
-          </a:p>
-        </p:txBody>
-      </p:sp>
-    </p:spTree>
-  </p:cSld>
-  <p:clrMapOvr>
-    <a:masterClrMapping/>
-  </p:clrMapOvr>
-</p:sld>
-</file>
-
 <file path=ppt/theme/theme1.xml><?xml version="1.0" encoding="utf-8"?>
 <a:theme xmlns:a="http://schemas.openxmlformats.org/drawingml/2006/main" name="Office Theme">
   <a:themeElements>

--- a/public/FlowGuard-Hackathon-Pitch.pptx
+++ b/public/FlowGuard-Hackathon-Pitch.pptx
@@ -8560,7 +8560,7 @@
         <p:spPr>
           <a:xfrm>
             <a:off x="8275320" y="1645920"/>
-            <a:ext cx="3544214" cy="4663440"/>
+            <a:ext cx="1135179" cy="4663440"/>
           </a:xfrm>
           <a:prstGeom prst="rect">
             <a:avLst/>
@@ -9274,7 +9274,7 @@
         <p:spPr>
           <a:xfrm>
             <a:off x="8275320" y="1645920"/>
-            <a:ext cx="3544214" cy="4663440"/>
+            <a:ext cx="2765181" cy="4663440"/>
           </a:xfrm>
           <a:prstGeom prst="rect">
             <a:avLst/>
@@ -9988,7 +9988,7 @@
         <p:spPr>
           <a:xfrm>
             <a:off x="8275320" y="1645920"/>
-            <a:ext cx="3544214" cy="4663440"/>
+            <a:ext cx="1588731" cy="4663440"/>
           </a:xfrm>
           <a:prstGeom prst="rect">
             <a:avLst/>
@@ -10702,7 +10702,7 @@
         <p:spPr>
           <a:xfrm>
             <a:off x="8275320" y="1645920"/>
-            <a:ext cx="3544214" cy="4663440"/>
+            <a:ext cx="1588731" cy="4663440"/>
           </a:xfrm>
           <a:prstGeom prst="rect">
             <a:avLst/>

--- a/public/FlowGuard-Hackathon-Pitch.pptx
+++ b/public/FlowGuard-Hackathon-Pitch.pptx
@@ -5686,7 +5686,7 @@
                 <a:ea typeface="Noto Sans CJK SC"/>
                 <a:cs typeface="Noto Sans CJK SC"/>
               </a:rPr>
-              <a:t>核心功能①：付款前退回风险预检</a:t>
+              <a:t>核心功能①：收款方信息预检-AI Agent</a:t>
             </a:r>
           </a:p>
         </p:txBody>
@@ -5804,7 +5804,7 @@
                 <a:ea typeface="Noto Sans CJK SC"/>
                 <a:cs typeface="Noto Sans CJK SC"/>
               </a:rPr>
-              <a:t>核心功能②：AI 补充风险信号+合规简报</a:t>
+              <a:t>核心功能②：多路径智能路由推荐引擎</a:t>
             </a:r>
           </a:p>
         </p:txBody>
@@ -5922,7 +5922,7 @@
                 <a:ea typeface="Noto Sans CJK SC"/>
                 <a:cs typeface="Noto Sans CJK SC"/>
               </a:rPr>
-              <a:t>核心功能③：双人审批+生成付款指令</a:t>
+              <a:t>核心功能③：分阶段里程碑付款工作台</a:t>
             </a:r>
           </a:p>
         </p:txBody>
@@ -6040,7 +6040,7 @@
                 <a:ea typeface="Noto Sans CJK SC"/>
                 <a:cs typeface="Noto Sans CJK SC"/>
               </a:rPr>
-              <a:t>核心功能④：里程碑条件结算工作台</a:t>
+              <a:t>核心功能④：统一结算状态与对账看板</a:t>
             </a:r>
           </a:p>
         </p:txBody>
@@ -7985,7 +7985,7 @@
                 <a:ea typeface="Noto Sans CJK SC"/>
                 <a:cs typeface="Noto Sans CJK SC"/>
               </a:rPr>
-              <a:t>付款前退回风险预检</a:t>
+              <a:t>收款方信息预检-AI Agent</a:t>
             </a:r>
           </a:p>
         </p:txBody>
@@ -8022,7 +8022,7 @@
                 <a:ea typeface="Noto Sans CJK SC"/>
                 <a:cs typeface="Noto Sans CJK SC"/>
               </a:rPr>
-              <a:t>确定性规则引擎：给出退回概率、命中风险因子、最可能的卡点。</a:t>
+              <a:t>收款账户信息智能校验、国别规则适配、退回风险评分、合规风险提示报告。</a:t>
             </a:r>
           </a:p>
         </p:txBody>
@@ -8103,7 +8103,7 @@
                 <a:ea typeface="Noto Sans CJK SC"/>
                 <a:cs typeface="Noto Sans CJK SC"/>
               </a:rPr>
-              <a:t>1. 先拦截，而非先失败</a:t>
+              <a:t>1. 账户信息智能校验</a:t>
             </a:r>
           </a:p>
         </p:txBody>
@@ -8140,7 +8140,7 @@
                 <a:ea typeface="Noto Sans CJK SC"/>
                 <a:cs typeface="Noto Sans CJK SC"/>
               </a:rPr>
-              <a:t>竞品在失败后对账；我们在提交前给出退回概率并指出卡点。</a:t>
+              <a:t>收款名/SWIFT/IBAN 一致性与账户状态校验，先拦截而非先失败。</a:t>
             </a:r>
           </a:p>
         </p:txBody>
@@ -8221,7 +8221,7 @@
                 <a:ea typeface="Noto Sans CJK SC"/>
                 <a:cs typeface="Noto Sans CJK SC"/>
               </a:rPr>
-              <a:t>2. 可解释</a:t>
+              <a:t>2. 国别规则适配</a:t>
             </a:r>
           </a:p>
         </p:txBody>
@@ -8258,7 +8258,7 @@
                 <a:ea typeface="Noto Sans CJK SC"/>
                 <a:cs typeface="Noto Sans CJK SC"/>
               </a:rPr>
-              <a:t>每个风险因子都能展开，告诉出纳为什么会被退、该补什么。</a:t>
+              <a:t>按收款人国家/币种自动适配该走廊的结算要求，省去每次重新摸规则。</a:t>
             </a:r>
           </a:p>
         </p:txBody>
@@ -8339,7 +8339,7 @@
                 <a:ea typeface="Noto Sans CJK SC"/>
                 <a:cs typeface="Noto Sans CJK SC"/>
               </a:rPr>
-              <a:t>3. 一键转核实</a:t>
+              <a:t>3. 退回风险评分</a:t>
             </a:r>
           </a:p>
         </p:txBody>
@@ -8376,7 +8376,7 @@
                 <a:ea typeface="Noto Sans CJK SC"/>
                 <a:cs typeface="Noto Sans CJK SC"/>
               </a:rPr>
-              <a:t>数据质量类因子可一键生成供应商核实工单，核实后自动清除/软化。</a:t>
+              <a:t>确定性规则引擎给出退回概率与命中因子；AI 补充语义/情境风险，只加警示、不降评分。</a:t>
             </a:r>
           </a:p>
         </p:txBody>
@@ -8457,7 +8457,7 @@
                 <a:ea typeface="Noto Sans CJK SC"/>
                 <a:cs typeface="Noto Sans CJK SC"/>
               </a:rPr>
-              <a:t>4. 为高风险把关</a:t>
+              <a:t>4. 合规风险提示报告</a:t>
             </a:r>
           </a:p>
         </p:txBody>
@@ -8494,7 +8494,7 @@
                 <a:ea typeface="Noto Sans CJK SC"/>
                 <a:cs typeface="Noto Sans CJK SC"/>
               </a:rPr>
-              <a:t>超大额、受限地区、休眠账户等自动进入高风险通道。</a:t>
+              <a:t>把检查项翻译成通俗解释与修复步骤，并可一键生成供应商核实工单。</a:t>
             </a:r>
           </a:p>
         </p:txBody>
@@ -8699,7 +8699,7 @@
                 <a:ea typeface="Noto Sans CJK SC"/>
                 <a:cs typeface="Noto Sans CJK SC"/>
               </a:rPr>
-              <a:t>AI 补充风险信号 + 合规简报</a:t>
+              <a:t>多路径智能路由推荐引擎</a:t>
             </a:r>
           </a:p>
         </p:txBody>
@@ -8736,7 +8736,7 @@
                 <a:ea typeface="Noto Sans CJK SC"/>
                 <a:cs typeface="Noto Sans CJK SC"/>
               </a:rPr>
-              <a:t>规则覆盖不了的语义与情境风险，交给 AI（DeepSeek）。</a:t>
+              <a:t>统一池管理多类持牌结算通道，输出最优路径对比建议——平台不执行付款。</a:t>
             </a:r>
           </a:p>
         </p:txBody>
@@ -8817,7 +8817,7 @@
                 <a:ea typeface="Noto Sans CJK SC"/>
                 <a:cs typeface="Noto Sans CJK SC"/>
               </a:rPr>
-              <a:t>1. 抓规则抓不到的</a:t>
+              <a:t>1. 统一通道池</a:t>
             </a:r>
           </a:p>
         </p:txBody>
@@ -8854,7 +8854,7 @@
                 <a:ea typeface="Noto Sans CJK SC"/>
                 <a:cs typeface="Noto Sans CJK SC"/>
               </a:rPr>
-              <a:t>语义矛盾、与历史失败的相似度、可能缺失的单据——只加警示，绝不降低评分。</a:t>
+              <a:t>传统电汇、跨境人民币、第三方跨境支付通道；境外主体可选通道含境外持牌数字结算服务商方案。</a:t>
             </a:r>
           </a:p>
         </p:txBody>
@@ -8935,7 +8935,7 @@
                 <a:ea typeface="Noto Sans CJK SC"/>
                 <a:cs typeface="Noto Sans CJK SC"/>
               </a:rPr>
-              <a:t>2. 合规简报</a:t>
+              <a:t>2. 多维度比价</a:t>
             </a:r>
           </a:p>
         </p:txBody>
@@ -8972,7 +8972,7 @@
                 <a:ea typeface="Noto Sans CJK SC"/>
                 <a:cs typeface="Noto Sans CJK SC"/>
               </a:rPr>
-              <a:t>把一堆检查项，翻译成出纳看得懂的通俗解释与修复步骤。</a:t>
+              <a:t>按费用、时效、退回率对各持牌通道自动排序，给出可解释的最优路径。</a:t>
             </a:r>
           </a:p>
         </p:txBody>
@@ -9053,7 +9053,7 @@
                 <a:ea typeface="Noto Sans CJK SC"/>
                 <a:cs typeface="Noto Sans CJK SC"/>
               </a:rPr>
-              <a:t>3. AI 起草核实消息</a:t>
+              <a:t>3. 只建议、不执行</a:t>
             </a:r>
           </a:p>
         </p:txBody>
@@ -9090,7 +9090,7 @@
                 <a:ea typeface="Noto Sans CJK SC"/>
                 <a:cs typeface="Noto Sans CJK SC"/>
               </a:rPr>
-              <a:t>自动向供应商起草精准、具体的求证消息，省去反复沟通。</a:t>
+              <a:t>平台仅输出最优路径对比建议，实际付款由持牌机构执行——平台不经手资金。</a:t>
             </a:r>
           </a:p>
         </p:txBody>
@@ -9171,7 +9171,7 @@
                 <a:ea typeface="Noto Sans CJK SC"/>
                 <a:cs typeface="Noto Sans CJK SC"/>
               </a:rPr>
-              <a:t>4. 为什么必须有 AI</a:t>
+              <a:t>4. 为什么要 AI</a:t>
             </a:r>
           </a:p>
         </p:txBody>
@@ -9208,7 +9208,7 @@
                 <a:ea typeface="Noto Sans CJK SC"/>
                 <a:cs typeface="Noto Sans CJK SC"/>
               </a:rPr>
-              <a:t>退回原因高度非结构化、随通道与国家变化；规则是骨架，AI 是识别隐藏风险的关键。</a:t>
+              <a:t>通道规则随国别/币种/额度多变，AI 帮助在多变约束下给出可解释的路径推荐。</a:t>
             </a:r>
           </a:p>
         </p:txBody>
@@ -9259,7 +9259,7 @@
       </p:sp>
       <p:pic>
         <p:nvPicPr>
-          <p:cNvPr id="18" name="Picture 17" descr="feat-ai.png"/>
+          <p:cNvPr id="18" name="Picture 17" descr="feat-route.png"/>
           <p:cNvPicPr>
             <a:picLocks noChangeAspect="1"/>
           </p:cNvPicPr>
@@ -9274,7 +9274,7 @@
         <p:spPr>
           <a:xfrm>
             <a:off x="8275320" y="1645920"/>
-            <a:ext cx="2765181" cy="4663440"/>
+            <a:ext cx="1457325" cy="4663440"/>
           </a:xfrm>
           <a:prstGeom prst="rect">
             <a:avLst/>
@@ -9413,7 +9413,7 @@
                 <a:ea typeface="Noto Sans CJK SC"/>
                 <a:cs typeface="Noto Sans CJK SC"/>
               </a:rPr>
-              <a:t>双人审批 + 生成付款指令</a:t>
+              <a:t>分阶段里程碑付款工作台</a:t>
             </a:r>
           </a:p>
         </p:txBody>
@@ -9450,7 +9450,7 @@
                 <a:ea typeface="Noto Sans CJK SC"/>
                 <a:cs typeface="Noto Sans CJK SC"/>
               </a:rPr>
-              <a:t>Maker-Checker 职责分离，服务端硬性禁止自我批准。</a:t>
+              <a:t>外包/项目付款节点台账管理，按里程碑进度设置触发条件；条件结算管理。</a:t>
             </a:r>
           </a:p>
         </p:txBody>
@@ -9531,7 +9531,7 @@
                 <a:ea typeface="Noto Sans CJK SC"/>
                 <a:cs typeface="Noto Sans CJK SC"/>
               </a:rPr>
-              <a:t>1. 第二签才放行</a:t>
+              <a:t>1. 节点台账管理</a:t>
             </a:r>
           </a:p>
         </p:txBody>
@@ -9568,7 +9568,7 @@
                 <a:ea typeface="Noto Sans CJK SC"/>
                 <a:cs typeface="Noto Sans CJK SC"/>
               </a:rPr>
-              <a:t>出纳(Maker)提交，复核人(Checker)第二签批准；高风险进第二签通道。</a:t>
+              <a:t>外包/项目付款节点集中管理，进度与金额一目了然。</a:t>
             </a:r>
           </a:p>
         </p:txBody>
@@ -9649,7 +9649,7 @@
                 <a:ea typeface="Noto Sans CJK SC"/>
                 <a:cs typeface="Noto Sans CJK SC"/>
               </a:rPr>
-              <a:t>2. 全程审计留痕</a:t>
+              <a:t>2. 里程碑触发条件</a:t>
             </a:r>
           </a:p>
         </p:txBody>
@@ -9686,7 +9686,7 @@
                 <a:ea typeface="Noto Sans CJK SC"/>
                 <a:cs typeface="Noto Sans CJK SC"/>
               </a:rPr>
-              <a:t>每次批准/退回都记录签批人与时间，写入历史。</a:t>
+              <a:t>按里程碑进度设置付款触发条件：待开始→进行中→待校验→已校验。</a:t>
             </a:r>
           </a:p>
         </p:txBody>
@@ -9767,7 +9767,7 @@
                 <a:ea typeface="Noto Sans CJK SC"/>
                 <a:cs typeface="Noto Sans CJK SC"/>
               </a:rPr>
-              <a:t>3. 产出是指令</a:t>
+              <a:t>3. 完成校验→放款提醒</a:t>
             </a:r>
           </a:p>
         </p:txBody>
@@ -9804,7 +9804,7 @@
                 <a:ea typeface="Noto Sans CJK SC"/>
                 <a:cs typeface="Noto Sans CJK SC"/>
               </a:rPr>
-              <a:t>批准=生成付款指令，交由持牌机构划付——平台不经手资金。</a:t>
+              <a:t>校验通过后向财务推送放款提醒，一键深链跳转付款流程。</a:t>
             </a:r>
           </a:p>
         </p:txBody>
@@ -9885,7 +9885,7 @@
                 <a:ea typeface="Noto Sans CJK SC"/>
                 <a:cs typeface="Noto Sans CJK SC"/>
               </a:rPr>
-              <a:t>4. 防错防内控</a:t>
+              <a:t>4. 合规边界</a:t>
             </a:r>
           </a:p>
         </p:txBody>
@@ -9922,7 +9922,7 @@
                 <a:ea typeface="Noto Sans CJK SC"/>
                 <a:cs typeface="Noto Sans CJK SC"/>
               </a:rPr>
-              <a:t>把关键控制点前置，减少人为疏漏造成的资金损失。</a:t>
+              <a:t>实际放款操作全部在银行/持牌结算机构完成——平台不托管、不放款。</a:t>
             </a:r>
           </a:p>
         </p:txBody>
@@ -9973,7 +9973,7 @@
       </p:sp>
       <p:pic>
         <p:nvPicPr>
-          <p:cNvPr id="18" name="Picture 17" descr="feat-review.png"/>
+          <p:cNvPr id="18" name="Picture 17" descr="feat-milestones.png"/>
           <p:cNvPicPr>
             <a:picLocks noChangeAspect="1"/>
           </p:cNvPicPr>
@@ -10127,7 +10127,7 @@
                 <a:ea typeface="Noto Sans CJK SC"/>
                 <a:cs typeface="Noto Sans CJK SC"/>
               </a:rPr>
-              <a:t>里程碑条件结算工作台</a:t>
+              <a:t>统一结算状态与对账看板</a:t>
             </a:r>
           </a:p>
         </p:txBody>
@@ -10164,7 +10164,7 @@
                 <a:ea typeface="Noto Sans CJK SC"/>
                 <a:cs typeface="Noto Sans CJK SC"/>
               </a:rPr>
-              <a:t>按里程碑进度设条件、校验通过后推送放款提醒；不托管、不放款。</a:t>
+              <a:t>聚合各通道汇款进度、中转链路信息、交易凭证，实现多笔跨国付款台账可视化与自动对账核销。</a:t>
             </a:r>
           </a:p>
         </p:txBody>
@@ -10245,7 +10245,7 @@
                 <a:ea typeface="Noto Sans CJK SC"/>
                 <a:cs typeface="Noto Sans CJK SC"/>
               </a:rPr>
-              <a:t>1. 项目/里程碑台账</a:t>
+              <a:t>1. 多通道进度聚合</a:t>
             </a:r>
           </a:p>
         </p:txBody>
@@ -10282,7 +10282,7 @@
                 <a:ea typeface="Noto Sans CJK SC"/>
                 <a:cs typeface="Noto Sans CJK SC"/>
               </a:rPr>
-              <a:t>外包/项目付款节点集中管理，进度与金额一目了然。</a:t>
+              <a:t>汇总各持牌通道的汇款进度与中转链路信息，钱走到哪一目了然。</a:t>
             </a:r>
           </a:p>
         </p:txBody>
@@ -10363,7 +10363,7 @@
                 <a:ea typeface="Noto Sans CJK SC"/>
                 <a:cs typeface="Noto Sans CJK SC"/>
               </a:rPr>
-              <a:t>2. 条件与状态流转</a:t>
+              <a:t>2. 凭证与台账可视化</a:t>
             </a:r>
           </a:p>
         </p:txBody>
@@ -10400,7 +10400,7 @@
                 <a:ea typeface="Noto Sans CJK SC"/>
                 <a:cs typeface="Noto Sans CJK SC"/>
               </a:rPr>
-              <a:t>待开始→进行中→待校验→已校验，逐节点可控。</a:t>
+              <a:t>聚合交易凭证，多笔跨国付款台账集中可视化管理。</a:t>
             </a:r>
           </a:p>
         </p:txBody>
@@ -10481,7 +10481,7 @@
                 <a:ea typeface="Noto Sans CJK SC"/>
                 <a:cs typeface="Noto Sans CJK SC"/>
               </a:rPr>
-              <a:t>3. 放款提醒→生成指令</a:t>
+              <a:t>3. 自动对账核销</a:t>
             </a:r>
           </a:p>
         </p:txBody>
@@ -10518,7 +10518,7 @@
                 <a:ea typeface="Noto Sans CJK SC"/>
                 <a:cs typeface="Noto Sans CJK SC"/>
               </a:rPr>
-              <a:t>校验通过弹出放款提醒，一键跳转生成付款指令。</a:t>
+              <a:t>应收 vs 实收、费用与汇兑损失自动匹配核销，并可导出对账单。</a:t>
             </a:r>
           </a:p>
         </p:txBody>
@@ -10599,7 +10599,7 @@
                 <a:ea typeface="Noto Sans CJK SC"/>
                 <a:cs typeface="Noto Sans CJK SC"/>
               </a:rPr>
-              <a:t>4. 合规边界</a:t>
+              <a:t>4. 结算链路透明</a:t>
             </a:r>
           </a:p>
         </p:txBody>
@@ -10636,7 +10636,7 @@
                 <a:ea typeface="Noto Sans CJK SC"/>
                 <a:cs typeface="Noto Sans CJK SC"/>
               </a:rPr>
-              <a:t>仅做条件结算管理，实际放款在银行/持牌机构完成。</a:t>
+              <a:t>结算全程可追踪；平台只做透明化追踪，不经手资金。</a:t>
             </a:r>
           </a:p>
         </p:txBody>
@@ -10687,7 +10687,7 @@
       </p:sp>
       <p:pic>
         <p:nvPicPr>
-          <p:cNvPr id="18" name="Picture 17" descr="feat-milestones.png"/>
+          <p:cNvPr id="18" name="Picture 17" descr="feat-reconcile.png"/>
           <p:cNvPicPr>
             <a:picLocks noChangeAspect="1"/>
           </p:cNvPicPr>

--- a/public/FlowGuard-Hackathon-Pitch.pptx
+++ b/public/FlowGuard-Hackathon-Pitch.pptx
@@ -7612,7 +7612,7 @@
                 <a:ea typeface="Noto Sans CJK SC"/>
                 <a:cs typeface="Noto Sans CJK SC"/>
               </a:rPr>
-              <a:t>双通道比价</a:t>
+              <a:t>多通道比价</a:t>
             </a:r>
           </a:p>
         </p:txBody>
@@ -7649,7 +7649,7 @@
                 <a:ea typeface="Noto Sans CJK SC"/>
                 <a:cs typeface="Noto Sans CJK SC"/>
               </a:rPr>
-              <a:t>稳定币直连 vs 本地法币，按费用/时效/退回率自动排序，给出可解释推荐。</a:t>
+              <a:t>统一池管理多类持牌结算通道，按费用/时效/退回率自动排序，给出可解释的最优路径推荐。</a:t>
             </a:r>
           </a:p>
         </p:txBody>

--- a/public/FlowGuard-Hackathon-Pitch.pptx
+++ b/public/FlowGuard-Hackathon-Pitch.pptx
@@ -7003,7 +7003,7 @@
                 <a:ea typeface="Noto Sans CJK SC"/>
                 <a:cs typeface="Noto Sans CJK SC"/>
               </a:rPr>
-              <a:t>退回多是收款信息/合规校验问题，却发起后才发现，代价几天到一周 → AI: draft the follow-up</a:t>
+              <a:t>被退回的以转账（尤其打款给个人收款人）最常见；退回多是收款信息/合规校验问题，却发起后才发现，代价几天到一周 → AI: draft the follow-up</a:t>
             </a:r>
           </a:p>
         </p:txBody>

--- a/public/FlowGuard-Hackathon-Pitch.pptx
+++ b/public/FlowGuard-Hackathon-Pitch.pptx
@@ -7413,7 +7413,7 @@
                 <a:ea typeface="Noto Sans CJK SC"/>
                 <a:cs typeface="Noto Sans CJK SC"/>
               </a:rPr>
-              <a:t>一句话：在把付款指令提交给持牌机构之前，先预检退回风险、比价选路、双人放行。</a:t>
+              <a:t>一句话：在把付款指令提交给持牌机构之前，先预检退回风险、比价选路、双人放行（大额可升级为多级/多签）。</a:t>
             </a:r>
           </a:p>
         </p:txBody>
@@ -7531,7 +7531,7 @@
                 <a:ea typeface="Noto Sans CJK SC"/>
                 <a:cs typeface="Noto Sans CJK SC"/>
               </a:rPr>
-              <a:t>预检→供应商核实→双人审批→生成付款指令(提交持牌机构)→到账确认→自动对账。</a:t>
+              <a:t>预检→供应商核实→双人审批（大额可升级多级/多签）→生成付款指令(提交持牌机构)→到账确认→自动对账。</a:t>
             </a:r>
           </a:p>
         </p:txBody>

--- a/public/FlowGuard-Hackathon-Pitch.pptx
+++ b/public/FlowGuard-Hackathon-Pitch.pptx
@@ -17,7 +17,6 @@
     <p:sldId id="265" r:id="rId16"/>
     <p:sldId id="266" r:id="rId17"/>
     <p:sldId id="267" r:id="rId18"/>
-    <p:sldId id="268" r:id="rId19"/>
   </p:sldIdLst>
   <p:sldSz cx="12191695" cy="6858000" type="screen4x3"/>
   <p:notesSz cx="6858000" cy="9144000"/>
@@ -3314,7 +3313,7 @@
                 <a:ea typeface="Noto Sans CJK SC"/>
                 <a:cs typeface="Noto Sans CJK SC"/>
               </a:rPr>
-              <a:t>现场可以看到什么</a:t>
+              <a:t>过程可说明 · 技术架构</a:t>
             </a:r>
           </a:p>
         </p:txBody>
@@ -3343,7 +3342,7 @@
           <a:p>
             <a:pPr algn="l"/>
             <a:r>
-              <a:rPr sz="3200" b="1">
+              <a:rPr sz="3600" b="1">
                 <a:solidFill>
                   <a:srgbClr val="0F172A"/>
                 </a:solidFill>
@@ -3351,7 +3350,7 @@
                 <a:ea typeface="Noto Sans CJK SC"/>
                 <a:cs typeface="Noto Sans CJK SC"/>
               </a:rPr>
-              <a:t>现场 Demo：一笔高风险付款的完整拦截</a:t>
+              <a:t>怎么实现的</a:t>
             </a:r>
           </a:p>
         </p:txBody>
@@ -3364,23 +3363,23 @@
         </p:nvSpPr>
         <p:spPr>
           <a:xfrm>
-            <a:off x="822960" y="1691640"/>
-            <a:ext cx="10515600" cy="548640"/>
-          </a:xfrm>
-          <a:prstGeom prst="rect">
-            <a:avLst/>
-          </a:prstGeom>
-          <a:noFill/>
-        </p:spPr>
-        <p:txBody>
-          <a:bodyPr wrap="square" anchor="t">
-            <a:spAutoFit/>
-          </a:bodyPr>
-          <a:lstStyle/>
-          <a:p>
-            <a:pPr algn="l"/>
-            <a:r>
-              <a:rPr sz="1500" b="0">
+            <a:off x="822960" y="1783080"/>
+            <a:ext cx="10515600" cy="731520"/>
+          </a:xfrm>
+          <a:prstGeom prst="rect">
+            <a:avLst/>
+          </a:prstGeom>
+          <a:noFill/>
+        </p:spPr>
+        <p:txBody>
+          <a:bodyPr wrap="square" anchor="t">
+            <a:spAutoFit/>
+          </a:bodyPr>
+          <a:lstStyle/>
+          <a:p>
+            <a:pPr algn="l"/>
+            <a:r>
+              <a:rPr sz="1600" b="0">
                 <a:solidFill>
                   <a:srgbClr val="64748B"/>
                 </a:solidFill>
@@ -3388,35 +3387,55 @@
                 <a:ea typeface="Noto Sans CJK SC"/>
                 <a:cs typeface="Noto Sans CJK SC"/>
               </a:rPr>
-              <a:t>现场可运行：新建付款→预检亮红→AI 信号→核实清除→双人放行→生成指令。</a:t>
-            </a:r>
-          </a:p>
-        </p:txBody>
-      </p:sp>
-      <p:pic>
-        <p:nvPicPr>
-          <p:cNvPr id="5" name="Picture 4" descr="demo.png"/>
-          <p:cNvPicPr>
-            <a:picLocks noChangeAspect="1"/>
-          </p:cNvPicPr>
-          <p:nvPr/>
-        </p:nvPicPr>
-        <p:blipFill>
-          <a:blip r:embed="rId2"/>
-          <a:stretch>
-            <a:fillRect/>
-          </a:stretch>
-        </p:blipFill>
-        <p:spPr>
-          <a:xfrm>
-            <a:off x="1234440" y="2286000"/>
-            <a:ext cx="9692640" cy="5452110"/>
-          </a:xfrm>
-          <a:prstGeom prst="rect">
-            <a:avLst/>
-          </a:prstGeom>
-        </p:spPr>
-      </p:pic>
+              <a:t>Next.js(App Router)+TypeScript+Tailwind；确定性规则引擎+DeepSeek AI；双语 i18n。</a:t>
+            </a:r>
+          </a:p>
+        </p:txBody>
+      </p:sp>
+      <p:sp>
+        <p:nvSpPr>
+          <p:cNvPr id="5" name="Rounded Rectangle 4"/>
+          <p:cNvSpPr/>
+          <p:nvPr/>
+        </p:nvSpPr>
+        <p:spPr>
+          <a:xfrm>
+            <a:off x="822960" y="2468880"/>
+            <a:ext cx="5143500" cy="1143000"/>
+          </a:xfrm>
+          <a:prstGeom prst="roundRect">
+            <a:avLst/>
+          </a:prstGeom>
+          <a:solidFill>
+            <a:srgbClr val="F1F5F9"/>
+          </a:solidFill>
+          <a:ln>
+            <a:noFill/>
+          </a:ln>
+          <a:effectLst/>
+        </p:spPr>
+        <p:style>
+          <a:lnRef idx="1">
+            <a:schemeClr val="accent1"/>
+          </a:lnRef>
+          <a:fillRef idx="3">
+            <a:schemeClr val="accent1"/>
+          </a:fillRef>
+          <a:effectRef idx="2">
+            <a:schemeClr val="accent1"/>
+          </a:effectRef>
+          <a:fontRef idx="minor">
+            <a:schemeClr val="lt1"/>
+          </a:fontRef>
+        </p:style>
+        <p:txBody>
+          <a:bodyPr rtlCol="0" anchor="ctr"/>
+          <a:lstStyle/>
+          <a:p>
+            <a:pPr algn="ctr"/>
+          </a:p>
+        </p:txBody>
+      </p:sp>
       <p:sp>
         <p:nvSpPr>
           <p:cNvPr id="6" name="TextBox 5"/>
@@ -3425,23 +3444,60 @@
         </p:nvSpPr>
         <p:spPr>
           <a:xfrm>
-            <a:off x="822960" y="6309360"/>
-            <a:ext cx="10515600" cy="365760"/>
-          </a:xfrm>
-          <a:prstGeom prst="rect">
-            <a:avLst/>
-          </a:prstGeom>
-          <a:noFill/>
-        </p:spPr>
-        <p:txBody>
-          <a:bodyPr wrap="square" anchor="t">
-            <a:spAutoFit/>
-          </a:bodyPr>
-          <a:lstStyle/>
-          <a:p>
-            <a:pPr algn="l"/>
-            <a:r>
-              <a:rPr sz="1100" b="0">
+            <a:off x="1005840" y="2578608"/>
+            <a:ext cx="4777740" cy="365760"/>
+          </a:xfrm>
+          <a:prstGeom prst="rect">
+            <a:avLst/>
+          </a:prstGeom>
+          <a:noFill/>
+        </p:spPr>
+        <p:txBody>
+          <a:bodyPr wrap="square" anchor="t">
+            <a:spAutoFit/>
+          </a:bodyPr>
+          <a:lstStyle/>
+          <a:p>
+            <a:pPr algn="l"/>
+            <a:r>
+              <a:rPr sz="1600" b="1">
+                <a:solidFill>
+                  <a:srgbClr val="0F172A"/>
+                </a:solidFill>
+                <a:latin typeface="Noto Sans CJK SC"/>
+                <a:ea typeface="Noto Sans CJK SC"/>
+                <a:cs typeface="Noto Sans CJK SC"/>
+              </a:rPr>
+              <a:t>前端 / 应用</a:t>
+            </a:r>
+          </a:p>
+        </p:txBody>
+      </p:sp>
+      <p:sp>
+        <p:nvSpPr>
+          <p:cNvPr id="7" name="TextBox 6"/>
+          <p:cNvSpPr txBox="1"/>
+          <p:nvPr/>
+        </p:nvSpPr>
+        <p:spPr>
+          <a:xfrm>
+            <a:off x="1005840" y="2971800"/>
+            <a:ext cx="4777740" cy="548640"/>
+          </a:xfrm>
+          <a:prstGeom prst="rect">
+            <a:avLst/>
+          </a:prstGeom>
+          <a:noFill/>
+        </p:spPr>
+        <p:txBody>
+          <a:bodyPr wrap="square" anchor="t">
+            <a:spAutoFit/>
+          </a:bodyPr>
+          <a:lstStyle/>
+          <a:p>
+            <a:pPr algn="l"/>
+            <a:r>
+              <a:rPr sz="1250" b="0">
                 <a:solidFill>
                   <a:srgbClr val="64748B"/>
                 </a:solidFill>
@@ -3449,7 +3505,361 @@
                 <a:ea typeface="Noto Sans CJK SC"/>
                 <a:cs typeface="Noto Sans CJK SC"/>
               </a:rPr>
-              <a:t>现场可运行、可演示核心功能——不是 PPT 概念。可扫码访问在线应用实测。</a:t>
+              <a:t>Next.js 15 + React + Tailwind，移动端优先；react-i18next 中英双语。</a:t>
+            </a:r>
+          </a:p>
+        </p:txBody>
+      </p:sp>
+      <p:sp>
+        <p:nvSpPr>
+          <p:cNvPr id="8" name="Rounded Rectangle 7"/>
+          <p:cNvSpPr/>
+          <p:nvPr/>
+        </p:nvSpPr>
+        <p:spPr>
+          <a:xfrm>
+            <a:off x="6195060" y="2468880"/>
+            <a:ext cx="5143500" cy="1143000"/>
+          </a:xfrm>
+          <a:prstGeom prst="roundRect">
+            <a:avLst/>
+          </a:prstGeom>
+          <a:solidFill>
+            <a:srgbClr val="F1F5F9"/>
+          </a:solidFill>
+          <a:ln>
+            <a:noFill/>
+          </a:ln>
+          <a:effectLst/>
+        </p:spPr>
+        <p:style>
+          <a:lnRef idx="1">
+            <a:schemeClr val="accent1"/>
+          </a:lnRef>
+          <a:fillRef idx="3">
+            <a:schemeClr val="accent1"/>
+          </a:fillRef>
+          <a:effectRef idx="2">
+            <a:schemeClr val="accent1"/>
+          </a:effectRef>
+          <a:fontRef idx="minor">
+            <a:schemeClr val="lt1"/>
+          </a:fontRef>
+        </p:style>
+        <p:txBody>
+          <a:bodyPr rtlCol="0" anchor="ctr"/>
+          <a:lstStyle/>
+          <a:p>
+            <a:pPr algn="ctr"/>
+          </a:p>
+        </p:txBody>
+      </p:sp>
+      <p:sp>
+        <p:nvSpPr>
+          <p:cNvPr id="9" name="TextBox 8"/>
+          <p:cNvSpPr txBox="1"/>
+          <p:nvPr/>
+        </p:nvSpPr>
+        <p:spPr>
+          <a:xfrm>
+            <a:off x="6377940" y="2578608"/>
+            <a:ext cx="4777740" cy="365760"/>
+          </a:xfrm>
+          <a:prstGeom prst="rect">
+            <a:avLst/>
+          </a:prstGeom>
+          <a:noFill/>
+        </p:spPr>
+        <p:txBody>
+          <a:bodyPr wrap="square" anchor="t">
+            <a:spAutoFit/>
+          </a:bodyPr>
+          <a:lstStyle/>
+          <a:p>
+            <a:pPr algn="l"/>
+            <a:r>
+              <a:rPr sz="1600" b="1">
+                <a:solidFill>
+                  <a:srgbClr val="0F172A"/>
+                </a:solidFill>
+                <a:latin typeface="Noto Sans CJK SC"/>
+                <a:ea typeface="Noto Sans CJK SC"/>
+                <a:cs typeface="Noto Sans CJK SC"/>
+              </a:rPr>
+              <a:t>风控内核</a:t>
+            </a:r>
+          </a:p>
+        </p:txBody>
+      </p:sp>
+      <p:sp>
+        <p:nvSpPr>
+          <p:cNvPr id="10" name="TextBox 9"/>
+          <p:cNvSpPr txBox="1"/>
+          <p:nvPr/>
+        </p:nvSpPr>
+        <p:spPr>
+          <a:xfrm>
+            <a:off x="6377940" y="2971800"/>
+            <a:ext cx="4777740" cy="548640"/>
+          </a:xfrm>
+          <a:prstGeom prst="rect">
+            <a:avLst/>
+          </a:prstGeom>
+          <a:noFill/>
+        </p:spPr>
+        <p:txBody>
+          <a:bodyPr wrap="square" anchor="t">
+            <a:spAutoFit/>
+          </a:bodyPr>
+          <a:lstStyle/>
+          <a:p>
+            <a:pPr algn="l"/>
+            <a:r>
+              <a:rPr sz="1250" b="0">
+                <a:solidFill>
+                  <a:srgbClr val="64748B"/>
+                </a:solidFill>
+                <a:latin typeface="Noto Sans CJK SC"/>
+                <a:ea typeface="Noto Sans CJK SC"/>
+                <a:cs typeface="Noto Sans CJK SC"/>
+              </a:rPr>
+              <a:t>确定性退回风险规则引擎(可解释、可复现) + DeepSeek 作为补充语义信号层。</a:t>
+            </a:r>
+          </a:p>
+        </p:txBody>
+      </p:sp>
+      <p:sp>
+        <p:nvSpPr>
+          <p:cNvPr id="11" name="Rounded Rectangle 10"/>
+          <p:cNvSpPr/>
+          <p:nvPr/>
+        </p:nvSpPr>
+        <p:spPr>
+          <a:xfrm>
+            <a:off x="822960" y="3840480"/>
+            <a:ext cx="5143500" cy="1143000"/>
+          </a:xfrm>
+          <a:prstGeom prst="roundRect">
+            <a:avLst/>
+          </a:prstGeom>
+          <a:solidFill>
+            <a:srgbClr val="F1F5F9"/>
+          </a:solidFill>
+          <a:ln>
+            <a:noFill/>
+          </a:ln>
+          <a:effectLst/>
+        </p:spPr>
+        <p:style>
+          <a:lnRef idx="1">
+            <a:schemeClr val="accent1"/>
+          </a:lnRef>
+          <a:fillRef idx="3">
+            <a:schemeClr val="accent1"/>
+          </a:fillRef>
+          <a:effectRef idx="2">
+            <a:schemeClr val="accent1"/>
+          </a:effectRef>
+          <a:fontRef idx="minor">
+            <a:schemeClr val="lt1"/>
+          </a:fontRef>
+        </p:style>
+        <p:txBody>
+          <a:bodyPr rtlCol="0" anchor="ctr"/>
+          <a:lstStyle/>
+          <a:p>
+            <a:pPr algn="ctr"/>
+          </a:p>
+        </p:txBody>
+      </p:sp>
+      <p:sp>
+        <p:nvSpPr>
+          <p:cNvPr id="12" name="TextBox 11"/>
+          <p:cNvSpPr txBox="1"/>
+          <p:nvPr/>
+        </p:nvSpPr>
+        <p:spPr>
+          <a:xfrm>
+            <a:off x="1005840" y="3950208"/>
+            <a:ext cx="4777740" cy="365760"/>
+          </a:xfrm>
+          <a:prstGeom prst="rect">
+            <a:avLst/>
+          </a:prstGeom>
+          <a:noFill/>
+        </p:spPr>
+        <p:txBody>
+          <a:bodyPr wrap="square" anchor="t">
+            <a:spAutoFit/>
+          </a:bodyPr>
+          <a:lstStyle/>
+          <a:p>
+            <a:pPr algn="l"/>
+            <a:r>
+              <a:rPr sz="1600" b="1">
+                <a:solidFill>
+                  <a:srgbClr val="0F172A"/>
+                </a:solidFill>
+                <a:latin typeface="Noto Sans CJK SC"/>
+                <a:ea typeface="Noto Sans CJK SC"/>
+                <a:cs typeface="Noto Sans CJK SC"/>
+              </a:rPr>
+              <a:t>数据与流转</a:t>
+            </a:r>
+          </a:p>
+        </p:txBody>
+      </p:sp>
+      <p:sp>
+        <p:nvSpPr>
+          <p:cNvPr id="13" name="TextBox 12"/>
+          <p:cNvSpPr txBox="1"/>
+          <p:nvPr/>
+        </p:nvSpPr>
+        <p:spPr>
+          <a:xfrm>
+            <a:off x="1005840" y="4343400"/>
+            <a:ext cx="4777740" cy="548640"/>
+          </a:xfrm>
+          <a:prstGeom prst="rect">
+            <a:avLst/>
+          </a:prstGeom>
+          <a:noFill/>
+        </p:spPr>
+        <p:txBody>
+          <a:bodyPr wrap="square" anchor="t">
+            <a:spAutoFit/>
+          </a:bodyPr>
+          <a:lstStyle/>
+          <a:p>
+            <a:pPr algn="l"/>
+            <a:r>
+              <a:rPr sz="1250" b="0">
+                <a:solidFill>
+                  <a:srgbClr val="64748B"/>
+                </a:solidFill>
+                <a:latin typeface="Noto Sans CJK SC"/>
+                <a:ea typeface="Noto Sans CJK SC"/>
+                <a:cs typeface="Noto Sans CJK SC"/>
+              </a:rPr>
+              <a:t>付款指令/收款人台账/工单/到账确认/对账 全链路数据模型。</a:t>
+            </a:r>
+          </a:p>
+        </p:txBody>
+      </p:sp>
+      <p:sp>
+        <p:nvSpPr>
+          <p:cNvPr id="14" name="Rounded Rectangle 13"/>
+          <p:cNvSpPr/>
+          <p:nvPr/>
+        </p:nvSpPr>
+        <p:spPr>
+          <a:xfrm>
+            <a:off x="6195060" y="3840480"/>
+            <a:ext cx="5143500" cy="1143000"/>
+          </a:xfrm>
+          <a:prstGeom prst="roundRect">
+            <a:avLst/>
+          </a:prstGeom>
+          <a:solidFill>
+            <a:srgbClr val="F1F5F9"/>
+          </a:solidFill>
+          <a:ln>
+            <a:noFill/>
+          </a:ln>
+          <a:effectLst/>
+        </p:spPr>
+        <p:style>
+          <a:lnRef idx="1">
+            <a:schemeClr val="accent1"/>
+          </a:lnRef>
+          <a:fillRef idx="3">
+            <a:schemeClr val="accent1"/>
+          </a:fillRef>
+          <a:effectRef idx="2">
+            <a:schemeClr val="accent1"/>
+          </a:effectRef>
+          <a:fontRef idx="minor">
+            <a:schemeClr val="lt1"/>
+          </a:fontRef>
+        </p:style>
+        <p:txBody>
+          <a:bodyPr rtlCol="0" anchor="ctr"/>
+          <a:lstStyle/>
+          <a:p>
+            <a:pPr algn="ctr"/>
+          </a:p>
+        </p:txBody>
+      </p:sp>
+      <p:sp>
+        <p:nvSpPr>
+          <p:cNvPr id="15" name="TextBox 14"/>
+          <p:cNvSpPr txBox="1"/>
+          <p:nvPr/>
+        </p:nvSpPr>
+        <p:spPr>
+          <a:xfrm>
+            <a:off x="6377940" y="3950208"/>
+            <a:ext cx="4777740" cy="365760"/>
+          </a:xfrm>
+          <a:prstGeom prst="rect">
+            <a:avLst/>
+          </a:prstGeom>
+          <a:noFill/>
+        </p:spPr>
+        <p:txBody>
+          <a:bodyPr wrap="square" anchor="t">
+            <a:spAutoFit/>
+          </a:bodyPr>
+          <a:lstStyle/>
+          <a:p>
+            <a:pPr algn="l"/>
+            <a:r>
+              <a:rPr sz="1600" b="1">
+                <a:solidFill>
+                  <a:srgbClr val="0F172A"/>
+                </a:solidFill>
+                <a:latin typeface="Noto Sans CJK SC"/>
+                <a:ea typeface="Noto Sans CJK SC"/>
+                <a:cs typeface="Noto Sans CJK SC"/>
+              </a:rPr>
+              <a:t>工程质量</a:t>
+            </a:r>
+          </a:p>
+        </p:txBody>
+      </p:sp>
+      <p:sp>
+        <p:nvSpPr>
+          <p:cNvPr id="16" name="TextBox 15"/>
+          <p:cNvSpPr txBox="1"/>
+          <p:nvPr/>
+        </p:nvSpPr>
+        <p:spPr>
+          <a:xfrm>
+            <a:off x="6377940" y="4343400"/>
+            <a:ext cx="4777740" cy="548640"/>
+          </a:xfrm>
+          <a:prstGeom prst="rect">
+            <a:avLst/>
+          </a:prstGeom>
+          <a:noFill/>
+        </p:spPr>
+        <p:txBody>
+          <a:bodyPr wrap="square" anchor="t">
+            <a:spAutoFit/>
+          </a:bodyPr>
+          <a:lstStyle/>
+          <a:p>
+            <a:pPr algn="l"/>
+            <a:r>
+              <a:rPr sz="1250" b="0">
+                <a:solidFill>
+                  <a:srgbClr val="64748B"/>
+                </a:solidFill>
+                <a:latin typeface="Noto Sans CJK SC"/>
+                <a:ea typeface="Noto Sans CJK SC"/>
+                <a:cs typeface="Noto Sans CJK SC"/>
+              </a:rPr>
+              <a:t>全站 TypeScript 0 error、双语键 411/411 对齐、关键路由端到端可跑。</a:t>
             </a:r>
           </a:p>
         </p:txBody>
@@ -3463,615 +3873,6 @@
 </file>
 
 <file path=ppt/slides/slide11.xml><?xml version="1.0" encoding="utf-8"?>
-<p:sld xmlns:a="http://schemas.openxmlformats.org/drawingml/2006/main" xmlns:p="http://schemas.openxmlformats.org/presentationml/2006/main" xmlns:r="http://schemas.openxmlformats.org/officeDocument/2006/relationships">
-  <p:cSld>
-    <p:bg>
-      <p:bgPr>
-        <a:solidFill>
-          <a:srgbClr val="FFFFFF"/>
-        </a:solidFill>
-        <a:effectLst/>
-      </p:bgPr>
-    </p:bg>
-    <p:spTree>
-      <p:nvGrpSpPr>
-        <p:cNvPr id="1" name=""/>
-        <p:cNvGrpSpPr/>
-        <p:nvPr/>
-      </p:nvGrpSpPr>
-      <p:grpSpPr/>
-      <p:sp>
-        <p:nvSpPr>
-          <p:cNvPr id="2" name="TextBox 1"/>
-          <p:cNvSpPr txBox="1"/>
-          <p:nvPr/>
-        </p:nvSpPr>
-        <p:spPr>
-          <a:xfrm>
-            <a:off x="822960" y="502920"/>
-            <a:ext cx="10515600" cy="365760"/>
-          </a:xfrm>
-          <a:prstGeom prst="rect">
-            <a:avLst/>
-          </a:prstGeom>
-          <a:noFill/>
-        </p:spPr>
-        <p:txBody>
-          <a:bodyPr wrap="square" anchor="t">
-            <a:spAutoFit/>
-          </a:bodyPr>
-          <a:lstStyle/>
-          <a:p>
-            <a:pPr algn="l"/>
-            <a:r>
-              <a:rPr sz="1400" b="1">
-                <a:solidFill>
-                  <a:srgbClr val="0F766E"/>
-                </a:solidFill>
-                <a:latin typeface="Noto Sans CJK SC"/>
-                <a:ea typeface="Noto Sans CJK SC"/>
-                <a:cs typeface="Noto Sans CJK SC"/>
-              </a:rPr>
-              <a:t>过程可说明 · 技术架构</a:t>
-            </a:r>
-          </a:p>
-        </p:txBody>
-      </p:sp>
-      <p:sp>
-        <p:nvSpPr>
-          <p:cNvPr id="3" name="TextBox 2"/>
-          <p:cNvSpPr txBox="1"/>
-          <p:nvPr/>
-        </p:nvSpPr>
-        <p:spPr>
-          <a:xfrm>
-            <a:off x="822960" y="868680"/>
-            <a:ext cx="10515600" cy="914400"/>
-          </a:xfrm>
-          <a:prstGeom prst="rect">
-            <a:avLst/>
-          </a:prstGeom>
-          <a:noFill/>
-        </p:spPr>
-        <p:txBody>
-          <a:bodyPr wrap="square" anchor="t">
-            <a:spAutoFit/>
-          </a:bodyPr>
-          <a:lstStyle/>
-          <a:p>
-            <a:pPr algn="l"/>
-            <a:r>
-              <a:rPr sz="3600" b="1">
-                <a:solidFill>
-                  <a:srgbClr val="0F172A"/>
-                </a:solidFill>
-                <a:latin typeface="Noto Sans CJK SC"/>
-                <a:ea typeface="Noto Sans CJK SC"/>
-                <a:cs typeface="Noto Sans CJK SC"/>
-              </a:rPr>
-              <a:t>怎么实现的</a:t>
-            </a:r>
-          </a:p>
-        </p:txBody>
-      </p:sp>
-      <p:sp>
-        <p:nvSpPr>
-          <p:cNvPr id="4" name="TextBox 3"/>
-          <p:cNvSpPr txBox="1"/>
-          <p:nvPr/>
-        </p:nvSpPr>
-        <p:spPr>
-          <a:xfrm>
-            <a:off x="822960" y="1783080"/>
-            <a:ext cx="10515600" cy="731520"/>
-          </a:xfrm>
-          <a:prstGeom prst="rect">
-            <a:avLst/>
-          </a:prstGeom>
-          <a:noFill/>
-        </p:spPr>
-        <p:txBody>
-          <a:bodyPr wrap="square" anchor="t">
-            <a:spAutoFit/>
-          </a:bodyPr>
-          <a:lstStyle/>
-          <a:p>
-            <a:pPr algn="l"/>
-            <a:r>
-              <a:rPr sz="1600" b="0">
-                <a:solidFill>
-                  <a:srgbClr val="64748B"/>
-                </a:solidFill>
-                <a:latin typeface="Noto Sans CJK SC"/>
-                <a:ea typeface="Noto Sans CJK SC"/>
-                <a:cs typeface="Noto Sans CJK SC"/>
-              </a:rPr>
-              <a:t>Next.js(App Router)+TypeScript+Tailwind；确定性规则引擎+DeepSeek AI；双语 i18n。</a:t>
-            </a:r>
-          </a:p>
-        </p:txBody>
-      </p:sp>
-      <p:sp>
-        <p:nvSpPr>
-          <p:cNvPr id="5" name="Rounded Rectangle 4"/>
-          <p:cNvSpPr/>
-          <p:nvPr/>
-        </p:nvSpPr>
-        <p:spPr>
-          <a:xfrm>
-            <a:off x="822960" y="2468880"/>
-            <a:ext cx="5143500" cy="1143000"/>
-          </a:xfrm>
-          <a:prstGeom prst="roundRect">
-            <a:avLst/>
-          </a:prstGeom>
-          <a:solidFill>
-            <a:srgbClr val="F1F5F9"/>
-          </a:solidFill>
-          <a:ln>
-            <a:noFill/>
-          </a:ln>
-          <a:effectLst/>
-        </p:spPr>
-        <p:style>
-          <a:lnRef idx="1">
-            <a:schemeClr val="accent1"/>
-          </a:lnRef>
-          <a:fillRef idx="3">
-            <a:schemeClr val="accent1"/>
-          </a:fillRef>
-          <a:effectRef idx="2">
-            <a:schemeClr val="accent1"/>
-          </a:effectRef>
-          <a:fontRef idx="minor">
-            <a:schemeClr val="lt1"/>
-          </a:fontRef>
-        </p:style>
-        <p:txBody>
-          <a:bodyPr rtlCol="0" anchor="ctr"/>
-          <a:lstStyle/>
-          <a:p>
-            <a:pPr algn="ctr"/>
-          </a:p>
-        </p:txBody>
-      </p:sp>
-      <p:sp>
-        <p:nvSpPr>
-          <p:cNvPr id="6" name="TextBox 5"/>
-          <p:cNvSpPr txBox="1"/>
-          <p:nvPr/>
-        </p:nvSpPr>
-        <p:spPr>
-          <a:xfrm>
-            <a:off x="1005840" y="2578608"/>
-            <a:ext cx="4777740" cy="365760"/>
-          </a:xfrm>
-          <a:prstGeom prst="rect">
-            <a:avLst/>
-          </a:prstGeom>
-          <a:noFill/>
-        </p:spPr>
-        <p:txBody>
-          <a:bodyPr wrap="square" anchor="t">
-            <a:spAutoFit/>
-          </a:bodyPr>
-          <a:lstStyle/>
-          <a:p>
-            <a:pPr algn="l"/>
-            <a:r>
-              <a:rPr sz="1600" b="1">
-                <a:solidFill>
-                  <a:srgbClr val="0F172A"/>
-                </a:solidFill>
-                <a:latin typeface="Noto Sans CJK SC"/>
-                <a:ea typeface="Noto Sans CJK SC"/>
-                <a:cs typeface="Noto Sans CJK SC"/>
-              </a:rPr>
-              <a:t>前端 / 应用</a:t>
-            </a:r>
-          </a:p>
-        </p:txBody>
-      </p:sp>
-      <p:sp>
-        <p:nvSpPr>
-          <p:cNvPr id="7" name="TextBox 6"/>
-          <p:cNvSpPr txBox="1"/>
-          <p:nvPr/>
-        </p:nvSpPr>
-        <p:spPr>
-          <a:xfrm>
-            <a:off x="1005840" y="2971800"/>
-            <a:ext cx="4777740" cy="548640"/>
-          </a:xfrm>
-          <a:prstGeom prst="rect">
-            <a:avLst/>
-          </a:prstGeom>
-          <a:noFill/>
-        </p:spPr>
-        <p:txBody>
-          <a:bodyPr wrap="square" anchor="t">
-            <a:spAutoFit/>
-          </a:bodyPr>
-          <a:lstStyle/>
-          <a:p>
-            <a:pPr algn="l"/>
-            <a:r>
-              <a:rPr sz="1250" b="0">
-                <a:solidFill>
-                  <a:srgbClr val="64748B"/>
-                </a:solidFill>
-                <a:latin typeface="Noto Sans CJK SC"/>
-                <a:ea typeface="Noto Sans CJK SC"/>
-                <a:cs typeface="Noto Sans CJK SC"/>
-              </a:rPr>
-              <a:t>Next.js 15 + React + Tailwind，移动端优先；react-i18next 中英双语。</a:t>
-            </a:r>
-          </a:p>
-        </p:txBody>
-      </p:sp>
-      <p:sp>
-        <p:nvSpPr>
-          <p:cNvPr id="8" name="Rounded Rectangle 7"/>
-          <p:cNvSpPr/>
-          <p:nvPr/>
-        </p:nvSpPr>
-        <p:spPr>
-          <a:xfrm>
-            <a:off x="6195060" y="2468880"/>
-            <a:ext cx="5143500" cy="1143000"/>
-          </a:xfrm>
-          <a:prstGeom prst="roundRect">
-            <a:avLst/>
-          </a:prstGeom>
-          <a:solidFill>
-            <a:srgbClr val="F1F5F9"/>
-          </a:solidFill>
-          <a:ln>
-            <a:noFill/>
-          </a:ln>
-          <a:effectLst/>
-        </p:spPr>
-        <p:style>
-          <a:lnRef idx="1">
-            <a:schemeClr val="accent1"/>
-          </a:lnRef>
-          <a:fillRef idx="3">
-            <a:schemeClr val="accent1"/>
-          </a:fillRef>
-          <a:effectRef idx="2">
-            <a:schemeClr val="accent1"/>
-          </a:effectRef>
-          <a:fontRef idx="minor">
-            <a:schemeClr val="lt1"/>
-          </a:fontRef>
-        </p:style>
-        <p:txBody>
-          <a:bodyPr rtlCol="0" anchor="ctr"/>
-          <a:lstStyle/>
-          <a:p>
-            <a:pPr algn="ctr"/>
-          </a:p>
-        </p:txBody>
-      </p:sp>
-      <p:sp>
-        <p:nvSpPr>
-          <p:cNvPr id="9" name="TextBox 8"/>
-          <p:cNvSpPr txBox="1"/>
-          <p:nvPr/>
-        </p:nvSpPr>
-        <p:spPr>
-          <a:xfrm>
-            <a:off x="6377940" y="2578608"/>
-            <a:ext cx="4777740" cy="365760"/>
-          </a:xfrm>
-          <a:prstGeom prst="rect">
-            <a:avLst/>
-          </a:prstGeom>
-          <a:noFill/>
-        </p:spPr>
-        <p:txBody>
-          <a:bodyPr wrap="square" anchor="t">
-            <a:spAutoFit/>
-          </a:bodyPr>
-          <a:lstStyle/>
-          <a:p>
-            <a:pPr algn="l"/>
-            <a:r>
-              <a:rPr sz="1600" b="1">
-                <a:solidFill>
-                  <a:srgbClr val="0F172A"/>
-                </a:solidFill>
-                <a:latin typeface="Noto Sans CJK SC"/>
-                <a:ea typeface="Noto Sans CJK SC"/>
-                <a:cs typeface="Noto Sans CJK SC"/>
-              </a:rPr>
-              <a:t>风控内核</a:t>
-            </a:r>
-          </a:p>
-        </p:txBody>
-      </p:sp>
-      <p:sp>
-        <p:nvSpPr>
-          <p:cNvPr id="10" name="TextBox 9"/>
-          <p:cNvSpPr txBox="1"/>
-          <p:nvPr/>
-        </p:nvSpPr>
-        <p:spPr>
-          <a:xfrm>
-            <a:off x="6377940" y="2971800"/>
-            <a:ext cx="4777740" cy="548640"/>
-          </a:xfrm>
-          <a:prstGeom prst="rect">
-            <a:avLst/>
-          </a:prstGeom>
-          <a:noFill/>
-        </p:spPr>
-        <p:txBody>
-          <a:bodyPr wrap="square" anchor="t">
-            <a:spAutoFit/>
-          </a:bodyPr>
-          <a:lstStyle/>
-          <a:p>
-            <a:pPr algn="l"/>
-            <a:r>
-              <a:rPr sz="1250" b="0">
-                <a:solidFill>
-                  <a:srgbClr val="64748B"/>
-                </a:solidFill>
-                <a:latin typeface="Noto Sans CJK SC"/>
-                <a:ea typeface="Noto Sans CJK SC"/>
-                <a:cs typeface="Noto Sans CJK SC"/>
-              </a:rPr>
-              <a:t>确定性退回风险规则引擎(可解释、可复现) + DeepSeek 作为补充语义信号层。</a:t>
-            </a:r>
-          </a:p>
-        </p:txBody>
-      </p:sp>
-      <p:sp>
-        <p:nvSpPr>
-          <p:cNvPr id="11" name="Rounded Rectangle 10"/>
-          <p:cNvSpPr/>
-          <p:nvPr/>
-        </p:nvSpPr>
-        <p:spPr>
-          <a:xfrm>
-            <a:off x="822960" y="3840480"/>
-            <a:ext cx="5143500" cy="1143000"/>
-          </a:xfrm>
-          <a:prstGeom prst="roundRect">
-            <a:avLst/>
-          </a:prstGeom>
-          <a:solidFill>
-            <a:srgbClr val="F1F5F9"/>
-          </a:solidFill>
-          <a:ln>
-            <a:noFill/>
-          </a:ln>
-          <a:effectLst/>
-        </p:spPr>
-        <p:style>
-          <a:lnRef idx="1">
-            <a:schemeClr val="accent1"/>
-          </a:lnRef>
-          <a:fillRef idx="3">
-            <a:schemeClr val="accent1"/>
-          </a:fillRef>
-          <a:effectRef idx="2">
-            <a:schemeClr val="accent1"/>
-          </a:effectRef>
-          <a:fontRef idx="minor">
-            <a:schemeClr val="lt1"/>
-          </a:fontRef>
-        </p:style>
-        <p:txBody>
-          <a:bodyPr rtlCol="0" anchor="ctr"/>
-          <a:lstStyle/>
-          <a:p>
-            <a:pPr algn="ctr"/>
-          </a:p>
-        </p:txBody>
-      </p:sp>
-      <p:sp>
-        <p:nvSpPr>
-          <p:cNvPr id="12" name="TextBox 11"/>
-          <p:cNvSpPr txBox="1"/>
-          <p:nvPr/>
-        </p:nvSpPr>
-        <p:spPr>
-          <a:xfrm>
-            <a:off x="1005840" y="3950208"/>
-            <a:ext cx="4777740" cy="365760"/>
-          </a:xfrm>
-          <a:prstGeom prst="rect">
-            <a:avLst/>
-          </a:prstGeom>
-          <a:noFill/>
-        </p:spPr>
-        <p:txBody>
-          <a:bodyPr wrap="square" anchor="t">
-            <a:spAutoFit/>
-          </a:bodyPr>
-          <a:lstStyle/>
-          <a:p>
-            <a:pPr algn="l"/>
-            <a:r>
-              <a:rPr sz="1600" b="1">
-                <a:solidFill>
-                  <a:srgbClr val="0F172A"/>
-                </a:solidFill>
-                <a:latin typeface="Noto Sans CJK SC"/>
-                <a:ea typeface="Noto Sans CJK SC"/>
-                <a:cs typeface="Noto Sans CJK SC"/>
-              </a:rPr>
-              <a:t>数据与流转</a:t>
-            </a:r>
-          </a:p>
-        </p:txBody>
-      </p:sp>
-      <p:sp>
-        <p:nvSpPr>
-          <p:cNvPr id="13" name="TextBox 12"/>
-          <p:cNvSpPr txBox="1"/>
-          <p:nvPr/>
-        </p:nvSpPr>
-        <p:spPr>
-          <a:xfrm>
-            <a:off x="1005840" y="4343400"/>
-            <a:ext cx="4777740" cy="548640"/>
-          </a:xfrm>
-          <a:prstGeom prst="rect">
-            <a:avLst/>
-          </a:prstGeom>
-          <a:noFill/>
-        </p:spPr>
-        <p:txBody>
-          <a:bodyPr wrap="square" anchor="t">
-            <a:spAutoFit/>
-          </a:bodyPr>
-          <a:lstStyle/>
-          <a:p>
-            <a:pPr algn="l"/>
-            <a:r>
-              <a:rPr sz="1250" b="0">
-                <a:solidFill>
-                  <a:srgbClr val="64748B"/>
-                </a:solidFill>
-                <a:latin typeface="Noto Sans CJK SC"/>
-                <a:ea typeface="Noto Sans CJK SC"/>
-                <a:cs typeface="Noto Sans CJK SC"/>
-              </a:rPr>
-              <a:t>付款指令/收款人台账/工单/到账确认/对账 全链路数据模型。</a:t>
-            </a:r>
-          </a:p>
-        </p:txBody>
-      </p:sp>
-      <p:sp>
-        <p:nvSpPr>
-          <p:cNvPr id="14" name="Rounded Rectangle 13"/>
-          <p:cNvSpPr/>
-          <p:nvPr/>
-        </p:nvSpPr>
-        <p:spPr>
-          <a:xfrm>
-            <a:off x="6195060" y="3840480"/>
-            <a:ext cx="5143500" cy="1143000"/>
-          </a:xfrm>
-          <a:prstGeom prst="roundRect">
-            <a:avLst/>
-          </a:prstGeom>
-          <a:solidFill>
-            <a:srgbClr val="F1F5F9"/>
-          </a:solidFill>
-          <a:ln>
-            <a:noFill/>
-          </a:ln>
-          <a:effectLst/>
-        </p:spPr>
-        <p:style>
-          <a:lnRef idx="1">
-            <a:schemeClr val="accent1"/>
-          </a:lnRef>
-          <a:fillRef idx="3">
-            <a:schemeClr val="accent1"/>
-          </a:fillRef>
-          <a:effectRef idx="2">
-            <a:schemeClr val="accent1"/>
-          </a:effectRef>
-          <a:fontRef idx="minor">
-            <a:schemeClr val="lt1"/>
-          </a:fontRef>
-        </p:style>
-        <p:txBody>
-          <a:bodyPr rtlCol="0" anchor="ctr"/>
-          <a:lstStyle/>
-          <a:p>
-            <a:pPr algn="ctr"/>
-          </a:p>
-        </p:txBody>
-      </p:sp>
-      <p:sp>
-        <p:nvSpPr>
-          <p:cNvPr id="15" name="TextBox 14"/>
-          <p:cNvSpPr txBox="1"/>
-          <p:nvPr/>
-        </p:nvSpPr>
-        <p:spPr>
-          <a:xfrm>
-            <a:off x="6377940" y="3950208"/>
-            <a:ext cx="4777740" cy="365760"/>
-          </a:xfrm>
-          <a:prstGeom prst="rect">
-            <a:avLst/>
-          </a:prstGeom>
-          <a:noFill/>
-        </p:spPr>
-        <p:txBody>
-          <a:bodyPr wrap="square" anchor="t">
-            <a:spAutoFit/>
-          </a:bodyPr>
-          <a:lstStyle/>
-          <a:p>
-            <a:pPr algn="l"/>
-            <a:r>
-              <a:rPr sz="1600" b="1">
-                <a:solidFill>
-                  <a:srgbClr val="0F172A"/>
-                </a:solidFill>
-                <a:latin typeface="Noto Sans CJK SC"/>
-                <a:ea typeface="Noto Sans CJK SC"/>
-                <a:cs typeface="Noto Sans CJK SC"/>
-              </a:rPr>
-              <a:t>工程质量</a:t>
-            </a:r>
-          </a:p>
-        </p:txBody>
-      </p:sp>
-      <p:sp>
-        <p:nvSpPr>
-          <p:cNvPr id="16" name="TextBox 15"/>
-          <p:cNvSpPr txBox="1"/>
-          <p:nvPr/>
-        </p:nvSpPr>
-        <p:spPr>
-          <a:xfrm>
-            <a:off x="6377940" y="4343400"/>
-            <a:ext cx="4777740" cy="548640"/>
-          </a:xfrm>
-          <a:prstGeom prst="rect">
-            <a:avLst/>
-          </a:prstGeom>
-          <a:noFill/>
-        </p:spPr>
-        <p:txBody>
-          <a:bodyPr wrap="square" anchor="t">
-            <a:spAutoFit/>
-          </a:bodyPr>
-          <a:lstStyle/>
-          <a:p>
-            <a:pPr algn="l"/>
-            <a:r>
-              <a:rPr sz="1250" b="0">
-                <a:solidFill>
-                  <a:srgbClr val="64748B"/>
-                </a:solidFill>
-                <a:latin typeface="Noto Sans CJK SC"/>
-                <a:ea typeface="Noto Sans CJK SC"/>
-                <a:cs typeface="Noto Sans CJK SC"/>
-              </a:rPr>
-              <a:t>全站 TypeScript 0 error、双语键 386/386 对齐、关键路由端到端可跑。</a:t>
-            </a:r>
-          </a:p>
-        </p:txBody>
-      </p:sp>
-    </p:spTree>
-  </p:cSld>
-  <p:clrMapOvr>
-    <a:masterClrMapping/>
-  </p:clrMapOvr>
-</p:sld>
-</file>
-
-<file path=ppt/slides/slide12.xml><?xml version="1.0" encoding="utf-8"?>
 <p:sld xmlns:a="http://schemas.openxmlformats.org/drawingml/2006/main" xmlns:p="http://schemas.openxmlformats.org/presentationml/2006/main" xmlns:r="http://schemas.openxmlformats.org/officeDocument/2006/relationships">
   <p:cSld>
     <p:bg>
@@ -4717,7 +4518,7 @@
 </p:sld>
 </file>
 
-<file path=ppt/slides/slide13.xml><?xml version="1.0" encoding="utf-8"?>
+<file path=ppt/slides/slide12.xml><?xml version="1.0" encoding="utf-8"?>
 <p:sld xmlns:a="http://schemas.openxmlformats.org/drawingml/2006/main" xmlns:p="http://schemas.openxmlformats.org/presentationml/2006/main" xmlns:r="http://schemas.openxmlformats.org/officeDocument/2006/relationships">
   <p:cSld>
     <p:bg>
@@ -5332,7 +5133,7 @@
                 <a:ea typeface="Noto Sans CJK SC"/>
                 <a:cs typeface="Noto Sans CJK SC"/>
               </a:rPr>
-              <a:t>今天用 5 分钟讲清 11 件事</a:t>
+              <a:t>今天用 5 分钟讲清 10 件事</a:t>
             </a:r>
           </a:p>
         </p:txBody>
@@ -5922,7 +5723,7 @@
                 <a:ea typeface="Noto Sans CJK SC"/>
                 <a:cs typeface="Noto Sans CJK SC"/>
               </a:rPr>
-              <a:t>核心功能③：分阶段里程碑付款工作台</a:t>
+              <a:t>核心功能③：统一结算状态与对账看板</a:t>
             </a:r>
           </a:p>
         </p:txBody>
@@ -6040,7 +5841,7 @@
                 <a:ea typeface="Noto Sans CJK SC"/>
                 <a:cs typeface="Noto Sans CJK SC"/>
               </a:rPr>
-              <a:t>核心功能④：统一结算状态与对账看板</a:t>
+              <a:t>AI 覆盖一览：四痛点→四能力</a:t>
             </a:r>
           </a:p>
         </p:txBody>
@@ -6158,7 +5959,7 @@
                 <a:ea typeface="Noto Sans CJK SC"/>
                 <a:cs typeface="Noto Sans CJK SC"/>
               </a:rPr>
-              <a:t>AI 覆盖一览：四痛点→四能力</a:t>
+              <a:t>现场 Demo：你能看到什么</a:t>
             </a:r>
           </a:p>
         </p:txBody>
@@ -6276,7 +6077,7 @@
                 <a:ea typeface="Noto Sans CJK SC"/>
                 <a:cs typeface="Noto Sans CJK SC"/>
               </a:rPr>
-              <a:t>现场 Demo：你能看到什么</a:t>
+              <a:t>技术架构：怎么实现的</a:t>
             </a:r>
           </a:p>
         </p:txBody>
@@ -6394,7 +6195,7 @@
                 <a:ea typeface="Noto Sans CJK SC"/>
                 <a:cs typeface="Noto Sans CJK SC"/>
               </a:rPr>
-              <a:t>技术架构：怎么实现的</a:t>
+              <a:t>合规边界：我们不碰什么（关键）</a:t>
             </a:r>
           </a:p>
         </p:txBody>
@@ -6489,124 +6290,6 @@
         <p:spPr>
           <a:xfrm>
             <a:off x="1463040" y="6217920"/>
-            <a:ext cx="2651760" cy="731520"/>
-          </a:xfrm>
-          <a:prstGeom prst="rect">
-            <a:avLst/>
-          </a:prstGeom>
-          <a:noFill/>
-        </p:spPr>
-        <p:txBody>
-          <a:bodyPr wrap="square" anchor="t">
-            <a:spAutoFit/>
-          </a:bodyPr>
-          <a:lstStyle/>
-          <a:p>
-            <a:pPr algn="l"/>
-            <a:r>
-              <a:rPr sz="1300" b="1">
-                <a:solidFill>
-                  <a:srgbClr val="0F172A"/>
-                </a:solidFill>
-                <a:latin typeface="Noto Sans CJK SC"/>
-                <a:ea typeface="Noto Sans CJK SC"/>
-                <a:cs typeface="Noto Sans CJK SC"/>
-              </a:rPr>
-              <a:t>合规边界：我们不碰什么（关键）</a:t>
-            </a:r>
-          </a:p>
-        </p:txBody>
-      </p:sp>
-      <p:sp>
-        <p:nvSpPr>
-          <p:cNvPr id="34" name="Rounded Rectangle 33"/>
-          <p:cNvSpPr/>
-          <p:nvPr/>
-        </p:nvSpPr>
-        <p:spPr>
-          <a:xfrm>
-            <a:off x="4434840" y="6035040"/>
-            <a:ext cx="3429000" cy="1051560"/>
-          </a:xfrm>
-          <a:prstGeom prst="roundRect">
-            <a:avLst/>
-          </a:prstGeom>
-          <a:solidFill>
-            <a:srgbClr val="F1F5F9"/>
-          </a:solidFill>
-          <a:ln>
-            <a:noFill/>
-          </a:ln>
-          <a:effectLst/>
-        </p:spPr>
-        <p:style>
-          <a:lnRef idx="1">
-            <a:schemeClr val="accent1"/>
-          </a:lnRef>
-          <a:fillRef idx="3">
-            <a:schemeClr val="accent1"/>
-          </a:fillRef>
-          <a:effectRef idx="2">
-            <a:schemeClr val="accent1"/>
-          </a:effectRef>
-          <a:fontRef idx="minor">
-            <a:schemeClr val="lt1"/>
-          </a:fontRef>
-        </p:style>
-        <p:txBody>
-          <a:bodyPr rtlCol="0" anchor="ctr"/>
-          <a:lstStyle/>
-          <a:p>
-            <a:pPr algn="ctr"/>
-          </a:p>
-        </p:txBody>
-      </p:sp>
-      <p:sp>
-        <p:nvSpPr>
-          <p:cNvPr id="35" name="TextBox 34"/>
-          <p:cNvSpPr txBox="1"/>
-          <p:nvPr/>
-        </p:nvSpPr>
-        <p:spPr>
-          <a:xfrm>
-            <a:off x="4572000" y="6144768"/>
-            <a:ext cx="457200" cy="457200"/>
-          </a:xfrm>
-          <a:prstGeom prst="rect">
-            <a:avLst/>
-          </a:prstGeom>
-          <a:noFill/>
-        </p:spPr>
-        <p:txBody>
-          <a:bodyPr wrap="square" anchor="t">
-            <a:spAutoFit/>
-          </a:bodyPr>
-          <a:lstStyle/>
-          <a:p>
-            <a:pPr algn="l"/>
-            <a:r>
-              <a:rPr sz="1800" b="1">
-                <a:solidFill>
-                  <a:srgbClr val="0F766E"/>
-                </a:solidFill>
-                <a:latin typeface="Noto Sans CJK SC"/>
-                <a:ea typeface="Noto Sans CJK SC"/>
-                <a:cs typeface="Noto Sans CJK SC"/>
-              </a:rPr>
-              <a:t>11</a:t>
-            </a:r>
-          </a:p>
-        </p:txBody>
-      </p:sp>
-      <p:sp>
-        <p:nvSpPr>
-          <p:cNvPr id="36" name="TextBox 35"/>
-          <p:cNvSpPr txBox="1"/>
-          <p:nvPr/>
-        </p:nvSpPr>
-        <p:spPr>
-          <a:xfrm>
-            <a:off x="5074920" y="6217920"/>
             <a:ext cx="2651760" cy="731520"/>
           </a:xfrm>
           <a:prstGeom prst="rect">
@@ -9413,7 +9096,7 @@
                 <a:ea typeface="Noto Sans CJK SC"/>
                 <a:cs typeface="Noto Sans CJK SC"/>
               </a:rPr>
-              <a:t>分阶段里程碑付款工作台</a:t>
+              <a:t>统一结算状态与对账看板</a:t>
             </a:r>
           </a:p>
         </p:txBody>
@@ -9450,7 +9133,7 @@
                 <a:ea typeface="Noto Sans CJK SC"/>
                 <a:cs typeface="Noto Sans CJK SC"/>
               </a:rPr>
-              <a:t>外包/项目付款节点台账管理，按里程碑进度设置触发条件；条件结算管理。</a:t>
+              <a:t>聚合各通道汇款进度、中转链路信息、交易凭证，实现多笔跨国付款台账可视化与自动对账核销。</a:t>
             </a:r>
           </a:p>
         </p:txBody>
@@ -9531,7 +9214,7 @@
                 <a:ea typeface="Noto Sans CJK SC"/>
                 <a:cs typeface="Noto Sans CJK SC"/>
               </a:rPr>
-              <a:t>1. 节点台账管理</a:t>
+              <a:t>1. 多通道进度聚合</a:t>
             </a:r>
           </a:p>
         </p:txBody>
@@ -9568,7 +9251,7 @@
                 <a:ea typeface="Noto Sans CJK SC"/>
                 <a:cs typeface="Noto Sans CJK SC"/>
               </a:rPr>
-              <a:t>外包/项目付款节点集中管理，进度与金额一目了然。</a:t>
+              <a:t>汇总各持牌通道的汇款进度与中转链路信息，钱走到哪一目了然。</a:t>
             </a:r>
           </a:p>
         </p:txBody>
@@ -9649,7 +9332,7 @@
                 <a:ea typeface="Noto Sans CJK SC"/>
                 <a:cs typeface="Noto Sans CJK SC"/>
               </a:rPr>
-              <a:t>2. 里程碑触发条件</a:t>
+              <a:t>2. 凭证与台账可视化</a:t>
             </a:r>
           </a:p>
         </p:txBody>
@@ -9686,7 +9369,7 @@
                 <a:ea typeface="Noto Sans CJK SC"/>
                 <a:cs typeface="Noto Sans CJK SC"/>
               </a:rPr>
-              <a:t>按里程碑进度设置付款触发条件：待开始→进行中→待校验→已校验。</a:t>
+              <a:t>聚合交易凭证，多笔跨国付款台账集中可视化管理。</a:t>
             </a:r>
           </a:p>
         </p:txBody>
@@ -9767,7 +9450,7 @@
                 <a:ea typeface="Noto Sans CJK SC"/>
                 <a:cs typeface="Noto Sans CJK SC"/>
               </a:rPr>
-              <a:t>3. 完成校验→放款提醒</a:t>
+              <a:t>3. 自动对账核销</a:t>
             </a:r>
           </a:p>
         </p:txBody>
@@ -9804,7 +9487,7 @@
                 <a:ea typeface="Noto Sans CJK SC"/>
                 <a:cs typeface="Noto Sans CJK SC"/>
               </a:rPr>
-              <a:t>校验通过后向财务推送放款提醒，一键深链跳转付款流程。</a:t>
+              <a:t>应收 vs 实收、费用与汇兑损失自动匹配核销，并可导出对账单。</a:t>
             </a:r>
           </a:p>
         </p:txBody>
@@ -9885,7 +9568,7 @@
                 <a:ea typeface="Noto Sans CJK SC"/>
                 <a:cs typeface="Noto Sans CJK SC"/>
               </a:rPr>
-              <a:t>4. 合规边界</a:t>
+              <a:t>4. 结算链路透明</a:t>
             </a:r>
           </a:p>
         </p:txBody>
@@ -9922,7 +9605,7 @@
                 <a:ea typeface="Noto Sans CJK SC"/>
                 <a:cs typeface="Noto Sans CJK SC"/>
               </a:rPr>
-              <a:t>实际放款操作全部在银行/持牌结算机构完成——平台不托管、不放款。</a:t>
+              <a:t>结算全程可追踪；平台只做透明化追踪，不经手资金。</a:t>
             </a:r>
           </a:p>
         </p:txBody>
@@ -9973,7 +9656,7 @@
       </p:sp>
       <p:pic>
         <p:nvPicPr>
-          <p:cNvPr id="18" name="Picture 17" descr="feat-milestones.png"/>
+          <p:cNvPr id="18" name="Picture 17" descr="feat-reconcile.png"/>
           <p:cNvPicPr>
             <a:picLocks noChangeAspect="1"/>
           </p:cNvPicPr>
@@ -10041,720 +9724,6 @@
 </file>
 
 <file path=ppt/slides/slide8.xml><?xml version="1.0" encoding="utf-8"?>
-<p:sld xmlns:a="http://schemas.openxmlformats.org/drawingml/2006/main" xmlns:p="http://schemas.openxmlformats.org/presentationml/2006/main" xmlns:r="http://schemas.openxmlformats.org/officeDocument/2006/relationships">
-  <p:cSld>
-    <p:bg>
-      <p:bgPr>
-        <a:solidFill>
-          <a:srgbClr val="FFFFFF"/>
-        </a:solidFill>
-        <a:effectLst/>
-      </p:bgPr>
-    </p:bg>
-    <p:spTree>
-      <p:nvGrpSpPr>
-        <p:cNvPr id="1" name=""/>
-        <p:cNvGrpSpPr/>
-        <p:nvPr/>
-      </p:nvGrpSpPr>
-      <p:grpSpPr/>
-      <p:sp>
-        <p:nvSpPr>
-          <p:cNvPr id="2" name="TextBox 1"/>
-          <p:cNvSpPr txBox="1"/>
-          <p:nvPr/>
-        </p:nvSpPr>
-        <p:spPr>
-          <a:xfrm>
-            <a:off x="822960" y="502920"/>
-            <a:ext cx="10515600" cy="365760"/>
-          </a:xfrm>
-          <a:prstGeom prst="rect">
-            <a:avLst/>
-          </a:prstGeom>
-          <a:noFill/>
-        </p:spPr>
-        <p:txBody>
-          <a:bodyPr wrap="square" anchor="t">
-            <a:spAutoFit/>
-          </a:bodyPr>
-          <a:lstStyle/>
-          <a:p>
-            <a:pPr algn="l"/>
-            <a:r>
-              <a:rPr sz="1400" b="1">
-                <a:solidFill>
-                  <a:srgbClr val="0F766E"/>
-                </a:solidFill>
-                <a:latin typeface="Noto Sans CJK SC"/>
-                <a:ea typeface="Noto Sans CJK SC"/>
-                <a:cs typeface="Noto Sans CJK SC"/>
-              </a:rPr>
-              <a:t>核心功能④ · 成果可演示</a:t>
-            </a:r>
-          </a:p>
-        </p:txBody>
-      </p:sp>
-      <p:sp>
-        <p:nvSpPr>
-          <p:cNvPr id="3" name="TextBox 2"/>
-          <p:cNvSpPr txBox="1"/>
-          <p:nvPr/>
-        </p:nvSpPr>
-        <p:spPr>
-          <a:xfrm>
-            <a:off x="822960" y="868680"/>
-            <a:ext cx="10515600" cy="914400"/>
-          </a:xfrm>
-          <a:prstGeom prst="rect">
-            <a:avLst/>
-          </a:prstGeom>
-          <a:noFill/>
-        </p:spPr>
-        <p:txBody>
-          <a:bodyPr wrap="square" anchor="t">
-            <a:spAutoFit/>
-          </a:bodyPr>
-          <a:lstStyle/>
-          <a:p>
-            <a:pPr algn="l"/>
-            <a:r>
-              <a:rPr sz="3000" b="1">
-                <a:solidFill>
-                  <a:srgbClr val="0F172A"/>
-                </a:solidFill>
-                <a:latin typeface="Noto Sans CJK SC"/>
-                <a:ea typeface="Noto Sans CJK SC"/>
-                <a:cs typeface="Noto Sans CJK SC"/>
-              </a:rPr>
-              <a:t>统一结算状态与对账看板</a:t>
-            </a:r>
-          </a:p>
-        </p:txBody>
-      </p:sp>
-      <p:sp>
-        <p:nvSpPr>
-          <p:cNvPr id="4" name="TextBox 3"/>
-          <p:cNvSpPr txBox="1"/>
-          <p:nvPr/>
-        </p:nvSpPr>
-        <p:spPr>
-          <a:xfrm>
-            <a:off x="822960" y="1554480"/>
-            <a:ext cx="7040880" cy="640080"/>
-          </a:xfrm>
-          <a:prstGeom prst="rect">
-            <a:avLst/>
-          </a:prstGeom>
-          <a:noFill/>
-        </p:spPr>
-        <p:txBody>
-          <a:bodyPr wrap="square" anchor="t">
-            <a:spAutoFit/>
-          </a:bodyPr>
-          <a:lstStyle/>
-          <a:p>
-            <a:pPr algn="l"/>
-            <a:r>
-              <a:rPr sz="1400" b="0">
-                <a:solidFill>
-                  <a:srgbClr val="64748B"/>
-                </a:solidFill>
-                <a:latin typeface="Noto Sans CJK SC"/>
-                <a:ea typeface="Noto Sans CJK SC"/>
-                <a:cs typeface="Noto Sans CJK SC"/>
-              </a:rPr>
-              <a:t>聚合各通道汇款进度、中转链路信息、交易凭证，实现多笔跨国付款台账可视化与自动对账核销。</a:t>
-            </a:r>
-          </a:p>
-        </p:txBody>
-      </p:sp>
-      <p:sp>
-        <p:nvSpPr>
-          <p:cNvPr id="5" name="Rounded Rectangle 4"/>
-          <p:cNvSpPr/>
-          <p:nvPr/>
-        </p:nvSpPr>
-        <p:spPr>
-          <a:xfrm>
-            <a:off x="822960" y="2377440"/>
-            <a:ext cx="7040880" cy="932688"/>
-          </a:xfrm>
-          <a:prstGeom prst="roundRect">
-            <a:avLst/>
-          </a:prstGeom>
-          <a:solidFill>
-            <a:srgbClr val="F1F5F9"/>
-          </a:solidFill>
-          <a:ln>
-            <a:noFill/>
-          </a:ln>
-          <a:effectLst/>
-        </p:spPr>
-        <p:style>
-          <a:lnRef idx="1">
-            <a:schemeClr val="accent1"/>
-          </a:lnRef>
-          <a:fillRef idx="3">
-            <a:schemeClr val="accent1"/>
-          </a:fillRef>
-          <a:effectRef idx="2">
-            <a:schemeClr val="accent1"/>
-          </a:effectRef>
-          <a:fontRef idx="minor">
-            <a:schemeClr val="lt1"/>
-          </a:fontRef>
-        </p:style>
-        <p:txBody>
-          <a:bodyPr rtlCol="0" anchor="ctr"/>
-          <a:lstStyle/>
-          <a:p>
-            <a:pPr algn="ctr"/>
-          </a:p>
-        </p:txBody>
-      </p:sp>
-      <p:sp>
-        <p:nvSpPr>
-          <p:cNvPr id="6" name="TextBox 5"/>
-          <p:cNvSpPr txBox="1"/>
-          <p:nvPr/>
-        </p:nvSpPr>
-        <p:spPr>
-          <a:xfrm>
-            <a:off x="1005840" y="2487168"/>
-            <a:ext cx="6675120" cy="365760"/>
-          </a:xfrm>
-          <a:prstGeom prst="rect">
-            <a:avLst/>
-          </a:prstGeom>
-          <a:noFill/>
-        </p:spPr>
-        <p:txBody>
-          <a:bodyPr wrap="square" anchor="t">
-            <a:spAutoFit/>
-          </a:bodyPr>
-          <a:lstStyle/>
-          <a:p>
-            <a:pPr algn="l"/>
-            <a:r>
-              <a:rPr sz="1500" b="1">
-                <a:solidFill>
-                  <a:srgbClr val="0F172A"/>
-                </a:solidFill>
-                <a:latin typeface="Noto Sans CJK SC"/>
-                <a:ea typeface="Noto Sans CJK SC"/>
-                <a:cs typeface="Noto Sans CJK SC"/>
-              </a:rPr>
-              <a:t>1. 多通道进度聚合</a:t>
-            </a:r>
-          </a:p>
-        </p:txBody>
-      </p:sp>
-      <p:sp>
-        <p:nvSpPr>
-          <p:cNvPr id="7" name="TextBox 6"/>
-          <p:cNvSpPr txBox="1"/>
-          <p:nvPr/>
-        </p:nvSpPr>
-        <p:spPr>
-          <a:xfrm>
-            <a:off x="1005840" y="2834640"/>
-            <a:ext cx="6675120" cy="457200"/>
-          </a:xfrm>
-          <a:prstGeom prst="rect">
-            <a:avLst/>
-          </a:prstGeom>
-          <a:noFill/>
-        </p:spPr>
-        <p:txBody>
-          <a:bodyPr wrap="square" anchor="t">
-            <a:spAutoFit/>
-          </a:bodyPr>
-          <a:lstStyle/>
-          <a:p>
-            <a:pPr algn="l"/>
-            <a:r>
-              <a:rPr sz="1150" b="0">
-                <a:solidFill>
-                  <a:srgbClr val="64748B"/>
-                </a:solidFill>
-                <a:latin typeface="Noto Sans CJK SC"/>
-                <a:ea typeface="Noto Sans CJK SC"/>
-                <a:cs typeface="Noto Sans CJK SC"/>
-              </a:rPr>
-              <a:t>汇总各持牌通道的汇款进度与中转链路信息，钱走到哪一目了然。</a:t>
-            </a:r>
-          </a:p>
-        </p:txBody>
-      </p:sp>
-      <p:sp>
-        <p:nvSpPr>
-          <p:cNvPr id="8" name="Rounded Rectangle 7"/>
-          <p:cNvSpPr/>
-          <p:nvPr/>
-        </p:nvSpPr>
-        <p:spPr>
-          <a:xfrm>
-            <a:off x="822960" y="3474720"/>
-            <a:ext cx="7040880" cy="932688"/>
-          </a:xfrm>
-          <a:prstGeom prst="roundRect">
-            <a:avLst/>
-          </a:prstGeom>
-          <a:solidFill>
-            <a:srgbClr val="F1F5F9"/>
-          </a:solidFill>
-          <a:ln>
-            <a:noFill/>
-          </a:ln>
-          <a:effectLst/>
-        </p:spPr>
-        <p:style>
-          <a:lnRef idx="1">
-            <a:schemeClr val="accent1"/>
-          </a:lnRef>
-          <a:fillRef idx="3">
-            <a:schemeClr val="accent1"/>
-          </a:fillRef>
-          <a:effectRef idx="2">
-            <a:schemeClr val="accent1"/>
-          </a:effectRef>
-          <a:fontRef idx="minor">
-            <a:schemeClr val="lt1"/>
-          </a:fontRef>
-        </p:style>
-        <p:txBody>
-          <a:bodyPr rtlCol="0" anchor="ctr"/>
-          <a:lstStyle/>
-          <a:p>
-            <a:pPr algn="ctr"/>
-          </a:p>
-        </p:txBody>
-      </p:sp>
-      <p:sp>
-        <p:nvSpPr>
-          <p:cNvPr id="9" name="TextBox 8"/>
-          <p:cNvSpPr txBox="1"/>
-          <p:nvPr/>
-        </p:nvSpPr>
-        <p:spPr>
-          <a:xfrm>
-            <a:off x="1005840" y="3584448"/>
-            <a:ext cx="6675120" cy="365760"/>
-          </a:xfrm>
-          <a:prstGeom prst="rect">
-            <a:avLst/>
-          </a:prstGeom>
-          <a:noFill/>
-        </p:spPr>
-        <p:txBody>
-          <a:bodyPr wrap="square" anchor="t">
-            <a:spAutoFit/>
-          </a:bodyPr>
-          <a:lstStyle/>
-          <a:p>
-            <a:pPr algn="l"/>
-            <a:r>
-              <a:rPr sz="1500" b="1">
-                <a:solidFill>
-                  <a:srgbClr val="0F172A"/>
-                </a:solidFill>
-                <a:latin typeface="Noto Sans CJK SC"/>
-                <a:ea typeface="Noto Sans CJK SC"/>
-                <a:cs typeface="Noto Sans CJK SC"/>
-              </a:rPr>
-              <a:t>2. 凭证与台账可视化</a:t>
-            </a:r>
-          </a:p>
-        </p:txBody>
-      </p:sp>
-      <p:sp>
-        <p:nvSpPr>
-          <p:cNvPr id="10" name="TextBox 9"/>
-          <p:cNvSpPr txBox="1"/>
-          <p:nvPr/>
-        </p:nvSpPr>
-        <p:spPr>
-          <a:xfrm>
-            <a:off x="1005840" y="3931920"/>
-            <a:ext cx="6675120" cy="457200"/>
-          </a:xfrm>
-          <a:prstGeom prst="rect">
-            <a:avLst/>
-          </a:prstGeom>
-          <a:noFill/>
-        </p:spPr>
-        <p:txBody>
-          <a:bodyPr wrap="square" anchor="t">
-            <a:spAutoFit/>
-          </a:bodyPr>
-          <a:lstStyle/>
-          <a:p>
-            <a:pPr algn="l"/>
-            <a:r>
-              <a:rPr sz="1150" b="0">
-                <a:solidFill>
-                  <a:srgbClr val="64748B"/>
-                </a:solidFill>
-                <a:latin typeface="Noto Sans CJK SC"/>
-                <a:ea typeface="Noto Sans CJK SC"/>
-                <a:cs typeface="Noto Sans CJK SC"/>
-              </a:rPr>
-              <a:t>聚合交易凭证，多笔跨国付款台账集中可视化管理。</a:t>
-            </a:r>
-          </a:p>
-        </p:txBody>
-      </p:sp>
-      <p:sp>
-        <p:nvSpPr>
-          <p:cNvPr id="11" name="Rounded Rectangle 10"/>
-          <p:cNvSpPr/>
-          <p:nvPr/>
-        </p:nvSpPr>
-        <p:spPr>
-          <a:xfrm>
-            <a:off x="822960" y="4572000"/>
-            <a:ext cx="7040880" cy="932688"/>
-          </a:xfrm>
-          <a:prstGeom prst="roundRect">
-            <a:avLst/>
-          </a:prstGeom>
-          <a:solidFill>
-            <a:srgbClr val="F1F5F9"/>
-          </a:solidFill>
-          <a:ln>
-            <a:noFill/>
-          </a:ln>
-          <a:effectLst/>
-        </p:spPr>
-        <p:style>
-          <a:lnRef idx="1">
-            <a:schemeClr val="accent1"/>
-          </a:lnRef>
-          <a:fillRef idx="3">
-            <a:schemeClr val="accent1"/>
-          </a:fillRef>
-          <a:effectRef idx="2">
-            <a:schemeClr val="accent1"/>
-          </a:effectRef>
-          <a:fontRef idx="minor">
-            <a:schemeClr val="lt1"/>
-          </a:fontRef>
-        </p:style>
-        <p:txBody>
-          <a:bodyPr rtlCol="0" anchor="ctr"/>
-          <a:lstStyle/>
-          <a:p>
-            <a:pPr algn="ctr"/>
-          </a:p>
-        </p:txBody>
-      </p:sp>
-      <p:sp>
-        <p:nvSpPr>
-          <p:cNvPr id="12" name="TextBox 11"/>
-          <p:cNvSpPr txBox="1"/>
-          <p:nvPr/>
-        </p:nvSpPr>
-        <p:spPr>
-          <a:xfrm>
-            <a:off x="1005840" y="4681728"/>
-            <a:ext cx="6675120" cy="365760"/>
-          </a:xfrm>
-          <a:prstGeom prst="rect">
-            <a:avLst/>
-          </a:prstGeom>
-          <a:noFill/>
-        </p:spPr>
-        <p:txBody>
-          <a:bodyPr wrap="square" anchor="t">
-            <a:spAutoFit/>
-          </a:bodyPr>
-          <a:lstStyle/>
-          <a:p>
-            <a:pPr algn="l"/>
-            <a:r>
-              <a:rPr sz="1500" b="1">
-                <a:solidFill>
-                  <a:srgbClr val="0F172A"/>
-                </a:solidFill>
-                <a:latin typeface="Noto Sans CJK SC"/>
-                <a:ea typeface="Noto Sans CJK SC"/>
-                <a:cs typeface="Noto Sans CJK SC"/>
-              </a:rPr>
-              <a:t>3. 自动对账核销</a:t>
-            </a:r>
-          </a:p>
-        </p:txBody>
-      </p:sp>
-      <p:sp>
-        <p:nvSpPr>
-          <p:cNvPr id="13" name="TextBox 12"/>
-          <p:cNvSpPr txBox="1"/>
-          <p:nvPr/>
-        </p:nvSpPr>
-        <p:spPr>
-          <a:xfrm>
-            <a:off x="1005840" y="5029200"/>
-            <a:ext cx="6675120" cy="457200"/>
-          </a:xfrm>
-          <a:prstGeom prst="rect">
-            <a:avLst/>
-          </a:prstGeom>
-          <a:noFill/>
-        </p:spPr>
-        <p:txBody>
-          <a:bodyPr wrap="square" anchor="t">
-            <a:spAutoFit/>
-          </a:bodyPr>
-          <a:lstStyle/>
-          <a:p>
-            <a:pPr algn="l"/>
-            <a:r>
-              <a:rPr sz="1150" b="0">
-                <a:solidFill>
-                  <a:srgbClr val="64748B"/>
-                </a:solidFill>
-                <a:latin typeface="Noto Sans CJK SC"/>
-                <a:ea typeface="Noto Sans CJK SC"/>
-                <a:cs typeface="Noto Sans CJK SC"/>
-              </a:rPr>
-              <a:t>应收 vs 实收、费用与汇兑损失自动匹配核销，并可导出对账单。</a:t>
-            </a:r>
-          </a:p>
-        </p:txBody>
-      </p:sp>
-      <p:sp>
-        <p:nvSpPr>
-          <p:cNvPr id="14" name="Rounded Rectangle 13"/>
-          <p:cNvSpPr/>
-          <p:nvPr/>
-        </p:nvSpPr>
-        <p:spPr>
-          <a:xfrm>
-            <a:off x="822960" y="5669279"/>
-            <a:ext cx="7040880" cy="932688"/>
-          </a:xfrm>
-          <a:prstGeom prst="roundRect">
-            <a:avLst/>
-          </a:prstGeom>
-          <a:solidFill>
-            <a:srgbClr val="F1F5F9"/>
-          </a:solidFill>
-          <a:ln>
-            <a:noFill/>
-          </a:ln>
-          <a:effectLst/>
-        </p:spPr>
-        <p:style>
-          <a:lnRef idx="1">
-            <a:schemeClr val="accent1"/>
-          </a:lnRef>
-          <a:fillRef idx="3">
-            <a:schemeClr val="accent1"/>
-          </a:fillRef>
-          <a:effectRef idx="2">
-            <a:schemeClr val="accent1"/>
-          </a:effectRef>
-          <a:fontRef idx="minor">
-            <a:schemeClr val="lt1"/>
-          </a:fontRef>
-        </p:style>
-        <p:txBody>
-          <a:bodyPr rtlCol="0" anchor="ctr"/>
-          <a:lstStyle/>
-          <a:p>
-            <a:pPr algn="ctr"/>
-          </a:p>
-        </p:txBody>
-      </p:sp>
-      <p:sp>
-        <p:nvSpPr>
-          <p:cNvPr id="15" name="TextBox 14"/>
-          <p:cNvSpPr txBox="1"/>
-          <p:nvPr/>
-        </p:nvSpPr>
-        <p:spPr>
-          <a:xfrm>
-            <a:off x="1005840" y="5779007"/>
-            <a:ext cx="6675120" cy="365760"/>
-          </a:xfrm>
-          <a:prstGeom prst="rect">
-            <a:avLst/>
-          </a:prstGeom>
-          <a:noFill/>
-        </p:spPr>
-        <p:txBody>
-          <a:bodyPr wrap="square" anchor="t">
-            <a:spAutoFit/>
-          </a:bodyPr>
-          <a:lstStyle/>
-          <a:p>
-            <a:pPr algn="l"/>
-            <a:r>
-              <a:rPr sz="1500" b="1">
-                <a:solidFill>
-                  <a:srgbClr val="0F172A"/>
-                </a:solidFill>
-                <a:latin typeface="Noto Sans CJK SC"/>
-                <a:ea typeface="Noto Sans CJK SC"/>
-                <a:cs typeface="Noto Sans CJK SC"/>
-              </a:rPr>
-              <a:t>4. 结算链路透明</a:t>
-            </a:r>
-          </a:p>
-        </p:txBody>
-      </p:sp>
-      <p:sp>
-        <p:nvSpPr>
-          <p:cNvPr id="16" name="TextBox 15"/>
-          <p:cNvSpPr txBox="1"/>
-          <p:nvPr/>
-        </p:nvSpPr>
-        <p:spPr>
-          <a:xfrm>
-            <a:off x="1005840" y="6126479"/>
-            <a:ext cx="6675120" cy="457200"/>
-          </a:xfrm>
-          <a:prstGeom prst="rect">
-            <a:avLst/>
-          </a:prstGeom>
-          <a:noFill/>
-        </p:spPr>
-        <p:txBody>
-          <a:bodyPr wrap="square" anchor="t">
-            <a:spAutoFit/>
-          </a:bodyPr>
-          <a:lstStyle/>
-          <a:p>
-            <a:pPr algn="l"/>
-            <a:r>
-              <a:rPr sz="1150" b="0">
-                <a:solidFill>
-                  <a:srgbClr val="64748B"/>
-                </a:solidFill>
-                <a:latin typeface="Noto Sans CJK SC"/>
-                <a:ea typeface="Noto Sans CJK SC"/>
-                <a:cs typeface="Noto Sans CJK SC"/>
-              </a:rPr>
-              <a:t>结算全程可追踪；平台只做透明化追踪，不经手资金。</a:t>
-            </a:r>
-          </a:p>
-        </p:txBody>
-      </p:sp>
-      <p:sp>
-        <p:nvSpPr>
-          <p:cNvPr id="17" name="Rounded Rectangle 16"/>
-          <p:cNvSpPr/>
-          <p:nvPr/>
-        </p:nvSpPr>
-        <p:spPr>
-          <a:xfrm>
-            <a:off x="8138160" y="1508760"/>
-            <a:ext cx="3246120" cy="4937760"/>
-          </a:xfrm>
-          <a:prstGeom prst="roundRect">
-            <a:avLst/>
-          </a:prstGeom>
-          <a:solidFill>
-            <a:srgbClr val="F1F5F9"/>
-          </a:solidFill>
-          <a:ln>
-            <a:noFill/>
-          </a:ln>
-          <a:effectLst/>
-        </p:spPr>
-        <p:style>
-          <a:lnRef idx="1">
-            <a:schemeClr val="accent1"/>
-          </a:lnRef>
-          <a:fillRef idx="3">
-            <a:schemeClr val="accent1"/>
-          </a:fillRef>
-          <a:effectRef idx="2">
-            <a:schemeClr val="accent1"/>
-          </a:effectRef>
-          <a:fontRef idx="minor">
-            <a:schemeClr val="lt1"/>
-          </a:fontRef>
-        </p:style>
-        <p:txBody>
-          <a:bodyPr rtlCol="0" anchor="ctr"/>
-          <a:lstStyle/>
-          <a:p>
-            <a:pPr algn="ctr"/>
-          </a:p>
-        </p:txBody>
-      </p:sp>
-      <p:pic>
-        <p:nvPicPr>
-          <p:cNvPr id="18" name="Picture 17" descr="feat-reconcile.png"/>
-          <p:cNvPicPr>
-            <a:picLocks noChangeAspect="1"/>
-          </p:cNvPicPr>
-          <p:nvPr/>
-        </p:nvPicPr>
-        <p:blipFill>
-          <a:blip r:embed="rId2"/>
-          <a:stretch>
-            <a:fillRect/>
-          </a:stretch>
-        </p:blipFill>
-        <p:spPr>
-          <a:xfrm>
-            <a:off x="8275320" y="1645920"/>
-            <a:ext cx="1588731" cy="4663440"/>
-          </a:xfrm>
-          <a:prstGeom prst="rect">
-            <a:avLst/>
-          </a:prstGeom>
-        </p:spPr>
-      </p:pic>
-      <p:sp>
-        <p:nvSpPr>
-          <p:cNvPr id="19" name="TextBox 18"/>
-          <p:cNvSpPr txBox="1"/>
-          <p:nvPr/>
-        </p:nvSpPr>
-        <p:spPr>
-          <a:xfrm>
-            <a:off x="8138160" y="6510528"/>
-            <a:ext cx="3246120" cy="274320"/>
-          </a:xfrm>
-          <a:prstGeom prst="rect">
-            <a:avLst/>
-          </a:prstGeom>
-          <a:noFill/>
-        </p:spPr>
-        <p:txBody>
-          <a:bodyPr wrap="square" anchor="t">
-            <a:spAutoFit/>
-          </a:bodyPr>
-          <a:lstStyle/>
-          <a:p>
-            <a:pPr algn="ctr"/>
-            <a:r>
-              <a:rPr sz="900" b="0">
-                <a:solidFill>
-                  <a:srgbClr val="64748B"/>
-                </a:solidFill>
-                <a:latin typeface="Noto Sans CJK SC"/>
-                <a:ea typeface="Noto Sans CJK SC"/>
-                <a:cs typeface="Noto Sans CJK SC"/>
-              </a:rPr>
-              <a:t>产品界面（现场可实测）</a:t>
-            </a:r>
-          </a:p>
-        </p:txBody>
-      </p:sp>
-    </p:spTree>
-  </p:cSld>
-  <p:clrMapOvr>
-    <a:masterClrMapping/>
-  </p:clrMapOvr>
-</p:sld>
-</file>
-
-<file path=ppt/slides/slide9.xml><?xml version="1.0" encoding="utf-8"?>
 <p:sld xmlns:a="http://schemas.openxmlformats.org/drawingml/2006/main" xmlns:p="http://schemas.openxmlformats.org/presentationml/2006/main" xmlns:r="http://schemas.openxmlformats.org/officeDocument/2006/relationships">
   <p:cSld>
     <p:bg>
@@ -11369,6 +10338,204 @@
 </p:sld>
 </file>
 
+<file path=ppt/slides/slide9.xml><?xml version="1.0" encoding="utf-8"?>
+<p:sld xmlns:a="http://schemas.openxmlformats.org/drawingml/2006/main" xmlns:p="http://schemas.openxmlformats.org/presentationml/2006/main" xmlns:r="http://schemas.openxmlformats.org/officeDocument/2006/relationships">
+  <p:cSld>
+    <p:bg>
+      <p:bgPr>
+        <a:solidFill>
+          <a:srgbClr val="FFFFFF"/>
+        </a:solidFill>
+        <a:effectLst/>
+      </p:bgPr>
+    </p:bg>
+    <p:spTree>
+      <p:nvGrpSpPr>
+        <p:cNvPr id="1" name=""/>
+        <p:cNvGrpSpPr/>
+        <p:nvPr/>
+      </p:nvGrpSpPr>
+      <p:grpSpPr/>
+      <p:sp>
+        <p:nvSpPr>
+          <p:cNvPr id="2" name="TextBox 1"/>
+          <p:cNvSpPr txBox="1"/>
+          <p:nvPr/>
+        </p:nvSpPr>
+        <p:spPr>
+          <a:xfrm>
+            <a:off x="822960" y="502920"/>
+            <a:ext cx="10515600" cy="365760"/>
+          </a:xfrm>
+          <a:prstGeom prst="rect">
+            <a:avLst/>
+          </a:prstGeom>
+          <a:noFill/>
+        </p:spPr>
+        <p:txBody>
+          <a:bodyPr wrap="square" anchor="t">
+            <a:spAutoFit/>
+          </a:bodyPr>
+          <a:lstStyle/>
+          <a:p>
+            <a:pPr algn="l"/>
+            <a:r>
+              <a:rPr sz="1400" b="1">
+                <a:solidFill>
+                  <a:srgbClr val="0F766E"/>
+                </a:solidFill>
+                <a:latin typeface="Noto Sans CJK SC"/>
+                <a:ea typeface="Noto Sans CJK SC"/>
+                <a:cs typeface="Noto Sans CJK SC"/>
+              </a:rPr>
+              <a:t>现场可以看到什么</a:t>
+            </a:r>
+          </a:p>
+        </p:txBody>
+      </p:sp>
+      <p:sp>
+        <p:nvSpPr>
+          <p:cNvPr id="3" name="TextBox 2"/>
+          <p:cNvSpPr txBox="1"/>
+          <p:nvPr/>
+        </p:nvSpPr>
+        <p:spPr>
+          <a:xfrm>
+            <a:off x="822960" y="868680"/>
+            <a:ext cx="10515600" cy="914400"/>
+          </a:xfrm>
+          <a:prstGeom prst="rect">
+            <a:avLst/>
+          </a:prstGeom>
+          <a:noFill/>
+        </p:spPr>
+        <p:txBody>
+          <a:bodyPr wrap="square" anchor="t">
+            <a:spAutoFit/>
+          </a:bodyPr>
+          <a:lstStyle/>
+          <a:p>
+            <a:pPr algn="l"/>
+            <a:r>
+              <a:rPr sz="3200" b="1">
+                <a:solidFill>
+                  <a:srgbClr val="0F172A"/>
+                </a:solidFill>
+                <a:latin typeface="Noto Sans CJK SC"/>
+                <a:ea typeface="Noto Sans CJK SC"/>
+                <a:cs typeface="Noto Sans CJK SC"/>
+              </a:rPr>
+              <a:t>现场 Demo：一笔高风险付款的完整拦截</a:t>
+            </a:r>
+          </a:p>
+        </p:txBody>
+      </p:sp>
+      <p:sp>
+        <p:nvSpPr>
+          <p:cNvPr id="4" name="TextBox 3"/>
+          <p:cNvSpPr txBox="1"/>
+          <p:nvPr/>
+        </p:nvSpPr>
+        <p:spPr>
+          <a:xfrm>
+            <a:off x="822960" y="1691640"/>
+            <a:ext cx="10515600" cy="548640"/>
+          </a:xfrm>
+          <a:prstGeom prst="rect">
+            <a:avLst/>
+          </a:prstGeom>
+          <a:noFill/>
+        </p:spPr>
+        <p:txBody>
+          <a:bodyPr wrap="square" anchor="t">
+            <a:spAutoFit/>
+          </a:bodyPr>
+          <a:lstStyle/>
+          <a:p>
+            <a:pPr algn="l"/>
+            <a:r>
+              <a:rPr sz="1500" b="0">
+                <a:solidFill>
+                  <a:srgbClr val="64748B"/>
+                </a:solidFill>
+                <a:latin typeface="Noto Sans CJK SC"/>
+                <a:ea typeface="Noto Sans CJK SC"/>
+                <a:cs typeface="Noto Sans CJK SC"/>
+              </a:rPr>
+              <a:t>现场可运行：新建付款→预检亮红→AI 信号→核实清除→双人放行→生成指令。</a:t>
+            </a:r>
+          </a:p>
+        </p:txBody>
+      </p:sp>
+      <p:pic>
+        <p:nvPicPr>
+          <p:cNvPr id="5" name="Picture 4" descr="demo.png"/>
+          <p:cNvPicPr>
+            <a:picLocks noChangeAspect="1"/>
+          </p:cNvPicPr>
+          <p:nvPr/>
+        </p:nvPicPr>
+        <p:blipFill>
+          <a:blip r:embed="rId2"/>
+          <a:stretch>
+            <a:fillRect/>
+          </a:stretch>
+        </p:blipFill>
+        <p:spPr>
+          <a:xfrm>
+            <a:off x="1234440" y="2286000"/>
+            <a:ext cx="9692640" cy="5452110"/>
+          </a:xfrm>
+          <a:prstGeom prst="rect">
+            <a:avLst/>
+          </a:prstGeom>
+        </p:spPr>
+      </p:pic>
+      <p:sp>
+        <p:nvSpPr>
+          <p:cNvPr id="6" name="TextBox 5"/>
+          <p:cNvSpPr txBox="1"/>
+          <p:nvPr/>
+        </p:nvSpPr>
+        <p:spPr>
+          <a:xfrm>
+            <a:off x="822960" y="6309360"/>
+            <a:ext cx="10515600" cy="365760"/>
+          </a:xfrm>
+          <a:prstGeom prst="rect">
+            <a:avLst/>
+          </a:prstGeom>
+          <a:noFill/>
+        </p:spPr>
+        <p:txBody>
+          <a:bodyPr wrap="square" anchor="t">
+            <a:spAutoFit/>
+          </a:bodyPr>
+          <a:lstStyle/>
+          <a:p>
+            <a:pPr algn="l"/>
+            <a:r>
+              <a:rPr sz="1100" b="0">
+                <a:solidFill>
+                  <a:srgbClr val="64748B"/>
+                </a:solidFill>
+                <a:latin typeface="Noto Sans CJK SC"/>
+                <a:ea typeface="Noto Sans CJK SC"/>
+                <a:cs typeface="Noto Sans CJK SC"/>
+              </a:rPr>
+              <a:t>现场可运行、可演示核心功能——不是 PPT 概念。可扫码访问在线应用实测。</a:t>
+            </a:r>
+          </a:p>
+        </p:txBody>
+      </p:sp>
+    </p:spTree>
+  </p:cSld>
+  <p:clrMapOvr>
+    <a:masterClrMapping/>
+  </p:clrMapOvr>
+</p:sld>
+</file>
+
 <file path=ppt/theme/theme1.xml><?xml version="1.0" encoding="utf-8"?>
 <a:theme xmlns:a="http://schemas.openxmlformats.org/drawingml/2006/main" name="Office Theme">
   <a:themeElements>

--- a/public/FlowGuard-Hackathon-Pitch.pptx
+++ b/public/FlowGuard-Hackathon-Pitch.pptx
@@ -3859,7 +3859,7 @@
                 <a:ea typeface="Noto Sans CJK SC"/>
                 <a:cs typeface="Noto Sans CJK SC"/>
               </a:rPr>
-              <a:t>全站 TypeScript 0 error、双语键 411/411 对齐、关键路由端到端可跑。</a:t>
+              <a:t>全站 TypeScript 0 error、双语键 412/412 对齐、关键路由端到端可跑。</a:t>
             </a:r>
           </a:p>
         </p:txBody>

--- a/public/FlowGuard-Hackathon-Pitch.pptx
+++ b/public/FlowGuard-Hackathon-Pitch.pptx
@@ -6686,7 +6686,7 @@
                 <a:ea typeface="Noto Sans CJK SC"/>
                 <a:cs typeface="Noto Sans CJK SC"/>
               </a:rPr>
-              <a:t>被退回的以转账（尤其打款给个人收款人）最常见；退回多是收款信息/合规校验问题，却发起后才发现，代价几天到一周 → AI: draft the follow-up</a:t>
+              <a:t>被退回的以转账（尤其打款给个人收款人）最常见；退回多是收款信息/合规校验问题，却发起后才发现。传统核实要银行→出纳→业务→供应商层层传话，拖几天到一周 → AI: draft the follow-up</a:t>
             </a:r>
           </a:p>
         </p:txBody>
@@ -10108,7 +10108,7 @@
                           <a:ea typeface="Noto Sans CJK SC"/>
                           <a:cs typeface="Noto Sans CJK SC"/>
                         </a:rPr>
-                        <a:t> — 基于命中因子直接起草给供应商的核实话术，第一条就是可直接发送的消息（补齐闭环）。</a:t>
+                        <a:t> — 基于命中因子起草给供应商的核实邮件/话术，出纳一键直触供应商、砍掉银行→出纳→业务→供应商的中间层层传话（补齐闭环）。</a:t>
                       </a:r>
                     </a:p>
                   </a:txBody>

--- a/public/FlowGuard-Hackathon-Pitch.pptx
+++ b/public/FlowGuard-Hackathon-Pitch.pptx
@@ -3859,7 +3859,7 @@
                 <a:ea typeface="Noto Sans CJK SC"/>
                 <a:cs typeface="Noto Sans CJK SC"/>
               </a:rPr>
-              <a:t>全站 TypeScript 0 error、双语键 412/412 对齐、关键路由端到端可跑。</a:t>
+              <a:t>全站 TypeScript 0 error、双语键 415/415 对齐、关键路由端到端可跑。</a:t>
             </a:r>
           </a:p>
         </p:txBody>
@@ -8537,7 +8537,7 @@
                 <a:ea typeface="Noto Sans CJK SC"/>
                 <a:cs typeface="Noto Sans CJK SC"/>
               </a:rPr>
-              <a:t>传统电汇、跨境人民币、第三方跨境支付通道；境外主体可选通道含境外持牌数字结算服务商方案。</a:t>
+              <a:t>传统电汇、跨境人民币、第三方跨境支付通道；境外主体可选通道含境外持牌结算服务商方案。</a:t>
             </a:r>
           </a:p>
         </p:txBody>

--- a/public/FlowGuard-Hackathon-Pitch.pptx
+++ b/public/FlowGuard-Hackathon-Pitch.pptx
@@ -17,6 +17,7 @@
     <p:sldId id="265" r:id="rId16"/>
     <p:sldId id="266" r:id="rId17"/>
     <p:sldId id="267" r:id="rId18"/>
+    <p:sldId id="268" r:id="rId19"/>
   </p:sldIdLst>
   <p:sldSz cx="12191695" cy="6858000" type="screen4x3"/>
   <p:notesSz cx="6858000" cy="9144000"/>
@@ -3313,7 +3314,7 @@
                 <a:ea typeface="Noto Sans CJK SC"/>
                 <a:cs typeface="Noto Sans CJK SC"/>
               </a:rPr>
-              <a:t>过程可说明 · 技术架构</a:t>
+              <a:t>现场可以看到什么</a:t>
             </a:r>
           </a:p>
         </p:txBody>
@@ -3342,7 +3343,7 @@
           <a:p>
             <a:pPr algn="l"/>
             <a:r>
-              <a:rPr sz="3600" b="1">
+              <a:rPr sz="3200" b="1">
                 <a:solidFill>
                   <a:srgbClr val="0F172A"/>
                 </a:solidFill>
@@ -3350,7 +3351,7 @@
                 <a:ea typeface="Noto Sans CJK SC"/>
                 <a:cs typeface="Noto Sans CJK SC"/>
               </a:rPr>
-              <a:t>怎么实现的</a:t>
+              <a:t>现场 Demo：一笔高风险付款的完整拦截</a:t>
             </a:r>
           </a:p>
         </p:txBody>
@@ -3363,23 +3364,23 @@
         </p:nvSpPr>
         <p:spPr>
           <a:xfrm>
-            <a:off x="822960" y="1783080"/>
-            <a:ext cx="10515600" cy="731520"/>
-          </a:xfrm>
-          <a:prstGeom prst="rect">
-            <a:avLst/>
-          </a:prstGeom>
-          <a:noFill/>
-        </p:spPr>
-        <p:txBody>
-          <a:bodyPr wrap="square" anchor="t">
-            <a:spAutoFit/>
-          </a:bodyPr>
-          <a:lstStyle/>
-          <a:p>
-            <a:pPr algn="l"/>
-            <a:r>
-              <a:rPr sz="1600" b="0">
+            <a:off x="822960" y="1691640"/>
+            <a:ext cx="10515600" cy="548640"/>
+          </a:xfrm>
+          <a:prstGeom prst="rect">
+            <a:avLst/>
+          </a:prstGeom>
+          <a:noFill/>
+        </p:spPr>
+        <p:txBody>
+          <a:bodyPr wrap="square" anchor="t">
+            <a:spAutoFit/>
+          </a:bodyPr>
+          <a:lstStyle/>
+          <a:p>
+            <a:pPr algn="l"/>
+            <a:r>
+              <a:rPr sz="1500" b="0">
                 <a:solidFill>
                   <a:srgbClr val="64748B"/>
                 </a:solidFill>
@@ -3387,55 +3388,35 @@
                 <a:ea typeface="Noto Sans CJK SC"/>
                 <a:cs typeface="Noto Sans CJK SC"/>
               </a:rPr>
-              <a:t>Next.js(App Router)+TypeScript+Tailwind；确定性规则引擎+DeepSeek AI；双语 i18n。</a:t>
-            </a:r>
-          </a:p>
-        </p:txBody>
-      </p:sp>
-      <p:sp>
-        <p:nvSpPr>
-          <p:cNvPr id="5" name="Rounded Rectangle 4"/>
-          <p:cNvSpPr/>
-          <p:nvPr/>
-        </p:nvSpPr>
-        <p:spPr>
-          <a:xfrm>
-            <a:off x="822960" y="2468880"/>
-            <a:ext cx="5143500" cy="1143000"/>
-          </a:xfrm>
-          <a:prstGeom prst="roundRect">
-            <a:avLst/>
-          </a:prstGeom>
-          <a:solidFill>
-            <a:srgbClr val="F1F5F9"/>
-          </a:solidFill>
-          <a:ln>
-            <a:noFill/>
-          </a:ln>
-          <a:effectLst/>
-        </p:spPr>
-        <p:style>
-          <a:lnRef idx="1">
-            <a:schemeClr val="accent1"/>
-          </a:lnRef>
-          <a:fillRef idx="3">
-            <a:schemeClr val="accent1"/>
-          </a:fillRef>
-          <a:effectRef idx="2">
-            <a:schemeClr val="accent1"/>
-          </a:effectRef>
-          <a:fontRef idx="minor">
-            <a:schemeClr val="lt1"/>
-          </a:fontRef>
-        </p:style>
-        <p:txBody>
-          <a:bodyPr rtlCol="0" anchor="ctr"/>
-          <a:lstStyle/>
-          <a:p>
-            <a:pPr algn="ctr"/>
-          </a:p>
-        </p:txBody>
-      </p:sp>
+              <a:t>现场可运行：新建付款→预检亮红→AI 信号→核实清除→双人放行→生成指令。</a:t>
+            </a:r>
+          </a:p>
+        </p:txBody>
+      </p:sp>
+      <p:pic>
+        <p:nvPicPr>
+          <p:cNvPr id="5" name="Picture 4" descr="demo.png"/>
+          <p:cNvPicPr>
+            <a:picLocks noChangeAspect="1"/>
+          </p:cNvPicPr>
+          <p:nvPr/>
+        </p:nvPicPr>
+        <p:blipFill>
+          <a:blip r:embed="rId2"/>
+          <a:stretch>
+            <a:fillRect/>
+          </a:stretch>
+        </p:blipFill>
+        <p:spPr>
+          <a:xfrm>
+            <a:off x="1234440" y="2286000"/>
+            <a:ext cx="9692640" cy="5452110"/>
+          </a:xfrm>
+          <a:prstGeom prst="rect">
+            <a:avLst/>
+          </a:prstGeom>
+        </p:spPr>
+      </p:pic>
       <p:sp>
         <p:nvSpPr>
           <p:cNvPr id="6" name="TextBox 5"/>
@@ -3444,60 +3425,23 @@
         </p:nvSpPr>
         <p:spPr>
           <a:xfrm>
-            <a:off x="1005840" y="2578608"/>
-            <a:ext cx="4777740" cy="365760"/>
-          </a:xfrm>
-          <a:prstGeom prst="rect">
-            <a:avLst/>
-          </a:prstGeom>
-          <a:noFill/>
-        </p:spPr>
-        <p:txBody>
-          <a:bodyPr wrap="square" anchor="t">
-            <a:spAutoFit/>
-          </a:bodyPr>
-          <a:lstStyle/>
-          <a:p>
-            <a:pPr algn="l"/>
-            <a:r>
-              <a:rPr sz="1600" b="1">
-                <a:solidFill>
-                  <a:srgbClr val="0F172A"/>
-                </a:solidFill>
-                <a:latin typeface="Noto Sans CJK SC"/>
-                <a:ea typeface="Noto Sans CJK SC"/>
-                <a:cs typeface="Noto Sans CJK SC"/>
-              </a:rPr>
-              <a:t>前端 / 应用</a:t>
-            </a:r>
-          </a:p>
-        </p:txBody>
-      </p:sp>
-      <p:sp>
-        <p:nvSpPr>
-          <p:cNvPr id="7" name="TextBox 6"/>
-          <p:cNvSpPr txBox="1"/>
-          <p:nvPr/>
-        </p:nvSpPr>
-        <p:spPr>
-          <a:xfrm>
-            <a:off x="1005840" y="2971800"/>
-            <a:ext cx="4777740" cy="548640"/>
-          </a:xfrm>
-          <a:prstGeom prst="rect">
-            <a:avLst/>
-          </a:prstGeom>
-          <a:noFill/>
-        </p:spPr>
-        <p:txBody>
-          <a:bodyPr wrap="square" anchor="t">
-            <a:spAutoFit/>
-          </a:bodyPr>
-          <a:lstStyle/>
-          <a:p>
-            <a:pPr algn="l"/>
-            <a:r>
-              <a:rPr sz="1250" b="0">
+            <a:off x="822960" y="6309360"/>
+            <a:ext cx="10515600" cy="365760"/>
+          </a:xfrm>
+          <a:prstGeom prst="rect">
+            <a:avLst/>
+          </a:prstGeom>
+          <a:noFill/>
+        </p:spPr>
+        <p:txBody>
+          <a:bodyPr wrap="square" anchor="t">
+            <a:spAutoFit/>
+          </a:bodyPr>
+          <a:lstStyle/>
+          <a:p>
+            <a:pPr algn="l"/>
+            <a:r>
+              <a:rPr sz="1100" b="0">
                 <a:solidFill>
                   <a:srgbClr val="64748B"/>
                 </a:solidFill>
@@ -3505,361 +3449,7 @@
                 <a:ea typeface="Noto Sans CJK SC"/>
                 <a:cs typeface="Noto Sans CJK SC"/>
               </a:rPr>
-              <a:t>Next.js 15 + React + Tailwind，移动端优先；react-i18next 中英双语。</a:t>
-            </a:r>
-          </a:p>
-        </p:txBody>
-      </p:sp>
-      <p:sp>
-        <p:nvSpPr>
-          <p:cNvPr id="8" name="Rounded Rectangle 7"/>
-          <p:cNvSpPr/>
-          <p:nvPr/>
-        </p:nvSpPr>
-        <p:spPr>
-          <a:xfrm>
-            <a:off x="6195060" y="2468880"/>
-            <a:ext cx="5143500" cy="1143000"/>
-          </a:xfrm>
-          <a:prstGeom prst="roundRect">
-            <a:avLst/>
-          </a:prstGeom>
-          <a:solidFill>
-            <a:srgbClr val="F1F5F9"/>
-          </a:solidFill>
-          <a:ln>
-            <a:noFill/>
-          </a:ln>
-          <a:effectLst/>
-        </p:spPr>
-        <p:style>
-          <a:lnRef idx="1">
-            <a:schemeClr val="accent1"/>
-          </a:lnRef>
-          <a:fillRef idx="3">
-            <a:schemeClr val="accent1"/>
-          </a:fillRef>
-          <a:effectRef idx="2">
-            <a:schemeClr val="accent1"/>
-          </a:effectRef>
-          <a:fontRef idx="minor">
-            <a:schemeClr val="lt1"/>
-          </a:fontRef>
-        </p:style>
-        <p:txBody>
-          <a:bodyPr rtlCol="0" anchor="ctr"/>
-          <a:lstStyle/>
-          <a:p>
-            <a:pPr algn="ctr"/>
-          </a:p>
-        </p:txBody>
-      </p:sp>
-      <p:sp>
-        <p:nvSpPr>
-          <p:cNvPr id="9" name="TextBox 8"/>
-          <p:cNvSpPr txBox="1"/>
-          <p:nvPr/>
-        </p:nvSpPr>
-        <p:spPr>
-          <a:xfrm>
-            <a:off x="6377940" y="2578608"/>
-            <a:ext cx="4777740" cy="365760"/>
-          </a:xfrm>
-          <a:prstGeom prst="rect">
-            <a:avLst/>
-          </a:prstGeom>
-          <a:noFill/>
-        </p:spPr>
-        <p:txBody>
-          <a:bodyPr wrap="square" anchor="t">
-            <a:spAutoFit/>
-          </a:bodyPr>
-          <a:lstStyle/>
-          <a:p>
-            <a:pPr algn="l"/>
-            <a:r>
-              <a:rPr sz="1600" b="1">
-                <a:solidFill>
-                  <a:srgbClr val="0F172A"/>
-                </a:solidFill>
-                <a:latin typeface="Noto Sans CJK SC"/>
-                <a:ea typeface="Noto Sans CJK SC"/>
-                <a:cs typeface="Noto Sans CJK SC"/>
-              </a:rPr>
-              <a:t>风控内核</a:t>
-            </a:r>
-          </a:p>
-        </p:txBody>
-      </p:sp>
-      <p:sp>
-        <p:nvSpPr>
-          <p:cNvPr id="10" name="TextBox 9"/>
-          <p:cNvSpPr txBox="1"/>
-          <p:nvPr/>
-        </p:nvSpPr>
-        <p:spPr>
-          <a:xfrm>
-            <a:off x="6377940" y="2971800"/>
-            <a:ext cx="4777740" cy="548640"/>
-          </a:xfrm>
-          <a:prstGeom prst="rect">
-            <a:avLst/>
-          </a:prstGeom>
-          <a:noFill/>
-        </p:spPr>
-        <p:txBody>
-          <a:bodyPr wrap="square" anchor="t">
-            <a:spAutoFit/>
-          </a:bodyPr>
-          <a:lstStyle/>
-          <a:p>
-            <a:pPr algn="l"/>
-            <a:r>
-              <a:rPr sz="1250" b="0">
-                <a:solidFill>
-                  <a:srgbClr val="64748B"/>
-                </a:solidFill>
-                <a:latin typeface="Noto Sans CJK SC"/>
-                <a:ea typeface="Noto Sans CJK SC"/>
-                <a:cs typeface="Noto Sans CJK SC"/>
-              </a:rPr>
-              <a:t>确定性退回风险规则引擎(可解释、可复现) + DeepSeek 作为补充语义信号层。</a:t>
-            </a:r>
-          </a:p>
-        </p:txBody>
-      </p:sp>
-      <p:sp>
-        <p:nvSpPr>
-          <p:cNvPr id="11" name="Rounded Rectangle 10"/>
-          <p:cNvSpPr/>
-          <p:nvPr/>
-        </p:nvSpPr>
-        <p:spPr>
-          <a:xfrm>
-            <a:off x="822960" y="3840480"/>
-            <a:ext cx="5143500" cy="1143000"/>
-          </a:xfrm>
-          <a:prstGeom prst="roundRect">
-            <a:avLst/>
-          </a:prstGeom>
-          <a:solidFill>
-            <a:srgbClr val="F1F5F9"/>
-          </a:solidFill>
-          <a:ln>
-            <a:noFill/>
-          </a:ln>
-          <a:effectLst/>
-        </p:spPr>
-        <p:style>
-          <a:lnRef idx="1">
-            <a:schemeClr val="accent1"/>
-          </a:lnRef>
-          <a:fillRef idx="3">
-            <a:schemeClr val="accent1"/>
-          </a:fillRef>
-          <a:effectRef idx="2">
-            <a:schemeClr val="accent1"/>
-          </a:effectRef>
-          <a:fontRef idx="minor">
-            <a:schemeClr val="lt1"/>
-          </a:fontRef>
-        </p:style>
-        <p:txBody>
-          <a:bodyPr rtlCol="0" anchor="ctr"/>
-          <a:lstStyle/>
-          <a:p>
-            <a:pPr algn="ctr"/>
-          </a:p>
-        </p:txBody>
-      </p:sp>
-      <p:sp>
-        <p:nvSpPr>
-          <p:cNvPr id="12" name="TextBox 11"/>
-          <p:cNvSpPr txBox="1"/>
-          <p:nvPr/>
-        </p:nvSpPr>
-        <p:spPr>
-          <a:xfrm>
-            <a:off x="1005840" y="3950208"/>
-            <a:ext cx="4777740" cy="365760"/>
-          </a:xfrm>
-          <a:prstGeom prst="rect">
-            <a:avLst/>
-          </a:prstGeom>
-          <a:noFill/>
-        </p:spPr>
-        <p:txBody>
-          <a:bodyPr wrap="square" anchor="t">
-            <a:spAutoFit/>
-          </a:bodyPr>
-          <a:lstStyle/>
-          <a:p>
-            <a:pPr algn="l"/>
-            <a:r>
-              <a:rPr sz="1600" b="1">
-                <a:solidFill>
-                  <a:srgbClr val="0F172A"/>
-                </a:solidFill>
-                <a:latin typeface="Noto Sans CJK SC"/>
-                <a:ea typeface="Noto Sans CJK SC"/>
-                <a:cs typeface="Noto Sans CJK SC"/>
-              </a:rPr>
-              <a:t>数据与流转</a:t>
-            </a:r>
-          </a:p>
-        </p:txBody>
-      </p:sp>
-      <p:sp>
-        <p:nvSpPr>
-          <p:cNvPr id="13" name="TextBox 12"/>
-          <p:cNvSpPr txBox="1"/>
-          <p:nvPr/>
-        </p:nvSpPr>
-        <p:spPr>
-          <a:xfrm>
-            <a:off x="1005840" y="4343400"/>
-            <a:ext cx="4777740" cy="548640"/>
-          </a:xfrm>
-          <a:prstGeom prst="rect">
-            <a:avLst/>
-          </a:prstGeom>
-          <a:noFill/>
-        </p:spPr>
-        <p:txBody>
-          <a:bodyPr wrap="square" anchor="t">
-            <a:spAutoFit/>
-          </a:bodyPr>
-          <a:lstStyle/>
-          <a:p>
-            <a:pPr algn="l"/>
-            <a:r>
-              <a:rPr sz="1250" b="0">
-                <a:solidFill>
-                  <a:srgbClr val="64748B"/>
-                </a:solidFill>
-                <a:latin typeface="Noto Sans CJK SC"/>
-                <a:ea typeface="Noto Sans CJK SC"/>
-                <a:cs typeface="Noto Sans CJK SC"/>
-              </a:rPr>
-              <a:t>付款指令/收款人台账/工单/到账确认/对账 全链路数据模型。</a:t>
-            </a:r>
-          </a:p>
-        </p:txBody>
-      </p:sp>
-      <p:sp>
-        <p:nvSpPr>
-          <p:cNvPr id="14" name="Rounded Rectangle 13"/>
-          <p:cNvSpPr/>
-          <p:nvPr/>
-        </p:nvSpPr>
-        <p:spPr>
-          <a:xfrm>
-            <a:off x="6195060" y="3840480"/>
-            <a:ext cx="5143500" cy="1143000"/>
-          </a:xfrm>
-          <a:prstGeom prst="roundRect">
-            <a:avLst/>
-          </a:prstGeom>
-          <a:solidFill>
-            <a:srgbClr val="F1F5F9"/>
-          </a:solidFill>
-          <a:ln>
-            <a:noFill/>
-          </a:ln>
-          <a:effectLst/>
-        </p:spPr>
-        <p:style>
-          <a:lnRef idx="1">
-            <a:schemeClr val="accent1"/>
-          </a:lnRef>
-          <a:fillRef idx="3">
-            <a:schemeClr val="accent1"/>
-          </a:fillRef>
-          <a:effectRef idx="2">
-            <a:schemeClr val="accent1"/>
-          </a:effectRef>
-          <a:fontRef idx="minor">
-            <a:schemeClr val="lt1"/>
-          </a:fontRef>
-        </p:style>
-        <p:txBody>
-          <a:bodyPr rtlCol="0" anchor="ctr"/>
-          <a:lstStyle/>
-          <a:p>
-            <a:pPr algn="ctr"/>
-          </a:p>
-        </p:txBody>
-      </p:sp>
-      <p:sp>
-        <p:nvSpPr>
-          <p:cNvPr id="15" name="TextBox 14"/>
-          <p:cNvSpPr txBox="1"/>
-          <p:nvPr/>
-        </p:nvSpPr>
-        <p:spPr>
-          <a:xfrm>
-            <a:off x="6377940" y="3950208"/>
-            <a:ext cx="4777740" cy="365760"/>
-          </a:xfrm>
-          <a:prstGeom prst="rect">
-            <a:avLst/>
-          </a:prstGeom>
-          <a:noFill/>
-        </p:spPr>
-        <p:txBody>
-          <a:bodyPr wrap="square" anchor="t">
-            <a:spAutoFit/>
-          </a:bodyPr>
-          <a:lstStyle/>
-          <a:p>
-            <a:pPr algn="l"/>
-            <a:r>
-              <a:rPr sz="1600" b="1">
-                <a:solidFill>
-                  <a:srgbClr val="0F172A"/>
-                </a:solidFill>
-                <a:latin typeface="Noto Sans CJK SC"/>
-                <a:ea typeface="Noto Sans CJK SC"/>
-                <a:cs typeface="Noto Sans CJK SC"/>
-              </a:rPr>
-              <a:t>工程质量</a:t>
-            </a:r>
-          </a:p>
-        </p:txBody>
-      </p:sp>
-      <p:sp>
-        <p:nvSpPr>
-          <p:cNvPr id="16" name="TextBox 15"/>
-          <p:cNvSpPr txBox="1"/>
-          <p:nvPr/>
-        </p:nvSpPr>
-        <p:spPr>
-          <a:xfrm>
-            <a:off x="6377940" y="4343400"/>
-            <a:ext cx="4777740" cy="548640"/>
-          </a:xfrm>
-          <a:prstGeom prst="rect">
-            <a:avLst/>
-          </a:prstGeom>
-          <a:noFill/>
-        </p:spPr>
-        <p:txBody>
-          <a:bodyPr wrap="square" anchor="t">
-            <a:spAutoFit/>
-          </a:bodyPr>
-          <a:lstStyle/>
-          <a:p>
-            <a:pPr algn="l"/>
-            <a:r>
-              <a:rPr sz="1250" b="0">
-                <a:solidFill>
-                  <a:srgbClr val="64748B"/>
-                </a:solidFill>
-                <a:latin typeface="Noto Sans CJK SC"/>
-                <a:ea typeface="Noto Sans CJK SC"/>
-                <a:cs typeface="Noto Sans CJK SC"/>
-              </a:rPr>
-              <a:t>全站 TypeScript 0 error、双语键 415/415 对齐、关键路由端到端可跑。</a:t>
+              <a:t>现场可运行、可演示核心功能——不是 PPT 概念。可扫码访问在线应用实测。</a:t>
             </a:r>
           </a:p>
         </p:txBody>
@@ -3873,6 +3463,615 @@
 </file>
 
 <file path=ppt/slides/slide11.xml><?xml version="1.0" encoding="utf-8"?>
+<p:sld xmlns:a="http://schemas.openxmlformats.org/drawingml/2006/main" xmlns:p="http://schemas.openxmlformats.org/presentationml/2006/main" xmlns:r="http://schemas.openxmlformats.org/officeDocument/2006/relationships">
+  <p:cSld>
+    <p:bg>
+      <p:bgPr>
+        <a:solidFill>
+          <a:srgbClr val="FFFFFF"/>
+        </a:solidFill>
+        <a:effectLst/>
+      </p:bgPr>
+    </p:bg>
+    <p:spTree>
+      <p:nvGrpSpPr>
+        <p:cNvPr id="1" name=""/>
+        <p:cNvGrpSpPr/>
+        <p:nvPr/>
+      </p:nvGrpSpPr>
+      <p:grpSpPr/>
+      <p:sp>
+        <p:nvSpPr>
+          <p:cNvPr id="2" name="TextBox 1"/>
+          <p:cNvSpPr txBox="1"/>
+          <p:nvPr/>
+        </p:nvSpPr>
+        <p:spPr>
+          <a:xfrm>
+            <a:off x="822960" y="502920"/>
+            <a:ext cx="10515600" cy="365760"/>
+          </a:xfrm>
+          <a:prstGeom prst="rect">
+            <a:avLst/>
+          </a:prstGeom>
+          <a:noFill/>
+        </p:spPr>
+        <p:txBody>
+          <a:bodyPr wrap="square" anchor="t">
+            <a:spAutoFit/>
+          </a:bodyPr>
+          <a:lstStyle/>
+          <a:p>
+            <a:pPr algn="l"/>
+            <a:r>
+              <a:rPr sz="1400" b="1">
+                <a:solidFill>
+                  <a:srgbClr val="0F766E"/>
+                </a:solidFill>
+                <a:latin typeface="Noto Sans CJK SC"/>
+                <a:ea typeface="Noto Sans CJK SC"/>
+                <a:cs typeface="Noto Sans CJK SC"/>
+              </a:rPr>
+              <a:t>过程可说明 · 技术架构</a:t>
+            </a:r>
+          </a:p>
+        </p:txBody>
+      </p:sp>
+      <p:sp>
+        <p:nvSpPr>
+          <p:cNvPr id="3" name="TextBox 2"/>
+          <p:cNvSpPr txBox="1"/>
+          <p:nvPr/>
+        </p:nvSpPr>
+        <p:spPr>
+          <a:xfrm>
+            <a:off x="822960" y="868680"/>
+            <a:ext cx="10515600" cy="914400"/>
+          </a:xfrm>
+          <a:prstGeom prst="rect">
+            <a:avLst/>
+          </a:prstGeom>
+          <a:noFill/>
+        </p:spPr>
+        <p:txBody>
+          <a:bodyPr wrap="square" anchor="t">
+            <a:spAutoFit/>
+          </a:bodyPr>
+          <a:lstStyle/>
+          <a:p>
+            <a:pPr algn="l"/>
+            <a:r>
+              <a:rPr sz="3600" b="1">
+                <a:solidFill>
+                  <a:srgbClr val="0F172A"/>
+                </a:solidFill>
+                <a:latin typeface="Noto Sans CJK SC"/>
+                <a:ea typeface="Noto Sans CJK SC"/>
+                <a:cs typeface="Noto Sans CJK SC"/>
+              </a:rPr>
+              <a:t>怎么实现的</a:t>
+            </a:r>
+          </a:p>
+        </p:txBody>
+      </p:sp>
+      <p:sp>
+        <p:nvSpPr>
+          <p:cNvPr id="4" name="TextBox 3"/>
+          <p:cNvSpPr txBox="1"/>
+          <p:nvPr/>
+        </p:nvSpPr>
+        <p:spPr>
+          <a:xfrm>
+            <a:off x="822960" y="1783080"/>
+            <a:ext cx="10515600" cy="731520"/>
+          </a:xfrm>
+          <a:prstGeom prst="rect">
+            <a:avLst/>
+          </a:prstGeom>
+          <a:noFill/>
+        </p:spPr>
+        <p:txBody>
+          <a:bodyPr wrap="square" anchor="t">
+            <a:spAutoFit/>
+          </a:bodyPr>
+          <a:lstStyle/>
+          <a:p>
+            <a:pPr algn="l"/>
+            <a:r>
+              <a:rPr sz="1600" b="0">
+                <a:solidFill>
+                  <a:srgbClr val="64748B"/>
+                </a:solidFill>
+                <a:latin typeface="Noto Sans CJK SC"/>
+                <a:ea typeface="Noto Sans CJK SC"/>
+                <a:cs typeface="Noto Sans CJK SC"/>
+              </a:rPr>
+              <a:t>Next.js(App Router)+TypeScript+Tailwind；确定性规则引擎+DeepSeek AI；双语 i18n。</a:t>
+            </a:r>
+          </a:p>
+        </p:txBody>
+      </p:sp>
+      <p:sp>
+        <p:nvSpPr>
+          <p:cNvPr id="5" name="Rounded Rectangle 4"/>
+          <p:cNvSpPr/>
+          <p:nvPr/>
+        </p:nvSpPr>
+        <p:spPr>
+          <a:xfrm>
+            <a:off x="822960" y="2468880"/>
+            <a:ext cx="5143500" cy="1143000"/>
+          </a:xfrm>
+          <a:prstGeom prst="roundRect">
+            <a:avLst/>
+          </a:prstGeom>
+          <a:solidFill>
+            <a:srgbClr val="F1F5F9"/>
+          </a:solidFill>
+          <a:ln>
+            <a:noFill/>
+          </a:ln>
+          <a:effectLst/>
+        </p:spPr>
+        <p:style>
+          <a:lnRef idx="1">
+            <a:schemeClr val="accent1"/>
+          </a:lnRef>
+          <a:fillRef idx="3">
+            <a:schemeClr val="accent1"/>
+          </a:fillRef>
+          <a:effectRef idx="2">
+            <a:schemeClr val="accent1"/>
+          </a:effectRef>
+          <a:fontRef idx="minor">
+            <a:schemeClr val="lt1"/>
+          </a:fontRef>
+        </p:style>
+        <p:txBody>
+          <a:bodyPr rtlCol="0" anchor="ctr"/>
+          <a:lstStyle/>
+          <a:p>
+            <a:pPr algn="ctr"/>
+          </a:p>
+        </p:txBody>
+      </p:sp>
+      <p:sp>
+        <p:nvSpPr>
+          <p:cNvPr id="6" name="TextBox 5"/>
+          <p:cNvSpPr txBox="1"/>
+          <p:nvPr/>
+        </p:nvSpPr>
+        <p:spPr>
+          <a:xfrm>
+            <a:off x="1005840" y="2578608"/>
+            <a:ext cx="4777740" cy="365760"/>
+          </a:xfrm>
+          <a:prstGeom prst="rect">
+            <a:avLst/>
+          </a:prstGeom>
+          <a:noFill/>
+        </p:spPr>
+        <p:txBody>
+          <a:bodyPr wrap="square" anchor="t">
+            <a:spAutoFit/>
+          </a:bodyPr>
+          <a:lstStyle/>
+          <a:p>
+            <a:pPr algn="l"/>
+            <a:r>
+              <a:rPr sz="1600" b="1">
+                <a:solidFill>
+                  <a:srgbClr val="0F172A"/>
+                </a:solidFill>
+                <a:latin typeface="Noto Sans CJK SC"/>
+                <a:ea typeface="Noto Sans CJK SC"/>
+                <a:cs typeface="Noto Sans CJK SC"/>
+              </a:rPr>
+              <a:t>前端 / 应用</a:t>
+            </a:r>
+          </a:p>
+        </p:txBody>
+      </p:sp>
+      <p:sp>
+        <p:nvSpPr>
+          <p:cNvPr id="7" name="TextBox 6"/>
+          <p:cNvSpPr txBox="1"/>
+          <p:nvPr/>
+        </p:nvSpPr>
+        <p:spPr>
+          <a:xfrm>
+            <a:off x="1005840" y="2971800"/>
+            <a:ext cx="4777740" cy="548640"/>
+          </a:xfrm>
+          <a:prstGeom prst="rect">
+            <a:avLst/>
+          </a:prstGeom>
+          <a:noFill/>
+        </p:spPr>
+        <p:txBody>
+          <a:bodyPr wrap="square" anchor="t">
+            <a:spAutoFit/>
+          </a:bodyPr>
+          <a:lstStyle/>
+          <a:p>
+            <a:pPr algn="l"/>
+            <a:r>
+              <a:rPr sz="1250" b="0">
+                <a:solidFill>
+                  <a:srgbClr val="64748B"/>
+                </a:solidFill>
+                <a:latin typeface="Noto Sans CJK SC"/>
+                <a:ea typeface="Noto Sans CJK SC"/>
+                <a:cs typeface="Noto Sans CJK SC"/>
+              </a:rPr>
+              <a:t>Next.js 15 + React + Tailwind，移动端优先；react-i18next 中英双语。</a:t>
+            </a:r>
+          </a:p>
+        </p:txBody>
+      </p:sp>
+      <p:sp>
+        <p:nvSpPr>
+          <p:cNvPr id="8" name="Rounded Rectangle 7"/>
+          <p:cNvSpPr/>
+          <p:nvPr/>
+        </p:nvSpPr>
+        <p:spPr>
+          <a:xfrm>
+            <a:off x="6195060" y="2468880"/>
+            <a:ext cx="5143500" cy="1143000"/>
+          </a:xfrm>
+          <a:prstGeom prst="roundRect">
+            <a:avLst/>
+          </a:prstGeom>
+          <a:solidFill>
+            <a:srgbClr val="F1F5F9"/>
+          </a:solidFill>
+          <a:ln>
+            <a:noFill/>
+          </a:ln>
+          <a:effectLst/>
+        </p:spPr>
+        <p:style>
+          <a:lnRef idx="1">
+            <a:schemeClr val="accent1"/>
+          </a:lnRef>
+          <a:fillRef idx="3">
+            <a:schemeClr val="accent1"/>
+          </a:fillRef>
+          <a:effectRef idx="2">
+            <a:schemeClr val="accent1"/>
+          </a:effectRef>
+          <a:fontRef idx="minor">
+            <a:schemeClr val="lt1"/>
+          </a:fontRef>
+        </p:style>
+        <p:txBody>
+          <a:bodyPr rtlCol="0" anchor="ctr"/>
+          <a:lstStyle/>
+          <a:p>
+            <a:pPr algn="ctr"/>
+          </a:p>
+        </p:txBody>
+      </p:sp>
+      <p:sp>
+        <p:nvSpPr>
+          <p:cNvPr id="9" name="TextBox 8"/>
+          <p:cNvSpPr txBox="1"/>
+          <p:nvPr/>
+        </p:nvSpPr>
+        <p:spPr>
+          <a:xfrm>
+            <a:off x="6377940" y="2578608"/>
+            <a:ext cx="4777740" cy="365760"/>
+          </a:xfrm>
+          <a:prstGeom prst="rect">
+            <a:avLst/>
+          </a:prstGeom>
+          <a:noFill/>
+        </p:spPr>
+        <p:txBody>
+          <a:bodyPr wrap="square" anchor="t">
+            <a:spAutoFit/>
+          </a:bodyPr>
+          <a:lstStyle/>
+          <a:p>
+            <a:pPr algn="l"/>
+            <a:r>
+              <a:rPr sz="1600" b="1">
+                <a:solidFill>
+                  <a:srgbClr val="0F172A"/>
+                </a:solidFill>
+                <a:latin typeface="Noto Sans CJK SC"/>
+                <a:ea typeface="Noto Sans CJK SC"/>
+                <a:cs typeface="Noto Sans CJK SC"/>
+              </a:rPr>
+              <a:t>风控内核</a:t>
+            </a:r>
+          </a:p>
+        </p:txBody>
+      </p:sp>
+      <p:sp>
+        <p:nvSpPr>
+          <p:cNvPr id="10" name="TextBox 9"/>
+          <p:cNvSpPr txBox="1"/>
+          <p:nvPr/>
+        </p:nvSpPr>
+        <p:spPr>
+          <a:xfrm>
+            <a:off x="6377940" y="2971800"/>
+            <a:ext cx="4777740" cy="548640"/>
+          </a:xfrm>
+          <a:prstGeom prst="rect">
+            <a:avLst/>
+          </a:prstGeom>
+          <a:noFill/>
+        </p:spPr>
+        <p:txBody>
+          <a:bodyPr wrap="square" anchor="t">
+            <a:spAutoFit/>
+          </a:bodyPr>
+          <a:lstStyle/>
+          <a:p>
+            <a:pPr algn="l"/>
+            <a:r>
+              <a:rPr sz="1250" b="0">
+                <a:solidFill>
+                  <a:srgbClr val="64748B"/>
+                </a:solidFill>
+                <a:latin typeface="Noto Sans CJK SC"/>
+                <a:ea typeface="Noto Sans CJK SC"/>
+                <a:cs typeface="Noto Sans CJK SC"/>
+              </a:rPr>
+              <a:t>确定性退回风险规则引擎(可解释、可复现) + DeepSeek 作为补充语义信号层。</a:t>
+            </a:r>
+          </a:p>
+        </p:txBody>
+      </p:sp>
+      <p:sp>
+        <p:nvSpPr>
+          <p:cNvPr id="11" name="Rounded Rectangle 10"/>
+          <p:cNvSpPr/>
+          <p:nvPr/>
+        </p:nvSpPr>
+        <p:spPr>
+          <a:xfrm>
+            <a:off x="822960" y="3840480"/>
+            <a:ext cx="5143500" cy="1143000"/>
+          </a:xfrm>
+          <a:prstGeom prst="roundRect">
+            <a:avLst/>
+          </a:prstGeom>
+          <a:solidFill>
+            <a:srgbClr val="F1F5F9"/>
+          </a:solidFill>
+          <a:ln>
+            <a:noFill/>
+          </a:ln>
+          <a:effectLst/>
+        </p:spPr>
+        <p:style>
+          <a:lnRef idx="1">
+            <a:schemeClr val="accent1"/>
+          </a:lnRef>
+          <a:fillRef idx="3">
+            <a:schemeClr val="accent1"/>
+          </a:fillRef>
+          <a:effectRef idx="2">
+            <a:schemeClr val="accent1"/>
+          </a:effectRef>
+          <a:fontRef idx="minor">
+            <a:schemeClr val="lt1"/>
+          </a:fontRef>
+        </p:style>
+        <p:txBody>
+          <a:bodyPr rtlCol="0" anchor="ctr"/>
+          <a:lstStyle/>
+          <a:p>
+            <a:pPr algn="ctr"/>
+          </a:p>
+        </p:txBody>
+      </p:sp>
+      <p:sp>
+        <p:nvSpPr>
+          <p:cNvPr id="12" name="TextBox 11"/>
+          <p:cNvSpPr txBox="1"/>
+          <p:nvPr/>
+        </p:nvSpPr>
+        <p:spPr>
+          <a:xfrm>
+            <a:off x="1005840" y="3950208"/>
+            <a:ext cx="4777740" cy="365760"/>
+          </a:xfrm>
+          <a:prstGeom prst="rect">
+            <a:avLst/>
+          </a:prstGeom>
+          <a:noFill/>
+        </p:spPr>
+        <p:txBody>
+          <a:bodyPr wrap="square" anchor="t">
+            <a:spAutoFit/>
+          </a:bodyPr>
+          <a:lstStyle/>
+          <a:p>
+            <a:pPr algn="l"/>
+            <a:r>
+              <a:rPr sz="1600" b="1">
+                <a:solidFill>
+                  <a:srgbClr val="0F172A"/>
+                </a:solidFill>
+                <a:latin typeface="Noto Sans CJK SC"/>
+                <a:ea typeface="Noto Sans CJK SC"/>
+                <a:cs typeface="Noto Sans CJK SC"/>
+              </a:rPr>
+              <a:t>数据与流转</a:t>
+            </a:r>
+          </a:p>
+        </p:txBody>
+      </p:sp>
+      <p:sp>
+        <p:nvSpPr>
+          <p:cNvPr id="13" name="TextBox 12"/>
+          <p:cNvSpPr txBox="1"/>
+          <p:nvPr/>
+        </p:nvSpPr>
+        <p:spPr>
+          <a:xfrm>
+            <a:off x="1005840" y="4343400"/>
+            <a:ext cx="4777740" cy="548640"/>
+          </a:xfrm>
+          <a:prstGeom prst="rect">
+            <a:avLst/>
+          </a:prstGeom>
+          <a:noFill/>
+        </p:spPr>
+        <p:txBody>
+          <a:bodyPr wrap="square" anchor="t">
+            <a:spAutoFit/>
+          </a:bodyPr>
+          <a:lstStyle/>
+          <a:p>
+            <a:pPr algn="l"/>
+            <a:r>
+              <a:rPr sz="1250" b="0">
+                <a:solidFill>
+                  <a:srgbClr val="64748B"/>
+                </a:solidFill>
+                <a:latin typeface="Noto Sans CJK SC"/>
+                <a:ea typeface="Noto Sans CJK SC"/>
+                <a:cs typeface="Noto Sans CJK SC"/>
+              </a:rPr>
+              <a:t>付款指令/收款人台账/工单/到账确认/对账 全链路数据模型。</a:t>
+            </a:r>
+          </a:p>
+        </p:txBody>
+      </p:sp>
+      <p:sp>
+        <p:nvSpPr>
+          <p:cNvPr id="14" name="Rounded Rectangle 13"/>
+          <p:cNvSpPr/>
+          <p:nvPr/>
+        </p:nvSpPr>
+        <p:spPr>
+          <a:xfrm>
+            <a:off x="6195060" y="3840480"/>
+            <a:ext cx="5143500" cy="1143000"/>
+          </a:xfrm>
+          <a:prstGeom prst="roundRect">
+            <a:avLst/>
+          </a:prstGeom>
+          <a:solidFill>
+            <a:srgbClr val="F1F5F9"/>
+          </a:solidFill>
+          <a:ln>
+            <a:noFill/>
+          </a:ln>
+          <a:effectLst/>
+        </p:spPr>
+        <p:style>
+          <a:lnRef idx="1">
+            <a:schemeClr val="accent1"/>
+          </a:lnRef>
+          <a:fillRef idx="3">
+            <a:schemeClr val="accent1"/>
+          </a:fillRef>
+          <a:effectRef idx="2">
+            <a:schemeClr val="accent1"/>
+          </a:effectRef>
+          <a:fontRef idx="minor">
+            <a:schemeClr val="lt1"/>
+          </a:fontRef>
+        </p:style>
+        <p:txBody>
+          <a:bodyPr rtlCol="0" anchor="ctr"/>
+          <a:lstStyle/>
+          <a:p>
+            <a:pPr algn="ctr"/>
+          </a:p>
+        </p:txBody>
+      </p:sp>
+      <p:sp>
+        <p:nvSpPr>
+          <p:cNvPr id="15" name="TextBox 14"/>
+          <p:cNvSpPr txBox="1"/>
+          <p:nvPr/>
+        </p:nvSpPr>
+        <p:spPr>
+          <a:xfrm>
+            <a:off x="6377940" y="3950208"/>
+            <a:ext cx="4777740" cy="365760"/>
+          </a:xfrm>
+          <a:prstGeom prst="rect">
+            <a:avLst/>
+          </a:prstGeom>
+          <a:noFill/>
+        </p:spPr>
+        <p:txBody>
+          <a:bodyPr wrap="square" anchor="t">
+            <a:spAutoFit/>
+          </a:bodyPr>
+          <a:lstStyle/>
+          <a:p>
+            <a:pPr algn="l"/>
+            <a:r>
+              <a:rPr sz="1600" b="1">
+                <a:solidFill>
+                  <a:srgbClr val="0F172A"/>
+                </a:solidFill>
+                <a:latin typeface="Noto Sans CJK SC"/>
+                <a:ea typeface="Noto Sans CJK SC"/>
+                <a:cs typeface="Noto Sans CJK SC"/>
+              </a:rPr>
+              <a:t>工程质量</a:t>
+            </a:r>
+          </a:p>
+        </p:txBody>
+      </p:sp>
+      <p:sp>
+        <p:nvSpPr>
+          <p:cNvPr id="16" name="TextBox 15"/>
+          <p:cNvSpPr txBox="1"/>
+          <p:nvPr/>
+        </p:nvSpPr>
+        <p:spPr>
+          <a:xfrm>
+            <a:off x="6377940" y="4343400"/>
+            <a:ext cx="4777740" cy="548640"/>
+          </a:xfrm>
+          <a:prstGeom prst="rect">
+            <a:avLst/>
+          </a:prstGeom>
+          <a:noFill/>
+        </p:spPr>
+        <p:txBody>
+          <a:bodyPr wrap="square" anchor="t">
+            <a:spAutoFit/>
+          </a:bodyPr>
+          <a:lstStyle/>
+          <a:p>
+            <a:pPr algn="l"/>
+            <a:r>
+              <a:rPr sz="1250" b="0">
+                <a:solidFill>
+                  <a:srgbClr val="64748B"/>
+                </a:solidFill>
+                <a:latin typeface="Noto Sans CJK SC"/>
+                <a:ea typeface="Noto Sans CJK SC"/>
+                <a:cs typeface="Noto Sans CJK SC"/>
+              </a:rPr>
+              <a:t>全站 TypeScript 0 error、双语键 415/415 对齐、关键路由端到端可跑。</a:t>
+            </a:r>
+          </a:p>
+        </p:txBody>
+      </p:sp>
+    </p:spTree>
+  </p:cSld>
+  <p:clrMapOvr>
+    <a:masterClrMapping/>
+  </p:clrMapOvr>
+</p:sld>
+</file>
+
+<file path=ppt/slides/slide12.xml><?xml version="1.0" encoding="utf-8"?>
 <p:sld xmlns:a="http://schemas.openxmlformats.org/drawingml/2006/main" xmlns:p="http://schemas.openxmlformats.org/presentationml/2006/main" xmlns:r="http://schemas.openxmlformats.org/officeDocument/2006/relationships">
   <p:cSld>
     <p:bg>
@@ -4518,7 +4717,7 @@
 </p:sld>
 </file>
 
-<file path=ppt/slides/slide12.xml><?xml version="1.0" encoding="utf-8"?>
+<file path=ppt/slides/slide13.xml><?xml version="1.0" encoding="utf-8"?>
 <p:sld xmlns:a="http://schemas.openxmlformats.org/drawingml/2006/main" xmlns:p="http://schemas.openxmlformats.org/presentationml/2006/main" xmlns:r="http://schemas.openxmlformats.org/officeDocument/2006/relationships">
   <p:cSld>
     <p:bg>
@@ -5133,7 +5332,7 @@
                 <a:ea typeface="Noto Sans CJK SC"/>
                 <a:cs typeface="Noto Sans CJK SC"/>
               </a:rPr>
-              <a:t>今天用 5 分钟讲清 10 件事</a:t>
+              <a:t>今天用 5 分钟讲清 11 件事</a:t>
             </a:r>
           </a:p>
         </p:txBody>
@@ -5251,7 +5450,7 @@
                 <a:ea typeface="Noto Sans CJK SC"/>
                 <a:cs typeface="Noto Sans CJK SC"/>
               </a:rPr>
-              <a:t>真实问题：谁在痛、痛在哪</a:t>
+              <a:t>真实案例：一笔货款怎么踩坑</a:t>
             </a:r>
           </a:p>
         </p:txBody>
@@ -5369,7 +5568,7 @@
                 <a:ea typeface="Noto Sans CJK SC"/>
                 <a:cs typeface="Noto Sans CJK SC"/>
               </a:rPr>
-              <a:t>产品介绍：FlowGuard 是什么</a:t>
+              <a:t>真实问题：谁在痛、痛在哪</a:t>
             </a:r>
           </a:p>
         </p:txBody>
@@ -5487,7 +5686,7 @@
                 <a:ea typeface="Noto Sans CJK SC"/>
                 <a:cs typeface="Noto Sans CJK SC"/>
               </a:rPr>
-              <a:t>核心功能①：收款方信息预检-AI Agent</a:t>
+              <a:t>产品介绍：FlowGuard 是什么</a:t>
             </a:r>
           </a:p>
         </p:txBody>
@@ -5605,7 +5804,7 @@
                 <a:ea typeface="Noto Sans CJK SC"/>
                 <a:cs typeface="Noto Sans CJK SC"/>
               </a:rPr>
-              <a:t>核心功能②：多路径智能路由推荐引擎</a:t>
+              <a:t>核心功能①：收款方信息预检-AI Agent</a:t>
             </a:r>
           </a:p>
         </p:txBody>
@@ -5723,7 +5922,7 @@
                 <a:ea typeface="Noto Sans CJK SC"/>
                 <a:cs typeface="Noto Sans CJK SC"/>
               </a:rPr>
-              <a:t>核心功能③：统一结算状态与对账看板</a:t>
+              <a:t>核心功能②：多路径智能路由推荐引擎</a:t>
             </a:r>
           </a:p>
         </p:txBody>
@@ -5841,7 +6040,7 @@
                 <a:ea typeface="Noto Sans CJK SC"/>
                 <a:cs typeface="Noto Sans CJK SC"/>
               </a:rPr>
-              <a:t>AI 覆盖一览：四痛点→四能力</a:t>
+              <a:t>核心功能③：统一结算状态与对账看板</a:t>
             </a:r>
           </a:p>
         </p:txBody>
@@ -5959,7 +6158,7 @@
                 <a:ea typeface="Noto Sans CJK SC"/>
                 <a:cs typeface="Noto Sans CJK SC"/>
               </a:rPr>
-              <a:t>现场 Demo：你能看到什么</a:t>
+              <a:t>AI 覆盖一览：四痛点→四能力</a:t>
             </a:r>
           </a:p>
         </p:txBody>
@@ -6077,7 +6276,7 @@
                 <a:ea typeface="Noto Sans CJK SC"/>
                 <a:cs typeface="Noto Sans CJK SC"/>
               </a:rPr>
-              <a:t>技术架构：怎么实现的</a:t>
+              <a:t>现场 Demo：你能看到什么</a:t>
             </a:r>
           </a:p>
         </p:txBody>
@@ -6195,7 +6394,7 @@
                 <a:ea typeface="Noto Sans CJK SC"/>
                 <a:cs typeface="Noto Sans CJK SC"/>
               </a:rPr>
-              <a:t>合规边界：我们不碰什么（关键）</a:t>
+              <a:t>技术架构：怎么实现的</a:t>
             </a:r>
           </a:p>
         </p:txBody>
@@ -6290,6 +6489,124 @@
         <p:spPr>
           <a:xfrm>
             <a:off x="1463040" y="6217920"/>
+            <a:ext cx="2651760" cy="731520"/>
+          </a:xfrm>
+          <a:prstGeom prst="rect">
+            <a:avLst/>
+          </a:prstGeom>
+          <a:noFill/>
+        </p:spPr>
+        <p:txBody>
+          <a:bodyPr wrap="square" anchor="t">
+            <a:spAutoFit/>
+          </a:bodyPr>
+          <a:lstStyle/>
+          <a:p>
+            <a:pPr algn="l"/>
+            <a:r>
+              <a:rPr sz="1300" b="1">
+                <a:solidFill>
+                  <a:srgbClr val="0F172A"/>
+                </a:solidFill>
+                <a:latin typeface="Noto Sans CJK SC"/>
+                <a:ea typeface="Noto Sans CJK SC"/>
+                <a:cs typeface="Noto Sans CJK SC"/>
+              </a:rPr>
+              <a:t>合规边界：我们不碰什么（关键）</a:t>
+            </a:r>
+          </a:p>
+        </p:txBody>
+      </p:sp>
+      <p:sp>
+        <p:nvSpPr>
+          <p:cNvPr id="34" name="Rounded Rectangle 33"/>
+          <p:cNvSpPr/>
+          <p:nvPr/>
+        </p:nvSpPr>
+        <p:spPr>
+          <a:xfrm>
+            <a:off x="4434840" y="6035040"/>
+            <a:ext cx="3429000" cy="1051560"/>
+          </a:xfrm>
+          <a:prstGeom prst="roundRect">
+            <a:avLst/>
+          </a:prstGeom>
+          <a:solidFill>
+            <a:srgbClr val="F1F5F9"/>
+          </a:solidFill>
+          <a:ln>
+            <a:noFill/>
+          </a:ln>
+          <a:effectLst/>
+        </p:spPr>
+        <p:style>
+          <a:lnRef idx="1">
+            <a:schemeClr val="accent1"/>
+          </a:lnRef>
+          <a:fillRef idx="3">
+            <a:schemeClr val="accent1"/>
+          </a:fillRef>
+          <a:effectRef idx="2">
+            <a:schemeClr val="accent1"/>
+          </a:effectRef>
+          <a:fontRef idx="minor">
+            <a:schemeClr val="lt1"/>
+          </a:fontRef>
+        </p:style>
+        <p:txBody>
+          <a:bodyPr rtlCol="0" anchor="ctr"/>
+          <a:lstStyle/>
+          <a:p>
+            <a:pPr algn="ctr"/>
+          </a:p>
+        </p:txBody>
+      </p:sp>
+      <p:sp>
+        <p:nvSpPr>
+          <p:cNvPr id="35" name="TextBox 34"/>
+          <p:cNvSpPr txBox="1"/>
+          <p:nvPr/>
+        </p:nvSpPr>
+        <p:spPr>
+          <a:xfrm>
+            <a:off x="4572000" y="6144768"/>
+            <a:ext cx="457200" cy="457200"/>
+          </a:xfrm>
+          <a:prstGeom prst="rect">
+            <a:avLst/>
+          </a:prstGeom>
+          <a:noFill/>
+        </p:spPr>
+        <p:txBody>
+          <a:bodyPr wrap="square" anchor="t">
+            <a:spAutoFit/>
+          </a:bodyPr>
+          <a:lstStyle/>
+          <a:p>
+            <a:pPr algn="l"/>
+            <a:r>
+              <a:rPr sz="1800" b="1">
+                <a:solidFill>
+                  <a:srgbClr val="0F766E"/>
+                </a:solidFill>
+                <a:latin typeface="Noto Sans CJK SC"/>
+                <a:ea typeface="Noto Sans CJK SC"/>
+                <a:cs typeface="Noto Sans CJK SC"/>
+              </a:rPr>
+              <a:t>11</a:t>
+            </a:r>
+          </a:p>
+        </p:txBody>
+      </p:sp>
+      <p:sp>
+        <p:nvSpPr>
+          <p:cNvPr id="36" name="TextBox 35"/>
+          <p:cNvSpPr txBox="1"/>
+          <p:nvPr/>
+        </p:nvSpPr>
+        <p:spPr>
+          <a:xfrm>
+            <a:off x="5074920" y="6217920"/>
             <a:ext cx="2651760" cy="731520"/>
           </a:xfrm>
           <a:prstGeom prst="rect">
@@ -6376,7 +6693,7 @@
                 <a:ea typeface="Noto Sans CJK SC"/>
                 <a:cs typeface="Noto Sans CJK SC"/>
               </a:rPr>
-              <a:t>真实问题 · 谁会使用</a:t>
+              <a:t>先看一笔真实的付款</a:t>
             </a:r>
           </a:p>
         </p:txBody>
@@ -6405,7 +6722,7 @@
           <a:p>
             <a:pPr algn="l"/>
             <a:r>
-              <a:rPr sz="3600" b="1">
+              <a:rPr sz="3000" b="1">
                 <a:solidFill>
                   <a:srgbClr val="0F172A"/>
                 </a:solidFill>
@@ -6413,7 +6730,7 @@
                 <a:ea typeface="Noto Sans CJK SC"/>
                 <a:cs typeface="Noto Sans CJK SC"/>
               </a:rPr>
-              <a:t>跨境 B2B 付款，至今仍是「盲发」</a:t>
+              <a:t>一笔 $48,000 越南货款，是怎么踩进坑里的</a:t>
             </a:r>
           </a:p>
         </p:txBody>
@@ -6450,7 +6767,7 @@
                 <a:ea typeface="Noto Sans CJK SC"/>
                 <a:cs typeface="Noto Sans CJK SC"/>
               </a:rPr>
-              <a:t>使用者：外贸企业出纳/财务、跨境电商、做海外供应商结算的中小企业。下面四痛点，正好对应后面四个 AI 能力。</a:t>
+              <a:t>周一，出纳给越南供应商汇一笔货款。看似普通的一笔电汇，一周内连踩四个坑——每个坑，正是下一页要讲的痛点。</a:t>
             </a:r>
           </a:p>
         </p:txBody>
@@ -6463,8 +6780,8 @@
         </p:nvSpPr>
         <p:spPr>
           <a:xfrm>
-            <a:off x="822960" y="2468880"/>
-            <a:ext cx="5143500" cy="1371600"/>
+            <a:off x="822960" y="2514600"/>
+            <a:ext cx="5074920" cy="3611880"/>
           </a:xfrm>
           <a:prstGeom prst="roundRect">
             <a:avLst/>
@@ -6507,23 +6824,60 @@
         </p:nvSpPr>
         <p:spPr>
           <a:xfrm>
-            <a:off x="1005840" y="2578608"/>
-            <a:ext cx="4777740" cy="365760"/>
-          </a:xfrm>
-          <a:prstGeom prst="rect">
-            <a:avLst/>
-          </a:prstGeom>
-          <a:noFill/>
-        </p:spPr>
-        <p:txBody>
-          <a:bodyPr wrap="square" anchor="t">
-            <a:spAutoFit/>
-          </a:bodyPr>
-          <a:lstStyle/>
-          <a:p>
-            <a:pPr algn="l"/>
-            <a:r>
-              <a:rPr sz="1600" b="1">
+            <a:off x="1051560" y="2651760"/>
+            <a:ext cx="4663440" cy="365760"/>
+          </a:xfrm>
+          <a:prstGeom prst="rect">
+            <a:avLst/>
+          </a:prstGeom>
+          <a:noFill/>
+        </p:spPr>
+        <p:txBody>
+          <a:bodyPr wrap="square" anchor="t">
+            <a:spAutoFit/>
+          </a:bodyPr>
+          <a:lstStyle/>
+          <a:p>
+            <a:pPr algn="l"/>
+            <a:r>
+              <a:rPr sz="1500" b="1">
+                <a:solidFill>
+                  <a:srgbClr val="0F766E"/>
+                </a:solidFill>
+                <a:latin typeface="Noto Sans CJK SC"/>
+                <a:ea typeface="Noto Sans CJK SC"/>
+                <a:cs typeface="Noto Sans CJK SC"/>
+              </a:rPr>
+              <a:t>一周时间线</a:t>
+            </a:r>
+          </a:p>
+        </p:txBody>
+      </p:sp>
+      <p:sp>
+        <p:nvSpPr>
+          <p:cNvPr id="7" name="TextBox 6"/>
+          <p:cNvSpPr txBox="1"/>
+          <p:nvPr/>
+        </p:nvSpPr>
+        <p:spPr>
+          <a:xfrm>
+            <a:off x="1051560" y="3063240"/>
+            <a:ext cx="1005840" cy="365760"/>
+          </a:xfrm>
+          <a:prstGeom prst="rect">
+            <a:avLst/>
+          </a:prstGeom>
+          <a:noFill/>
+        </p:spPr>
+        <p:txBody>
+          <a:bodyPr wrap="square" anchor="t">
+            <a:spAutoFit/>
+          </a:bodyPr>
+          <a:lstStyle/>
+          <a:p>
+            <a:pPr algn="l"/>
+            <a:r>
+              <a:rPr sz="1250" b="1">
                 <a:solidFill>
                   <a:srgbClr val="0F172A"/>
                 </a:solidFill>
@@ -6531,36 +6885,36 @@
                 <a:ea typeface="Noto Sans CJK SC"/>
                 <a:cs typeface="Noto Sans CJK SC"/>
               </a:rPr>
-              <a:t>① 中间行黑箱，钱卡哪看不见</a:t>
-            </a:r>
-          </a:p>
-        </p:txBody>
-      </p:sp>
-      <p:sp>
-        <p:nvSpPr>
-          <p:cNvPr id="7" name="TextBox 6"/>
-          <p:cNvSpPr txBox="1"/>
-          <p:nvPr/>
-        </p:nvSpPr>
-        <p:spPr>
-          <a:xfrm>
-            <a:off x="1005840" y="2971800"/>
-            <a:ext cx="4777740" cy="777240"/>
-          </a:xfrm>
-          <a:prstGeom prst="rect">
-            <a:avLst/>
-          </a:prstGeom>
-          <a:noFill/>
-        </p:spPr>
-        <p:txBody>
-          <a:bodyPr wrap="square" anchor="t">
-            <a:spAutoFit/>
-          </a:bodyPr>
-          <a:lstStyle/>
-          <a:p>
-            <a:pPr algn="l"/>
-            <a:r>
-              <a:rPr sz="1250" b="0">
+              <a:t>周一</a:t>
+            </a:r>
+          </a:p>
+        </p:txBody>
+      </p:sp>
+      <p:sp>
+        <p:nvSpPr>
+          <p:cNvPr id="8" name="TextBox 7"/>
+          <p:cNvSpPr txBox="1"/>
+          <p:nvPr/>
+        </p:nvSpPr>
+        <p:spPr>
+          <a:xfrm>
+            <a:off x="2103120" y="3063240"/>
+            <a:ext cx="3611880" cy="731520"/>
+          </a:xfrm>
+          <a:prstGeom prst="rect">
+            <a:avLst/>
+          </a:prstGeom>
+          <a:noFill/>
+        </p:spPr>
+        <p:txBody>
+          <a:bodyPr wrap="square" anchor="t">
+            <a:spAutoFit/>
+          </a:bodyPr>
+          <a:lstStyle/>
+          <a:p>
+            <a:pPr algn="l"/>
+            <a:r>
+              <a:rPr sz="1150" b="0">
                 <a:solidFill>
                   <a:srgbClr val="64748B"/>
                 </a:solidFill>
@@ -6568,27 +6922,249 @@
                 <a:ea typeface="Noto Sans CJK SC"/>
                 <a:cs typeface="Noto Sans CJK SC"/>
               </a:rPr>
-              <a:t>看不到钱走了哪条路、卡在哪个中间行，只能干等 → AI: where is my money?</a:t>
-            </a:r>
-          </a:p>
-        </p:txBody>
-      </p:sp>
-      <p:sp>
-        <p:nvSpPr>
-          <p:cNvPr id="8" name="Rounded Rectangle 7"/>
+              <a:t>出纳发起 $48,000 电汇，钱汇出，开始等待。</a:t>
+            </a:r>
+          </a:p>
+        </p:txBody>
+      </p:sp>
+      <p:sp>
+        <p:nvSpPr>
+          <p:cNvPr id="9" name="TextBox 8"/>
+          <p:cNvSpPr txBox="1"/>
+          <p:nvPr/>
+        </p:nvSpPr>
+        <p:spPr>
+          <a:xfrm>
+            <a:off x="1051560" y="3822191"/>
+            <a:ext cx="1005840" cy="365760"/>
+          </a:xfrm>
+          <a:prstGeom prst="rect">
+            <a:avLst/>
+          </a:prstGeom>
+          <a:noFill/>
+        </p:spPr>
+        <p:txBody>
+          <a:bodyPr wrap="square" anchor="t">
+            <a:spAutoFit/>
+          </a:bodyPr>
+          <a:lstStyle/>
+          <a:p>
+            <a:pPr algn="l"/>
+            <a:r>
+              <a:rPr sz="1250" b="1">
+                <a:solidFill>
+                  <a:srgbClr val="0F172A"/>
+                </a:solidFill>
+                <a:latin typeface="Noto Sans CJK SC"/>
+                <a:ea typeface="Noto Sans CJK SC"/>
+                <a:cs typeface="Noto Sans CJK SC"/>
+              </a:rPr>
+              <a:t>第 3 天</a:t>
+            </a:r>
+          </a:p>
+        </p:txBody>
+      </p:sp>
+      <p:sp>
+        <p:nvSpPr>
+          <p:cNvPr id="10" name="TextBox 9"/>
+          <p:cNvSpPr txBox="1"/>
+          <p:nvPr/>
+        </p:nvSpPr>
+        <p:spPr>
+          <a:xfrm>
+            <a:off x="2103120" y="3822191"/>
+            <a:ext cx="3611880" cy="731520"/>
+          </a:xfrm>
+          <a:prstGeom prst="rect">
+            <a:avLst/>
+          </a:prstGeom>
+          <a:noFill/>
+        </p:spPr>
+        <p:txBody>
+          <a:bodyPr wrap="square" anchor="t">
+            <a:spAutoFit/>
+          </a:bodyPr>
+          <a:lstStyle/>
+          <a:p>
+            <a:pPr algn="l"/>
+            <a:r>
+              <a:rPr sz="1150" b="0">
+                <a:solidFill>
+                  <a:srgbClr val="64748B"/>
+                </a:solidFill>
+                <a:latin typeface="Noto Sans CJK SC"/>
+                <a:ea typeface="Noto Sans CJK SC"/>
+                <a:cs typeface="Noto Sans CJK SC"/>
+              </a:rPr>
+              <a:t>供应商说没收到。问银行，只答「在途」，卡在哪家中间行没人说得清。</a:t>
+            </a:r>
+          </a:p>
+        </p:txBody>
+      </p:sp>
+      <p:sp>
+        <p:nvSpPr>
+          <p:cNvPr id="11" name="TextBox 10"/>
+          <p:cNvSpPr txBox="1"/>
+          <p:nvPr/>
+        </p:nvSpPr>
+        <p:spPr>
+          <a:xfrm>
+            <a:off x="1051560" y="4581144"/>
+            <a:ext cx="1005840" cy="365760"/>
+          </a:xfrm>
+          <a:prstGeom prst="rect">
+            <a:avLst/>
+          </a:prstGeom>
+          <a:noFill/>
+        </p:spPr>
+        <p:txBody>
+          <a:bodyPr wrap="square" anchor="t">
+            <a:spAutoFit/>
+          </a:bodyPr>
+          <a:lstStyle/>
+          <a:p>
+            <a:pPr algn="l"/>
+            <a:r>
+              <a:rPr sz="1250" b="1">
+                <a:solidFill>
+                  <a:srgbClr val="0F172A"/>
+                </a:solidFill>
+                <a:latin typeface="Noto Sans CJK SC"/>
+                <a:ea typeface="Noto Sans CJK SC"/>
+                <a:cs typeface="Noto Sans CJK SC"/>
+              </a:rPr>
+              <a:t>第 6 天</a:t>
+            </a:r>
+          </a:p>
+        </p:txBody>
+      </p:sp>
+      <p:sp>
+        <p:nvSpPr>
+          <p:cNvPr id="12" name="TextBox 11"/>
+          <p:cNvSpPr txBox="1"/>
+          <p:nvPr/>
+        </p:nvSpPr>
+        <p:spPr>
+          <a:xfrm>
+            <a:off x="2103120" y="4581144"/>
+            <a:ext cx="3611880" cy="731520"/>
+          </a:xfrm>
+          <a:prstGeom prst="rect">
+            <a:avLst/>
+          </a:prstGeom>
+          <a:noFill/>
+        </p:spPr>
+        <p:txBody>
+          <a:bodyPr wrap="square" anchor="t">
+            <a:spAutoFit/>
+          </a:bodyPr>
+          <a:lstStyle/>
+          <a:p>
+            <a:pPr algn="l"/>
+            <a:r>
+              <a:rPr sz="1150" b="0">
+                <a:solidFill>
+                  <a:srgbClr val="64748B"/>
+                </a:solidFill>
+                <a:latin typeface="Noto Sans CJK SC"/>
+                <a:ea typeface="Noto Sans CJK SC"/>
+                <a:cs typeface="Noto Sans CJK SC"/>
+              </a:rPr>
+              <a:t>银行退回：收款公司名与账户不符（一个字母之差）。$133 手续费打水漂、货期延误。</a:t>
+            </a:r>
+          </a:p>
+        </p:txBody>
+      </p:sp>
+      <p:sp>
+        <p:nvSpPr>
+          <p:cNvPr id="13" name="TextBox 12"/>
+          <p:cNvSpPr txBox="1"/>
+          <p:nvPr/>
+        </p:nvSpPr>
+        <p:spPr>
+          <a:xfrm>
+            <a:off x="1051560" y="5340096"/>
+            <a:ext cx="1005840" cy="365760"/>
+          </a:xfrm>
+          <a:prstGeom prst="rect">
+            <a:avLst/>
+          </a:prstGeom>
+          <a:noFill/>
+        </p:spPr>
+        <p:txBody>
+          <a:bodyPr wrap="square" anchor="t">
+            <a:spAutoFit/>
+          </a:bodyPr>
+          <a:lstStyle/>
+          <a:p>
+            <a:pPr algn="l"/>
+            <a:r>
+              <a:rPr sz="1250" b="1">
+                <a:solidFill>
+                  <a:srgbClr val="0F172A"/>
+                </a:solidFill>
+                <a:latin typeface="Noto Sans CJK SC"/>
+                <a:ea typeface="Noto Sans CJK SC"/>
+                <a:cs typeface="Noto Sans CJK SC"/>
+              </a:rPr>
+              <a:t>第 7 天</a:t>
+            </a:r>
+          </a:p>
+        </p:txBody>
+      </p:sp>
+      <p:sp>
+        <p:nvSpPr>
+          <p:cNvPr id="14" name="TextBox 13"/>
+          <p:cNvSpPr txBox="1"/>
+          <p:nvPr/>
+        </p:nvSpPr>
+        <p:spPr>
+          <a:xfrm>
+            <a:off x="2103120" y="5340096"/>
+            <a:ext cx="3611880" cy="731520"/>
+          </a:xfrm>
+          <a:prstGeom prst="rect">
+            <a:avLst/>
+          </a:prstGeom>
+          <a:noFill/>
+        </p:spPr>
+        <p:txBody>
+          <a:bodyPr wrap="square" anchor="t">
+            <a:spAutoFit/>
+          </a:bodyPr>
+          <a:lstStyle/>
+          <a:p>
+            <a:pPr algn="l"/>
+            <a:r>
+              <a:rPr sz="1150" b="0">
+                <a:solidFill>
+                  <a:srgbClr val="64748B"/>
+                </a:solidFill>
+                <a:latin typeface="Noto Sans CJK SC"/>
+                <a:ea typeface="Noto Sans CJK SC"/>
+                <a:cs typeface="Noto Sans CJK SC"/>
+              </a:rPr>
+              <a:t>想改走别的通道，却不清楚越南走廊要哪些材料；对账时退回款/手续费/二次汇款三笔对不上。</a:t>
+            </a:r>
+          </a:p>
+        </p:txBody>
+      </p:sp>
+      <p:sp>
+        <p:nvSpPr>
+          <p:cNvPr id="15" name="Rounded Rectangle 14"/>
           <p:cNvSpPr/>
           <p:nvPr/>
         </p:nvSpPr>
         <p:spPr>
           <a:xfrm>
-            <a:off x="6195060" y="2468880"/>
-            <a:ext cx="5143500" cy="1371600"/>
+            <a:off x="6126480" y="2514600"/>
+            <a:ext cx="5212080" cy="3611880"/>
           </a:xfrm>
           <a:prstGeom prst="roundRect">
             <a:avLst/>
           </a:prstGeom>
           <a:solidFill>
-            <a:srgbClr val="F1F5F9"/>
+            <a:srgbClr val="FBECEC"/>
           </a:solidFill>
           <a:ln>
             <a:noFill/>
@@ -6619,66 +7195,103 @@
       </p:sp>
       <p:sp>
         <p:nvSpPr>
-          <p:cNvPr id="9" name="TextBox 8"/>
-          <p:cNvSpPr txBox="1"/>
-          <p:nvPr/>
-        </p:nvSpPr>
-        <p:spPr>
-          <a:xfrm>
-            <a:off x="6377940" y="2578608"/>
-            <a:ext cx="4777740" cy="365760"/>
-          </a:xfrm>
-          <a:prstGeom prst="rect">
-            <a:avLst/>
-          </a:prstGeom>
-          <a:noFill/>
-        </p:spPr>
-        <p:txBody>
-          <a:bodyPr wrap="square" anchor="t">
-            <a:spAutoFit/>
-          </a:bodyPr>
-          <a:lstStyle/>
-          <a:p>
-            <a:pPr algn="l"/>
-            <a:r>
-              <a:rPr sz="1600" b="1">
-                <a:solidFill>
-                  <a:srgbClr val="0F172A"/>
-                </a:solidFill>
-                <a:latin typeface="Noto Sans CJK SC"/>
-                <a:ea typeface="Noto Sans CJK SC"/>
-                <a:cs typeface="Noto Sans CJK SC"/>
-              </a:rPr>
-              <a:t>② 莫名被退，发起时才知道</a:t>
-            </a:r>
-          </a:p>
-        </p:txBody>
-      </p:sp>
-      <p:sp>
-        <p:nvSpPr>
-          <p:cNvPr id="10" name="TextBox 9"/>
-          <p:cNvSpPr txBox="1"/>
-          <p:nvPr/>
-        </p:nvSpPr>
-        <p:spPr>
-          <a:xfrm>
-            <a:off x="6377940" y="2971800"/>
-            <a:ext cx="4777740" cy="777240"/>
-          </a:xfrm>
-          <a:prstGeom prst="rect">
-            <a:avLst/>
-          </a:prstGeom>
-          <a:noFill/>
-        </p:spPr>
-        <p:txBody>
-          <a:bodyPr wrap="square" anchor="t">
-            <a:spAutoFit/>
-          </a:bodyPr>
-          <a:lstStyle/>
-          <a:p>
-            <a:pPr algn="l"/>
-            <a:r>
-              <a:rPr sz="1250" b="0">
+          <p:cNvPr id="16" name="TextBox 15"/>
+          <p:cNvSpPr txBox="1"/>
+          <p:nvPr/>
+        </p:nvSpPr>
+        <p:spPr>
+          <a:xfrm>
+            <a:off x="6355080" y="2651760"/>
+            <a:ext cx="4754880" cy="365760"/>
+          </a:xfrm>
+          <a:prstGeom prst="rect">
+            <a:avLst/>
+          </a:prstGeom>
+          <a:noFill/>
+        </p:spPr>
+        <p:txBody>
+          <a:bodyPr wrap="square" anchor="t">
+            <a:spAutoFit/>
+          </a:bodyPr>
+          <a:lstStyle/>
+          <a:p>
+            <a:pPr algn="l"/>
+            <a:r>
+              <a:rPr sz="1500" b="1">
+                <a:solidFill>
+                  <a:srgbClr val="C03A2B"/>
+                </a:solidFill>
+                <a:latin typeface="Noto Sans CJK SC"/>
+                <a:ea typeface="Noto Sans CJK SC"/>
+                <a:cs typeface="Noto Sans CJK SC"/>
+              </a:rPr>
+              <a:t>四个坑，四个痛点</a:t>
+            </a:r>
+          </a:p>
+        </p:txBody>
+      </p:sp>
+      <p:sp>
+        <p:nvSpPr>
+          <p:cNvPr id="17" name="TextBox 16"/>
+          <p:cNvSpPr txBox="1"/>
+          <p:nvPr/>
+        </p:nvSpPr>
+        <p:spPr>
+          <a:xfrm>
+            <a:off x="6355080" y="3063240"/>
+            <a:ext cx="4754880" cy="320040"/>
+          </a:xfrm>
+          <a:prstGeom prst="rect">
+            <a:avLst/>
+          </a:prstGeom>
+          <a:noFill/>
+        </p:spPr>
+        <p:txBody>
+          <a:bodyPr wrap="square" anchor="t">
+            <a:spAutoFit/>
+          </a:bodyPr>
+          <a:lstStyle/>
+          <a:p>
+            <a:pPr algn="l"/>
+            <a:r>
+              <a:rPr sz="1300" b="1">
+                <a:solidFill>
+                  <a:srgbClr val="C03A2B"/>
+                </a:solidFill>
+                <a:latin typeface="Noto Sans CJK SC"/>
+                <a:ea typeface="Noto Sans CJK SC"/>
+                <a:cs typeface="Noto Sans CJK SC"/>
+              </a:rPr>
+              <a:t>看不到钱卡在哪</a:t>
+            </a:r>
+          </a:p>
+        </p:txBody>
+      </p:sp>
+      <p:sp>
+        <p:nvSpPr>
+          <p:cNvPr id="18" name="TextBox 17"/>
+          <p:cNvSpPr txBox="1"/>
+          <p:nvPr/>
+        </p:nvSpPr>
+        <p:spPr>
+          <a:xfrm>
+            <a:off x="6355080" y="3383280"/>
+            <a:ext cx="4754880" cy="365760"/>
+          </a:xfrm>
+          <a:prstGeom prst="rect">
+            <a:avLst/>
+          </a:prstGeom>
+          <a:noFill/>
+        </p:spPr>
+        <p:txBody>
+          <a:bodyPr wrap="square" anchor="t">
+            <a:spAutoFit/>
+          </a:bodyPr>
+          <a:lstStyle/>
+          <a:p>
+            <a:pPr algn="l"/>
+            <a:r>
+              <a:rPr sz="1150" b="0">
                 <a:solidFill>
                   <a:srgbClr val="64748B"/>
                 </a:solidFill>
@@ -6686,117 +7299,73 @@
                 <a:ea typeface="Noto Sans CJK SC"/>
                 <a:cs typeface="Noto Sans CJK SC"/>
               </a:rPr>
-              <a:t>被退回的以转账（尤其打款给个人收款人）最常见；退回多是收款信息/合规校验问题，却发起后才发现。传统核实要银行→出纳→业务→供应商层层传话，拖几天到一周 → AI: draft the follow-up</a:t>
-            </a:r>
-          </a:p>
-        </p:txBody>
-      </p:sp>
-      <p:sp>
-        <p:nvSpPr>
-          <p:cNvPr id="11" name="Rounded Rectangle 10"/>
-          <p:cNvSpPr/>
-          <p:nvPr/>
-        </p:nvSpPr>
-        <p:spPr>
-          <a:xfrm>
-            <a:off x="822960" y="4069080"/>
-            <a:ext cx="5143500" cy="1371600"/>
-          </a:xfrm>
-          <a:prstGeom prst="roundRect">
-            <a:avLst/>
-          </a:prstGeom>
-          <a:solidFill>
-            <a:srgbClr val="F1F5F9"/>
-          </a:solidFill>
-          <a:ln>
-            <a:noFill/>
-          </a:ln>
-          <a:effectLst/>
-        </p:spPr>
-        <p:style>
-          <a:lnRef idx="1">
-            <a:schemeClr val="accent1"/>
-          </a:lnRef>
-          <a:fillRef idx="3">
-            <a:schemeClr val="accent1"/>
-          </a:fillRef>
-          <a:effectRef idx="2">
-            <a:schemeClr val="accent1"/>
-          </a:effectRef>
-          <a:fontRef idx="minor">
-            <a:schemeClr val="lt1"/>
-          </a:fontRef>
-        </p:style>
-        <p:txBody>
-          <a:bodyPr rtlCol="0" anchor="ctr"/>
-          <a:lstStyle/>
-          <a:p>
-            <a:pPr algn="ctr"/>
-          </a:p>
-        </p:txBody>
-      </p:sp>
-      <p:sp>
-        <p:nvSpPr>
-          <p:cNvPr id="12" name="TextBox 11"/>
-          <p:cNvSpPr txBox="1"/>
-          <p:nvPr/>
-        </p:nvSpPr>
-        <p:spPr>
-          <a:xfrm>
-            <a:off x="1005840" y="4178808"/>
-            <a:ext cx="4777740" cy="365760"/>
-          </a:xfrm>
-          <a:prstGeom prst="rect">
-            <a:avLst/>
-          </a:prstGeom>
-          <a:noFill/>
-        </p:spPr>
-        <p:txBody>
-          <a:bodyPr wrap="square" anchor="t">
-            <a:spAutoFit/>
-          </a:bodyPr>
-          <a:lstStyle/>
-          <a:p>
-            <a:pPr algn="l"/>
-            <a:r>
-              <a:rPr sz="1600" b="1">
-                <a:solidFill>
-                  <a:srgbClr val="0F172A"/>
-                </a:solidFill>
-                <a:latin typeface="Noto Sans CJK SC"/>
-                <a:ea typeface="Noto Sans CJK SC"/>
-                <a:cs typeface="Noto Sans CJK SC"/>
-              </a:rPr>
-              <a:t>③ 多国供应商，重复适应银行</a:t>
-            </a:r>
-          </a:p>
-        </p:txBody>
-      </p:sp>
-      <p:sp>
-        <p:nvSpPr>
-          <p:cNvPr id="13" name="TextBox 12"/>
-          <p:cNvSpPr txBox="1"/>
-          <p:nvPr/>
-        </p:nvSpPr>
-        <p:spPr>
-          <a:xfrm>
-            <a:off x="1005840" y="4572000"/>
-            <a:ext cx="4777740" cy="777240"/>
-          </a:xfrm>
-          <a:prstGeom prst="rect">
-            <a:avLst/>
-          </a:prstGeom>
-          <a:noFill/>
-        </p:spPr>
-        <p:txBody>
-          <a:bodyPr wrap="square" anchor="t">
-            <a:spAutoFit/>
-          </a:bodyPr>
-          <a:lstStyle/>
-          <a:p>
-            <a:pPr algn="l"/>
-            <a:r>
-              <a:rPr sz="1250" b="0">
+              <a:t>全程黑箱，只能干等 → 痛点①</a:t>
+            </a:r>
+          </a:p>
+        </p:txBody>
+      </p:sp>
+      <p:sp>
+        <p:nvSpPr>
+          <p:cNvPr id="19" name="TextBox 18"/>
+          <p:cNvSpPr txBox="1"/>
+          <p:nvPr/>
+        </p:nvSpPr>
+        <p:spPr>
+          <a:xfrm>
+            <a:off x="6355080" y="3822191"/>
+            <a:ext cx="4754880" cy="320040"/>
+          </a:xfrm>
+          <a:prstGeom prst="rect">
+            <a:avLst/>
+          </a:prstGeom>
+          <a:noFill/>
+        </p:spPr>
+        <p:txBody>
+          <a:bodyPr wrap="square" anchor="t">
+            <a:spAutoFit/>
+          </a:bodyPr>
+          <a:lstStyle/>
+          <a:p>
+            <a:pPr algn="l"/>
+            <a:r>
+              <a:rPr sz="1300" b="1">
+                <a:solidFill>
+                  <a:srgbClr val="C03A2B"/>
+                </a:solidFill>
+                <a:latin typeface="Noto Sans CJK SC"/>
+                <a:ea typeface="Noto Sans CJK SC"/>
+                <a:cs typeface="Noto Sans CJK SC"/>
+              </a:rPr>
+              <a:t>发出后才知会被退</a:t>
+            </a:r>
+          </a:p>
+        </p:txBody>
+      </p:sp>
+      <p:sp>
+        <p:nvSpPr>
+          <p:cNvPr id="20" name="TextBox 19"/>
+          <p:cNvSpPr txBox="1"/>
+          <p:nvPr/>
+        </p:nvSpPr>
+        <p:spPr>
+          <a:xfrm>
+            <a:off x="6355080" y="4142231"/>
+            <a:ext cx="4754880" cy="365760"/>
+          </a:xfrm>
+          <a:prstGeom prst="rect">
+            <a:avLst/>
+          </a:prstGeom>
+          <a:noFill/>
+        </p:spPr>
+        <p:txBody>
+          <a:bodyPr wrap="square" anchor="t">
+            <a:spAutoFit/>
+          </a:bodyPr>
+          <a:lstStyle/>
+          <a:p>
+            <a:pPr algn="l"/>
+            <a:r>
+              <a:rPr sz="1150" b="0">
                 <a:solidFill>
                   <a:srgbClr val="64748B"/>
                 </a:solidFill>
@@ -6804,117 +7373,73 @@
                 <a:ea typeface="Noto Sans CJK SC"/>
                 <a:cs typeface="Noto Sans CJK SC"/>
               </a:rPr>
-              <a:t>多国多供应商，每次结算都要重新适应不同银行要求，效率极低 → AI: what this corridor requires</a:t>
-            </a:r>
-          </a:p>
-        </p:txBody>
-      </p:sp>
-      <p:sp>
-        <p:nvSpPr>
-          <p:cNvPr id="14" name="Rounded Rectangle 13"/>
-          <p:cNvSpPr/>
-          <p:nvPr/>
-        </p:nvSpPr>
-        <p:spPr>
-          <a:xfrm>
-            <a:off x="6195060" y="4069080"/>
-            <a:ext cx="5143500" cy="1371600"/>
-          </a:xfrm>
-          <a:prstGeom prst="roundRect">
-            <a:avLst/>
-          </a:prstGeom>
-          <a:solidFill>
-            <a:srgbClr val="F1F5F9"/>
-          </a:solidFill>
-          <a:ln>
-            <a:noFill/>
-          </a:ln>
-          <a:effectLst/>
-        </p:spPr>
-        <p:style>
-          <a:lnRef idx="1">
-            <a:schemeClr val="accent1"/>
-          </a:lnRef>
-          <a:fillRef idx="3">
-            <a:schemeClr val="accent1"/>
-          </a:fillRef>
-          <a:effectRef idx="2">
-            <a:schemeClr val="accent1"/>
-          </a:effectRef>
-          <a:fontRef idx="minor">
-            <a:schemeClr val="lt1"/>
-          </a:fontRef>
-        </p:style>
-        <p:txBody>
-          <a:bodyPr rtlCol="0" anchor="ctr"/>
-          <a:lstStyle/>
-          <a:p>
-            <a:pPr algn="ctr"/>
-          </a:p>
-        </p:txBody>
-      </p:sp>
-      <p:sp>
-        <p:nvSpPr>
-          <p:cNvPr id="15" name="TextBox 14"/>
-          <p:cNvSpPr txBox="1"/>
-          <p:nvPr/>
-        </p:nvSpPr>
-        <p:spPr>
-          <a:xfrm>
-            <a:off x="6377940" y="4178808"/>
-            <a:ext cx="4777740" cy="365760"/>
-          </a:xfrm>
-          <a:prstGeom prst="rect">
-            <a:avLst/>
-          </a:prstGeom>
-          <a:noFill/>
-        </p:spPr>
-        <p:txBody>
-          <a:bodyPr wrap="square" anchor="t">
-            <a:spAutoFit/>
-          </a:bodyPr>
-          <a:lstStyle/>
-          <a:p>
-            <a:pPr algn="l"/>
-            <a:r>
-              <a:rPr sz="1600" b="1">
-                <a:solidFill>
-                  <a:srgbClr val="0F172A"/>
-                </a:solidFill>
-                <a:latin typeface="Noto Sans CJK SC"/>
-                <a:ea typeface="Noto Sans CJK SC"/>
-                <a:cs typeface="Noto Sans CJK SC"/>
-              </a:rPr>
-              <a:t>④ 财务对账，凭证对不上</a:t>
-            </a:r>
-          </a:p>
-        </p:txBody>
-      </p:sp>
-      <p:sp>
-        <p:nvSpPr>
-          <p:cNvPr id="16" name="TextBox 15"/>
-          <p:cNvSpPr txBox="1"/>
-          <p:nvPr/>
-        </p:nvSpPr>
-        <p:spPr>
-          <a:xfrm>
-            <a:off x="6377940" y="4572000"/>
-            <a:ext cx="4777740" cy="777240"/>
-          </a:xfrm>
-          <a:prstGeom prst="rect">
-            <a:avLst/>
-          </a:prstGeom>
-          <a:noFill/>
-        </p:spPr>
-        <p:txBody>
-          <a:bodyPr wrap="square" anchor="t">
-            <a:spAutoFit/>
-          </a:bodyPr>
-          <a:lstStyle/>
-          <a:p>
-            <a:pPr algn="l"/>
-            <a:r>
-              <a:rPr sz="1250" b="0">
+              <a:t>收款信息问题事后才暴露 → 痛点②</a:t>
+            </a:r>
+          </a:p>
+        </p:txBody>
+      </p:sp>
+      <p:sp>
+        <p:nvSpPr>
+          <p:cNvPr id="21" name="TextBox 20"/>
+          <p:cNvSpPr txBox="1"/>
+          <p:nvPr/>
+        </p:nvSpPr>
+        <p:spPr>
+          <a:xfrm>
+            <a:off x="6355080" y="4581144"/>
+            <a:ext cx="4754880" cy="320040"/>
+          </a:xfrm>
+          <a:prstGeom prst="rect">
+            <a:avLst/>
+          </a:prstGeom>
+          <a:noFill/>
+        </p:spPr>
+        <p:txBody>
+          <a:bodyPr wrap="square" anchor="t">
+            <a:spAutoFit/>
+          </a:bodyPr>
+          <a:lstStyle/>
+          <a:p>
+            <a:pPr algn="l"/>
+            <a:r>
+              <a:rPr sz="1300" b="1">
+                <a:solidFill>
+                  <a:srgbClr val="C03A2B"/>
+                </a:solidFill>
+                <a:latin typeface="Noto Sans CJK SC"/>
+                <a:ea typeface="Noto Sans CJK SC"/>
+                <a:cs typeface="Noto Sans CJK SC"/>
+              </a:rPr>
+              <a:t>走廊规则要重新摸</a:t>
+            </a:r>
+          </a:p>
+        </p:txBody>
+      </p:sp>
+      <p:sp>
+        <p:nvSpPr>
+          <p:cNvPr id="22" name="TextBox 21"/>
+          <p:cNvSpPr txBox="1"/>
+          <p:nvPr/>
+        </p:nvSpPr>
+        <p:spPr>
+          <a:xfrm>
+            <a:off x="6355080" y="4901183"/>
+            <a:ext cx="4754880" cy="365760"/>
+          </a:xfrm>
+          <a:prstGeom prst="rect">
+            <a:avLst/>
+          </a:prstGeom>
+          <a:noFill/>
+        </p:spPr>
+        <p:txBody>
+          <a:bodyPr wrap="square" anchor="t">
+            <a:spAutoFit/>
+          </a:bodyPr>
+          <a:lstStyle/>
+          <a:p>
+            <a:pPr algn="l"/>
+            <a:r>
+              <a:rPr sz="1150" b="0">
                 <a:solidFill>
                   <a:srgbClr val="64748B"/>
                 </a:solidFill>
@@ -6922,14 +7447,88 @@
                 <a:ea typeface="Noto Sans CJK SC"/>
                 <a:cs typeface="Noto Sans CJK SC"/>
               </a:rPr>
-              <a:t>链上/链下凭证对不上，多笔跨国付款时尤其头疼 → AI: why don't these match?</a:t>
-            </a:r>
-          </a:p>
-        </p:txBody>
-      </p:sp>
-      <p:sp>
-        <p:nvSpPr>
-          <p:cNvPr id="17" name="TextBox 16"/>
+              <a:t>每国每行要求都不同 → 痛点③</a:t>
+            </a:r>
+          </a:p>
+        </p:txBody>
+      </p:sp>
+      <p:sp>
+        <p:nvSpPr>
+          <p:cNvPr id="23" name="TextBox 22"/>
+          <p:cNvSpPr txBox="1"/>
+          <p:nvPr/>
+        </p:nvSpPr>
+        <p:spPr>
+          <a:xfrm>
+            <a:off x="6355080" y="5340096"/>
+            <a:ext cx="4754880" cy="320040"/>
+          </a:xfrm>
+          <a:prstGeom prst="rect">
+            <a:avLst/>
+          </a:prstGeom>
+          <a:noFill/>
+        </p:spPr>
+        <p:txBody>
+          <a:bodyPr wrap="square" anchor="t">
+            <a:spAutoFit/>
+          </a:bodyPr>
+          <a:lstStyle/>
+          <a:p>
+            <a:pPr algn="l"/>
+            <a:r>
+              <a:rPr sz="1300" b="1">
+                <a:solidFill>
+                  <a:srgbClr val="C03A2B"/>
+                </a:solidFill>
+                <a:latin typeface="Noto Sans CJK SC"/>
+                <a:ea typeface="Noto Sans CJK SC"/>
+                <a:cs typeface="Noto Sans CJK SC"/>
+              </a:rPr>
+              <a:t>三笔款对不上账</a:t>
+            </a:r>
+          </a:p>
+        </p:txBody>
+      </p:sp>
+      <p:sp>
+        <p:nvSpPr>
+          <p:cNvPr id="24" name="TextBox 23"/>
+          <p:cNvSpPr txBox="1"/>
+          <p:nvPr/>
+        </p:nvSpPr>
+        <p:spPr>
+          <a:xfrm>
+            <a:off x="6355080" y="5660136"/>
+            <a:ext cx="4754880" cy="365760"/>
+          </a:xfrm>
+          <a:prstGeom prst="rect">
+            <a:avLst/>
+          </a:prstGeom>
+          <a:noFill/>
+        </p:spPr>
+        <p:txBody>
+          <a:bodyPr wrap="square" anchor="t">
+            <a:spAutoFit/>
+          </a:bodyPr>
+          <a:lstStyle/>
+          <a:p>
+            <a:pPr algn="l"/>
+            <a:r>
+              <a:rPr sz="1150" b="0">
+                <a:solidFill>
+                  <a:srgbClr val="64748B"/>
+                </a:solidFill>
+                <a:latin typeface="Noto Sans CJK SC"/>
+                <a:ea typeface="Noto Sans CJK SC"/>
+                <a:cs typeface="Noto Sans CJK SC"/>
+              </a:rPr>
+              <a:t>退回/手续费/重汇难核销 → 痛点④</a:t>
+            </a:r>
+          </a:p>
+        </p:txBody>
+      </p:sp>
+      <p:sp>
+        <p:nvSpPr>
+          <p:cNvPr id="25" name="TextBox 24"/>
           <p:cNvSpPr txBox="1"/>
           <p:nvPr/>
         </p:nvSpPr>
@@ -6959,7 +7558,7 @@
                 <a:ea typeface="Noto Sans CJK SC"/>
                 <a:cs typeface="Noto Sans CJK SC"/>
               </a:rPr>
-              <a:t>真实、高频、可被验证的痛点——每一条都在后续被一个 AI 能力接住。</a:t>
+              <a:t>这不是虚构极端案例，而是外贸出纳每周都在经历的常态。下一页，把它拆成四个可被验证的痛点。</a:t>
             </a:r>
           </a:p>
         </p:txBody>
@@ -7022,7 +7621,7 @@
                 <a:ea typeface="Noto Sans CJK SC"/>
                 <a:cs typeface="Noto Sans CJK SC"/>
               </a:rPr>
-              <a:t>产品介绍 · 解决什么</a:t>
+              <a:t>真实问题 · 谁会使用</a:t>
             </a:r>
           </a:p>
         </p:txBody>
@@ -7059,7 +7658,7 @@
                 <a:ea typeface="Noto Sans CJK SC"/>
                 <a:cs typeface="Noto Sans CJK SC"/>
               </a:rPr>
-              <a:t>付款前的「退回风险 + 合规」控制台</a:t>
+              <a:t>跨境 B2B 付款，至今仍是「盲发」</a:t>
             </a:r>
           </a:p>
         </p:txBody>
@@ -7096,7 +7695,7 @@
                 <a:ea typeface="Noto Sans CJK SC"/>
                 <a:cs typeface="Noto Sans CJK SC"/>
               </a:rPr>
-              <a:t>一句话：在把付款指令提交给持牌机构之前，先预检退回风险、比价选路、双人放行（大额可升级为多级/多签）。</a:t>
+              <a:t>使用者：外贸企业出纳/财务、跨境电商、做海外供应商结算的中小企业。下面四痛点，正好对应后面四个 AI 能力。</a:t>
             </a:r>
           </a:p>
         </p:txBody>
@@ -7110,7 +7709,7 @@
         <p:spPr>
           <a:xfrm>
             <a:off x="822960" y="2468880"/>
-            <a:ext cx="5143500" cy="1143000"/>
+            <a:ext cx="5143500" cy="1371600"/>
           </a:xfrm>
           <a:prstGeom prst="roundRect">
             <a:avLst/>
@@ -7177,7 +7776,7 @@
                 <a:ea typeface="Noto Sans CJK SC"/>
                 <a:cs typeface="Noto Sans CJK SC"/>
               </a:rPr>
-              <a:t>全链路闭环</a:t>
+              <a:t>① 中间行黑箱，钱卡哪看不见</a:t>
             </a:r>
           </a:p>
         </p:txBody>
@@ -7191,7 +7790,7 @@
         <p:spPr>
           <a:xfrm>
             <a:off x="1005840" y="2971800"/>
-            <a:ext cx="4777740" cy="548640"/>
+            <a:ext cx="4777740" cy="777240"/>
           </a:xfrm>
           <a:prstGeom prst="rect">
             <a:avLst/>
@@ -7214,7 +7813,7 @@
                 <a:ea typeface="Noto Sans CJK SC"/>
                 <a:cs typeface="Noto Sans CJK SC"/>
               </a:rPr>
-              <a:t>预检→供应商核实→双人审批（大额可升级多级/多签）→生成付款指令(提交持牌机构)→到账确认→自动对账。</a:t>
+              <a:t>看不到钱走了哪条路、卡在哪个中间行，只能干等 → AI: where is my money?</a:t>
             </a:r>
           </a:p>
         </p:txBody>
@@ -7228,7 +7827,7 @@
         <p:spPr>
           <a:xfrm>
             <a:off x="6195060" y="2468880"/>
-            <a:ext cx="5143500" cy="1143000"/>
+            <a:ext cx="5143500" cy="1371600"/>
           </a:xfrm>
           <a:prstGeom prst="roundRect">
             <a:avLst/>
@@ -7295,7 +7894,7 @@
                 <a:ea typeface="Noto Sans CJK SC"/>
                 <a:cs typeface="Noto Sans CJK SC"/>
               </a:rPr>
-              <a:t>多通道比价</a:t>
+              <a:t>② 莫名被退，发起时才知道</a:t>
             </a:r>
           </a:p>
         </p:txBody>
@@ -7309,7 +7908,7 @@
         <p:spPr>
           <a:xfrm>
             <a:off x="6377940" y="2971800"/>
-            <a:ext cx="4777740" cy="548640"/>
+            <a:ext cx="4777740" cy="777240"/>
           </a:xfrm>
           <a:prstGeom prst="rect">
             <a:avLst/>
@@ -7332,7 +7931,7 @@
                 <a:ea typeface="Noto Sans CJK SC"/>
                 <a:cs typeface="Noto Sans CJK SC"/>
               </a:rPr>
-              <a:t>统一池管理多类持牌结算通道，按费用/时效/退回率自动排序，给出可解释的最优路径推荐。</a:t>
+              <a:t>被退回的以转账（尤其打款给个人收款人）最常见；退回多是收款信息/合规校验问题，却发起后才发现。传统核实要银行→出纳→业务→供应商层层传话，拖几天到一周 → AI: draft the follow-up</a:t>
             </a:r>
           </a:p>
         </p:txBody>
@@ -7345,8 +7944,8 @@
         </p:nvSpPr>
         <p:spPr>
           <a:xfrm>
-            <a:off x="822960" y="3840480"/>
-            <a:ext cx="5143500" cy="1143000"/>
+            <a:off x="822960" y="4069080"/>
+            <a:ext cx="5143500" cy="1371600"/>
           </a:xfrm>
           <a:prstGeom prst="roundRect">
             <a:avLst/>
@@ -7389,7 +7988,7 @@
         </p:nvSpPr>
         <p:spPr>
           <a:xfrm>
-            <a:off x="1005840" y="3950208"/>
+            <a:off x="1005840" y="4178808"/>
             <a:ext cx="4777740" cy="365760"/>
           </a:xfrm>
           <a:prstGeom prst="rect">
@@ -7413,7 +8012,7 @@
                 <a:ea typeface="Noto Sans CJK SC"/>
                 <a:cs typeface="Noto Sans CJK SC"/>
               </a:rPr>
-              <a:t>面向真实用户</a:t>
+              <a:t>③ 多国供应商，重复适应银行</a:t>
             </a:r>
           </a:p>
         </p:txBody>
@@ -7426,8 +8025,8 @@
         </p:nvSpPr>
         <p:spPr>
           <a:xfrm>
-            <a:off x="1005840" y="4343400"/>
-            <a:ext cx="4777740" cy="548640"/>
+            <a:off x="1005840" y="4572000"/>
+            <a:ext cx="4777740" cy="777240"/>
           </a:xfrm>
           <a:prstGeom prst="rect">
             <a:avLst/>
@@ -7450,7 +8049,7 @@
                 <a:ea typeface="Noto Sans CJK SC"/>
                 <a:cs typeface="Noto Sans CJK SC"/>
               </a:rPr>
-              <a:t>为中小外贸出纳设计，移动端优先，几步走完一笔高风险付款的完整控制。</a:t>
+              <a:t>多国多供应商，每次结算都要重新适应不同银行要求，效率极低 → AI: what this corridor requires</a:t>
             </a:r>
           </a:p>
         </p:txBody>
@@ -7463,8 +8062,8 @@
         </p:nvSpPr>
         <p:spPr>
           <a:xfrm>
-            <a:off x="6195060" y="3840480"/>
-            <a:ext cx="5143500" cy="1143000"/>
+            <a:off x="6195060" y="4069080"/>
+            <a:ext cx="5143500" cy="1371600"/>
           </a:xfrm>
           <a:prstGeom prst="roundRect">
             <a:avLst/>
@@ -7507,7 +8106,7 @@
         </p:nvSpPr>
         <p:spPr>
           <a:xfrm>
-            <a:off x="6377940" y="3950208"/>
+            <a:off x="6377940" y="4178808"/>
             <a:ext cx="4777740" cy="365760"/>
           </a:xfrm>
           <a:prstGeom prst="rect">
@@ -7531,7 +8130,7 @@
                 <a:ea typeface="Noto Sans CJK SC"/>
                 <a:cs typeface="Noto Sans CJK SC"/>
               </a:rPr>
-              <a:t>产出是指令</a:t>
+              <a:t>④ 财务对账，凭证对不上</a:t>
             </a:r>
           </a:p>
         </p:txBody>
@@ -7544,8 +8143,8 @@
         </p:nvSpPr>
         <p:spPr>
           <a:xfrm>
-            <a:off x="6377940" y="4343400"/>
-            <a:ext cx="4777740" cy="548640"/>
+            <a:off x="6377940" y="4572000"/>
+            <a:ext cx="4777740" cy="777240"/>
           </a:xfrm>
           <a:prstGeom prst="rect">
             <a:avLst/>
@@ -7568,7 +8167,44 @@
                 <a:ea typeface="Noto Sans CJK SC"/>
                 <a:cs typeface="Noto Sans CJK SC"/>
               </a:rPr>
-              <a:t>批准即生成付款指令，交由持牌机构划付——平台不经手资金。</a:t>
+              <a:t>链上/链下凭证对不上，多笔跨国付款时尤其头疼 → AI: why don't these match?</a:t>
+            </a:r>
+          </a:p>
+        </p:txBody>
+      </p:sp>
+      <p:sp>
+        <p:nvSpPr>
+          <p:cNvPr id="17" name="TextBox 16"/>
+          <p:cNvSpPr txBox="1"/>
+          <p:nvPr/>
+        </p:nvSpPr>
+        <p:spPr>
+          <a:xfrm>
+            <a:off x="822960" y="6309360"/>
+            <a:ext cx="10515600" cy="365760"/>
+          </a:xfrm>
+          <a:prstGeom prst="rect">
+            <a:avLst/>
+          </a:prstGeom>
+          <a:noFill/>
+        </p:spPr>
+        <p:txBody>
+          <a:bodyPr wrap="square" anchor="t">
+            <a:spAutoFit/>
+          </a:bodyPr>
+          <a:lstStyle/>
+          <a:p>
+            <a:pPr algn="l"/>
+            <a:r>
+              <a:rPr sz="1100" b="0">
+                <a:solidFill>
+                  <a:srgbClr val="64748B"/>
+                </a:solidFill>
+                <a:latin typeface="Noto Sans CJK SC"/>
+                <a:ea typeface="Noto Sans CJK SC"/>
+                <a:cs typeface="Noto Sans CJK SC"/>
+              </a:rPr>
+              <a:t>真实、高频、可被验证的痛点——每一条都在后续被一个 AI 能力接住。</a:t>
             </a:r>
           </a:p>
         </p:txBody>
@@ -7631,7 +8267,7 @@
                 <a:ea typeface="Noto Sans CJK SC"/>
                 <a:cs typeface="Noto Sans CJK SC"/>
               </a:rPr>
-              <a:t>核心功能① · AI 为何必要</a:t>
+              <a:t>产品介绍 · 解决什么</a:t>
             </a:r>
           </a:p>
         </p:txBody>
@@ -7660,7 +8296,7 @@
           <a:p>
             <a:pPr algn="l"/>
             <a:r>
-              <a:rPr sz="3000" b="1">
+              <a:rPr sz="3600" b="1">
                 <a:solidFill>
                   <a:srgbClr val="0F172A"/>
                 </a:solidFill>
@@ -7668,7 +8304,7 @@
                 <a:ea typeface="Noto Sans CJK SC"/>
                 <a:cs typeface="Noto Sans CJK SC"/>
               </a:rPr>
-              <a:t>收款方信息预检-AI Agent</a:t>
+              <a:t>付款前的「退回风险 + 合规」控制台</a:t>
             </a:r>
           </a:p>
         </p:txBody>
@@ -7681,23 +8317,23 @@
         </p:nvSpPr>
         <p:spPr>
           <a:xfrm>
-            <a:off x="822960" y="1554480"/>
-            <a:ext cx="7040880" cy="640080"/>
-          </a:xfrm>
-          <a:prstGeom prst="rect">
-            <a:avLst/>
-          </a:prstGeom>
-          <a:noFill/>
-        </p:spPr>
-        <p:txBody>
-          <a:bodyPr wrap="square" anchor="t">
-            <a:spAutoFit/>
-          </a:bodyPr>
-          <a:lstStyle/>
-          <a:p>
-            <a:pPr algn="l"/>
-            <a:r>
-              <a:rPr sz="1400" b="0">
+            <a:off x="822960" y="1783080"/>
+            <a:ext cx="10515600" cy="731520"/>
+          </a:xfrm>
+          <a:prstGeom prst="rect">
+            <a:avLst/>
+          </a:prstGeom>
+          <a:noFill/>
+        </p:spPr>
+        <p:txBody>
+          <a:bodyPr wrap="square" anchor="t">
+            <a:spAutoFit/>
+          </a:bodyPr>
+          <a:lstStyle/>
+          <a:p>
+            <a:pPr algn="l"/>
+            <a:r>
+              <a:rPr sz="1600" b="0">
                 <a:solidFill>
                   <a:srgbClr val="64748B"/>
                 </a:solidFill>
@@ -7705,7 +8341,7 @@
                 <a:ea typeface="Noto Sans CJK SC"/>
                 <a:cs typeface="Noto Sans CJK SC"/>
               </a:rPr>
-              <a:t>收款账户信息智能校验、国别规则适配、退回风险评分、合规风险提示报告。</a:t>
+              <a:t>一句话：在把付款指令提交给持牌机构之前，先预检退回风险、比价选路、双人放行（大额可升级为多级/多签）。</a:t>
             </a:r>
           </a:p>
         </p:txBody>
@@ -7718,8 +8354,8 @@
         </p:nvSpPr>
         <p:spPr>
           <a:xfrm>
-            <a:off x="822960" y="2377440"/>
-            <a:ext cx="7040880" cy="932688"/>
+            <a:off x="822960" y="2468880"/>
+            <a:ext cx="5143500" cy="1143000"/>
           </a:xfrm>
           <a:prstGeom prst="roundRect">
             <a:avLst/>
@@ -7762,23 +8398,23 @@
         </p:nvSpPr>
         <p:spPr>
           <a:xfrm>
-            <a:off x="1005840" y="2487168"/>
-            <a:ext cx="6675120" cy="365760"/>
-          </a:xfrm>
-          <a:prstGeom prst="rect">
-            <a:avLst/>
-          </a:prstGeom>
-          <a:noFill/>
-        </p:spPr>
-        <p:txBody>
-          <a:bodyPr wrap="square" anchor="t">
-            <a:spAutoFit/>
-          </a:bodyPr>
-          <a:lstStyle/>
-          <a:p>
-            <a:pPr algn="l"/>
-            <a:r>
-              <a:rPr sz="1500" b="1">
+            <a:off x="1005840" y="2578608"/>
+            <a:ext cx="4777740" cy="365760"/>
+          </a:xfrm>
+          <a:prstGeom prst="rect">
+            <a:avLst/>
+          </a:prstGeom>
+          <a:noFill/>
+        </p:spPr>
+        <p:txBody>
+          <a:bodyPr wrap="square" anchor="t">
+            <a:spAutoFit/>
+          </a:bodyPr>
+          <a:lstStyle/>
+          <a:p>
+            <a:pPr algn="l"/>
+            <a:r>
+              <a:rPr sz="1600" b="1">
                 <a:solidFill>
                   <a:srgbClr val="0F172A"/>
                 </a:solidFill>
@@ -7786,7 +8422,7 @@
                 <a:ea typeface="Noto Sans CJK SC"/>
                 <a:cs typeface="Noto Sans CJK SC"/>
               </a:rPr>
-              <a:t>1. 账户信息智能校验</a:t>
+              <a:t>全链路闭环</a:t>
             </a:r>
           </a:p>
         </p:txBody>
@@ -7799,23 +8435,23 @@
         </p:nvSpPr>
         <p:spPr>
           <a:xfrm>
-            <a:off x="1005840" y="2834640"/>
-            <a:ext cx="6675120" cy="457200"/>
-          </a:xfrm>
-          <a:prstGeom prst="rect">
-            <a:avLst/>
-          </a:prstGeom>
-          <a:noFill/>
-        </p:spPr>
-        <p:txBody>
-          <a:bodyPr wrap="square" anchor="t">
-            <a:spAutoFit/>
-          </a:bodyPr>
-          <a:lstStyle/>
-          <a:p>
-            <a:pPr algn="l"/>
-            <a:r>
-              <a:rPr sz="1150" b="0">
+            <a:off x="1005840" y="2971800"/>
+            <a:ext cx="4777740" cy="548640"/>
+          </a:xfrm>
+          <a:prstGeom prst="rect">
+            <a:avLst/>
+          </a:prstGeom>
+          <a:noFill/>
+        </p:spPr>
+        <p:txBody>
+          <a:bodyPr wrap="square" anchor="t">
+            <a:spAutoFit/>
+          </a:bodyPr>
+          <a:lstStyle/>
+          <a:p>
+            <a:pPr algn="l"/>
+            <a:r>
+              <a:rPr sz="1250" b="0">
                 <a:solidFill>
                   <a:srgbClr val="64748B"/>
                 </a:solidFill>
@@ -7823,7 +8459,7 @@
                 <a:ea typeface="Noto Sans CJK SC"/>
                 <a:cs typeface="Noto Sans CJK SC"/>
               </a:rPr>
-              <a:t>收款名/SWIFT/IBAN 一致性与账户状态校验，先拦截而非先失败。</a:t>
+              <a:t>预检→供应商核实→双人审批（大额可升级多级/多签）→生成付款指令(提交持牌机构)→到账确认→自动对账。</a:t>
             </a:r>
           </a:p>
         </p:txBody>
@@ -7836,8 +8472,8 @@
         </p:nvSpPr>
         <p:spPr>
           <a:xfrm>
-            <a:off x="822960" y="3474720"/>
-            <a:ext cx="7040880" cy="932688"/>
+            <a:off x="6195060" y="2468880"/>
+            <a:ext cx="5143500" cy="1143000"/>
           </a:xfrm>
           <a:prstGeom prst="roundRect">
             <a:avLst/>
@@ -7880,23 +8516,23 @@
         </p:nvSpPr>
         <p:spPr>
           <a:xfrm>
-            <a:off x="1005840" y="3584448"/>
-            <a:ext cx="6675120" cy="365760"/>
-          </a:xfrm>
-          <a:prstGeom prst="rect">
-            <a:avLst/>
-          </a:prstGeom>
-          <a:noFill/>
-        </p:spPr>
-        <p:txBody>
-          <a:bodyPr wrap="square" anchor="t">
-            <a:spAutoFit/>
-          </a:bodyPr>
-          <a:lstStyle/>
-          <a:p>
-            <a:pPr algn="l"/>
-            <a:r>
-              <a:rPr sz="1500" b="1">
+            <a:off x="6377940" y="2578608"/>
+            <a:ext cx="4777740" cy="365760"/>
+          </a:xfrm>
+          <a:prstGeom prst="rect">
+            <a:avLst/>
+          </a:prstGeom>
+          <a:noFill/>
+        </p:spPr>
+        <p:txBody>
+          <a:bodyPr wrap="square" anchor="t">
+            <a:spAutoFit/>
+          </a:bodyPr>
+          <a:lstStyle/>
+          <a:p>
+            <a:pPr algn="l"/>
+            <a:r>
+              <a:rPr sz="1600" b="1">
                 <a:solidFill>
                   <a:srgbClr val="0F172A"/>
                 </a:solidFill>
@@ -7904,7 +8540,7 @@
                 <a:ea typeface="Noto Sans CJK SC"/>
                 <a:cs typeface="Noto Sans CJK SC"/>
               </a:rPr>
-              <a:t>2. 国别规则适配</a:t>
+              <a:t>多通道比价</a:t>
             </a:r>
           </a:p>
         </p:txBody>
@@ -7917,23 +8553,23 @@
         </p:nvSpPr>
         <p:spPr>
           <a:xfrm>
-            <a:off x="1005840" y="3931920"/>
-            <a:ext cx="6675120" cy="457200"/>
-          </a:xfrm>
-          <a:prstGeom prst="rect">
-            <a:avLst/>
-          </a:prstGeom>
-          <a:noFill/>
-        </p:spPr>
-        <p:txBody>
-          <a:bodyPr wrap="square" anchor="t">
-            <a:spAutoFit/>
-          </a:bodyPr>
-          <a:lstStyle/>
-          <a:p>
-            <a:pPr algn="l"/>
-            <a:r>
-              <a:rPr sz="1150" b="0">
+            <a:off x="6377940" y="2971800"/>
+            <a:ext cx="4777740" cy="548640"/>
+          </a:xfrm>
+          <a:prstGeom prst="rect">
+            <a:avLst/>
+          </a:prstGeom>
+          <a:noFill/>
+        </p:spPr>
+        <p:txBody>
+          <a:bodyPr wrap="square" anchor="t">
+            <a:spAutoFit/>
+          </a:bodyPr>
+          <a:lstStyle/>
+          <a:p>
+            <a:pPr algn="l"/>
+            <a:r>
+              <a:rPr sz="1250" b="0">
                 <a:solidFill>
                   <a:srgbClr val="64748B"/>
                 </a:solidFill>
@@ -7941,7 +8577,7 @@
                 <a:ea typeface="Noto Sans CJK SC"/>
                 <a:cs typeface="Noto Sans CJK SC"/>
               </a:rPr>
-              <a:t>按收款人国家/币种自动适配该走廊的结算要求，省去每次重新摸规则。</a:t>
+              <a:t>统一池管理多类持牌结算通道，按费用/时效/退回率自动排序，给出可解释的最优路径推荐。</a:t>
             </a:r>
           </a:p>
         </p:txBody>
@@ -7954,8 +8590,8 @@
         </p:nvSpPr>
         <p:spPr>
           <a:xfrm>
-            <a:off x="822960" y="4572000"/>
-            <a:ext cx="7040880" cy="932688"/>
+            <a:off x="822960" y="3840480"/>
+            <a:ext cx="5143500" cy="1143000"/>
           </a:xfrm>
           <a:prstGeom prst="roundRect">
             <a:avLst/>
@@ -7998,23 +8634,23 @@
         </p:nvSpPr>
         <p:spPr>
           <a:xfrm>
-            <a:off x="1005840" y="4681728"/>
-            <a:ext cx="6675120" cy="365760"/>
-          </a:xfrm>
-          <a:prstGeom prst="rect">
-            <a:avLst/>
-          </a:prstGeom>
-          <a:noFill/>
-        </p:spPr>
-        <p:txBody>
-          <a:bodyPr wrap="square" anchor="t">
-            <a:spAutoFit/>
-          </a:bodyPr>
-          <a:lstStyle/>
-          <a:p>
-            <a:pPr algn="l"/>
-            <a:r>
-              <a:rPr sz="1500" b="1">
+            <a:off x="1005840" y="3950208"/>
+            <a:ext cx="4777740" cy="365760"/>
+          </a:xfrm>
+          <a:prstGeom prst="rect">
+            <a:avLst/>
+          </a:prstGeom>
+          <a:noFill/>
+        </p:spPr>
+        <p:txBody>
+          <a:bodyPr wrap="square" anchor="t">
+            <a:spAutoFit/>
+          </a:bodyPr>
+          <a:lstStyle/>
+          <a:p>
+            <a:pPr algn="l"/>
+            <a:r>
+              <a:rPr sz="1600" b="1">
                 <a:solidFill>
                   <a:srgbClr val="0F172A"/>
                 </a:solidFill>
@@ -8022,7 +8658,7 @@
                 <a:ea typeface="Noto Sans CJK SC"/>
                 <a:cs typeface="Noto Sans CJK SC"/>
               </a:rPr>
-              <a:t>3. 退回风险评分</a:t>
+              <a:t>面向真实用户</a:t>
             </a:r>
           </a:p>
         </p:txBody>
@@ -8035,23 +8671,23 @@
         </p:nvSpPr>
         <p:spPr>
           <a:xfrm>
-            <a:off x="1005840" y="5029200"/>
-            <a:ext cx="6675120" cy="457200"/>
-          </a:xfrm>
-          <a:prstGeom prst="rect">
-            <a:avLst/>
-          </a:prstGeom>
-          <a:noFill/>
-        </p:spPr>
-        <p:txBody>
-          <a:bodyPr wrap="square" anchor="t">
-            <a:spAutoFit/>
-          </a:bodyPr>
-          <a:lstStyle/>
-          <a:p>
-            <a:pPr algn="l"/>
-            <a:r>
-              <a:rPr sz="1150" b="0">
+            <a:off x="1005840" y="4343400"/>
+            <a:ext cx="4777740" cy="548640"/>
+          </a:xfrm>
+          <a:prstGeom prst="rect">
+            <a:avLst/>
+          </a:prstGeom>
+          <a:noFill/>
+        </p:spPr>
+        <p:txBody>
+          <a:bodyPr wrap="square" anchor="t">
+            <a:spAutoFit/>
+          </a:bodyPr>
+          <a:lstStyle/>
+          <a:p>
+            <a:pPr algn="l"/>
+            <a:r>
+              <a:rPr sz="1250" b="0">
                 <a:solidFill>
                   <a:srgbClr val="64748B"/>
                 </a:solidFill>
@@ -8059,7 +8695,7 @@
                 <a:ea typeface="Noto Sans CJK SC"/>
                 <a:cs typeface="Noto Sans CJK SC"/>
               </a:rPr>
-              <a:t>确定性规则引擎给出退回概率与命中因子；AI 补充语义/情境风险，只加警示、不降评分。</a:t>
+              <a:t>为中小外贸出纳设计，移动端优先，几步走完一笔高风险付款的完整控制。</a:t>
             </a:r>
           </a:p>
         </p:txBody>
@@ -8072,8 +8708,8 @@
         </p:nvSpPr>
         <p:spPr>
           <a:xfrm>
-            <a:off x="822960" y="5669279"/>
-            <a:ext cx="7040880" cy="932688"/>
+            <a:off x="6195060" y="3840480"/>
+            <a:ext cx="5143500" cy="1143000"/>
           </a:xfrm>
           <a:prstGeom prst="roundRect">
             <a:avLst/>
@@ -8116,23 +8752,23 @@
         </p:nvSpPr>
         <p:spPr>
           <a:xfrm>
-            <a:off x="1005840" y="5779007"/>
-            <a:ext cx="6675120" cy="365760"/>
-          </a:xfrm>
-          <a:prstGeom prst="rect">
-            <a:avLst/>
-          </a:prstGeom>
-          <a:noFill/>
-        </p:spPr>
-        <p:txBody>
-          <a:bodyPr wrap="square" anchor="t">
-            <a:spAutoFit/>
-          </a:bodyPr>
-          <a:lstStyle/>
-          <a:p>
-            <a:pPr algn="l"/>
-            <a:r>
-              <a:rPr sz="1500" b="1">
+            <a:off x="6377940" y="3950208"/>
+            <a:ext cx="4777740" cy="365760"/>
+          </a:xfrm>
+          <a:prstGeom prst="rect">
+            <a:avLst/>
+          </a:prstGeom>
+          <a:noFill/>
+        </p:spPr>
+        <p:txBody>
+          <a:bodyPr wrap="square" anchor="t">
+            <a:spAutoFit/>
+          </a:bodyPr>
+          <a:lstStyle/>
+          <a:p>
+            <a:pPr algn="l"/>
+            <a:r>
+              <a:rPr sz="1600" b="1">
                 <a:solidFill>
                   <a:srgbClr val="0F172A"/>
                 </a:solidFill>
@@ -8140,7 +8776,7 @@
                 <a:ea typeface="Noto Sans CJK SC"/>
                 <a:cs typeface="Noto Sans CJK SC"/>
               </a:rPr>
-              <a:t>4. 合规风险提示报告</a:t>
+              <a:t>产出是指令</a:t>
             </a:r>
           </a:p>
         </p:txBody>
@@ -8153,23 +8789,23 @@
         </p:nvSpPr>
         <p:spPr>
           <a:xfrm>
-            <a:off x="1005840" y="6126479"/>
-            <a:ext cx="6675120" cy="457200"/>
-          </a:xfrm>
-          <a:prstGeom prst="rect">
-            <a:avLst/>
-          </a:prstGeom>
-          <a:noFill/>
-        </p:spPr>
-        <p:txBody>
-          <a:bodyPr wrap="square" anchor="t">
-            <a:spAutoFit/>
-          </a:bodyPr>
-          <a:lstStyle/>
-          <a:p>
-            <a:pPr algn="l"/>
-            <a:r>
-              <a:rPr sz="1150" b="0">
+            <a:off x="6377940" y="4343400"/>
+            <a:ext cx="4777740" cy="548640"/>
+          </a:xfrm>
+          <a:prstGeom prst="rect">
+            <a:avLst/>
+          </a:prstGeom>
+          <a:noFill/>
+        </p:spPr>
+        <p:txBody>
+          <a:bodyPr wrap="square" anchor="t">
+            <a:spAutoFit/>
+          </a:bodyPr>
+          <a:lstStyle/>
+          <a:p>
+            <a:pPr algn="l"/>
+            <a:r>
+              <a:rPr sz="1250" b="0">
                 <a:solidFill>
                   <a:srgbClr val="64748B"/>
                 </a:solidFill>
@@ -8177,112 +8813,7 @@
                 <a:ea typeface="Noto Sans CJK SC"/>
                 <a:cs typeface="Noto Sans CJK SC"/>
               </a:rPr>
-              <a:t>把检查项翻译成通俗解释与修复步骤，并可一键生成供应商核实工单。</a:t>
-            </a:r>
-          </a:p>
-        </p:txBody>
-      </p:sp>
-      <p:sp>
-        <p:nvSpPr>
-          <p:cNvPr id="17" name="Rounded Rectangle 16"/>
-          <p:cNvSpPr/>
-          <p:nvPr/>
-        </p:nvSpPr>
-        <p:spPr>
-          <a:xfrm>
-            <a:off x="8138160" y="1508760"/>
-            <a:ext cx="3246120" cy="4937760"/>
-          </a:xfrm>
-          <a:prstGeom prst="roundRect">
-            <a:avLst/>
-          </a:prstGeom>
-          <a:solidFill>
-            <a:srgbClr val="F1F5F9"/>
-          </a:solidFill>
-          <a:ln>
-            <a:noFill/>
-          </a:ln>
-          <a:effectLst/>
-        </p:spPr>
-        <p:style>
-          <a:lnRef idx="1">
-            <a:schemeClr val="accent1"/>
-          </a:lnRef>
-          <a:fillRef idx="3">
-            <a:schemeClr val="accent1"/>
-          </a:fillRef>
-          <a:effectRef idx="2">
-            <a:schemeClr val="accent1"/>
-          </a:effectRef>
-          <a:fontRef idx="minor">
-            <a:schemeClr val="lt1"/>
-          </a:fontRef>
-        </p:style>
-        <p:txBody>
-          <a:bodyPr rtlCol="0" anchor="ctr"/>
-          <a:lstStyle/>
-          <a:p>
-            <a:pPr algn="ctr"/>
-          </a:p>
-        </p:txBody>
-      </p:sp>
-      <p:pic>
-        <p:nvPicPr>
-          <p:cNvPr id="18" name="Picture 17" descr="feat-precheck.png"/>
-          <p:cNvPicPr>
-            <a:picLocks noChangeAspect="1"/>
-          </p:cNvPicPr>
-          <p:nvPr/>
-        </p:nvPicPr>
-        <p:blipFill>
-          <a:blip r:embed="rId2"/>
-          <a:stretch>
-            <a:fillRect/>
-          </a:stretch>
-        </p:blipFill>
-        <p:spPr>
-          <a:xfrm>
-            <a:off x="8275320" y="1645920"/>
-            <a:ext cx="1135179" cy="4663440"/>
-          </a:xfrm>
-          <a:prstGeom prst="rect">
-            <a:avLst/>
-          </a:prstGeom>
-        </p:spPr>
-      </p:pic>
-      <p:sp>
-        <p:nvSpPr>
-          <p:cNvPr id="19" name="TextBox 18"/>
-          <p:cNvSpPr txBox="1"/>
-          <p:nvPr/>
-        </p:nvSpPr>
-        <p:spPr>
-          <a:xfrm>
-            <a:off x="8138160" y="6510528"/>
-            <a:ext cx="3246120" cy="274320"/>
-          </a:xfrm>
-          <a:prstGeom prst="rect">
-            <a:avLst/>
-          </a:prstGeom>
-          <a:noFill/>
-        </p:spPr>
-        <p:txBody>
-          <a:bodyPr wrap="square" anchor="t">
-            <a:spAutoFit/>
-          </a:bodyPr>
-          <a:lstStyle/>
-          <a:p>
-            <a:pPr algn="ctr"/>
-            <a:r>
-              <a:rPr sz="900" b="0">
-                <a:solidFill>
-                  <a:srgbClr val="64748B"/>
-                </a:solidFill>
-                <a:latin typeface="Noto Sans CJK SC"/>
-                <a:ea typeface="Noto Sans CJK SC"/>
-                <a:cs typeface="Noto Sans CJK SC"/>
-              </a:rPr>
-              <a:t>产品界面（现场可实测）</a:t>
+              <a:t>批准即生成付款指令，交由持牌机构划付——平台不经手资金。</a:t>
             </a:r>
           </a:p>
         </p:txBody>
@@ -8345,7 +8876,7 @@
                 <a:ea typeface="Noto Sans CJK SC"/>
                 <a:cs typeface="Noto Sans CJK SC"/>
               </a:rPr>
-              <a:t>核心功能② · AI 为何必要</a:t>
+              <a:t>核心功能① · AI 为何必要</a:t>
             </a:r>
           </a:p>
         </p:txBody>
@@ -8382,7 +8913,7 @@
                 <a:ea typeface="Noto Sans CJK SC"/>
                 <a:cs typeface="Noto Sans CJK SC"/>
               </a:rPr>
-              <a:t>多路径智能路由推荐引擎</a:t>
+              <a:t>收款方信息预检-AI Agent</a:t>
             </a:r>
           </a:p>
         </p:txBody>
@@ -8419,7 +8950,7 @@
                 <a:ea typeface="Noto Sans CJK SC"/>
                 <a:cs typeface="Noto Sans CJK SC"/>
               </a:rPr>
-              <a:t>统一池管理多类持牌结算通道，输出最优路径对比建议——平台不执行付款。</a:t>
+              <a:t>收款账户信息智能校验、国别规则适配、退回风险评分、合规风险提示报告。</a:t>
             </a:r>
           </a:p>
         </p:txBody>
@@ -8500,7 +9031,7 @@
                 <a:ea typeface="Noto Sans CJK SC"/>
                 <a:cs typeface="Noto Sans CJK SC"/>
               </a:rPr>
-              <a:t>1. 统一通道池</a:t>
+              <a:t>1. 账户信息智能校验</a:t>
             </a:r>
           </a:p>
         </p:txBody>
@@ -8537,7 +9068,7 @@
                 <a:ea typeface="Noto Sans CJK SC"/>
                 <a:cs typeface="Noto Sans CJK SC"/>
               </a:rPr>
-              <a:t>传统电汇、跨境人民币、第三方跨境支付通道；境外主体可选通道含境外持牌结算服务商方案。</a:t>
+              <a:t>收款名/SWIFT/IBAN 一致性与账户状态校验，先拦截而非先失败。</a:t>
             </a:r>
           </a:p>
         </p:txBody>
@@ -8618,7 +9149,7 @@
                 <a:ea typeface="Noto Sans CJK SC"/>
                 <a:cs typeface="Noto Sans CJK SC"/>
               </a:rPr>
-              <a:t>2. 多维度比价</a:t>
+              <a:t>2. 国别规则适配</a:t>
             </a:r>
           </a:p>
         </p:txBody>
@@ -8655,7 +9186,7 @@
                 <a:ea typeface="Noto Sans CJK SC"/>
                 <a:cs typeface="Noto Sans CJK SC"/>
               </a:rPr>
-              <a:t>按费用、时效、退回率对各持牌通道自动排序，给出可解释的最优路径。</a:t>
+              <a:t>按收款人国家/币种自动适配该走廊的结算要求，省去每次重新摸规则。</a:t>
             </a:r>
           </a:p>
         </p:txBody>
@@ -8736,7 +9267,7 @@
                 <a:ea typeface="Noto Sans CJK SC"/>
                 <a:cs typeface="Noto Sans CJK SC"/>
               </a:rPr>
-              <a:t>3. 只建议、不执行</a:t>
+              <a:t>3. 退回风险评分</a:t>
             </a:r>
           </a:p>
         </p:txBody>
@@ -8773,7 +9304,7 @@
                 <a:ea typeface="Noto Sans CJK SC"/>
                 <a:cs typeface="Noto Sans CJK SC"/>
               </a:rPr>
-              <a:t>平台仅输出最优路径对比建议，实际付款由持牌机构执行——平台不经手资金。</a:t>
+              <a:t>确定性规则引擎给出退回概率与命中因子；AI 补充语义/情境风险，只加警示、不降评分。</a:t>
             </a:r>
           </a:p>
         </p:txBody>
@@ -8854,7 +9385,7 @@
                 <a:ea typeface="Noto Sans CJK SC"/>
                 <a:cs typeface="Noto Sans CJK SC"/>
               </a:rPr>
-              <a:t>4. 为什么要 AI</a:t>
+              <a:t>4. 合规风险提示报告</a:t>
             </a:r>
           </a:p>
         </p:txBody>
@@ -8891,7 +9422,7 @@
                 <a:ea typeface="Noto Sans CJK SC"/>
                 <a:cs typeface="Noto Sans CJK SC"/>
               </a:rPr>
-              <a:t>通道规则随国别/币种/额度多变，AI 帮助在多变约束下给出可解释的路径推荐。</a:t>
+              <a:t>把检查项翻译成通俗解释与修复步骤，并可一键生成供应商核实工单。</a:t>
             </a:r>
           </a:p>
         </p:txBody>
@@ -8942,7 +9473,7 @@
       </p:sp>
       <p:pic>
         <p:nvPicPr>
-          <p:cNvPr id="18" name="Picture 17" descr="feat-route.png"/>
+          <p:cNvPr id="18" name="Picture 17" descr="feat-precheck.png"/>
           <p:cNvPicPr>
             <a:picLocks noChangeAspect="1"/>
           </p:cNvPicPr>
@@ -8957,7 +9488,7 @@
         <p:spPr>
           <a:xfrm>
             <a:off x="8275320" y="1645920"/>
-            <a:ext cx="1457325" cy="4663440"/>
+            <a:ext cx="1135179" cy="4663440"/>
           </a:xfrm>
           <a:prstGeom prst="rect">
             <a:avLst/>
@@ -9059,7 +9590,7 @@
                 <a:ea typeface="Noto Sans CJK SC"/>
                 <a:cs typeface="Noto Sans CJK SC"/>
               </a:rPr>
-              <a:t>核心功能③ · 成果可演示</a:t>
+              <a:t>核心功能② · AI 为何必要</a:t>
             </a:r>
           </a:p>
         </p:txBody>
@@ -9096,7 +9627,7 @@
                 <a:ea typeface="Noto Sans CJK SC"/>
                 <a:cs typeface="Noto Sans CJK SC"/>
               </a:rPr>
-              <a:t>统一结算状态与对账看板</a:t>
+              <a:t>多路径智能路由推荐引擎</a:t>
             </a:r>
           </a:p>
         </p:txBody>
@@ -9133,7 +9664,7 @@
                 <a:ea typeface="Noto Sans CJK SC"/>
                 <a:cs typeface="Noto Sans CJK SC"/>
               </a:rPr>
-              <a:t>聚合各通道汇款进度、中转链路信息、交易凭证，实现多笔跨国付款台账可视化与自动对账核销。</a:t>
+              <a:t>统一池管理多类持牌结算通道，输出最优路径对比建议——平台不执行付款。</a:t>
             </a:r>
           </a:p>
         </p:txBody>
@@ -9214,7 +9745,7 @@
                 <a:ea typeface="Noto Sans CJK SC"/>
                 <a:cs typeface="Noto Sans CJK SC"/>
               </a:rPr>
-              <a:t>1. 多通道进度聚合</a:t>
+              <a:t>1. 统一通道池</a:t>
             </a:r>
           </a:p>
         </p:txBody>
@@ -9251,7 +9782,7 @@
                 <a:ea typeface="Noto Sans CJK SC"/>
                 <a:cs typeface="Noto Sans CJK SC"/>
               </a:rPr>
-              <a:t>汇总各持牌通道的汇款进度与中转链路信息，钱走到哪一目了然。</a:t>
+              <a:t>传统电汇、跨境人民币、第三方跨境支付通道；境外主体可选通道含境外持牌结算服务商方案。</a:t>
             </a:r>
           </a:p>
         </p:txBody>
@@ -9332,7 +9863,7 @@
                 <a:ea typeface="Noto Sans CJK SC"/>
                 <a:cs typeface="Noto Sans CJK SC"/>
               </a:rPr>
-              <a:t>2. 凭证与台账可视化</a:t>
+              <a:t>2. 多维度比价</a:t>
             </a:r>
           </a:p>
         </p:txBody>
@@ -9369,7 +9900,7 @@
                 <a:ea typeface="Noto Sans CJK SC"/>
                 <a:cs typeface="Noto Sans CJK SC"/>
               </a:rPr>
-              <a:t>聚合交易凭证，多笔跨国付款台账集中可视化管理。</a:t>
+              <a:t>按费用、时效、退回率对各持牌通道自动排序，给出可解释的最优路径。</a:t>
             </a:r>
           </a:p>
         </p:txBody>
@@ -9450,7 +9981,7 @@
                 <a:ea typeface="Noto Sans CJK SC"/>
                 <a:cs typeface="Noto Sans CJK SC"/>
               </a:rPr>
-              <a:t>3. 自动对账核销</a:t>
+              <a:t>3. 只建议、不执行</a:t>
             </a:r>
           </a:p>
         </p:txBody>
@@ -9487,7 +10018,7 @@
                 <a:ea typeface="Noto Sans CJK SC"/>
                 <a:cs typeface="Noto Sans CJK SC"/>
               </a:rPr>
-              <a:t>应收 vs 实收、费用与汇兑损失自动匹配核销，并可导出对账单。</a:t>
+              <a:t>平台仅输出最优路径对比建议，实际付款由持牌机构执行——平台不经手资金。</a:t>
             </a:r>
           </a:p>
         </p:txBody>
@@ -9568,7 +10099,7 @@
                 <a:ea typeface="Noto Sans CJK SC"/>
                 <a:cs typeface="Noto Sans CJK SC"/>
               </a:rPr>
-              <a:t>4. 结算链路透明</a:t>
+              <a:t>4. 为什么要 AI</a:t>
             </a:r>
           </a:p>
         </p:txBody>
@@ -9605,7 +10136,7 @@
                 <a:ea typeface="Noto Sans CJK SC"/>
                 <a:cs typeface="Noto Sans CJK SC"/>
               </a:rPr>
-              <a:t>结算全程可追踪；平台只做透明化追踪，不经手资金。</a:t>
+              <a:t>通道规则随国别/币种/额度多变，AI 帮助在多变约束下给出可解释的路径推荐。</a:t>
             </a:r>
           </a:p>
         </p:txBody>
@@ -9656,7 +10187,7 @@
       </p:sp>
       <p:pic>
         <p:nvPicPr>
-          <p:cNvPr id="18" name="Picture 17" descr="feat-reconcile.png"/>
+          <p:cNvPr id="18" name="Picture 17" descr="feat-route.png"/>
           <p:cNvPicPr>
             <a:picLocks noChangeAspect="1"/>
           </p:cNvPicPr>
@@ -9671,7 +10202,7 @@
         <p:spPr>
           <a:xfrm>
             <a:off x="8275320" y="1645920"/>
-            <a:ext cx="1588731" cy="4663440"/>
+            <a:ext cx="1457325" cy="4663440"/>
           </a:xfrm>
           <a:prstGeom prst="rect">
             <a:avLst/>
@@ -9724,6 +10255,720 @@
 </file>
 
 <file path=ppt/slides/slide8.xml><?xml version="1.0" encoding="utf-8"?>
+<p:sld xmlns:a="http://schemas.openxmlformats.org/drawingml/2006/main" xmlns:p="http://schemas.openxmlformats.org/presentationml/2006/main" xmlns:r="http://schemas.openxmlformats.org/officeDocument/2006/relationships">
+  <p:cSld>
+    <p:bg>
+      <p:bgPr>
+        <a:solidFill>
+          <a:srgbClr val="FFFFFF"/>
+        </a:solidFill>
+        <a:effectLst/>
+      </p:bgPr>
+    </p:bg>
+    <p:spTree>
+      <p:nvGrpSpPr>
+        <p:cNvPr id="1" name=""/>
+        <p:cNvGrpSpPr/>
+        <p:nvPr/>
+      </p:nvGrpSpPr>
+      <p:grpSpPr/>
+      <p:sp>
+        <p:nvSpPr>
+          <p:cNvPr id="2" name="TextBox 1"/>
+          <p:cNvSpPr txBox="1"/>
+          <p:nvPr/>
+        </p:nvSpPr>
+        <p:spPr>
+          <a:xfrm>
+            <a:off x="822960" y="502920"/>
+            <a:ext cx="10515600" cy="365760"/>
+          </a:xfrm>
+          <a:prstGeom prst="rect">
+            <a:avLst/>
+          </a:prstGeom>
+          <a:noFill/>
+        </p:spPr>
+        <p:txBody>
+          <a:bodyPr wrap="square" anchor="t">
+            <a:spAutoFit/>
+          </a:bodyPr>
+          <a:lstStyle/>
+          <a:p>
+            <a:pPr algn="l"/>
+            <a:r>
+              <a:rPr sz="1400" b="1">
+                <a:solidFill>
+                  <a:srgbClr val="0F766E"/>
+                </a:solidFill>
+                <a:latin typeface="Noto Sans CJK SC"/>
+                <a:ea typeface="Noto Sans CJK SC"/>
+                <a:cs typeface="Noto Sans CJK SC"/>
+              </a:rPr>
+              <a:t>核心功能③ · 成果可演示</a:t>
+            </a:r>
+          </a:p>
+        </p:txBody>
+      </p:sp>
+      <p:sp>
+        <p:nvSpPr>
+          <p:cNvPr id="3" name="TextBox 2"/>
+          <p:cNvSpPr txBox="1"/>
+          <p:nvPr/>
+        </p:nvSpPr>
+        <p:spPr>
+          <a:xfrm>
+            <a:off x="822960" y="868680"/>
+            <a:ext cx="10515600" cy="914400"/>
+          </a:xfrm>
+          <a:prstGeom prst="rect">
+            <a:avLst/>
+          </a:prstGeom>
+          <a:noFill/>
+        </p:spPr>
+        <p:txBody>
+          <a:bodyPr wrap="square" anchor="t">
+            <a:spAutoFit/>
+          </a:bodyPr>
+          <a:lstStyle/>
+          <a:p>
+            <a:pPr algn="l"/>
+            <a:r>
+              <a:rPr sz="3000" b="1">
+                <a:solidFill>
+                  <a:srgbClr val="0F172A"/>
+                </a:solidFill>
+                <a:latin typeface="Noto Sans CJK SC"/>
+                <a:ea typeface="Noto Sans CJK SC"/>
+                <a:cs typeface="Noto Sans CJK SC"/>
+              </a:rPr>
+              <a:t>统一结算状态与对账看板</a:t>
+            </a:r>
+          </a:p>
+        </p:txBody>
+      </p:sp>
+      <p:sp>
+        <p:nvSpPr>
+          <p:cNvPr id="4" name="TextBox 3"/>
+          <p:cNvSpPr txBox="1"/>
+          <p:nvPr/>
+        </p:nvSpPr>
+        <p:spPr>
+          <a:xfrm>
+            <a:off x="822960" y="1554480"/>
+            <a:ext cx="7040880" cy="640080"/>
+          </a:xfrm>
+          <a:prstGeom prst="rect">
+            <a:avLst/>
+          </a:prstGeom>
+          <a:noFill/>
+        </p:spPr>
+        <p:txBody>
+          <a:bodyPr wrap="square" anchor="t">
+            <a:spAutoFit/>
+          </a:bodyPr>
+          <a:lstStyle/>
+          <a:p>
+            <a:pPr algn="l"/>
+            <a:r>
+              <a:rPr sz="1400" b="0">
+                <a:solidFill>
+                  <a:srgbClr val="64748B"/>
+                </a:solidFill>
+                <a:latin typeface="Noto Sans CJK SC"/>
+                <a:ea typeface="Noto Sans CJK SC"/>
+                <a:cs typeface="Noto Sans CJK SC"/>
+              </a:rPr>
+              <a:t>聚合各通道汇款进度、中转链路信息、交易凭证，实现多笔跨国付款台账可视化与自动对账核销。</a:t>
+            </a:r>
+          </a:p>
+        </p:txBody>
+      </p:sp>
+      <p:sp>
+        <p:nvSpPr>
+          <p:cNvPr id="5" name="Rounded Rectangle 4"/>
+          <p:cNvSpPr/>
+          <p:nvPr/>
+        </p:nvSpPr>
+        <p:spPr>
+          <a:xfrm>
+            <a:off x="822960" y="2377440"/>
+            <a:ext cx="7040880" cy="932688"/>
+          </a:xfrm>
+          <a:prstGeom prst="roundRect">
+            <a:avLst/>
+          </a:prstGeom>
+          <a:solidFill>
+            <a:srgbClr val="F1F5F9"/>
+          </a:solidFill>
+          <a:ln>
+            <a:noFill/>
+          </a:ln>
+          <a:effectLst/>
+        </p:spPr>
+        <p:style>
+          <a:lnRef idx="1">
+            <a:schemeClr val="accent1"/>
+          </a:lnRef>
+          <a:fillRef idx="3">
+            <a:schemeClr val="accent1"/>
+          </a:fillRef>
+          <a:effectRef idx="2">
+            <a:schemeClr val="accent1"/>
+          </a:effectRef>
+          <a:fontRef idx="minor">
+            <a:schemeClr val="lt1"/>
+          </a:fontRef>
+        </p:style>
+        <p:txBody>
+          <a:bodyPr rtlCol="0" anchor="ctr"/>
+          <a:lstStyle/>
+          <a:p>
+            <a:pPr algn="ctr"/>
+          </a:p>
+        </p:txBody>
+      </p:sp>
+      <p:sp>
+        <p:nvSpPr>
+          <p:cNvPr id="6" name="TextBox 5"/>
+          <p:cNvSpPr txBox="1"/>
+          <p:nvPr/>
+        </p:nvSpPr>
+        <p:spPr>
+          <a:xfrm>
+            <a:off x="1005840" y="2487168"/>
+            <a:ext cx="6675120" cy="365760"/>
+          </a:xfrm>
+          <a:prstGeom prst="rect">
+            <a:avLst/>
+          </a:prstGeom>
+          <a:noFill/>
+        </p:spPr>
+        <p:txBody>
+          <a:bodyPr wrap="square" anchor="t">
+            <a:spAutoFit/>
+          </a:bodyPr>
+          <a:lstStyle/>
+          <a:p>
+            <a:pPr algn="l"/>
+            <a:r>
+              <a:rPr sz="1500" b="1">
+                <a:solidFill>
+                  <a:srgbClr val="0F172A"/>
+                </a:solidFill>
+                <a:latin typeface="Noto Sans CJK SC"/>
+                <a:ea typeface="Noto Sans CJK SC"/>
+                <a:cs typeface="Noto Sans CJK SC"/>
+              </a:rPr>
+              <a:t>1. 多通道进度聚合</a:t>
+            </a:r>
+          </a:p>
+        </p:txBody>
+      </p:sp>
+      <p:sp>
+        <p:nvSpPr>
+          <p:cNvPr id="7" name="TextBox 6"/>
+          <p:cNvSpPr txBox="1"/>
+          <p:nvPr/>
+        </p:nvSpPr>
+        <p:spPr>
+          <a:xfrm>
+            <a:off x="1005840" y="2834640"/>
+            <a:ext cx="6675120" cy="457200"/>
+          </a:xfrm>
+          <a:prstGeom prst="rect">
+            <a:avLst/>
+          </a:prstGeom>
+          <a:noFill/>
+        </p:spPr>
+        <p:txBody>
+          <a:bodyPr wrap="square" anchor="t">
+            <a:spAutoFit/>
+          </a:bodyPr>
+          <a:lstStyle/>
+          <a:p>
+            <a:pPr algn="l"/>
+            <a:r>
+              <a:rPr sz="1150" b="0">
+                <a:solidFill>
+                  <a:srgbClr val="64748B"/>
+                </a:solidFill>
+                <a:latin typeface="Noto Sans CJK SC"/>
+                <a:ea typeface="Noto Sans CJK SC"/>
+                <a:cs typeface="Noto Sans CJK SC"/>
+              </a:rPr>
+              <a:t>汇总各持牌通道的汇款进度与中转链路信息，钱走到哪一目了然。</a:t>
+            </a:r>
+          </a:p>
+        </p:txBody>
+      </p:sp>
+      <p:sp>
+        <p:nvSpPr>
+          <p:cNvPr id="8" name="Rounded Rectangle 7"/>
+          <p:cNvSpPr/>
+          <p:nvPr/>
+        </p:nvSpPr>
+        <p:spPr>
+          <a:xfrm>
+            <a:off x="822960" y="3474720"/>
+            <a:ext cx="7040880" cy="932688"/>
+          </a:xfrm>
+          <a:prstGeom prst="roundRect">
+            <a:avLst/>
+          </a:prstGeom>
+          <a:solidFill>
+            <a:srgbClr val="F1F5F9"/>
+          </a:solidFill>
+          <a:ln>
+            <a:noFill/>
+          </a:ln>
+          <a:effectLst/>
+        </p:spPr>
+        <p:style>
+          <a:lnRef idx="1">
+            <a:schemeClr val="accent1"/>
+          </a:lnRef>
+          <a:fillRef idx="3">
+            <a:schemeClr val="accent1"/>
+          </a:fillRef>
+          <a:effectRef idx="2">
+            <a:schemeClr val="accent1"/>
+          </a:effectRef>
+          <a:fontRef idx="minor">
+            <a:schemeClr val="lt1"/>
+          </a:fontRef>
+        </p:style>
+        <p:txBody>
+          <a:bodyPr rtlCol="0" anchor="ctr"/>
+          <a:lstStyle/>
+          <a:p>
+            <a:pPr algn="ctr"/>
+          </a:p>
+        </p:txBody>
+      </p:sp>
+      <p:sp>
+        <p:nvSpPr>
+          <p:cNvPr id="9" name="TextBox 8"/>
+          <p:cNvSpPr txBox="1"/>
+          <p:nvPr/>
+        </p:nvSpPr>
+        <p:spPr>
+          <a:xfrm>
+            <a:off x="1005840" y="3584448"/>
+            <a:ext cx="6675120" cy="365760"/>
+          </a:xfrm>
+          <a:prstGeom prst="rect">
+            <a:avLst/>
+          </a:prstGeom>
+          <a:noFill/>
+        </p:spPr>
+        <p:txBody>
+          <a:bodyPr wrap="square" anchor="t">
+            <a:spAutoFit/>
+          </a:bodyPr>
+          <a:lstStyle/>
+          <a:p>
+            <a:pPr algn="l"/>
+            <a:r>
+              <a:rPr sz="1500" b="1">
+                <a:solidFill>
+                  <a:srgbClr val="0F172A"/>
+                </a:solidFill>
+                <a:latin typeface="Noto Sans CJK SC"/>
+                <a:ea typeface="Noto Sans CJK SC"/>
+                <a:cs typeface="Noto Sans CJK SC"/>
+              </a:rPr>
+              <a:t>2. 凭证与台账可视化</a:t>
+            </a:r>
+          </a:p>
+        </p:txBody>
+      </p:sp>
+      <p:sp>
+        <p:nvSpPr>
+          <p:cNvPr id="10" name="TextBox 9"/>
+          <p:cNvSpPr txBox="1"/>
+          <p:nvPr/>
+        </p:nvSpPr>
+        <p:spPr>
+          <a:xfrm>
+            <a:off x="1005840" y="3931920"/>
+            <a:ext cx="6675120" cy="457200"/>
+          </a:xfrm>
+          <a:prstGeom prst="rect">
+            <a:avLst/>
+          </a:prstGeom>
+          <a:noFill/>
+        </p:spPr>
+        <p:txBody>
+          <a:bodyPr wrap="square" anchor="t">
+            <a:spAutoFit/>
+          </a:bodyPr>
+          <a:lstStyle/>
+          <a:p>
+            <a:pPr algn="l"/>
+            <a:r>
+              <a:rPr sz="1150" b="0">
+                <a:solidFill>
+                  <a:srgbClr val="64748B"/>
+                </a:solidFill>
+                <a:latin typeface="Noto Sans CJK SC"/>
+                <a:ea typeface="Noto Sans CJK SC"/>
+                <a:cs typeface="Noto Sans CJK SC"/>
+              </a:rPr>
+              <a:t>聚合交易凭证，多笔跨国付款台账集中可视化管理。</a:t>
+            </a:r>
+          </a:p>
+        </p:txBody>
+      </p:sp>
+      <p:sp>
+        <p:nvSpPr>
+          <p:cNvPr id="11" name="Rounded Rectangle 10"/>
+          <p:cNvSpPr/>
+          <p:nvPr/>
+        </p:nvSpPr>
+        <p:spPr>
+          <a:xfrm>
+            <a:off x="822960" y="4572000"/>
+            <a:ext cx="7040880" cy="932688"/>
+          </a:xfrm>
+          <a:prstGeom prst="roundRect">
+            <a:avLst/>
+          </a:prstGeom>
+          <a:solidFill>
+            <a:srgbClr val="F1F5F9"/>
+          </a:solidFill>
+          <a:ln>
+            <a:noFill/>
+          </a:ln>
+          <a:effectLst/>
+        </p:spPr>
+        <p:style>
+          <a:lnRef idx="1">
+            <a:schemeClr val="accent1"/>
+          </a:lnRef>
+          <a:fillRef idx="3">
+            <a:schemeClr val="accent1"/>
+          </a:fillRef>
+          <a:effectRef idx="2">
+            <a:schemeClr val="accent1"/>
+          </a:effectRef>
+          <a:fontRef idx="minor">
+            <a:schemeClr val="lt1"/>
+          </a:fontRef>
+        </p:style>
+        <p:txBody>
+          <a:bodyPr rtlCol="0" anchor="ctr"/>
+          <a:lstStyle/>
+          <a:p>
+            <a:pPr algn="ctr"/>
+          </a:p>
+        </p:txBody>
+      </p:sp>
+      <p:sp>
+        <p:nvSpPr>
+          <p:cNvPr id="12" name="TextBox 11"/>
+          <p:cNvSpPr txBox="1"/>
+          <p:nvPr/>
+        </p:nvSpPr>
+        <p:spPr>
+          <a:xfrm>
+            <a:off x="1005840" y="4681728"/>
+            <a:ext cx="6675120" cy="365760"/>
+          </a:xfrm>
+          <a:prstGeom prst="rect">
+            <a:avLst/>
+          </a:prstGeom>
+          <a:noFill/>
+        </p:spPr>
+        <p:txBody>
+          <a:bodyPr wrap="square" anchor="t">
+            <a:spAutoFit/>
+          </a:bodyPr>
+          <a:lstStyle/>
+          <a:p>
+            <a:pPr algn="l"/>
+            <a:r>
+              <a:rPr sz="1500" b="1">
+                <a:solidFill>
+                  <a:srgbClr val="0F172A"/>
+                </a:solidFill>
+                <a:latin typeface="Noto Sans CJK SC"/>
+                <a:ea typeface="Noto Sans CJK SC"/>
+                <a:cs typeface="Noto Sans CJK SC"/>
+              </a:rPr>
+              <a:t>3. 自动对账核销</a:t>
+            </a:r>
+          </a:p>
+        </p:txBody>
+      </p:sp>
+      <p:sp>
+        <p:nvSpPr>
+          <p:cNvPr id="13" name="TextBox 12"/>
+          <p:cNvSpPr txBox="1"/>
+          <p:nvPr/>
+        </p:nvSpPr>
+        <p:spPr>
+          <a:xfrm>
+            <a:off x="1005840" y="5029200"/>
+            <a:ext cx="6675120" cy="457200"/>
+          </a:xfrm>
+          <a:prstGeom prst="rect">
+            <a:avLst/>
+          </a:prstGeom>
+          <a:noFill/>
+        </p:spPr>
+        <p:txBody>
+          <a:bodyPr wrap="square" anchor="t">
+            <a:spAutoFit/>
+          </a:bodyPr>
+          <a:lstStyle/>
+          <a:p>
+            <a:pPr algn="l"/>
+            <a:r>
+              <a:rPr sz="1150" b="0">
+                <a:solidFill>
+                  <a:srgbClr val="64748B"/>
+                </a:solidFill>
+                <a:latin typeface="Noto Sans CJK SC"/>
+                <a:ea typeface="Noto Sans CJK SC"/>
+                <a:cs typeface="Noto Sans CJK SC"/>
+              </a:rPr>
+              <a:t>应收 vs 实收、费用与汇兑损失自动匹配核销，并可导出对账单。</a:t>
+            </a:r>
+          </a:p>
+        </p:txBody>
+      </p:sp>
+      <p:sp>
+        <p:nvSpPr>
+          <p:cNvPr id="14" name="Rounded Rectangle 13"/>
+          <p:cNvSpPr/>
+          <p:nvPr/>
+        </p:nvSpPr>
+        <p:spPr>
+          <a:xfrm>
+            <a:off x="822960" y="5669279"/>
+            <a:ext cx="7040880" cy="932688"/>
+          </a:xfrm>
+          <a:prstGeom prst="roundRect">
+            <a:avLst/>
+          </a:prstGeom>
+          <a:solidFill>
+            <a:srgbClr val="F1F5F9"/>
+          </a:solidFill>
+          <a:ln>
+            <a:noFill/>
+          </a:ln>
+          <a:effectLst/>
+        </p:spPr>
+        <p:style>
+          <a:lnRef idx="1">
+            <a:schemeClr val="accent1"/>
+          </a:lnRef>
+          <a:fillRef idx="3">
+            <a:schemeClr val="accent1"/>
+          </a:fillRef>
+          <a:effectRef idx="2">
+            <a:schemeClr val="accent1"/>
+          </a:effectRef>
+          <a:fontRef idx="minor">
+            <a:schemeClr val="lt1"/>
+          </a:fontRef>
+        </p:style>
+        <p:txBody>
+          <a:bodyPr rtlCol="0" anchor="ctr"/>
+          <a:lstStyle/>
+          <a:p>
+            <a:pPr algn="ctr"/>
+          </a:p>
+        </p:txBody>
+      </p:sp>
+      <p:sp>
+        <p:nvSpPr>
+          <p:cNvPr id="15" name="TextBox 14"/>
+          <p:cNvSpPr txBox="1"/>
+          <p:nvPr/>
+        </p:nvSpPr>
+        <p:spPr>
+          <a:xfrm>
+            <a:off x="1005840" y="5779007"/>
+            <a:ext cx="6675120" cy="365760"/>
+          </a:xfrm>
+          <a:prstGeom prst="rect">
+            <a:avLst/>
+          </a:prstGeom>
+          <a:noFill/>
+        </p:spPr>
+        <p:txBody>
+          <a:bodyPr wrap="square" anchor="t">
+            <a:spAutoFit/>
+          </a:bodyPr>
+          <a:lstStyle/>
+          <a:p>
+            <a:pPr algn="l"/>
+            <a:r>
+              <a:rPr sz="1500" b="1">
+                <a:solidFill>
+                  <a:srgbClr val="0F172A"/>
+                </a:solidFill>
+                <a:latin typeface="Noto Sans CJK SC"/>
+                <a:ea typeface="Noto Sans CJK SC"/>
+                <a:cs typeface="Noto Sans CJK SC"/>
+              </a:rPr>
+              <a:t>4. 结算链路透明</a:t>
+            </a:r>
+          </a:p>
+        </p:txBody>
+      </p:sp>
+      <p:sp>
+        <p:nvSpPr>
+          <p:cNvPr id="16" name="TextBox 15"/>
+          <p:cNvSpPr txBox="1"/>
+          <p:nvPr/>
+        </p:nvSpPr>
+        <p:spPr>
+          <a:xfrm>
+            <a:off x="1005840" y="6126479"/>
+            <a:ext cx="6675120" cy="457200"/>
+          </a:xfrm>
+          <a:prstGeom prst="rect">
+            <a:avLst/>
+          </a:prstGeom>
+          <a:noFill/>
+        </p:spPr>
+        <p:txBody>
+          <a:bodyPr wrap="square" anchor="t">
+            <a:spAutoFit/>
+          </a:bodyPr>
+          <a:lstStyle/>
+          <a:p>
+            <a:pPr algn="l"/>
+            <a:r>
+              <a:rPr sz="1150" b="0">
+                <a:solidFill>
+                  <a:srgbClr val="64748B"/>
+                </a:solidFill>
+                <a:latin typeface="Noto Sans CJK SC"/>
+                <a:ea typeface="Noto Sans CJK SC"/>
+                <a:cs typeface="Noto Sans CJK SC"/>
+              </a:rPr>
+              <a:t>结算全程可追踪；平台只做透明化追踪，不经手资金。</a:t>
+            </a:r>
+          </a:p>
+        </p:txBody>
+      </p:sp>
+      <p:sp>
+        <p:nvSpPr>
+          <p:cNvPr id="17" name="Rounded Rectangle 16"/>
+          <p:cNvSpPr/>
+          <p:nvPr/>
+        </p:nvSpPr>
+        <p:spPr>
+          <a:xfrm>
+            <a:off x="8138160" y="1508760"/>
+            <a:ext cx="3246120" cy="4937760"/>
+          </a:xfrm>
+          <a:prstGeom prst="roundRect">
+            <a:avLst/>
+          </a:prstGeom>
+          <a:solidFill>
+            <a:srgbClr val="F1F5F9"/>
+          </a:solidFill>
+          <a:ln>
+            <a:noFill/>
+          </a:ln>
+          <a:effectLst/>
+        </p:spPr>
+        <p:style>
+          <a:lnRef idx="1">
+            <a:schemeClr val="accent1"/>
+          </a:lnRef>
+          <a:fillRef idx="3">
+            <a:schemeClr val="accent1"/>
+          </a:fillRef>
+          <a:effectRef idx="2">
+            <a:schemeClr val="accent1"/>
+          </a:effectRef>
+          <a:fontRef idx="minor">
+            <a:schemeClr val="lt1"/>
+          </a:fontRef>
+        </p:style>
+        <p:txBody>
+          <a:bodyPr rtlCol="0" anchor="ctr"/>
+          <a:lstStyle/>
+          <a:p>
+            <a:pPr algn="ctr"/>
+          </a:p>
+        </p:txBody>
+      </p:sp>
+      <p:pic>
+        <p:nvPicPr>
+          <p:cNvPr id="18" name="Picture 17" descr="feat-reconcile.png"/>
+          <p:cNvPicPr>
+            <a:picLocks noChangeAspect="1"/>
+          </p:cNvPicPr>
+          <p:nvPr/>
+        </p:nvPicPr>
+        <p:blipFill>
+          <a:blip r:embed="rId2"/>
+          <a:stretch>
+            <a:fillRect/>
+          </a:stretch>
+        </p:blipFill>
+        <p:spPr>
+          <a:xfrm>
+            <a:off x="8275320" y="1645920"/>
+            <a:ext cx="1588731" cy="4663440"/>
+          </a:xfrm>
+          <a:prstGeom prst="rect">
+            <a:avLst/>
+          </a:prstGeom>
+        </p:spPr>
+      </p:pic>
+      <p:sp>
+        <p:nvSpPr>
+          <p:cNvPr id="19" name="TextBox 18"/>
+          <p:cNvSpPr txBox="1"/>
+          <p:nvPr/>
+        </p:nvSpPr>
+        <p:spPr>
+          <a:xfrm>
+            <a:off x="8138160" y="6510528"/>
+            <a:ext cx="3246120" cy="274320"/>
+          </a:xfrm>
+          <a:prstGeom prst="rect">
+            <a:avLst/>
+          </a:prstGeom>
+          <a:noFill/>
+        </p:spPr>
+        <p:txBody>
+          <a:bodyPr wrap="square" anchor="t">
+            <a:spAutoFit/>
+          </a:bodyPr>
+          <a:lstStyle/>
+          <a:p>
+            <a:pPr algn="ctr"/>
+            <a:r>
+              <a:rPr sz="900" b="0">
+                <a:solidFill>
+                  <a:srgbClr val="64748B"/>
+                </a:solidFill>
+                <a:latin typeface="Noto Sans CJK SC"/>
+                <a:ea typeface="Noto Sans CJK SC"/>
+                <a:cs typeface="Noto Sans CJK SC"/>
+              </a:rPr>
+              <a:t>产品界面（现场可实测）</a:t>
+            </a:r>
+          </a:p>
+        </p:txBody>
+      </p:sp>
+    </p:spTree>
+  </p:cSld>
+  <p:clrMapOvr>
+    <a:masterClrMapping/>
+  </p:clrMapOvr>
+</p:sld>
+</file>
+
+<file path=ppt/slides/slide9.xml><?xml version="1.0" encoding="utf-8"?>
 <p:sld xmlns:a="http://schemas.openxmlformats.org/drawingml/2006/main" xmlns:p="http://schemas.openxmlformats.org/presentationml/2006/main" xmlns:r="http://schemas.openxmlformats.org/officeDocument/2006/relationships">
   <p:cSld>
     <p:bg>
@@ -10338,204 +11583,6 @@
 </p:sld>
 </file>
 
-<file path=ppt/slides/slide9.xml><?xml version="1.0" encoding="utf-8"?>
-<p:sld xmlns:a="http://schemas.openxmlformats.org/drawingml/2006/main" xmlns:p="http://schemas.openxmlformats.org/presentationml/2006/main" xmlns:r="http://schemas.openxmlformats.org/officeDocument/2006/relationships">
-  <p:cSld>
-    <p:bg>
-      <p:bgPr>
-        <a:solidFill>
-          <a:srgbClr val="FFFFFF"/>
-        </a:solidFill>
-        <a:effectLst/>
-      </p:bgPr>
-    </p:bg>
-    <p:spTree>
-      <p:nvGrpSpPr>
-        <p:cNvPr id="1" name=""/>
-        <p:cNvGrpSpPr/>
-        <p:nvPr/>
-      </p:nvGrpSpPr>
-      <p:grpSpPr/>
-      <p:sp>
-        <p:nvSpPr>
-          <p:cNvPr id="2" name="TextBox 1"/>
-          <p:cNvSpPr txBox="1"/>
-          <p:nvPr/>
-        </p:nvSpPr>
-        <p:spPr>
-          <a:xfrm>
-            <a:off x="822960" y="502920"/>
-            <a:ext cx="10515600" cy="365760"/>
-          </a:xfrm>
-          <a:prstGeom prst="rect">
-            <a:avLst/>
-          </a:prstGeom>
-          <a:noFill/>
-        </p:spPr>
-        <p:txBody>
-          <a:bodyPr wrap="square" anchor="t">
-            <a:spAutoFit/>
-          </a:bodyPr>
-          <a:lstStyle/>
-          <a:p>
-            <a:pPr algn="l"/>
-            <a:r>
-              <a:rPr sz="1400" b="1">
-                <a:solidFill>
-                  <a:srgbClr val="0F766E"/>
-                </a:solidFill>
-                <a:latin typeface="Noto Sans CJK SC"/>
-                <a:ea typeface="Noto Sans CJK SC"/>
-                <a:cs typeface="Noto Sans CJK SC"/>
-              </a:rPr>
-              <a:t>现场可以看到什么</a:t>
-            </a:r>
-          </a:p>
-        </p:txBody>
-      </p:sp>
-      <p:sp>
-        <p:nvSpPr>
-          <p:cNvPr id="3" name="TextBox 2"/>
-          <p:cNvSpPr txBox="1"/>
-          <p:nvPr/>
-        </p:nvSpPr>
-        <p:spPr>
-          <a:xfrm>
-            <a:off x="822960" y="868680"/>
-            <a:ext cx="10515600" cy="914400"/>
-          </a:xfrm>
-          <a:prstGeom prst="rect">
-            <a:avLst/>
-          </a:prstGeom>
-          <a:noFill/>
-        </p:spPr>
-        <p:txBody>
-          <a:bodyPr wrap="square" anchor="t">
-            <a:spAutoFit/>
-          </a:bodyPr>
-          <a:lstStyle/>
-          <a:p>
-            <a:pPr algn="l"/>
-            <a:r>
-              <a:rPr sz="3200" b="1">
-                <a:solidFill>
-                  <a:srgbClr val="0F172A"/>
-                </a:solidFill>
-                <a:latin typeface="Noto Sans CJK SC"/>
-                <a:ea typeface="Noto Sans CJK SC"/>
-                <a:cs typeface="Noto Sans CJK SC"/>
-              </a:rPr>
-              <a:t>现场 Demo：一笔高风险付款的完整拦截</a:t>
-            </a:r>
-          </a:p>
-        </p:txBody>
-      </p:sp>
-      <p:sp>
-        <p:nvSpPr>
-          <p:cNvPr id="4" name="TextBox 3"/>
-          <p:cNvSpPr txBox="1"/>
-          <p:nvPr/>
-        </p:nvSpPr>
-        <p:spPr>
-          <a:xfrm>
-            <a:off x="822960" y="1691640"/>
-            <a:ext cx="10515600" cy="548640"/>
-          </a:xfrm>
-          <a:prstGeom prst="rect">
-            <a:avLst/>
-          </a:prstGeom>
-          <a:noFill/>
-        </p:spPr>
-        <p:txBody>
-          <a:bodyPr wrap="square" anchor="t">
-            <a:spAutoFit/>
-          </a:bodyPr>
-          <a:lstStyle/>
-          <a:p>
-            <a:pPr algn="l"/>
-            <a:r>
-              <a:rPr sz="1500" b="0">
-                <a:solidFill>
-                  <a:srgbClr val="64748B"/>
-                </a:solidFill>
-                <a:latin typeface="Noto Sans CJK SC"/>
-                <a:ea typeface="Noto Sans CJK SC"/>
-                <a:cs typeface="Noto Sans CJK SC"/>
-              </a:rPr>
-              <a:t>现场可运行：新建付款→预检亮红→AI 信号→核实清除→双人放行→生成指令。</a:t>
-            </a:r>
-          </a:p>
-        </p:txBody>
-      </p:sp>
-      <p:pic>
-        <p:nvPicPr>
-          <p:cNvPr id="5" name="Picture 4" descr="demo.png"/>
-          <p:cNvPicPr>
-            <a:picLocks noChangeAspect="1"/>
-          </p:cNvPicPr>
-          <p:nvPr/>
-        </p:nvPicPr>
-        <p:blipFill>
-          <a:blip r:embed="rId2"/>
-          <a:stretch>
-            <a:fillRect/>
-          </a:stretch>
-        </p:blipFill>
-        <p:spPr>
-          <a:xfrm>
-            <a:off x="1234440" y="2286000"/>
-            <a:ext cx="9692640" cy="5452110"/>
-          </a:xfrm>
-          <a:prstGeom prst="rect">
-            <a:avLst/>
-          </a:prstGeom>
-        </p:spPr>
-      </p:pic>
-      <p:sp>
-        <p:nvSpPr>
-          <p:cNvPr id="6" name="TextBox 5"/>
-          <p:cNvSpPr txBox="1"/>
-          <p:nvPr/>
-        </p:nvSpPr>
-        <p:spPr>
-          <a:xfrm>
-            <a:off x="822960" y="6309360"/>
-            <a:ext cx="10515600" cy="365760"/>
-          </a:xfrm>
-          <a:prstGeom prst="rect">
-            <a:avLst/>
-          </a:prstGeom>
-          <a:noFill/>
-        </p:spPr>
-        <p:txBody>
-          <a:bodyPr wrap="square" anchor="t">
-            <a:spAutoFit/>
-          </a:bodyPr>
-          <a:lstStyle/>
-          <a:p>
-            <a:pPr algn="l"/>
-            <a:r>
-              <a:rPr sz="1100" b="0">
-                <a:solidFill>
-                  <a:srgbClr val="64748B"/>
-                </a:solidFill>
-                <a:latin typeface="Noto Sans CJK SC"/>
-                <a:ea typeface="Noto Sans CJK SC"/>
-                <a:cs typeface="Noto Sans CJK SC"/>
-              </a:rPr>
-              <a:t>现场可运行、可演示核心功能——不是 PPT 概念。可扫码访问在线应用实测。</a:t>
-            </a:r>
-          </a:p>
-        </p:txBody>
-      </p:sp>
-    </p:spTree>
-  </p:cSld>
-  <p:clrMapOvr>
-    <a:masterClrMapping/>
-  </p:clrMapOvr>
-</p:sld>
-</file>
-
 <file path=ppt/theme/theme1.xml><?xml version="1.0" encoding="utf-8"?>
 <a:theme xmlns:a="http://schemas.openxmlformats.org/drawingml/2006/main" name="Office Theme">
   <a:themeElements>

--- a/public/FlowGuard-Hackathon-Pitch.pptx
+++ b/public/FlowGuard-Hackathon-Pitch.pptx
@@ -3393,33 +3393,90 @@
           </a:p>
         </p:txBody>
       </p:sp>
-      <p:pic>
-        <p:nvPicPr>
-          <p:cNvPr id="5" name="Picture 4" descr="demo.png"/>
-          <p:cNvPicPr>
-            <a:picLocks noChangeAspect="1"/>
-          </p:cNvPicPr>
-          <p:nvPr/>
-        </p:nvPicPr>
-        <p:blipFill>
-          <a:blip r:embed="rId2"/>
-          <a:stretch>
-            <a:fillRect/>
-          </a:stretch>
-        </p:blipFill>
+      <p:sp>
+        <p:nvSpPr>
+          <p:cNvPr id="5" name="Rounded Rectangle 4"/>
+          <p:cNvSpPr/>
+          <p:nvPr/>
+        </p:nvSpPr>
         <p:spPr>
           <a:xfrm>
             <a:off x="1234440" y="2286000"/>
-            <a:ext cx="9692640" cy="5452110"/>
-          </a:xfrm>
-          <a:prstGeom prst="rect">
-            <a:avLst/>
-          </a:prstGeom>
-        </p:spPr>
-      </p:pic>
+            <a:ext cx="9692640" cy="3931920"/>
+          </a:xfrm>
+          <a:prstGeom prst="roundRect">
+            <a:avLst/>
+          </a:prstGeom>
+          <a:solidFill>
+            <a:srgbClr val="F1F5F9"/>
+          </a:solidFill>
+          <a:ln>
+            <a:noFill/>
+          </a:ln>
+          <a:effectLst/>
+        </p:spPr>
+        <p:style>
+          <a:lnRef idx="1">
+            <a:schemeClr val="accent1"/>
+          </a:lnRef>
+          <a:fillRef idx="3">
+            <a:schemeClr val="accent1"/>
+          </a:fillRef>
+          <a:effectRef idx="2">
+            <a:schemeClr val="accent1"/>
+          </a:effectRef>
+          <a:fontRef idx="minor">
+            <a:schemeClr val="lt1"/>
+          </a:fontRef>
+        </p:style>
+        <p:txBody>
+          <a:bodyPr rtlCol="0" anchor="ctr"/>
+          <a:lstStyle/>
+          <a:p>
+            <a:pPr algn="ctr"/>
+          </a:p>
+        </p:txBody>
+      </p:sp>
       <p:sp>
         <p:nvSpPr>
           <p:cNvPr id="6" name="TextBox 5"/>
+          <p:cNvSpPr txBox="1"/>
+          <p:nvPr/>
+        </p:nvSpPr>
+        <p:spPr>
+          <a:xfrm>
+            <a:off x="1234440" y="4114800"/>
+            <a:ext cx="9692640" cy="457200"/>
+          </a:xfrm>
+          <a:prstGeom prst="rect">
+            <a:avLst/>
+          </a:prstGeom>
+          <a:noFill/>
+        </p:spPr>
+        <p:txBody>
+          <a:bodyPr wrap="square" anchor="t">
+            <a:spAutoFit/>
+          </a:bodyPr>
+          <a:lstStyle/>
+          <a:p>
+            <a:pPr algn="ctr"/>
+            <a:r>
+              <a:rPr sz="1400" b="0">
+                <a:solidFill>
+                  <a:srgbClr val="64748B"/>
+                </a:solidFill>
+                <a:latin typeface="Noto Sans CJK SC"/>
+                <a:ea typeface="Noto Sans CJK SC"/>
+                <a:cs typeface="Noto Sans CJK SC"/>
+              </a:rPr>
+              <a:t>在此处粘贴截图</a:t>
+            </a:r>
+          </a:p>
+        </p:txBody>
+      </p:sp>
+      <p:sp>
+        <p:nvSpPr>
+          <p:cNvPr id="7" name="TextBox 6"/>
           <p:cNvSpPr txBox="1"/>
           <p:nvPr/>
         </p:nvSpPr>
@@ -9471,30 +9528,43 @@
           </a:p>
         </p:txBody>
       </p:sp>
-      <p:pic>
-        <p:nvPicPr>
-          <p:cNvPr id="18" name="Picture 17" descr="feat-precheck.png"/>
-          <p:cNvPicPr>
-            <a:picLocks noChangeAspect="1"/>
-          </p:cNvPicPr>
-          <p:nvPr/>
-        </p:nvPicPr>
-        <p:blipFill>
-          <a:blip r:embed="rId2"/>
-          <a:stretch>
-            <a:fillRect/>
-          </a:stretch>
-        </p:blipFill>
-        <p:spPr>
-          <a:xfrm>
-            <a:off x="8275320" y="1645920"/>
-            <a:ext cx="1135179" cy="4663440"/>
-          </a:xfrm>
-          <a:prstGeom prst="rect">
-            <a:avLst/>
-          </a:prstGeom>
-        </p:spPr>
-      </p:pic>
+      <p:sp>
+        <p:nvSpPr>
+          <p:cNvPr id="18" name="TextBox 17"/>
+          <p:cNvSpPr txBox="1"/>
+          <p:nvPr/>
+        </p:nvSpPr>
+        <p:spPr>
+          <a:xfrm>
+            <a:off x="8138160" y="3794760"/>
+            <a:ext cx="3246120" cy="365760"/>
+          </a:xfrm>
+          <a:prstGeom prst="rect">
+            <a:avLst/>
+          </a:prstGeom>
+          <a:noFill/>
+        </p:spPr>
+        <p:txBody>
+          <a:bodyPr wrap="square" anchor="t">
+            <a:spAutoFit/>
+          </a:bodyPr>
+          <a:lstStyle/>
+          <a:p>
+            <a:pPr algn="ctr"/>
+            <a:r>
+              <a:rPr sz="1100" b="0">
+                <a:solidFill>
+                  <a:srgbClr val="64748B"/>
+                </a:solidFill>
+                <a:latin typeface="Noto Sans CJK SC"/>
+                <a:ea typeface="Noto Sans CJK SC"/>
+                <a:cs typeface="Noto Sans CJK SC"/>
+              </a:rPr>
+              <a:t>在此处粘贴截图</a:t>
+            </a:r>
+          </a:p>
+        </p:txBody>
+      </p:sp>
       <p:sp>
         <p:nvSpPr>
           <p:cNvPr id="19" name="TextBox 18"/>
@@ -10185,30 +10255,43 @@
           </a:p>
         </p:txBody>
       </p:sp>
-      <p:pic>
-        <p:nvPicPr>
-          <p:cNvPr id="18" name="Picture 17" descr="feat-route.png"/>
-          <p:cNvPicPr>
-            <a:picLocks noChangeAspect="1"/>
-          </p:cNvPicPr>
-          <p:nvPr/>
-        </p:nvPicPr>
-        <p:blipFill>
-          <a:blip r:embed="rId2"/>
-          <a:stretch>
-            <a:fillRect/>
-          </a:stretch>
-        </p:blipFill>
-        <p:spPr>
-          <a:xfrm>
-            <a:off x="8275320" y="1645920"/>
-            <a:ext cx="1457325" cy="4663440"/>
-          </a:xfrm>
-          <a:prstGeom prst="rect">
-            <a:avLst/>
-          </a:prstGeom>
-        </p:spPr>
-      </p:pic>
+      <p:sp>
+        <p:nvSpPr>
+          <p:cNvPr id="18" name="TextBox 17"/>
+          <p:cNvSpPr txBox="1"/>
+          <p:nvPr/>
+        </p:nvSpPr>
+        <p:spPr>
+          <a:xfrm>
+            <a:off x="8138160" y="3794760"/>
+            <a:ext cx="3246120" cy="365760"/>
+          </a:xfrm>
+          <a:prstGeom prst="rect">
+            <a:avLst/>
+          </a:prstGeom>
+          <a:noFill/>
+        </p:spPr>
+        <p:txBody>
+          <a:bodyPr wrap="square" anchor="t">
+            <a:spAutoFit/>
+          </a:bodyPr>
+          <a:lstStyle/>
+          <a:p>
+            <a:pPr algn="ctr"/>
+            <a:r>
+              <a:rPr sz="1100" b="0">
+                <a:solidFill>
+                  <a:srgbClr val="64748B"/>
+                </a:solidFill>
+                <a:latin typeface="Noto Sans CJK SC"/>
+                <a:ea typeface="Noto Sans CJK SC"/>
+                <a:cs typeface="Noto Sans CJK SC"/>
+              </a:rPr>
+              <a:t>在此处粘贴截图</a:t>
+            </a:r>
+          </a:p>
+        </p:txBody>
+      </p:sp>
       <p:sp>
         <p:nvSpPr>
           <p:cNvPr id="19" name="TextBox 18"/>
@@ -10899,30 +10982,43 @@
           </a:p>
         </p:txBody>
       </p:sp>
-      <p:pic>
-        <p:nvPicPr>
-          <p:cNvPr id="18" name="Picture 17" descr="feat-reconcile.png"/>
-          <p:cNvPicPr>
-            <a:picLocks noChangeAspect="1"/>
-          </p:cNvPicPr>
-          <p:nvPr/>
-        </p:nvPicPr>
-        <p:blipFill>
-          <a:blip r:embed="rId2"/>
-          <a:stretch>
-            <a:fillRect/>
-          </a:stretch>
-        </p:blipFill>
-        <p:spPr>
-          <a:xfrm>
-            <a:off x="8275320" y="1645920"/>
-            <a:ext cx="1588731" cy="4663440"/>
-          </a:xfrm>
-          <a:prstGeom prst="rect">
-            <a:avLst/>
-          </a:prstGeom>
-        </p:spPr>
-      </p:pic>
+      <p:sp>
+        <p:nvSpPr>
+          <p:cNvPr id="18" name="TextBox 17"/>
+          <p:cNvSpPr txBox="1"/>
+          <p:nvPr/>
+        </p:nvSpPr>
+        <p:spPr>
+          <a:xfrm>
+            <a:off x="8138160" y="3794760"/>
+            <a:ext cx="3246120" cy="365760"/>
+          </a:xfrm>
+          <a:prstGeom prst="rect">
+            <a:avLst/>
+          </a:prstGeom>
+          <a:noFill/>
+        </p:spPr>
+        <p:txBody>
+          <a:bodyPr wrap="square" anchor="t">
+            <a:spAutoFit/>
+          </a:bodyPr>
+          <a:lstStyle/>
+          <a:p>
+            <a:pPr algn="ctr"/>
+            <a:r>
+              <a:rPr sz="1100" b="0">
+                <a:solidFill>
+                  <a:srgbClr val="64748B"/>
+                </a:solidFill>
+                <a:latin typeface="Noto Sans CJK SC"/>
+                <a:ea typeface="Noto Sans CJK SC"/>
+                <a:cs typeface="Noto Sans CJK SC"/>
+              </a:rPr>
+              <a:t>在此处粘贴截图</a:t>
+            </a:r>
+          </a:p>
+        </p:txBody>
+      </p:sp>
       <p:sp>
         <p:nvSpPr>
           <p:cNvPr id="19" name="TextBox 18"/>

--- a/public/FlowGuard-Hackathon-Pitch.pptx
+++ b/public/FlowGuard-Hackathon-Pitch.pptx
@@ -3314,7 +3314,7 @@
                 <a:ea typeface="Noto Sans CJK SC"/>
                 <a:cs typeface="Noto Sans CJK SC"/>
               </a:rPr>
-              <a:t>现场可以看到什么</a:t>
+              <a:t>预录 Demo 视频</a:t>
             </a:r>
           </a:p>
         </p:txBody>
@@ -3351,7 +3351,7 @@
                 <a:ea typeface="Noto Sans CJK SC"/>
                 <a:cs typeface="Noto Sans CJK SC"/>
               </a:rPr>
-              <a:t>现场 Demo：一笔高风险付款的完整拦截</a:t>
+              <a:t>Demo 视频：一笔高风险付款的完整拦截</a:t>
             </a:r>
           </a:p>
         </p:txBody>
@@ -3388,7 +3388,7 @@
                 <a:ea typeface="Noto Sans CJK SC"/>
                 <a:cs typeface="Noto Sans CJK SC"/>
               </a:rPr>
-              <a:t>现场可运行：新建付款→预检亮红→AI 信号→核实清除→双人放行→生成指令。</a:t>
+              <a:t>播放预录 Demo 视频：新建付款→预检亮红→AI 信号→核实清除→双人放行→生成指令。</a:t>
             </a:r>
           </a:p>
         </p:txBody>
@@ -3469,7 +3469,7 @@
                 <a:ea typeface="Noto Sans CJK SC"/>
                 <a:cs typeface="Noto Sans CJK SC"/>
               </a:rPr>
-              <a:t>在此处粘贴截图</a:t>
+              <a:t>在此处放入 Demo 视频</a:t>
             </a:r>
           </a:p>
         </p:txBody>
@@ -3506,7 +3506,7 @@
                 <a:ea typeface="Noto Sans CJK SC"/>
                 <a:cs typeface="Noto Sans CJK SC"/>
               </a:rPr>
-              <a:t>现场可运行、可演示核心功能——不是 PPT 概念。可扫码访问在线应用实测。</a:t>
+              <a:t>预录 Demo 视频、可完整演示核心功能——不是 PPT 概念。可扫码访问在线应用实测。</a:t>
             </a:r>
           </a:p>
         </p:txBody>
@@ -6333,7 +6333,7 @@
                 <a:ea typeface="Noto Sans CJK SC"/>
                 <a:cs typeface="Noto Sans CJK SC"/>
               </a:rPr>
-              <a:t>现场 Demo：你能看到什么</a:t>
+              <a:t>Demo 视频：你能看到什么</a:t>
             </a:r>
           </a:p>
         </p:txBody>

--- a/public/FlowGuard-Hackathon-Pitch.pptx
+++ b/public/FlowGuard-Hackathon-Pitch.pptx
@@ -5389,7 +5389,7 @@
                 <a:ea typeface="Noto Sans CJK SC"/>
                 <a:cs typeface="Noto Sans CJK SC"/>
               </a:rPr>
-              <a:t>今天用 5 分钟讲清 11 件事</a:t>
+              <a:t>今天用 5 分钟讲清这几件事</a:t>
             </a:r>
           </a:p>
         </p:txBody>
@@ -5861,7 +5861,7 @@
                 <a:ea typeface="Noto Sans CJK SC"/>
                 <a:cs typeface="Noto Sans CJK SC"/>
               </a:rPr>
-              <a:t>核心功能①：收款方信息预检-AI Agent</a:t>
+              <a:t>三大核心功能：预检 · 智能路由 · 对账看板</a:t>
             </a:r>
           </a:p>
         </p:txBody>
@@ -5979,7 +5979,7 @@
                 <a:ea typeface="Noto Sans CJK SC"/>
                 <a:cs typeface="Noto Sans CJK SC"/>
               </a:rPr>
-              <a:t>核心功能②：多路径智能路由推荐引擎</a:t>
+              <a:t>AI 覆盖一览：四痛点→四能力</a:t>
             </a:r>
           </a:p>
         </p:txBody>
@@ -6097,7 +6097,7 @@
                 <a:ea typeface="Noto Sans CJK SC"/>
                 <a:cs typeface="Noto Sans CJK SC"/>
               </a:rPr>
-              <a:t>核心功能③：统一结算状态与对账看板</a:t>
+              <a:t>Demo 视频：你能看到什么</a:t>
             </a:r>
           </a:p>
         </p:txBody>
@@ -6215,7 +6215,7 @@
                 <a:ea typeface="Noto Sans CJK SC"/>
                 <a:cs typeface="Noto Sans CJK SC"/>
               </a:rPr>
-              <a:t>AI 覆盖一览：四痛点→四能力</a:t>
+              <a:t>技术架构：怎么实现的</a:t>
             </a:r>
           </a:p>
         </p:txBody>
@@ -6333,7 +6333,7 @@
                 <a:ea typeface="Noto Sans CJK SC"/>
                 <a:cs typeface="Noto Sans CJK SC"/>
               </a:rPr>
-              <a:t>Demo 视频：你能看到什么</a:t>
+              <a:t>合规边界：我们不碰什么（关键）</a:t>
             </a:r>
           </a:p>
         </p:txBody>
@@ -6428,242 +6428,6 @@
         <p:spPr>
           <a:xfrm>
             <a:off x="8686800" y="4983480"/>
-            <a:ext cx="2651760" cy="731520"/>
-          </a:xfrm>
-          <a:prstGeom prst="rect">
-            <a:avLst/>
-          </a:prstGeom>
-          <a:noFill/>
-        </p:spPr>
-        <p:txBody>
-          <a:bodyPr wrap="square" anchor="t">
-            <a:spAutoFit/>
-          </a:bodyPr>
-          <a:lstStyle/>
-          <a:p>
-            <a:pPr algn="l"/>
-            <a:r>
-              <a:rPr sz="1300" b="1">
-                <a:solidFill>
-                  <a:srgbClr val="0F172A"/>
-                </a:solidFill>
-                <a:latin typeface="Noto Sans CJK SC"/>
-                <a:ea typeface="Noto Sans CJK SC"/>
-                <a:cs typeface="Noto Sans CJK SC"/>
-              </a:rPr>
-              <a:t>技术架构：怎么实现的</a:t>
-            </a:r>
-          </a:p>
-        </p:txBody>
-      </p:sp>
-      <p:sp>
-        <p:nvSpPr>
-          <p:cNvPr id="31" name="Rounded Rectangle 30"/>
-          <p:cNvSpPr/>
-          <p:nvPr/>
-        </p:nvSpPr>
-        <p:spPr>
-          <a:xfrm>
-            <a:off x="822960" y="6035040"/>
-            <a:ext cx="3429000" cy="1051560"/>
-          </a:xfrm>
-          <a:prstGeom prst="roundRect">
-            <a:avLst/>
-          </a:prstGeom>
-          <a:solidFill>
-            <a:srgbClr val="F1F5F9"/>
-          </a:solidFill>
-          <a:ln>
-            <a:noFill/>
-          </a:ln>
-          <a:effectLst/>
-        </p:spPr>
-        <p:style>
-          <a:lnRef idx="1">
-            <a:schemeClr val="accent1"/>
-          </a:lnRef>
-          <a:fillRef idx="3">
-            <a:schemeClr val="accent1"/>
-          </a:fillRef>
-          <a:effectRef idx="2">
-            <a:schemeClr val="accent1"/>
-          </a:effectRef>
-          <a:fontRef idx="minor">
-            <a:schemeClr val="lt1"/>
-          </a:fontRef>
-        </p:style>
-        <p:txBody>
-          <a:bodyPr rtlCol="0" anchor="ctr"/>
-          <a:lstStyle/>
-          <a:p>
-            <a:pPr algn="ctr"/>
-          </a:p>
-        </p:txBody>
-      </p:sp>
-      <p:sp>
-        <p:nvSpPr>
-          <p:cNvPr id="32" name="TextBox 31"/>
-          <p:cNvSpPr txBox="1"/>
-          <p:nvPr/>
-        </p:nvSpPr>
-        <p:spPr>
-          <a:xfrm>
-            <a:off x="960120" y="6144768"/>
-            <a:ext cx="457200" cy="457200"/>
-          </a:xfrm>
-          <a:prstGeom prst="rect">
-            <a:avLst/>
-          </a:prstGeom>
-          <a:noFill/>
-        </p:spPr>
-        <p:txBody>
-          <a:bodyPr wrap="square" anchor="t">
-            <a:spAutoFit/>
-          </a:bodyPr>
-          <a:lstStyle/>
-          <a:p>
-            <a:pPr algn="l"/>
-            <a:r>
-              <a:rPr sz="1800" b="1">
-                <a:solidFill>
-                  <a:srgbClr val="0F766E"/>
-                </a:solidFill>
-                <a:latin typeface="Noto Sans CJK SC"/>
-                <a:ea typeface="Noto Sans CJK SC"/>
-                <a:cs typeface="Noto Sans CJK SC"/>
-              </a:rPr>
-              <a:t>10</a:t>
-            </a:r>
-          </a:p>
-        </p:txBody>
-      </p:sp>
-      <p:sp>
-        <p:nvSpPr>
-          <p:cNvPr id="33" name="TextBox 32"/>
-          <p:cNvSpPr txBox="1"/>
-          <p:nvPr/>
-        </p:nvSpPr>
-        <p:spPr>
-          <a:xfrm>
-            <a:off x="1463040" y="6217920"/>
-            <a:ext cx="2651760" cy="731520"/>
-          </a:xfrm>
-          <a:prstGeom prst="rect">
-            <a:avLst/>
-          </a:prstGeom>
-          <a:noFill/>
-        </p:spPr>
-        <p:txBody>
-          <a:bodyPr wrap="square" anchor="t">
-            <a:spAutoFit/>
-          </a:bodyPr>
-          <a:lstStyle/>
-          <a:p>
-            <a:pPr algn="l"/>
-            <a:r>
-              <a:rPr sz="1300" b="1">
-                <a:solidFill>
-                  <a:srgbClr val="0F172A"/>
-                </a:solidFill>
-                <a:latin typeface="Noto Sans CJK SC"/>
-                <a:ea typeface="Noto Sans CJK SC"/>
-                <a:cs typeface="Noto Sans CJK SC"/>
-              </a:rPr>
-              <a:t>合规边界：我们不碰什么（关键）</a:t>
-            </a:r>
-          </a:p>
-        </p:txBody>
-      </p:sp>
-      <p:sp>
-        <p:nvSpPr>
-          <p:cNvPr id="34" name="Rounded Rectangle 33"/>
-          <p:cNvSpPr/>
-          <p:nvPr/>
-        </p:nvSpPr>
-        <p:spPr>
-          <a:xfrm>
-            <a:off x="4434840" y="6035040"/>
-            <a:ext cx="3429000" cy="1051560"/>
-          </a:xfrm>
-          <a:prstGeom prst="roundRect">
-            <a:avLst/>
-          </a:prstGeom>
-          <a:solidFill>
-            <a:srgbClr val="F1F5F9"/>
-          </a:solidFill>
-          <a:ln>
-            <a:noFill/>
-          </a:ln>
-          <a:effectLst/>
-        </p:spPr>
-        <p:style>
-          <a:lnRef idx="1">
-            <a:schemeClr val="accent1"/>
-          </a:lnRef>
-          <a:fillRef idx="3">
-            <a:schemeClr val="accent1"/>
-          </a:fillRef>
-          <a:effectRef idx="2">
-            <a:schemeClr val="accent1"/>
-          </a:effectRef>
-          <a:fontRef idx="minor">
-            <a:schemeClr val="lt1"/>
-          </a:fontRef>
-        </p:style>
-        <p:txBody>
-          <a:bodyPr rtlCol="0" anchor="ctr"/>
-          <a:lstStyle/>
-          <a:p>
-            <a:pPr algn="ctr"/>
-          </a:p>
-        </p:txBody>
-      </p:sp>
-      <p:sp>
-        <p:nvSpPr>
-          <p:cNvPr id="35" name="TextBox 34"/>
-          <p:cNvSpPr txBox="1"/>
-          <p:nvPr/>
-        </p:nvSpPr>
-        <p:spPr>
-          <a:xfrm>
-            <a:off x="4572000" y="6144768"/>
-            <a:ext cx="457200" cy="457200"/>
-          </a:xfrm>
-          <a:prstGeom prst="rect">
-            <a:avLst/>
-          </a:prstGeom>
-          <a:noFill/>
-        </p:spPr>
-        <p:txBody>
-          <a:bodyPr wrap="square" anchor="t">
-            <a:spAutoFit/>
-          </a:bodyPr>
-          <a:lstStyle/>
-          <a:p>
-            <a:pPr algn="l"/>
-            <a:r>
-              <a:rPr sz="1800" b="1">
-                <a:solidFill>
-                  <a:srgbClr val="0F766E"/>
-                </a:solidFill>
-                <a:latin typeface="Noto Sans CJK SC"/>
-                <a:ea typeface="Noto Sans CJK SC"/>
-                <a:cs typeface="Noto Sans CJK SC"/>
-              </a:rPr>
-              <a:t>11</a:t>
-            </a:r>
-          </a:p>
-        </p:txBody>
-      </p:sp>
-      <p:sp>
-        <p:nvSpPr>
-          <p:cNvPr id="36" name="TextBox 35"/>
-          <p:cNvSpPr txBox="1"/>
-          <p:nvPr/>
-        </p:nvSpPr>
-        <p:spPr>
-          <a:xfrm>
-            <a:off x="5074920" y="6217920"/>
             <a:ext cx="2651760" cy="731520"/>
           </a:xfrm>
           <a:prstGeom prst="rect">

--- a/public/FlowGuard-Hackathon-Pitch.pptx
+++ b/public/FlowGuard-Hackathon-Pitch.pptx
@@ -9292,43 +9292,39 @@
           </a:p>
         </p:txBody>
       </p:sp>
-      <p:sp>
-        <p:nvSpPr>
-          <p:cNvPr id="18" name="TextBox 17"/>
-          <p:cNvSpPr txBox="1"/>
-          <p:nvPr/>
-        </p:nvSpPr>
-        <p:spPr>
-          <a:xfrm>
-            <a:off x="8138160" y="3794760"/>
-            <a:ext cx="3246120" cy="365760"/>
-          </a:xfrm>
-          <a:prstGeom prst="rect">
-            <a:avLst/>
-          </a:prstGeom>
-          <a:noFill/>
-        </p:spPr>
-        <p:txBody>
-          <a:bodyPr wrap="square" anchor="t">
-            <a:spAutoFit/>
-          </a:bodyPr>
-          <a:lstStyle/>
-          <a:p>
-            <a:pPr algn="ctr"/>
-            <a:r>
-              <a:rPr sz="1100" b="0">
-                <a:solidFill>
-                  <a:srgbClr val="64748B"/>
-                </a:solidFill>
-                <a:latin typeface="Noto Sans CJK SC"/>
-                <a:ea typeface="Noto Sans CJK SC"/>
-                <a:cs typeface="Noto Sans CJK SC"/>
-              </a:rPr>
-              <a:t>在此处粘贴截图</a:t>
-            </a:r>
-          </a:p>
-        </p:txBody>
-      </p:sp>
+      <p:pic>
+        <p:nvPicPr>
+          <p:cNvPr id="18" name="att_0oyps7645nfy4jjj-dac41ff6e4-feat-precheck-demo.mp4">
+            <a:hlinkClick r:id="" action="ppaction://media"/>
+          </p:cNvPr>
+          <p:cNvPicPr>
+            <a:picLocks noChangeAspect="1"/>
+          </p:cNvPicPr>
+          <p:nvPr>
+            <a:videoFile r:link="rId3"/>
+            <p:extLst>
+              <p:ext uri="{DAA4B4D4-6D71-4841-9C94-3DE7FCFB9230}">
+                <p14:media xmlns:p14="http://schemas.microsoft.com/office/powerpoint/2010/main" r:embed="rId2"/>
+              </p:ext>
+            </p:extLst>
+          </p:nvPr>
+        </p:nvPicPr>
+        <p:blipFill>
+          <a:blip r:embed="rId4"/>
+          <a:stretch>
+            <a:fillRect/>
+          </a:stretch>
+        </p:blipFill>
+        <p:spPr>
+          <a:xfrm>
+            <a:off x="8211312" y="1600200"/>
+            <a:ext cx="3108960" cy="4754880"/>
+          </a:xfrm>
+          <a:prstGeom prst="rect">
+            <a:avLst/>
+          </a:prstGeom>
+        </p:spPr>
+      </p:pic>
       <p:sp>
         <p:nvSpPr>
           <p:cNvPr id="19" name="TextBox 18"/>
@@ -9361,7 +9357,7 @@
                 <a:ea typeface="Noto Sans CJK SC"/>
                 <a:cs typeface="Noto Sans CJK SC"/>
               </a:rPr>
-              <a:t>产品界面（现场可实测）</a:t>
+              <a:t>Demo 视频（点击播放）</a:t>
             </a:r>
           </a:p>
         </p:txBody>
@@ -9371,6 +9367,28 @@
   <p:clrMapOvr>
     <a:masterClrMapping/>
   </p:clrMapOvr>
+  <p:timing>
+    <p:tnLst>
+      <p:par>
+        <p:cTn id="1" dur="indefinite" restart="never" nodeType="tmRoot">
+          <p:childTnLst>
+            <p:video>
+              <p:cMediaNode vol="80000">
+                <p:cTn id="2" fill="hold" display="0">
+                  <p:stCondLst>
+                    <p:cond delay="indefinite"/>
+                  </p:stCondLst>
+                </p:cTn>
+                <p:tgtEl>
+                  <p:spTgt spid="18"/>
+                </p:tgtEl>
+              </p:cMediaNode>
+            </p:video>
+          </p:childTnLst>
+        </p:cTn>
+      </p:par>
+    </p:tnLst>
+  </p:timing>
 </p:sld>
 </file>
 

--- a/public/FlowGuard-Hackathon-Pitch.pptx
+++ b/public/FlowGuard-Hackathon-Pitch.pptx
@@ -10037,43 +10037,39 @@
           </a:p>
         </p:txBody>
       </p:sp>
-      <p:sp>
-        <p:nvSpPr>
-          <p:cNvPr id="18" name="TextBox 17"/>
-          <p:cNvSpPr txBox="1"/>
-          <p:nvPr/>
-        </p:nvSpPr>
-        <p:spPr>
-          <a:xfrm>
-            <a:off x="8138160" y="3794760"/>
-            <a:ext cx="3246120" cy="365760"/>
-          </a:xfrm>
-          <a:prstGeom prst="rect">
-            <a:avLst/>
-          </a:prstGeom>
-          <a:noFill/>
-        </p:spPr>
-        <p:txBody>
-          <a:bodyPr wrap="square" anchor="t">
-            <a:spAutoFit/>
-          </a:bodyPr>
-          <a:lstStyle/>
-          <a:p>
-            <a:pPr algn="ctr"/>
-            <a:r>
-              <a:rPr sz="1100" b="0">
-                <a:solidFill>
-                  <a:srgbClr val="64748B"/>
-                </a:solidFill>
-                <a:latin typeface="Noto Sans CJK SC"/>
-                <a:ea typeface="Noto Sans CJK SC"/>
-                <a:cs typeface="Noto Sans CJK SC"/>
-              </a:rPr>
-              <a:t>在此处粘贴截图</a:t>
-            </a:r>
-          </a:p>
-        </p:txBody>
-      </p:sp>
+      <p:pic>
+        <p:nvPicPr>
+          <p:cNvPr id="18" name="att_385lhafcz161fcq3-190894a7b5-feat-route-demo.mp4">
+            <a:hlinkClick r:id="" action="ppaction://media"/>
+          </p:cNvPr>
+          <p:cNvPicPr>
+            <a:picLocks noChangeAspect="1"/>
+          </p:cNvPicPr>
+          <p:nvPr>
+            <a:videoFile r:link="rId3"/>
+            <p:extLst>
+              <p:ext uri="{DAA4B4D4-6D71-4841-9C94-3DE7FCFB9230}">
+                <p14:media xmlns:p14="http://schemas.microsoft.com/office/powerpoint/2010/main" r:embed="rId2"/>
+              </p:ext>
+            </p:extLst>
+          </p:nvPr>
+        </p:nvPicPr>
+        <p:blipFill>
+          <a:blip r:embed="rId4"/>
+          <a:stretch>
+            <a:fillRect/>
+          </a:stretch>
+        </p:blipFill>
+        <p:spPr>
+          <a:xfrm>
+            <a:off x="8211312" y="1600200"/>
+            <a:ext cx="3108960" cy="4754880"/>
+          </a:xfrm>
+          <a:prstGeom prst="rect">
+            <a:avLst/>
+          </a:prstGeom>
+        </p:spPr>
+      </p:pic>
       <p:sp>
         <p:nvSpPr>
           <p:cNvPr id="19" name="TextBox 18"/>
@@ -10106,7 +10102,7 @@
                 <a:ea typeface="Noto Sans CJK SC"/>
                 <a:cs typeface="Noto Sans CJK SC"/>
               </a:rPr>
-              <a:t>产品界面（现场可实测）</a:t>
+              <a:t>Demo 视频（点击播放）</a:t>
             </a:r>
           </a:p>
         </p:txBody>
@@ -10116,6 +10112,28 @@
   <p:clrMapOvr>
     <a:masterClrMapping/>
   </p:clrMapOvr>
+  <p:timing>
+    <p:tnLst>
+      <p:par>
+        <p:cTn id="1" dur="indefinite" restart="never" nodeType="tmRoot">
+          <p:childTnLst>
+            <p:video>
+              <p:cMediaNode vol="80000">
+                <p:cTn id="2" fill="hold" display="0">
+                  <p:stCondLst>
+                    <p:cond delay="indefinite"/>
+                  </p:stCondLst>
+                </p:cTn>
+                <p:tgtEl>
+                  <p:spTgt spid="18"/>
+                </p:tgtEl>
+              </p:cMediaNode>
+            </p:video>
+          </p:childTnLst>
+        </p:cTn>
+      </p:par>
+    </p:tnLst>
+  </p:timing>
 </p:sld>
 </file>
 

--- a/public/FlowGuard-Hackathon-Pitch.pptx
+++ b/public/FlowGuard-Hackathon-Pitch.pptx
@@ -9988,7 +9988,7 @@
                 <a:ea typeface="Noto Sans CJK SC"/>
                 <a:cs typeface="Noto Sans CJK SC"/>
               </a:rPr>
-              <a:t>AI 用自然语言说清钱现在卡在哪家中间行、为何被卡、还要多久、你能做什么。</a:t>
+              <a:t>规则引擎决定选哪条路径，AI 只负责用自然语言把「为什么推荐这条、它比其他通道好在哪」讲清楚——可解释、可复核。</a:t>
             </a:r>
           </a:p>
         </p:txBody>
